--- a/presentation.pptx
+++ b/presentation.pptx
@@ -111,6 +111,11 @@
       </a:defRPr>
     </a:lvl9pPr>
   </p:defaultTextStyle>
+  <p:extLst>
+    <p:ext uri="{EFAFB233-063F-42B5-8137-9DF3F51BA10A}">
+      <p15:sldGuideLst xmlns:p15="http://schemas.microsoft.com/office/powerpoint/2012/main"/>
+    </p:ext>
+  </p:extLst>
 </p:presentation>
 </file>
 
@@ -375,7 +380,7 @@
           <a:p>
             <a:fld id="{9E7B9DCE-2806-D243-A137-B4C1362D6AA1}" type="datetimeFigureOut">
               <a:rPr lang="en-GB" smtClean="0"/>
-              <a:t>30/11/2025</a:t>
+              <a:t>01/12/2025</a:t>
             </a:fld>
             <a:endParaRPr lang="en-GB"/>
           </a:p>
@@ -575,7 +580,7 @@
           <a:p>
             <a:fld id="{9E7B9DCE-2806-D243-A137-B4C1362D6AA1}" type="datetimeFigureOut">
               <a:rPr lang="en-GB" smtClean="0"/>
-              <a:t>30/11/2025</a:t>
+              <a:t>01/12/2025</a:t>
             </a:fld>
             <a:endParaRPr lang="en-GB"/>
           </a:p>
@@ -785,7 +790,7 @@
           <a:p>
             <a:fld id="{9E7B9DCE-2806-D243-A137-B4C1362D6AA1}" type="datetimeFigureOut">
               <a:rPr lang="en-GB" smtClean="0"/>
-              <a:t>30/11/2025</a:t>
+              <a:t>01/12/2025</a:t>
             </a:fld>
             <a:endParaRPr lang="en-GB"/>
           </a:p>
@@ -985,7 +990,7 @@
           <a:p>
             <a:fld id="{9E7B9DCE-2806-D243-A137-B4C1362D6AA1}" type="datetimeFigureOut">
               <a:rPr lang="en-GB" smtClean="0"/>
-              <a:t>30/11/2025</a:t>
+              <a:t>01/12/2025</a:t>
             </a:fld>
             <a:endParaRPr lang="en-GB"/>
           </a:p>
@@ -1261,7 +1266,7 @@
           <a:p>
             <a:fld id="{9E7B9DCE-2806-D243-A137-B4C1362D6AA1}" type="datetimeFigureOut">
               <a:rPr lang="en-GB" smtClean="0"/>
-              <a:t>30/11/2025</a:t>
+              <a:t>01/12/2025</a:t>
             </a:fld>
             <a:endParaRPr lang="en-GB"/>
           </a:p>
@@ -1529,7 +1534,7 @@
           <a:p>
             <a:fld id="{9E7B9DCE-2806-D243-A137-B4C1362D6AA1}" type="datetimeFigureOut">
               <a:rPr lang="en-GB" smtClean="0"/>
-              <a:t>30/11/2025</a:t>
+              <a:t>01/12/2025</a:t>
             </a:fld>
             <a:endParaRPr lang="en-GB"/>
           </a:p>
@@ -1944,7 +1949,7 @@
           <a:p>
             <a:fld id="{9E7B9DCE-2806-D243-A137-B4C1362D6AA1}" type="datetimeFigureOut">
               <a:rPr lang="en-GB" smtClean="0"/>
-              <a:t>30/11/2025</a:t>
+              <a:t>01/12/2025</a:t>
             </a:fld>
             <a:endParaRPr lang="en-GB"/>
           </a:p>
@@ -2086,7 +2091,7 @@
           <a:p>
             <a:fld id="{9E7B9DCE-2806-D243-A137-B4C1362D6AA1}" type="datetimeFigureOut">
               <a:rPr lang="en-GB" smtClean="0"/>
-              <a:t>30/11/2025</a:t>
+              <a:t>01/12/2025</a:t>
             </a:fld>
             <a:endParaRPr lang="en-GB"/>
           </a:p>
@@ -2199,7 +2204,7 @@
           <a:p>
             <a:fld id="{9E7B9DCE-2806-D243-A137-B4C1362D6AA1}" type="datetimeFigureOut">
               <a:rPr lang="en-GB" smtClean="0"/>
-              <a:t>30/11/2025</a:t>
+              <a:t>01/12/2025</a:t>
             </a:fld>
             <a:endParaRPr lang="en-GB"/>
           </a:p>
@@ -2512,7 +2517,7 @@
           <a:p>
             <a:fld id="{9E7B9DCE-2806-D243-A137-B4C1362D6AA1}" type="datetimeFigureOut">
               <a:rPr lang="en-GB" smtClean="0"/>
-              <a:t>30/11/2025</a:t>
+              <a:t>01/12/2025</a:t>
             </a:fld>
             <a:endParaRPr lang="en-GB"/>
           </a:p>
@@ -2801,7 +2806,7 @@
           <a:p>
             <a:fld id="{9E7B9DCE-2806-D243-A137-B4C1362D6AA1}" type="datetimeFigureOut">
               <a:rPr lang="en-GB" smtClean="0"/>
-              <a:t>30/11/2025</a:t>
+              <a:t>01/12/2025</a:t>
             </a:fld>
             <a:endParaRPr lang="en-GB"/>
           </a:p>
@@ -3044,7 +3049,7 @@
           <a:p>
             <a:fld id="{9E7B9DCE-2806-D243-A137-B4C1362D6AA1}" type="datetimeFigureOut">
               <a:rPr lang="en-GB" smtClean="0"/>
-              <a:t>30/11/2025</a:t>
+              <a:t>01/12/2025</a:t>
             </a:fld>
             <a:endParaRPr lang="en-GB"/>
           </a:p>
@@ -13390,8 +13395,8 @@
           </a:p>
         </p:txBody>
       </p:sp>
-      <mc:AlternateContent xmlns:mc="http://schemas.openxmlformats.org/markup-compatibility/2006">
-        <mc:Choice xmlns:p14="http://schemas.microsoft.com/office/powerpoint/2010/main" Requires="p14">
+      <mc:AlternateContent xmlns:mc="http://schemas.openxmlformats.org/markup-compatibility/2006" xmlns:p14="http://schemas.microsoft.com/office/powerpoint/2010/main">
+        <mc:Choice Requires="p14">
           <p:contentPart p14:bwMode="auto" r:id="rId3">
             <p14:nvContentPartPr>
               <p14:cNvPr id="7" name="Freihand 6">
@@ -13410,7 +13415,7 @@
             </p14:xfrm>
           </p:contentPart>
         </mc:Choice>
-        <mc:Fallback>
+        <mc:Fallback xmlns="">
           <p:pic>
             <p:nvPicPr>
               <p:cNvPr id="7" name="Freihand 6">
@@ -13485,8 +13490,8 @@
           </a:p>
         </p:txBody>
       </p:sp>
-      <mc:AlternateContent xmlns:mc="http://schemas.openxmlformats.org/markup-compatibility/2006">
-        <mc:Choice xmlns:p14="http://schemas.microsoft.com/office/powerpoint/2010/main" Requires="p14">
+      <mc:AlternateContent xmlns:mc="http://schemas.openxmlformats.org/markup-compatibility/2006" xmlns:p14="http://schemas.microsoft.com/office/powerpoint/2010/main">
+        <mc:Choice Requires="p14">
           <p:contentPart p14:bwMode="auto" r:id="rId6">
             <p14:nvContentPartPr>
               <p14:cNvPr id="12" name="Freihand 11">
@@ -13505,7 +13510,7 @@
             </p14:xfrm>
           </p:contentPart>
         </mc:Choice>
-        <mc:Fallback>
+        <mc:Fallback xmlns="">
           <p:pic>
             <p:nvPicPr>
               <p:cNvPr id="12" name="Freihand 11">
@@ -13536,8 +13541,8 @@
           </p:pic>
         </mc:Fallback>
       </mc:AlternateContent>
-      <mc:AlternateContent xmlns:mc="http://schemas.openxmlformats.org/markup-compatibility/2006">
-        <mc:Choice xmlns:p14="http://schemas.microsoft.com/office/powerpoint/2010/main" Requires="p14">
+      <mc:AlternateContent xmlns:mc="http://schemas.openxmlformats.org/markup-compatibility/2006" xmlns:p14="http://schemas.microsoft.com/office/powerpoint/2010/main">
+        <mc:Choice Requires="p14">
           <p:contentPart p14:bwMode="auto" r:id="rId8">
             <p14:nvContentPartPr>
               <p14:cNvPr id="16" name="Freihand 15">
@@ -13556,7 +13561,7 @@
             </p14:xfrm>
           </p:contentPart>
         </mc:Choice>
-        <mc:Fallback>
+        <mc:Fallback xmlns="">
           <p:pic>
             <p:nvPicPr>
               <p:cNvPr id="16" name="Freihand 15">
@@ -13587,8 +13592,8 @@
           </p:pic>
         </mc:Fallback>
       </mc:AlternateContent>
-      <mc:AlternateContent xmlns:mc="http://schemas.openxmlformats.org/markup-compatibility/2006">
-        <mc:Choice xmlns:p14="http://schemas.microsoft.com/office/powerpoint/2010/main" Requires="p14">
+      <mc:AlternateContent xmlns:mc="http://schemas.openxmlformats.org/markup-compatibility/2006" xmlns:p14="http://schemas.microsoft.com/office/powerpoint/2010/main">
+        <mc:Choice Requires="p14">
           <p:contentPart p14:bwMode="auto" r:id="rId10">
             <p14:nvContentPartPr>
               <p14:cNvPr id="21" name="Freihand 20">
@@ -13607,7 +13612,7 @@
             </p14:xfrm>
           </p:contentPart>
         </mc:Choice>
-        <mc:Fallback>
+        <mc:Fallback xmlns="">
           <p:pic>
             <p:nvPicPr>
               <p:cNvPr id="21" name="Freihand 20">
@@ -13700,6 +13705,41 @@
             <a:r>
               <a:rPr lang="en-GB" dirty="0"/>
               <a:t>ETH Zürich, Foggy driving, 101 real world images</a:t>
+            </a:r>
+          </a:p>
+        </p:txBody>
+      </p:sp>
+      <p:sp>
+        <p:nvSpPr>
+          <p:cNvPr id="2" name="Textfeld 1">
+            <a:extLst>
+              <a:ext uri="{FF2B5EF4-FFF2-40B4-BE49-F238E27FC236}">
+                <a16:creationId xmlns:a16="http://schemas.microsoft.com/office/drawing/2014/main" id="{B15BFF0B-D470-AD70-644C-10EF4E603BCC}"/>
+              </a:ext>
+            </a:extLst>
+          </p:cNvPr>
+          <p:cNvSpPr txBox="1"/>
+          <p:nvPr/>
+        </p:nvSpPr>
+        <p:spPr>
+          <a:xfrm>
+            <a:off x="1643063" y="5657850"/>
+            <a:ext cx="4605300" cy="369332"/>
+          </a:xfrm>
+          <a:prstGeom prst="rect">
+            <a:avLst/>
+          </a:prstGeom>
+          <a:noFill/>
+        </p:spPr>
+        <p:txBody>
+          <a:bodyPr wrap="none" rtlCol="0">
+            <a:spAutoFit/>
+          </a:bodyPr>
+          <a:lstStyle/>
+          <a:p>
+            <a:r>
+              <a:rPr lang="en-GB" dirty="0"/>
+              <a:t>DAWN:  303 foggy images with bounding boxes</a:t>
             </a:r>
           </a:p>
         </p:txBody>

--- a/presentation.pptx
+++ b/presentation.pptx
@@ -380,7 +380,7 @@
           <a:p>
             <a:fld id="{9E7B9DCE-2806-D243-A137-B4C1362D6AA1}" type="datetimeFigureOut">
               <a:rPr lang="en-GB" smtClean="0"/>
-              <a:t>01/12/2025</a:t>
+              <a:t>03/12/2025</a:t>
             </a:fld>
             <a:endParaRPr lang="en-GB"/>
           </a:p>
@@ -580,7 +580,7 @@
           <a:p>
             <a:fld id="{9E7B9DCE-2806-D243-A137-B4C1362D6AA1}" type="datetimeFigureOut">
               <a:rPr lang="en-GB" smtClean="0"/>
-              <a:t>01/12/2025</a:t>
+              <a:t>03/12/2025</a:t>
             </a:fld>
             <a:endParaRPr lang="en-GB"/>
           </a:p>
@@ -790,7 +790,7 @@
           <a:p>
             <a:fld id="{9E7B9DCE-2806-D243-A137-B4C1362D6AA1}" type="datetimeFigureOut">
               <a:rPr lang="en-GB" smtClean="0"/>
-              <a:t>01/12/2025</a:t>
+              <a:t>03/12/2025</a:t>
             </a:fld>
             <a:endParaRPr lang="en-GB"/>
           </a:p>
@@ -990,7 +990,7 @@
           <a:p>
             <a:fld id="{9E7B9DCE-2806-D243-A137-B4C1362D6AA1}" type="datetimeFigureOut">
               <a:rPr lang="en-GB" smtClean="0"/>
-              <a:t>01/12/2025</a:t>
+              <a:t>03/12/2025</a:t>
             </a:fld>
             <a:endParaRPr lang="en-GB"/>
           </a:p>
@@ -1266,7 +1266,7 @@
           <a:p>
             <a:fld id="{9E7B9DCE-2806-D243-A137-B4C1362D6AA1}" type="datetimeFigureOut">
               <a:rPr lang="en-GB" smtClean="0"/>
-              <a:t>01/12/2025</a:t>
+              <a:t>03/12/2025</a:t>
             </a:fld>
             <a:endParaRPr lang="en-GB"/>
           </a:p>
@@ -1534,7 +1534,7 @@
           <a:p>
             <a:fld id="{9E7B9DCE-2806-D243-A137-B4C1362D6AA1}" type="datetimeFigureOut">
               <a:rPr lang="en-GB" smtClean="0"/>
-              <a:t>01/12/2025</a:t>
+              <a:t>03/12/2025</a:t>
             </a:fld>
             <a:endParaRPr lang="en-GB"/>
           </a:p>
@@ -1949,7 +1949,7 @@
           <a:p>
             <a:fld id="{9E7B9DCE-2806-D243-A137-B4C1362D6AA1}" type="datetimeFigureOut">
               <a:rPr lang="en-GB" smtClean="0"/>
-              <a:t>01/12/2025</a:t>
+              <a:t>03/12/2025</a:t>
             </a:fld>
             <a:endParaRPr lang="en-GB"/>
           </a:p>
@@ -2091,7 +2091,7 @@
           <a:p>
             <a:fld id="{9E7B9DCE-2806-D243-A137-B4C1362D6AA1}" type="datetimeFigureOut">
               <a:rPr lang="en-GB" smtClean="0"/>
-              <a:t>01/12/2025</a:t>
+              <a:t>03/12/2025</a:t>
             </a:fld>
             <a:endParaRPr lang="en-GB"/>
           </a:p>
@@ -2204,7 +2204,7 @@
           <a:p>
             <a:fld id="{9E7B9DCE-2806-D243-A137-B4C1362D6AA1}" type="datetimeFigureOut">
               <a:rPr lang="en-GB" smtClean="0"/>
-              <a:t>01/12/2025</a:t>
+              <a:t>03/12/2025</a:t>
             </a:fld>
             <a:endParaRPr lang="en-GB"/>
           </a:p>
@@ -2517,7 +2517,7 @@
           <a:p>
             <a:fld id="{9E7B9DCE-2806-D243-A137-B4C1362D6AA1}" type="datetimeFigureOut">
               <a:rPr lang="en-GB" smtClean="0"/>
-              <a:t>01/12/2025</a:t>
+              <a:t>03/12/2025</a:t>
             </a:fld>
             <a:endParaRPr lang="en-GB"/>
           </a:p>
@@ -2806,7 +2806,7 @@
           <a:p>
             <a:fld id="{9E7B9DCE-2806-D243-A137-B4C1362D6AA1}" type="datetimeFigureOut">
               <a:rPr lang="en-GB" smtClean="0"/>
-              <a:t>01/12/2025</a:t>
+              <a:t>03/12/2025</a:t>
             </a:fld>
             <a:endParaRPr lang="en-GB"/>
           </a:p>
@@ -3049,7 +3049,7 @@
           <a:p>
             <a:fld id="{9E7B9DCE-2806-D243-A137-B4C1362D6AA1}" type="datetimeFigureOut">
               <a:rPr lang="en-GB" smtClean="0"/>
-              <a:t>01/12/2025</a:t>
+              <a:t>03/12/2025</a:t>
             </a:fld>
             <a:endParaRPr lang="en-GB"/>
           </a:p>
@@ -13816,10 +13816,10 @@
         </p:nvGrpSpPr>
         <p:grpSpPr>
           <a:xfrm>
-            <a:off x="523406" y="1702478"/>
-            <a:ext cx="3835399" cy="2335572"/>
-            <a:chOff x="598357" y="1733256"/>
-            <a:chExt cx="3835399" cy="2335572"/>
+            <a:off x="523405" y="1759567"/>
+            <a:ext cx="3673516" cy="2278483"/>
+            <a:chOff x="598356" y="1790345"/>
+            <a:chExt cx="3673516" cy="2278483"/>
           </a:xfrm>
         </p:grpSpPr>
         <p:pic>
@@ -13866,8 +13866,8 @@
           </p:nvSpPr>
           <p:spPr>
             <a:xfrm>
-              <a:off x="598357" y="1733256"/>
-              <a:ext cx="3835399" cy="338554"/>
+              <a:off x="598356" y="1790345"/>
+              <a:ext cx="3673515" cy="307777"/>
             </a:xfrm>
             <a:prstGeom prst="rect">
               <a:avLst/>
@@ -13881,8 +13881,8 @@
             <a:lstStyle/>
             <a:p>
               <a:r>
-                <a:rPr lang="en-GB" sz="1600" b="1" dirty="0"/>
-                <a:t>Foggy Cityscape Images [1] (3475 images)</a:t>
+                <a:rPr lang="en-GB" sz="1400" b="1" dirty="0"/>
+                <a:t>Foggy Cityscape Images [1] (2976 + 501 images)</a:t>
               </a:r>
             </a:p>
           </p:txBody>
@@ -13902,8 +13902,8 @@
         </p:nvSpPr>
         <p:spPr>
           <a:xfrm>
-            <a:off x="-24240" y="6596390"/>
-            <a:ext cx="4985660" cy="261610"/>
+            <a:off x="0" y="6474940"/>
+            <a:ext cx="5264583" cy="430887"/>
           </a:xfrm>
           <a:prstGeom prst="rect">
             <a:avLst/>
@@ -13918,23 +13918,92 @@
           <a:p>
             <a:r>
               <a:rPr lang="en-GB" sz="1100" dirty="0"/>
-              <a:t>[1] https://</a:t>
+              <a:t>[1] </a:t>
             </a:r>
             <a:r>
-              <a:rPr lang="en-GB" sz="1100" dirty="0" err="1"/>
-              <a:t>www.kaggle.com</a:t>
+              <a:rPr lang="en-GB" sz="1100" dirty="0">
+                <a:hlinkClick r:id="rId3"/>
+              </a:rPr>
+              <a:t>https://www.kaggle.com/datasets/khitdon/foggy-cityscapes-yolo</a:t>
+            </a:r>
+            <a:br>
+              <a:rPr lang="en-GB" sz="1100" dirty="0"/>
+            </a:br>
+            <a:r>
+              <a:rPr lang="en-GB" sz="1100" dirty="0"/>
+              <a:t>[2] </a:t>
             </a:r>
             <a:r>
-              <a:rPr lang="en-GB" sz="1100" dirty="0"/>
-              <a:t>/datasets/</a:t>
+              <a:rPr lang="en-GB" sz="1100" dirty="0">
+                <a:hlinkClick r:id="rId4"/>
+              </a:rPr>
+              <a:t>https://www.kaggle.com/datasets/orvile/dawn-detection-in-adverse-weather-nature</a:t>
             </a:r>
+            <a:endParaRPr lang="en-GB" sz="1100" dirty="0"/>
+          </a:p>
+        </p:txBody>
+      </p:sp>
+      <p:pic>
+        <p:nvPicPr>
+          <p:cNvPr id="5" name="Grafik 4">
+            <a:extLst>
+              <a:ext uri="{FF2B5EF4-FFF2-40B4-BE49-F238E27FC236}">
+                <a16:creationId xmlns:a16="http://schemas.microsoft.com/office/drawing/2014/main" id="{E184B02E-E1B9-6148-D47B-702E7BD8697F}"/>
+              </a:ext>
+            </a:extLst>
+          </p:cNvPr>
+          <p:cNvPicPr>
+            <a:picLocks noChangeAspect="1"/>
+          </p:cNvPicPr>
+          <p:nvPr/>
+        </p:nvPicPr>
+        <p:blipFill>
+          <a:blip r:embed="rId5"/>
+          <a:stretch>
+            <a:fillRect/>
+          </a:stretch>
+        </p:blipFill>
+        <p:spPr>
+          <a:xfrm>
+            <a:off x="523405" y="4364814"/>
+            <a:ext cx="3673515" cy="2008808"/>
+          </a:xfrm>
+          <a:prstGeom prst="rect">
+            <a:avLst/>
+          </a:prstGeom>
+        </p:spPr>
+      </p:pic>
+      <p:sp>
+        <p:nvSpPr>
+          <p:cNvPr id="7" name="Textfeld 6">
+            <a:extLst>
+              <a:ext uri="{FF2B5EF4-FFF2-40B4-BE49-F238E27FC236}">
+                <a16:creationId xmlns:a16="http://schemas.microsoft.com/office/drawing/2014/main" id="{6071C3DD-867C-D1CC-03EE-F2A9D888644E}"/>
+              </a:ext>
+            </a:extLst>
+          </p:cNvPr>
+          <p:cNvSpPr txBox="1"/>
+          <p:nvPr/>
+        </p:nvSpPr>
+        <p:spPr>
+          <a:xfrm>
+            <a:off x="912092" y="4106929"/>
+            <a:ext cx="3835399" cy="307777"/>
+          </a:xfrm>
+          <a:prstGeom prst="rect">
+            <a:avLst/>
+          </a:prstGeom>
+          <a:noFill/>
+        </p:spPr>
+        <p:txBody>
+          <a:bodyPr wrap="square" rtlCol="0">
+            <a:spAutoFit/>
+          </a:bodyPr>
+          <a:lstStyle/>
+          <a:p>
             <a:r>
-              <a:rPr lang="en-GB" sz="1100" dirty="0" err="1"/>
-              <a:t>yessicatuteja</a:t>
-            </a:r>
-            <a:r>
-              <a:rPr lang="en-GB" sz="1100" dirty="0"/>
-              <a:t>/foggy-cityscapes-image-dataset</a:t>
+              <a:rPr lang="en-GB" sz="1400" b="1" dirty="0"/>
+              <a:t>DAWN Images [2] (301 + 167 images)</a:t>
             </a:r>
           </a:p>
         </p:txBody>

--- a/presentation.pptx
+++ b/presentation.pptx
@@ -4,15 +4,21 @@
   <p:sldMasterIdLst>
     <p:sldMasterId id="2147483648" r:id="rId1"/>
   </p:sldMasterIdLst>
+  <p:notesMasterIdLst>
+    <p:notesMasterId r:id="rId13"/>
+  </p:notesMasterIdLst>
   <p:sldIdLst>
     <p:sldId id="256" r:id="rId2"/>
-    <p:sldId id="257" r:id="rId3"/>
-    <p:sldId id="258" r:id="rId4"/>
-    <p:sldId id="259" r:id="rId5"/>
-    <p:sldId id="263" r:id="rId6"/>
-    <p:sldId id="262" r:id="rId7"/>
-    <p:sldId id="260" r:id="rId8"/>
-    <p:sldId id="261" r:id="rId9"/>
+    <p:sldId id="265" r:id="rId3"/>
+    <p:sldId id="257" r:id="rId4"/>
+    <p:sldId id="266" r:id="rId5"/>
+    <p:sldId id="258" r:id="rId6"/>
+    <p:sldId id="259" r:id="rId7"/>
+    <p:sldId id="262" r:id="rId8"/>
+    <p:sldId id="267" r:id="rId9"/>
+    <p:sldId id="260" r:id="rId10"/>
+    <p:sldId id="261" r:id="rId11"/>
+    <p:sldId id="263" r:id="rId12"/>
   </p:sldIdLst>
   <p:sldSz cx="12192000" cy="6858000"/>
   <p:notesSz cx="6858000" cy="9144000"/>
@@ -135,6 +141,34 @@
           <inkml:channelProperty channel="F" name="resolution" value="0" units="1/dev"/>
         </inkml:channelProperties>
       </inkml:inkSource>
+      <inkml:timestamp xml:id="ts0" timeString="2025-12-08T08:46:27.027"/>
+    </inkml:context>
+    <inkml:brush xml:id="br0">
+      <inkml:brushProperty name="width" value="0.05" units="cm"/>
+      <inkml:brushProperty name="height" value="0.05" units="cm"/>
+      <inkml:brushProperty name="color" value="#E71224"/>
+    </inkml:brush>
+  </inkml:definitions>
+  <inkml:trace contextRef="#ctx0" brushRef="#br0">538 977 24575,'-11'0'0,"2"-3"0,-6-2 0,1-3 0,1-5 0,-4 3 0,4-6 0,-5 2 0,0-8 0,1 3 0,-1-3 0,4 5 0,-3-6 0,7 5 0,-7-5 0,7 6 0,-6 0 0,6-1 0,-3 1 0,4-6 0,0 5 0,0-5 0,1 6 0,-2-5 0,2 3 0,-2-3 0,6 4 0,-4 1 0,3 0 0,0-1 0,-2 5 0,6-3 0,-3-2 0,4-1 0,0-8 0,0 3 0,0-4 0,0-1 0,0 5 0,0 2 0,0 5 0,-4-1 0,3 5 0,-3 1 0,4 4 0,0 0 0,0 0 0,0 0 0,0 1 0,0-1 0,0 1 0,0-1 0,0 0 0,0 0 0,0-9 0,0 3 0,0-9 0,0 6 0,0 4 0,0-4 0,0 8 0,0-3 0,0 11 0,0 2 0,0 7 0,0 4 0,0 0 0,-3 1 0,-1 2 0,-1-7 0,-2 8 0,2-7 0,-3 3 0,0-5 0,0 1 0,0 0 0,0 0 0,0 0 0,0-1 0,0 1 0,4 0 0,-3 0 0,3 0 0,-4 0 0,3-1 0,-2 1 0,6 0 0,-6-4 0,3 3 0,-4-3 0,0 1 0,1-2 0,6-9 0,-1 0 0,8-4 0,-2 2 0,8-4 0,-4 4 0,0-4 0,-1 4 0,-2 0 0,2 0 0,1 0 0,0 0 0,0 4 0,-4-3 0,3 3 0,-3-4 0,4 0 0,0 0 0,0 0 0,-1 1 0,1 2 0,-4-2 0,3 7 0,-6-7 0,6 6 0,-3-3 0,3 4 0,1-3 0,-1 2 0,0-2 0,0 3 0,0 0 0,-3 3 0,2 5 0,-5 1 0,3 2 0,-4-3 0,3 0 0,-2-1 0,6 1 0,-6 0 0,6 0 0,-6 0 0,6 0 0,-6-1 0,5 1 0,-5 0 0,6-4 0,-6 3 0,6-3 0,-3 3 0,4 1 0,-1-4 0,1 3 0,0-3 0,0 0 0,-1 3 0,1-2 0,0 2 0,0-2 0,-1 1 0,0-5 0,1 3 0,-5-4 0,1 0 0</inkml:trace>
+</inkml:ink>
+</file>
+
+<file path=ppt/ink/ink2.xml><?xml version="1.0" encoding="utf-8"?>
+<inkml:ink xmlns:inkml="http://www.w3.org/2003/InkML">
+  <inkml:definitions>
+    <inkml:context xml:id="ctx0">
+      <inkml:inkSource xml:id="inkSrc0">
+        <inkml:traceFormat>
+          <inkml:channel name="X" type="integer" min="-2.14748E9" max="2.14748E9" units="cm"/>
+          <inkml:channel name="Y" type="integer" min="-2.14748E9" max="2.14748E9" units="cm"/>
+          <inkml:channel name="F" type="integer" max="32767" units="dev"/>
+        </inkml:traceFormat>
+        <inkml:channelProperties>
+          <inkml:channelProperty channel="X" name="resolution" value="1000" units="1/cm"/>
+          <inkml:channelProperty channel="Y" name="resolution" value="1000" units="1/cm"/>
+          <inkml:channelProperty channel="F" name="resolution" value="0" units="1/dev"/>
+        </inkml:channelProperties>
+      </inkml:inkSource>
       <inkml:timestamp xml:id="ts0" timeString="2025-11-30T07:06:35.496"/>
     </inkml:context>
     <inkml:brush xml:id="br0">
@@ -147,7 +181,7 @@
 </inkml:ink>
 </file>
 
-<file path=ppt/ink/ink2.xml><?xml version="1.0" encoding="utf-8"?>
+<file path=ppt/ink/ink3.xml><?xml version="1.0" encoding="utf-8"?>
 <inkml:ink xmlns:inkml="http://www.w3.org/2003/InkML">
   <inkml:definitions>
     <inkml:context xml:id="ctx0">
@@ -175,7 +209,7 @@
 </inkml:ink>
 </file>
 
-<file path=ppt/ink/ink3.xml><?xml version="1.0" encoding="utf-8"?>
+<file path=ppt/ink/ink4.xml><?xml version="1.0" encoding="utf-8"?>
 <inkml:ink xmlns:inkml="http://www.w3.org/2003/InkML">
   <inkml:definitions>
     <inkml:context xml:id="ctx0">
@@ -203,7 +237,7 @@
 </inkml:ink>
 </file>
 
-<file path=ppt/ink/ink4.xml><?xml version="1.0" encoding="utf-8"?>
+<file path=ppt/ink/ink5.xml><?xml version="1.0" encoding="utf-8"?>
 <inkml:ink xmlns:inkml="http://www.w3.org/2003/InkML">
   <inkml:definitions>
     <inkml:context xml:id="ctx0">
@@ -229,6 +263,1722 @@
   </inkml:definitions>
   <inkml:trace contextRef="#ctx0" brushRef="#br0">1 11,'84'-6,"3"1,-19 5,18 0,-36 0,0 0,1 0,0 0,9 0,1 0,-4 0,-1 0,0 0,1 0,4 0,-1 0,32 0,-20 0,-1 0,9 0,-10 0,1 0,23 0,-38 0,1 0,-2 0,0 0,44 0,-10 0,8 0,-18 0,18 0,-8 0,0 0,7 0,-39 0,-1 0,30 0,-27 0,-1 0,22 0,9 0,-2 0,0 0,-8 0,-1 0,-4 0,-6 0,19 0,-8 0,8 0,-1 0,-6 0,16 0,-16 7,16-5,-17 5,8-7,-10 0,0 0,-10 0,8 0,-16 0,7 0,-1 7,28-6,-18 6,-25-3,-1-1,10-1,16 4,-16 1,15-6,-15 5,16 1,-16-5,7 5,-10-7,1 6,0-4,0 4,-1-6,1 0,0 6,19-4,-15 10,15-10,-11 4,3 1,9-5,-9 4,6 1,-15-5,7 5,-9-7,0 0,8 0,-6 6,7-4,-1 11,-6-12,7 13,-9-13,0 12,-8-12,5 6,-13-2,14-3,-14 4,6-6,-8 0,0 0,0 0,0 0,0 0,0 0,-6 5,4-4,-12 4,13-5,-13 0,12 6,-4-4,6 9,0-9,-7 3,5 1,-4-4,6 3,0-5,8 0,-6 0,5 0,1 0,-6 0,6 0,-14 0,-3 0,-6 0,0 0,-6 0,3 0,-9 0,8 0,2 0,8 0,7 0,10 0,-6 0,6 0,-8 0,-7 0,-7 0,-8 0,-7 0,6-4,-14-16,2 6,-15-16,5 19,-3 0,-6 2,2 8,-7-4,4 5,-1 0</inkml:trace>
 </inkml:ink>
+</file>
+
+<file path=ppt/notesMasters/notesMaster1.xml><?xml version="1.0" encoding="utf-8"?>
+<p:notesMaster xmlns:a="http://schemas.openxmlformats.org/drawingml/2006/main" xmlns:r="http://schemas.openxmlformats.org/officeDocument/2006/relationships" xmlns:p="http://schemas.openxmlformats.org/presentationml/2006/main">
+  <p:cSld>
+    <p:bg>
+      <p:bgRef idx="1001">
+        <a:schemeClr val="bg1"/>
+      </p:bgRef>
+    </p:bg>
+    <p:spTree>
+      <p:nvGrpSpPr>
+        <p:cNvPr id="1" name=""/>
+        <p:cNvGrpSpPr/>
+        <p:nvPr/>
+      </p:nvGrpSpPr>
+      <p:grpSpPr>
+        <a:xfrm>
+          <a:off x="0" y="0"/>
+          <a:ext cx="0" cy="0"/>
+          <a:chOff x="0" y="0"/>
+          <a:chExt cx="0" cy="0"/>
+        </a:xfrm>
+      </p:grpSpPr>
+      <p:sp>
+        <p:nvSpPr>
+          <p:cNvPr id="2" name="Kopfzeilenplatzhalter 1"/>
+          <p:cNvSpPr>
+            <a:spLocks noGrp="1"/>
+          </p:cNvSpPr>
+          <p:nvPr>
+            <p:ph type="hdr" sz="quarter"/>
+          </p:nvPr>
+        </p:nvSpPr>
+        <p:spPr>
+          <a:xfrm>
+            <a:off x="0" y="0"/>
+            <a:ext cx="2971800" cy="458788"/>
+          </a:xfrm>
+          <a:prstGeom prst="rect">
+            <a:avLst/>
+          </a:prstGeom>
+        </p:spPr>
+        <p:txBody>
+          <a:bodyPr vert="horz" lIns="91440" tIns="45720" rIns="91440" bIns="45720" rtlCol="0"/>
+          <a:lstStyle>
+            <a:lvl1pPr algn="l">
+              <a:defRPr sz="1200"/>
+            </a:lvl1pPr>
+          </a:lstStyle>
+          <a:p>
+            <a:endParaRPr lang="en-GB"/>
+          </a:p>
+        </p:txBody>
+      </p:sp>
+      <p:sp>
+        <p:nvSpPr>
+          <p:cNvPr id="3" name="Datumsplatzhalter 2"/>
+          <p:cNvSpPr>
+            <a:spLocks noGrp="1"/>
+          </p:cNvSpPr>
+          <p:nvPr>
+            <p:ph type="dt" idx="1"/>
+          </p:nvPr>
+        </p:nvSpPr>
+        <p:spPr>
+          <a:xfrm>
+            <a:off x="3884613" y="0"/>
+            <a:ext cx="2971800" cy="458788"/>
+          </a:xfrm>
+          <a:prstGeom prst="rect">
+            <a:avLst/>
+          </a:prstGeom>
+        </p:spPr>
+        <p:txBody>
+          <a:bodyPr vert="horz" lIns="91440" tIns="45720" rIns="91440" bIns="45720" rtlCol="0"/>
+          <a:lstStyle>
+            <a:lvl1pPr algn="r">
+              <a:defRPr sz="1200"/>
+            </a:lvl1pPr>
+          </a:lstStyle>
+          <a:p>
+            <a:fld id="{00A0E189-13FF-894E-9F49-C2160E79585A}" type="datetimeFigureOut">
+              <a:rPr lang="en-GB" smtClean="0"/>
+              <a:t>08/12/2025</a:t>
+            </a:fld>
+            <a:endParaRPr lang="en-GB"/>
+          </a:p>
+        </p:txBody>
+      </p:sp>
+      <p:sp>
+        <p:nvSpPr>
+          <p:cNvPr id="4" name="Folienbildplatzhalter 3"/>
+          <p:cNvSpPr>
+            <a:spLocks noGrp="1" noRot="1" noChangeAspect="1"/>
+          </p:cNvSpPr>
+          <p:nvPr>
+            <p:ph type="sldImg" idx="2"/>
+          </p:nvPr>
+        </p:nvSpPr>
+        <p:spPr>
+          <a:xfrm>
+            <a:off x="685800" y="1143000"/>
+            <a:ext cx="5486400" cy="3086100"/>
+          </a:xfrm>
+          <a:prstGeom prst="rect">
+            <a:avLst/>
+          </a:prstGeom>
+          <a:noFill/>
+          <a:ln w="12700">
+            <a:solidFill>
+              <a:prstClr val="black"/>
+            </a:solidFill>
+          </a:ln>
+        </p:spPr>
+        <p:txBody>
+          <a:bodyPr vert="horz" lIns="91440" tIns="45720" rIns="91440" bIns="45720" rtlCol="0" anchor="ctr"/>
+          <a:lstStyle/>
+          <a:p>
+            <a:endParaRPr lang="en-GB"/>
+          </a:p>
+        </p:txBody>
+      </p:sp>
+      <p:sp>
+        <p:nvSpPr>
+          <p:cNvPr id="5" name="Notizenplatzhalter 4"/>
+          <p:cNvSpPr>
+            <a:spLocks noGrp="1"/>
+          </p:cNvSpPr>
+          <p:nvPr>
+            <p:ph type="body" sz="quarter" idx="3"/>
+          </p:nvPr>
+        </p:nvSpPr>
+        <p:spPr>
+          <a:xfrm>
+            <a:off x="685800" y="4400550"/>
+            <a:ext cx="5486400" cy="3600450"/>
+          </a:xfrm>
+          <a:prstGeom prst="rect">
+            <a:avLst/>
+          </a:prstGeom>
+        </p:spPr>
+        <p:txBody>
+          <a:bodyPr vert="horz" lIns="91440" tIns="45720" rIns="91440" bIns="45720" rtlCol="0"/>
+          <a:lstStyle/>
+          <a:p>
+            <a:pPr lvl="0"/>
+            <a:r>
+              <a:rPr lang="de-DE"/>
+              <a:t>Mastertextformat bearbeiten</a:t>
+            </a:r>
+          </a:p>
+          <a:p>
+            <a:pPr lvl="1"/>
+            <a:r>
+              <a:rPr lang="de-DE"/>
+              <a:t>Zweite Ebene</a:t>
+            </a:r>
+          </a:p>
+          <a:p>
+            <a:pPr lvl="2"/>
+            <a:r>
+              <a:rPr lang="de-DE"/>
+              <a:t>Dritte Ebene</a:t>
+            </a:r>
+          </a:p>
+          <a:p>
+            <a:pPr lvl="3"/>
+            <a:r>
+              <a:rPr lang="de-DE"/>
+              <a:t>Vierte Ebene</a:t>
+            </a:r>
+          </a:p>
+          <a:p>
+            <a:pPr lvl="4"/>
+            <a:r>
+              <a:rPr lang="de-DE"/>
+              <a:t>Fünfte Ebene</a:t>
+            </a:r>
+            <a:endParaRPr lang="en-GB"/>
+          </a:p>
+        </p:txBody>
+      </p:sp>
+      <p:sp>
+        <p:nvSpPr>
+          <p:cNvPr id="6" name="Fußzeilenplatzhalter 5"/>
+          <p:cNvSpPr>
+            <a:spLocks noGrp="1"/>
+          </p:cNvSpPr>
+          <p:nvPr>
+            <p:ph type="ftr" sz="quarter" idx="4"/>
+          </p:nvPr>
+        </p:nvSpPr>
+        <p:spPr>
+          <a:xfrm>
+            <a:off x="0" y="8685213"/>
+            <a:ext cx="2971800" cy="458787"/>
+          </a:xfrm>
+          <a:prstGeom prst="rect">
+            <a:avLst/>
+          </a:prstGeom>
+        </p:spPr>
+        <p:txBody>
+          <a:bodyPr vert="horz" lIns="91440" tIns="45720" rIns="91440" bIns="45720" rtlCol="0" anchor="b"/>
+          <a:lstStyle>
+            <a:lvl1pPr algn="l">
+              <a:defRPr sz="1200"/>
+            </a:lvl1pPr>
+          </a:lstStyle>
+          <a:p>
+            <a:endParaRPr lang="en-GB"/>
+          </a:p>
+        </p:txBody>
+      </p:sp>
+      <p:sp>
+        <p:nvSpPr>
+          <p:cNvPr id="7" name="Foliennummernplatzhalter 6"/>
+          <p:cNvSpPr>
+            <a:spLocks noGrp="1"/>
+          </p:cNvSpPr>
+          <p:nvPr>
+            <p:ph type="sldNum" sz="quarter" idx="5"/>
+          </p:nvPr>
+        </p:nvSpPr>
+        <p:spPr>
+          <a:xfrm>
+            <a:off x="3884613" y="8685213"/>
+            <a:ext cx="2971800" cy="458787"/>
+          </a:xfrm>
+          <a:prstGeom prst="rect">
+            <a:avLst/>
+          </a:prstGeom>
+        </p:spPr>
+        <p:txBody>
+          <a:bodyPr vert="horz" lIns="91440" tIns="45720" rIns="91440" bIns="45720" rtlCol="0" anchor="b"/>
+          <a:lstStyle>
+            <a:lvl1pPr algn="r">
+              <a:defRPr sz="1200"/>
+            </a:lvl1pPr>
+          </a:lstStyle>
+          <a:p>
+            <a:fld id="{FA60EB1A-5099-834C-85FD-CBA5DB11C771}" type="slidenum">
+              <a:rPr lang="en-GB" smtClean="0"/>
+              <a:t>‹Nr.›</a:t>
+            </a:fld>
+            <a:endParaRPr lang="en-GB"/>
+          </a:p>
+        </p:txBody>
+      </p:sp>
+    </p:spTree>
+    <p:extLst>
+      <p:ext uri="{BB962C8B-B14F-4D97-AF65-F5344CB8AC3E}">
+        <p14:creationId xmlns:p14="http://schemas.microsoft.com/office/powerpoint/2010/main" val="1416107516"/>
+      </p:ext>
+    </p:extLst>
+  </p:cSld>
+  <p:clrMap bg1="lt1" tx1="dk1" bg2="lt2" tx2="dk2" accent1="accent1" accent2="accent2" accent3="accent3" accent4="accent4" accent5="accent5" accent6="accent6" hlink="hlink" folHlink="folHlink"/>
+  <p:notesStyle>
+    <a:lvl1pPr marL="0" algn="l" defTabSz="914400" rtl="0" eaLnBrk="1" latinLnBrk="0" hangingPunct="1">
+      <a:defRPr sz="1200" kern="1200">
+        <a:solidFill>
+          <a:schemeClr val="tx1"/>
+        </a:solidFill>
+        <a:latin typeface="+mn-lt"/>
+        <a:ea typeface="+mn-ea"/>
+        <a:cs typeface="+mn-cs"/>
+      </a:defRPr>
+    </a:lvl1pPr>
+    <a:lvl2pPr marL="457200" algn="l" defTabSz="914400" rtl="0" eaLnBrk="1" latinLnBrk="0" hangingPunct="1">
+      <a:defRPr sz="1200" kern="1200">
+        <a:solidFill>
+          <a:schemeClr val="tx1"/>
+        </a:solidFill>
+        <a:latin typeface="+mn-lt"/>
+        <a:ea typeface="+mn-ea"/>
+        <a:cs typeface="+mn-cs"/>
+      </a:defRPr>
+    </a:lvl2pPr>
+    <a:lvl3pPr marL="914400" algn="l" defTabSz="914400" rtl="0" eaLnBrk="1" latinLnBrk="0" hangingPunct="1">
+      <a:defRPr sz="1200" kern="1200">
+        <a:solidFill>
+          <a:schemeClr val="tx1"/>
+        </a:solidFill>
+        <a:latin typeface="+mn-lt"/>
+        <a:ea typeface="+mn-ea"/>
+        <a:cs typeface="+mn-cs"/>
+      </a:defRPr>
+    </a:lvl3pPr>
+    <a:lvl4pPr marL="1371600" algn="l" defTabSz="914400" rtl="0" eaLnBrk="1" latinLnBrk="0" hangingPunct="1">
+      <a:defRPr sz="1200" kern="1200">
+        <a:solidFill>
+          <a:schemeClr val="tx1"/>
+        </a:solidFill>
+        <a:latin typeface="+mn-lt"/>
+        <a:ea typeface="+mn-ea"/>
+        <a:cs typeface="+mn-cs"/>
+      </a:defRPr>
+    </a:lvl4pPr>
+    <a:lvl5pPr marL="1828800" algn="l" defTabSz="914400" rtl="0" eaLnBrk="1" latinLnBrk="0" hangingPunct="1">
+      <a:defRPr sz="1200" kern="1200">
+        <a:solidFill>
+          <a:schemeClr val="tx1"/>
+        </a:solidFill>
+        <a:latin typeface="+mn-lt"/>
+        <a:ea typeface="+mn-ea"/>
+        <a:cs typeface="+mn-cs"/>
+      </a:defRPr>
+    </a:lvl5pPr>
+    <a:lvl6pPr marL="2286000" algn="l" defTabSz="914400" rtl="0" eaLnBrk="1" latinLnBrk="0" hangingPunct="1">
+      <a:defRPr sz="1200" kern="1200">
+        <a:solidFill>
+          <a:schemeClr val="tx1"/>
+        </a:solidFill>
+        <a:latin typeface="+mn-lt"/>
+        <a:ea typeface="+mn-ea"/>
+        <a:cs typeface="+mn-cs"/>
+      </a:defRPr>
+    </a:lvl6pPr>
+    <a:lvl7pPr marL="2743200" algn="l" defTabSz="914400" rtl="0" eaLnBrk="1" latinLnBrk="0" hangingPunct="1">
+      <a:defRPr sz="1200" kern="1200">
+        <a:solidFill>
+          <a:schemeClr val="tx1"/>
+        </a:solidFill>
+        <a:latin typeface="+mn-lt"/>
+        <a:ea typeface="+mn-ea"/>
+        <a:cs typeface="+mn-cs"/>
+      </a:defRPr>
+    </a:lvl7pPr>
+    <a:lvl8pPr marL="3200400" algn="l" defTabSz="914400" rtl="0" eaLnBrk="1" latinLnBrk="0" hangingPunct="1">
+      <a:defRPr sz="1200" kern="1200">
+        <a:solidFill>
+          <a:schemeClr val="tx1"/>
+        </a:solidFill>
+        <a:latin typeface="+mn-lt"/>
+        <a:ea typeface="+mn-ea"/>
+        <a:cs typeface="+mn-cs"/>
+      </a:defRPr>
+    </a:lvl8pPr>
+    <a:lvl9pPr marL="3657600" algn="l" defTabSz="914400" rtl="0" eaLnBrk="1" latinLnBrk="0" hangingPunct="1">
+      <a:defRPr sz="1200" kern="1200">
+        <a:solidFill>
+          <a:schemeClr val="tx1"/>
+        </a:solidFill>
+        <a:latin typeface="+mn-lt"/>
+        <a:ea typeface="+mn-ea"/>
+        <a:cs typeface="+mn-cs"/>
+      </a:defRPr>
+    </a:lvl9pPr>
+  </p:notesStyle>
+</p:notesMaster>
+</file>
+
+<file path=ppt/notesSlides/notesSlide1.xml><?xml version="1.0" encoding="utf-8"?>
+<p:notes xmlns:a="http://schemas.openxmlformats.org/drawingml/2006/main" xmlns:r="http://schemas.openxmlformats.org/officeDocument/2006/relationships" xmlns:p="http://schemas.openxmlformats.org/presentationml/2006/main">
+  <p:cSld>
+    <p:spTree>
+      <p:nvGrpSpPr>
+        <p:cNvPr id="1" name=""/>
+        <p:cNvGrpSpPr/>
+        <p:nvPr/>
+      </p:nvGrpSpPr>
+      <p:grpSpPr>
+        <a:xfrm>
+          <a:off x="0" y="0"/>
+          <a:ext cx="0" cy="0"/>
+          <a:chOff x="0" y="0"/>
+          <a:chExt cx="0" cy="0"/>
+        </a:xfrm>
+      </p:grpSpPr>
+      <p:sp>
+        <p:nvSpPr>
+          <p:cNvPr id="2" name="Folienbildplatzhalter 1"/>
+          <p:cNvSpPr>
+            <a:spLocks noGrp="1" noRot="1" noChangeAspect="1"/>
+          </p:cNvSpPr>
+          <p:nvPr>
+            <p:ph type="sldImg"/>
+          </p:nvPr>
+        </p:nvSpPr>
+        <p:spPr/>
+      </p:sp>
+      <p:sp>
+        <p:nvSpPr>
+          <p:cNvPr id="3" name="Notizenplatzhalter 2"/>
+          <p:cNvSpPr>
+            <a:spLocks noGrp="1"/>
+          </p:cNvSpPr>
+          <p:nvPr>
+            <p:ph type="body" idx="1"/>
+          </p:nvPr>
+        </p:nvSpPr>
+        <p:spPr/>
+        <p:txBody>
+          <a:bodyPr/>
+          <a:lstStyle/>
+          <a:p>
+            <a:endParaRPr lang="en-GB" dirty="0"/>
+          </a:p>
+        </p:txBody>
+      </p:sp>
+      <p:sp>
+        <p:nvSpPr>
+          <p:cNvPr id="4" name="Foliennummernplatzhalter 3"/>
+          <p:cNvSpPr>
+            <a:spLocks noGrp="1"/>
+          </p:cNvSpPr>
+          <p:nvPr>
+            <p:ph type="sldNum" sz="quarter" idx="5"/>
+          </p:nvPr>
+        </p:nvSpPr>
+        <p:spPr/>
+        <p:txBody>
+          <a:bodyPr/>
+          <a:lstStyle/>
+          <a:p>
+            <a:fld id="{FA60EB1A-5099-834C-85FD-CBA5DB11C771}" type="slidenum">
+              <a:rPr lang="en-GB" smtClean="0"/>
+              <a:t>1</a:t>
+            </a:fld>
+            <a:endParaRPr lang="en-GB"/>
+          </a:p>
+        </p:txBody>
+      </p:sp>
+    </p:spTree>
+    <p:extLst>
+      <p:ext uri="{BB962C8B-B14F-4D97-AF65-F5344CB8AC3E}">
+        <p14:creationId xmlns:p14="http://schemas.microsoft.com/office/powerpoint/2010/main" val="449096267"/>
+      </p:ext>
+    </p:extLst>
+  </p:cSld>
+  <p:clrMapOvr>
+    <a:masterClrMapping/>
+  </p:clrMapOvr>
+</p:notes>
+</file>
+
+<file path=ppt/notesSlides/notesSlide2.xml><?xml version="1.0" encoding="utf-8"?>
+<p:notes xmlns:a="http://schemas.openxmlformats.org/drawingml/2006/main" xmlns:r="http://schemas.openxmlformats.org/officeDocument/2006/relationships" xmlns:p="http://schemas.openxmlformats.org/presentationml/2006/main">
+  <p:cSld>
+    <p:spTree>
+      <p:nvGrpSpPr>
+        <p:cNvPr id="1" name=""/>
+        <p:cNvGrpSpPr/>
+        <p:nvPr/>
+      </p:nvGrpSpPr>
+      <p:grpSpPr>
+        <a:xfrm>
+          <a:off x="0" y="0"/>
+          <a:ext cx="0" cy="0"/>
+          <a:chOff x="0" y="0"/>
+          <a:chExt cx="0" cy="0"/>
+        </a:xfrm>
+      </p:grpSpPr>
+      <p:sp>
+        <p:nvSpPr>
+          <p:cNvPr id="2" name="Folienbildplatzhalter 1"/>
+          <p:cNvSpPr>
+            <a:spLocks noGrp="1" noRot="1" noChangeAspect="1"/>
+          </p:cNvSpPr>
+          <p:nvPr>
+            <p:ph type="sldImg"/>
+          </p:nvPr>
+        </p:nvSpPr>
+        <p:spPr/>
+      </p:sp>
+      <p:sp>
+        <p:nvSpPr>
+          <p:cNvPr id="3" name="Notizenplatzhalter 2"/>
+          <p:cNvSpPr>
+            <a:spLocks noGrp="1"/>
+          </p:cNvSpPr>
+          <p:nvPr>
+            <p:ph type="body" idx="1"/>
+          </p:nvPr>
+        </p:nvSpPr>
+        <p:spPr/>
+        <p:txBody>
+          <a:bodyPr/>
+          <a:lstStyle/>
+          <a:p>
+            <a:endParaRPr lang="en-GB" dirty="0"/>
+          </a:p>
+        </p:txBody>
+      </p:sp>
+      <p:sp>
+        <p:nvSpPr>
+          <p:cNvPr id="4" name="Foliennummernplatzhalter 3"/>
+          <p:cNvSpPr>
+            <a:spLocks noGrp="1"/>
+          </p:cNvSpPr>
+          <p:nvPr>
+            <p:ph type="sldNum" sz="quarter" idx="5"/>
+          </p:nvPr>
+        </p:nvSpPr>
+        <p:spPr/>
+        <p:txBody>
+          <a:bodyPr/>
+          <a:lstStyle/>
+          <a:p>
+            <a:fld id="{FA60EB1A-5099-834C-85FD-CBA5DB11C771}" type="slidenum">
+              <a:rPr lang="en-GB" smtClean="0"/>
+              <a:t>2</a:t>
+            </a:fld>
+            <a:endParaRPr lang="en-GB"/>
+          </a:p>
+        </p:txBody>
+      </p:sp>
+    </p:spTree>
+    <p:extLst>
+      <p:ext uri="{BB962C8B-B14F-4D97-AF65-F5344CB8AC3E}">
+        <p14:creationId xmlns:p14="http://schemas.microsoft.com/office/powerpoint/2010/main" val="299728215"/>
+      </p:ext>
+    </p:extLst>
+  </p:cSld>
+  <p:clrMapOvr>
+    <a:masterClrMapping/>
+  </p:clrMapOvr>
+</p:notes>
+</file>
+
+<file path=ppt/notesSlides/notesSlide3.xml><?xml version="1.0" encoding="utf-8"?>
+<p:notes xmlns:a="http://schemas.openxmlformats.org/drawingml/2006/main" xmlns:r="http://schemas.openxmlformats.org/officeDocument/2006/relationships" xmlns:p="http://schemas.openxmlformats.org/presentationml/2006/main">
+  <p:cSld>
+    <p:spTree>
+      <p:nvGrpSpPr>
+        <p:cNvPr id="1" name=""/>
+        <p:cNvGrpSpPr/>
+        <p:nvPr/>
+      </p:nvGrpSpPr>
+      <p:grpSpPr>
+        <a:xfrm>
+          <a:off x="0" y="0"/>
+          <a:ext cx="0" cy="0"/>
+          <a:chOff x="0" y="0"/>
+          <a:chExt cx="0" cy="0"/>
+        </a:xfrm>
+      </p:grpSpPr>
+      <p:sp>
+        <p:nvSpPr>
+          <p:cNvPr id="2" name="Folienbildplatzhalter 1"/>
+          <p:cNvSpPr>
+            <a:spLocks noGrp="1" noRot="1" noChangeAspect="1"/>
+          </p:cNvSpPr>
+          <p:nvPr>
+            <p:ph type="sldImg"/>
+          </p:nvPr>
+        </p:nvSpPr>
+        <p:spPr/>
+      </p:sp>
+      <p:sp>
+        <p:nvSpPr>
+          <p:cNvPr id="3" name="Notizenplatzhalter 2"/>
+          <p:cNvSpPr>
+            <a:spLocks noGrp="1"/>
+          </p:cNvSpPr>
+          <p:nvPr>
+            <p:ph type="body" idx="1"/>
+          </p:nvPr>
+        </p:nvSpPr>
+        <p:spPr/>
+        <p:txBody>
+          <a:bodyPr/>
+          <a:lstStyle/>
+          <a:p>
+            <a:endParaRPr lang="en-GB" dirty="0"/>
+          </a:p>
+        </p:txBody>
+      </p:sp>
+      <p:sp>
+        <p:nvSpPr>
+          <p:cNvPr id="4" name="Foliennummernplatzhalter 3"/>
+          <p:cNvSpPr>
+            <a:spLocks noGrp="1"/>
+          </p:cNvSpPr>
+          <p:nvPr>
+            <p:ph type="sldNum" sz="quarter" idx="5"/>
+          </p:nvPr>
+        </p:nvSpPr>
+        <p:spPr/>
+        <p:txBody>
+          <a:bodyPr/>
+          <a:lstStyle/>
+          <a:p>
+            <a:fld id="{FA60EB1A-5099-834C-85FD-CBA5DB11C771}" type="slidenum">
+              <a:rPr lang="en-GB" smtClean="0"/>
+              <a:t>3</a:t>
+            </a:fld>
+            <a:endParaRPr lang="en-GB"/>
+          </a:p>
+        </p:txBody>
+      </p:sp>
+    </p:spTree>
+    <p:extLst>
+      <p:ext uri="{BB962C8B-B14F-4D97-AF65-F5344CB8AC3E}">
+        <p14:creationId xmlns:p14="http://schemas.microsoft.com/office/powerpoint/2010/main" val="4210647895"/>
+      </p:ext>
+    </p:extLst>
+  </p:cSld>
+  <p:clrMapOvr>
+    <a:masterClrMapping/>
+  </p:clrMapOvr>
+</p:notes>
+</file>
+
+<file path=ppt/notesSlides/notesSlide4.xml><?xml version="1.0" encoding="utf-8"?>
+<p:notes xmlns:a="http://schemas.openxmlformats.org/drawingml/2006/main" xmlns:r="http://schemas.openxmlformats.org/officeDocument/2006/relationships" xmlns:p="http://schemas.openxmlformats.org/presentationml/2006/main">
+  <p:cSld>
+    <p:spTree>
+      <p:nvGrpSpPr>
+        <p:cNvPr id="1" name=""/>
+        <p:cNvGrpSpPr/>
+        <p:nvPr/>
+      </p:nvGrpSpPr>
+      <p:grpSpPr>
+        <a:xfrm>
+          <a:off x="0" y="0"/>
+          <a:ext cx="0" cy="0"/>
+          <a:chOff x="0" y="0"/>
+          <a:chExt cx="0" cy="0"/>
+        </a:xfrm>
+      </p:grpSpPr>
+      <p:sp>
+        <p:nvSpPr>
+          <p:cNvPr id="2" name="Folienbildplatzhalter 1"/>
+          <p:cNvSpPr>
+            <a:spLocks noGrp="1" noRot="1" noChangeAspect="1"/>
+          </p:cNvSpPr>
+          <p:nvPr>
+            <p:ph type="sldImg"/>
+          </p:nvPr>
+        </p:nvSpPr>
+        <p:spPr/>
+      </p:sp>
+      <p:sp>
+        <p:nvSpPr>
+          <p:cNvPr id="3" name="Notizenplatzhalter 2"/>
+          <p:cNvSpPr>
+            <a:spLocks noGrp="1"/>
+          </p:cNvSpPr>
+          <p:nvPr>
+            <p:ph type="body" idx="1"/>
+          </p:nvPr>
+        </p:nvSpPr>
+        <p:spPr/>
+        <p:txBody>
+          <a:bodyPr/>
+          <a:lstStyle/>
+          <a:p>
+            <a:r>
+              <a:rPr lang="de-DE" dirty="0"/>
+              <a:t>Use </a:t>
+            </a:r>
+            <a:r>
+              <a:rPr lang="de-DE" b="1" dirty="0" err="1"/>
+              <a:t>pado</a:t>
+            </a:r>
+            <a:r>
+              <a:rPr lang="de-DE" dirty="0"/>
+              <a:t> </a:t>
+            </a:r>
+            <a:r>
+              <a:rPr lang="de-DE" dirty="0" err="1"/>
+              <a:t>framework</a:t>
+            </a:r>
+            <a:r>
+              <a:rPr lang="de-DE" dirty="0"/>
+              <a:t> </a:t>
+            </a:r>
+            <a:r>
+              <a:rPr lang="de-DE" dirty="0" err="1"/>
+              <a:t>to</a:t>
+            </a:r>
+            <a:r>
+              <a:rPr lang="de-DE" dirty="0"/>
+              <a:t> </a:t>
+            </a:r>
+            <a:r>
+              <a:rPr lang="de-DE" dirty="0" err="1"/>
+              <a:t>simulate</a:t>
+            </a:r>
+            <a:r>
+              <a:rPr lang="de-DE" dirty="0"/>
+              <a:t> </a:t>
+            </a:r>
+            <a:r>
+              <a:rPr lang="de-DE" dirty="0" err="1"/>
+              <a:t>diffractive</a:t>
+            </a:r>
+            <a:r>
+              <a:rPr lang="de-DE" dirty="0"/>
+              <a:t> </a:t>
+            </a:r>
+            <a:r>
+              <a:rPr lang="de-DE" dirty="0" err="1"/>
+              <a:t>optical</a:t>
+            </a:r>
+            <a:r>
+              <a:rPr lang="de-DE" dirty="0"/>
+              <a:t> </a:t>
+            </a:r>
+            <a:r>
+              <a:rPr lang="de-DE" dirty="0" err="1"/>
+              <a:t>elements</a:t>
+            </a:r>
+            <a:r>
+              <a:rPr lang="de-DE" dirty="0"/>
+              <a:t> (DOE).</a:t>
+            </a:r>
+          </a:p>
+          <a:p>
+            <a:r>
+              <a:rPr lang="de-DE" dirty="0"/>
+              <a:t>Model </a:t>
+            </a:r>
+            <a:r>
+              <a:rPr lang="de-DE" dirty="0" err="1"/>
+              <a:t>assumes</a:t>
+            </a:r>
+            <a:r>
+              <a:rPr lang="de-DE" dirty="0"/>
+              <a:t> </a:t>
+            </a:r>
+            <a:r>
+              <a:rPr lang="de-DE" dirty="0" err="1"/>
+              <a:t>depth</a:t>
+            </a:r>
+            <a:r>
+              <a:rPr lang="de-DE" dirty="0"/>
+              <a:t>-independent </a:t>
+            </a:r>
+            <a:r>
+              <a:rPr lang="de-DE" dirty="0" err="1"/>
+              <a:t>point</a:t>
+            </a:r>
+            <a:r>
+              <a:rPr lang="de-DE" dirty="0"/>
+              <a:t> </a:t>
+            </a:r>
+            <a:r>
+              <a:rPr lang="de-DE" dirty="0" err="1"/>
+              <a:t>spread</a:t>
+            </a:r>
+            <a:r>
+              <a:rPr lang="de-DE" dirty="0"/>
+              <a:t> </a:t>
+            </a:r>
+            <a:r>
+              <a:rPr lang="de-DE" dirty="0" err="1"/>
+              <a:t>function</a:t>
+            </a:r>
+            <a:r>
+              <a:rPr lang="de-DE" dirty="0"/>
+              <a:t> (PSF).</a:t>
+            </a:r>
+          </a:p>
+          <a:p>
+            <a:r>
+              <a:rPr lang="de-DE" dirty="0"/>
+              <a:t>Optical </a:t>
+            </a:r>
+            <a:r>
+              <a:rPr lang="de-DE" dirty="0" err="1"/>
+              <a:t>simulation</a:t>
+            </a:r>
+            <a:r>
+              <a:rPr lang="de-DE" dirty="0"/>
+              <a:t> </a:t>
+            </a:r>
+            <a:r>
+              <a:rPr lang="de-DE" dirty="0" err="1"/>
+              <a:t>processes</a:t>
+            </a:r>
+            <a:r>
+              <a:rPr lang="de-DE" dirty="0"/>
+              <a:t> RGB </a:t>
+            </a:r>
+            <a:r>
+              <a:rPr lang="de-DE" dirty="0" err="1"/>
+              <a:t>images</a:t>
+            </a:r>
+            <a:r>
+              <a:rPr lang="de-DE" dirty="0"/>
+              <a:t> </a:t>
+            </a:r>
+            <a:r>
+              <a:rPr lang="de-DE" dirty="0" err="1"/>
+              <a:t>before</a:t>
+            </a:r>
+            <a:r>
+              <a:rPr lang="de-DE" dirty="0"/>
+              <a:t> </a:t>
+            </a:r>
+            <a:r>
+              <a:rPr lang="de-DE" dirty="0" err="1"/>
+              <a:t>detection</a:t>
+            </a:r>
+            <a:r>
+              <a:rPr lang="de-DE" dirty="0"/>
+              <a:t>.</a:t>
+            </a:r>
+          </a:p>
+          <a:p>
+            <a:r>
+              <a:rPr lang="de-DE" dirty="0" err="1"/>
+              <a:t>Enables</a:t>
+            </a:r>
+            <a:r>
+              <a:rPr lang="de-DE" dirty="0"/>
+              <a:t> </a:t>
+            </a:r>
+            <a:r>
+              <a:rPr lang="de-DE" dirty="0" err="1"/>
+              <a:t>gradient-based</a:t>
+            </a:r>
+            <a:r>
+              <a:rPr lang="de-DE" dirty="0"/>
+              <a:t> </a:t>
+            </a:r>
+            <a:r>
+              <a:rPr lang="de-DE" dirty="0" err="1"/>
+              <a:t>optimization</a:t>
+            </a:r>
+            <a:r>
+              <a:rPr lang="de-DE" dirty="0"/>
+              <a:t> </a:t>
+            </a:r>
+            <a:r>
+              <a:rPr lang="de-DE" dirty="0" err="1"/>
+              <a:t>of</a:t>
+            </a:r>
+            <a:r>
+              <a:rPr lang="de-DE" dirty="0"/>
+              <a:t> </a:t>
+            </a:r>
+            <a:r>
+              <a:rPr lang="de-DE" dirty="0" err="1"/>
+              <a:t>both</a:t>
+            </a:r>
+            <a:r>
+              <a:rPr lang="de-DE" dirty="0"/>
+              <a:t> DOE </a:t>
+            </a:r>
+            <a:r>
+              <a:rPr lang="de-DE" dirty="0" err="1"/>
+              <a:t>pattern</a:t>
+            </a:r>
+            <a:r>
+              <a:rPr lang="de-DE" dirty="0"/>
+              <a:t> and network </a:t>
+            </a:r>
+            <a:r>
+              <a:rPr lang="de-DE" dirty="0" err="1"/>
+              <a:t>parameters</a:t>
+            </a:r>
+            <a:r>
+              <a:rPr lang="de-DE" dirty="0"/>
+              <a:t>.</a:t>
+            </a:r>
+            <a:br>
+              <a:rPr lang="de-DE" dirty="0"/>
+            </a:br>
+            <a:br>
+              <a:rPr lang="de-DE" dirty="0"/>
+            </a:br>
+            <a:r>
+              <a:rPr lang="de-DE" dirty="0"/>
+              <a:t>YOLO11n </a:t>
+            </a:r>
+            <a:r>
+              <a:rPr lang="de-DE" dirty="0" err="1"/>
+              <a:t>adopted</a:t>
+            </a:r>
+            <a:r>
+              <a:rPr lang="de-DE" dirty="0"/>
+              <a:t> </a:t>
+            </a:r>
+            <a:r>
+              <a:rPr lang="de-DE" dirty="0" err="1"/>
+              <a:t>as</a:t>
+            </a:r>
+            <a:r>
+              <a:rPr lang="de-DE" dirty="0"/>
+              <a:t> </a:t>
+            </a:r>
+            <a:r>
+              <a:rPr lang="de-DE" dirty="0" err="1"/>
+              <a:t>baseline</a:t>
+            </a:r>
+            <a:r>
+              <a:rPr lang="de-DE" dirty="0"/>
+              <a:t> </a:t>
+            </a:r>
+            <a:r>
+              <a:rPr lang="de-DE" dirty="0" err="1"/>
+              <a:t>detector</a:t>
+            </a:r>
+            <a:r>
+              <a:rPr lang="de-DE" dirty="0"/>
+              <a:t> (</a:t>
+            </a:r>
+            <a:r>
+              <a:rPr lang="de-DE" dirty="0" err="1"/>
+              <a:t>accuracy</a:t>
+            </a:r>
+            <a:r>
+              <a:rPr lang="de-DE" dirty="0"/>
+              <a:t>–</a:t>
+            </a:r>
+            <a:r>
+              <a:rPr lang="de-DE" dirty="0" err="1"/>
+              <a:t>efficiency</a:t>
+            </a:r>
+            <a:r>
+              <a:rPr lang="de-DE" dirty="0"/>
+              <a:t> </a:t>
+            </a:r>
+            <a:r>
+              <a:rPr lang="de-DE" dirty="0" err="1"/>
+              <a:t>tradeoff</a:t>
+            </a:r>
+            <a:r>
+              <a:rPr lang="de-DE" dirty="0"/>
+              <a:t>).</a:t>
+            </a:r>
+          </a:p>
+          <a:p>
+            <a:r>
+              <a:rPr lang="de-DE" dirty="0"/>
+              <a:t>Optical </a:t>
+            </a:r>
+            <a:r>
+              <a:rPr lang="de-DE" dirty="0" err="1"/>
+              <a:t>simulation</a:t>
+            </a:r>
+            <a:r>
+              <a:rPr lang="de-DE" dirty="0"/>
+              <a:t> </a:t>
+            </a:r>
+            <a:r>
+              <a:rPr lang="de-DE" dirty="0" err="1"/>
+              <a:t>output</a:t>
+            </a:r>
+            <a:r>
+              <a:rPr lang="de-DE" dirty="0"/>
+              <a:t> </a:t>
+            </a:r>
+            <a:r>
+              <a:rPr lang="de-DE" dirty="0" err="1"/>
+              <a:t>fed</a:t>
+            </a:r>
+            <a:r>
+              <a:rPr lang="de-DE" dirty="0"/>
+              <a:t> </a:t>
+            </a:r>
+            <a:r>
+              <a:rPr lang="de-DE" dirty="0" err="1"/>
+              <a:t>directly</a:t>
+            </a:r>
+            <a:r>
+              <a:rPr lang="de-DE" dirty="0"/>
+              <a:t> </a:t>
+            </a:r>
+            <a:r>
+              <a:rPr lang="de-DE" dirty="0" err="1"/>
+              <a:t>into</a:t>
+            </a:r>
+            <a:r>
+              <a:rPr lang="de-DE" dirty="0"/>
+              <a:t> YOLO </a:t>
+            </a:r>
+            <a:r>
+              <a:rPr lang="de-DE" dirty="0" err="1"/>
+              <a:t>pipeline</a:t>
+            </a:r>
+            <a:r>
+              <a:rPr lang="de-DE" dirty="0"/>
+              <a:t>.</a:t>
+            </a:r>
+          </a:p>
+          <a:p>
+            <a:r>
+              <a:rPr lang="de-DE" dirty="0"/>
+              <a:t>End-</a:t>
+            </a:r>
+            <a:r>
+              <a:rPr lang="de-DE" dirty="0" err="1"/>
+              <a:t>to</a:t>
+            </a:r>
+            <a:r>
+              <a:rPr lang="de-DE" dirty="0"/>
+              <a:t>-end </a:t>
+            </a:r>
+            <a:r>
+              <a:rPr lang="de-DE" dirty="0" err="1"/>
+              <a:t>training</a:t>
+            </a:r>
+            <a:r>
+              <a:rPr lang="de-DE" dirty="0"/>
+              <a:t> </a:t>
+            </a:r>
+            <a:r>
+              <a:rPr lang="de-DE" dirty="0" err="1"/>
+              <a:t>optimizes</a:t>
+            </a:r>
+            <a:r>
+              <a:rPr lang="de-DE" dirty="0"/>
+              <a:t>:</a:t>
+            </a:r>
+          </a:p>
+          <a:p>
+            <a:pPr>
+              <a:buFont typeface="Arial" panose="020B0604020202020204" pitchFamily="34" charset="0"/>
+              <a:buChar char="•"/>
+            </a:pPr>
+            <a:r>
+              <a:rPr lang="de-DE" dirty="0"/>
+              <a:t>DOE </a:t>
+            </a:r>
+            <a:r>
+              <a:rPr lang="de-DE" dirty="0" err="1"/>
+              <a:t>phase</a:t>
+            </a:r>
+            <a:r>
+              <a:rPr lang="de-DE" dirty="0"/>
+              <a:t> </a:t>
+            </a:r>
+            <a:r>
+              <a:rPr lang="de-DE" dirty="0" err="1"/>
+              <a:t>profile</a:t>
+            </a:r>
+            <a:endParaRPr lang="de-DE" dirty="0"/>
+          </a:p>
+          <a:p>
+            <a:pPr>
+              <a:buFont typeface="Arial" panose="020B0604020202020204" pitchFamily="34" charset="0"/>
+              <a:buChar char="•"/>
+            </a:pPr>
+            <a:r>
+              <a:rPr lang="de-DE" dirty="0" err="1"/>
+              <a:t>Detector</a:t>
+            </a:r>
+            <a:r>
+              <a:rPr lang="de-DE" dirty="0"/>
+              <a:t> </a:t>
+            </a:r>
+            <a:r>
+              <a:rPr lang="de-DE" dirty="0" err="1"/>
+              <a:t>weights</a:t>
+            </a:r>
+            <a:endParaRPr lang="de-DE" dirty="0"/>
+          </a:p>
+          <a:p>
+            <a:r>
+              <a:rPr lang="de-DE" dirty="0" err="1"/>
+              <a:t>Uses</a:t>
+            </a:r>
+            <a:r>
+              <a:rPr lang="de-DE" dirty="0"/>
+              <a:t> </a:t>
+            </a:r>
+            <a:r>
+              <a:rPr lang="de-DE" dirty="0" err="1"/>
+              <a:t>Ultralytics</a:t>
+            </a:r>
+            <a:r>
+              <a:rPr lang="de-DE" dirty="0"/>
+              <a:t> </a:t>
+            </a:r>
+            <a:r>
+              <a:rPr lang="de-DE" dirty="0" err="1"/>
+              <a:t>standard</a:t>
+            </a:r>
+            <a:r>
+              <a:rPr lang="de-DE" dirty="0"/>
+              <a:t> </a:t>
+            </a:r>
+            <a:r>
+              <a:rPr lang="de-DE" dirty="0" err="1"/>
+              <a:t>training</a:t>
+            </a:r>
+            <a:r>
+              <a:rPr lang="de-DE" dirty="0"/>
+              <a:t> </a:t>
+            </a:r>
+            <a:r>
+              <a:rPr lang="de-DE" dirty="0" err="1"/>
+              <a:t>pipeline</a:t>
+            </a:r>
+            <a:r>
+              <a:rPr lang="de-DE" dirty="0"/>
+              <a:t> </a:t>
+            </a:r>
+            <a:r>
+              <a:rPr lang="de-DE" dirty="0" err="1"/>
+              <a:t>for</a:t>
+            </a:r>
+            <a:r>
+              <a:rPr lang="de-DE" dirty="0"/>
+              <a:t> </a:t>
+            </a:r>
+            <a:r>
+              <a:rPr lang="de-DE" dirty="0" err="1"/>
+              <a:t>stability</a:t>
+            </a:r>
+            <a:r>
+              <a:rPr lang="de-DE" dirty="0"/>
+              <a:t> and </a:t>
+            </a:r>
+            <a:r>
+              <a:rPr lang="de-DE" dirty="0" err="1"/>
+              <a:t>reproducibility</a:t>
+            </a:r>
+            <a:r>
+              <a:rPr lang="de-DE" dirty="0"/>
+              <a:t>.</a:t>
+            </a:r>
+          </a:p>
+          <a:p>
+            <a:endParaRPr lang="de-DE" dirty="0"/>
+          </a:p>
+          <a:p>
+            <a:endParaRPr lang="en-GB" dirty="0"/>
+          </a:p>
+        </p:txBody>
+      </p:sp>
+      <p:sp>
+        <p:nvSpPr>
+          <p:cNvPr id="4" name="Foliennummernplatzhalter 3"/>
+          <p:cNvSpPr>
+            <a:spLocks noGrp="1"/>
+          </p:cNvSpPr>
+          <p:nvPr>
+            <p:ph type="sldNum" sz="quarter" idx="5"/>
+          </p:nvPr>
+        </p:nvSpPr>
+        <p:spPr/>
+        <p:txBody>
+          <a:bodyPr/>
+          <a:lstStyle/>
+          <a:p>
+            <a:fld id="{FA60EB1A-5099-834C-85FD-CBA5DB11C771}" type="slidenum">
+              <a:rPr lang="en-GB" smtClean="0"/>
+              <a:t>7</a:t>
+            </a:fld>
+            <a:endParaRPr lang="en-GB"/>
+          </a:p>
+        </p:txBody>
+      </p:sp>
+    </p:spTree>
+    <p:extLst>
+      <p:ext uri="{BB962C8B-B14F-4D97-AF65-F5344CB8AC3E}">
+        <p14:creationId xmlns:p14="http://schemas.microsoft.com/office/powerpoint/2010/main" val="2551597918"/>
+      </p:ext>
+    </p:extLst>
+  </p:cSld>
+  <p:clrMapOvr>
+    <a:masterClrMapping/>
+  </p:clrMapOvr>
+</p:notes>
+</file>
+
+<file path=ppt/notesSlides/notesSlide5.xml><?xml version="1.0" encoding="utf-8"?>
+<p:notes xmlns:a="http://schemas.openxmlformats.org/drawingml/2006/main" xmlns:r="http://schemas.openxmlformats.org/officeDocument/2006/relationships" xmlns:p="http://schemas.openxmlformats.org/presentationml/2006/main">
+  <p:cSld>
+    <p:spTree>
+      <p:nvGrpSpPr>
+        <p:cNvPr id="1" name=""/>
+        <p:cNvGrpSpPr/>
+        <p:nvPr/>
+      </p:nvGrpSpPr>
+      <p:grpSpPr>
+        <a:xfrm>
+          <a:off x="0" y="0"/>
+          <a:ext cx="0" cy="0"/>
+          <a:chOff x="0" y="0"/>
+          <a:chExt cx="0" cy="0"/>
+        </a:xfrm>
+      </p:grpSpPr>
+      <p:sp>
+        <p:nvSpPr>
+          <p:cNvPr id="2" name="Folienbildplatzhalter 1"/>
+          <p:cNvSpPr>
+            <a:spLocks noGrp="1" noRot="1" noChangeAspect="1"/>
+          </p:cNvSpPr>
+          <p:nvPr>
+            <p:ph type="sldImg"/>
+          </p:nvPr>
+        </p:nvSpPr>
+        <p:spPr/>
+      </p:sp>
+      <p:sp>
+        <p:nvSpPr>
+          <p:cNvPr id="3" name="Notizenplatzhalter 2"/>
+          <p:cNvSpPr>
+            <a:spLocks noGrp="1"/>
+          </p:cNvSpPr>
+          <p:nvPr>
+            <p:ph type="body" idx="1"/>
+          </p:nvPr>
+        </p:nvSpPr>
+        <p:spPr/>
+        <p:txBody>
+          <a:bodyPr/>
+          <a:lstStyle/>
+          <a:p>
+            <a:r>
+              <a:rPr lang="de-DE" dirty="0"/>
+              <a:t>Use </a:t>
+            </a:r>
+            <a:r>
+              <a:rPr lang="de-DE" b="1" dirty="0" err="1"/>
+              <a:t>pado</a:t>
+            </a:r>
+            <a:r>
+              <a:rPr lang="de-DE" dirty="0"/>
+              <a:t> </a:t>
+            </a:r>
+            <a:r>
+              <a:rPr lang="de-DE" dirty="0" err="1"/>
+              <a:t>framework</a:t>
+            </a:r>
+            <a:r>
+              <a:rPr lang="de-DE" dirty="0"/>
+              <a:t> </a:t>
+            </a:r>
+            <a:r>
+              <a:rPr lang="de-DE" dirty="0" err="1"/>
+              <a:t>to</a:t>
+            </a:r>
+            <a:r>
+              <a:rPr lang="de-DE" dirty="0"/>
+              <a:t> </a:t>
+            </a:r>
+            <a:r>
+              <a:rPr lang="de-DE" dirty="0" err="1"/>
+              <a:t>simulate</a:t>
+            </a:r>
+            <a:r>
+              <a:rPr lang="de-DE" dirty="0"/>
+              <a:t> </a:t>
+            </a:r>
+            <a:r>
+              <a:rPr lang="de-DE" dirty="0" err="1"/>
+              <a:t>diffractive</a:t>
+            </a:r>
+            <a:r>
+              <a:rPr lang="de-DE" dirty="0"/>
+              <a:t> </a:t>
+            </a:r>
+            <a:r>
+              <a:rPr lang="de-DE" dirty="0" err="1"/>
+              <a:t>optical</a:t>
+            </a:r>
+            <a:r>
+              <a:rPr lang="de-DE" dirty="0"/>
+              <a:t> </a:t>
+            </a:r>
+            <a:r>
+              <a:rPr lang="de-DE" dirty="0" err="1"/>
+              <a:t>elements</a:t>
+            </a:r>
+            <a:r>
+              <a:rPr lang="de-DE" dirty="0"/>
+              <a:t> (DOE).</a:t>
+            </a:r>
+          </a:p>
+          <a:p>
+            <a:r>
+              <a:rPr lang="de-DE" dirty="0"/>
+              <a:t>Model </a:t>
+            </a:r>
+            <a:r>
+              <a:rPr lang="de-DE" dirty="0" err="1"/>
+              <a:t>assumes</a:t>
+            </a:r>
+            <a:r>
+              <a:rPr lang="de-DE" dirty="0"/>
+              <a:t> </a:t>
+            </a:r>
+            <a:r>
+              <a:rPr lang="de-DE" dirty="0" err="1"/>
+              <a:t>depth</a:t>
+            </a:r>
+            <a:r>
+              <a:rPr lang="de-DE" dirty="0"/>
+              <a:t>-independent </a:t>
+            </a:r>
+            <a:r>
+              <a:rPr lang="de-DE" dirty="0" err="1"/>
+              <a:t>point</a:t>
+            </a:r>
+            <a:r>
+              <a:rPr lang="de-DE" dirty="0"/>
+              <a:t> </a:t>
+            </a:r>
+            <a:r>
+              <a:rPr lang="de-DE" dirty="0" err="1"/>
+              <a:t>spread</a:t>
+            </a:r>
+            <a:r>
+              <a:rPr lang="de-DE" dirty="0"/>
+              <a:t> </a:t>
+            </a:r>
+            <a:r>
+              <a:rPr lang="de-DE" dirty="0" err="1"/>
+              <a:t>function</a:t>
+            </a:r>
+            <a:r>
+              <a:rPr lang="de-DE" dirty="0"/>
+              <a:t> (PSF).</a:t>
+            </a:r>
+          </a:p>
+          <a:p>
+            <a:r>
+              <a:rPr lang="de-DE" dirty="0"/>
+              <a:t>Optical </a:t>
+            </a:r>
+            <a:r>
+              <a:rPr lang="de-DE" dirty="0" err="1"/>
+              <a:t>simulation</a:t>
+            </a:r>
+            <a:r>
+              <a:rPr lang="de-DE" dirty="0"/>
+              <a:t> </a:t>
+            </a:r>
+            <a:r>
+              <a:rPr lang="de-DE" dirty="0" err="1"/>
+              <a:t>processes</a:t>
+            </a:r>
+            <a:r>
+              <a:rPr lang="de-DE" dirty="0"/>
+              <a:t> RGB </a:t>
+            </a:r>
+            <a:r>
+              <a:rPr lang="de-DE" dirty="0" err="1"/>
+              <a:t>images</a:t>
+            </a:r>
+            <a:r>
+              <a:rPr lang="de-DE" dirty="0"/>
+              <a:t> </a:t>
+            </a:r>
+            <a:r>
+              <a:rPr lang="de-DE" dirty="0" err="1"/>
+              <a:t>before</a:t>
+            </a:r>
+            <a:r>
+              <a:rPr lang="de-DE" dirty="0"/>
+              <a:t> </a:t>
+            </a:r>
+            <a:r>
+              <a:rPr lang="de-DE" dirty="0" err="1"/>
+              <a:t>detection</a:t>
+            </a:r>
+            <a:r>
+              <a:rPr lang="de-DE" dirty="0"/>
+              <a:t>.</a:t>
+            </a:r>
+          </a:p>
+          <a:p>
+            <a:r>
+              <a:rPr lang="de-DE" dirty="0" err="1"/>
+              <a:t>Enables</a:t>
+            </a:r>
+            <a:r>
+              <a:rPr lang="de-DE" dirty="0"/>
+              <a:t> </a:t>
+            </a:r>
+            <a:r>
+              <a:rPr lang="de-DE" dirty="0" err="1"/>
+              <a:t>gradient-based</a:t>
+            </a:r>
+            <a:r>
+              <a:rPr lang="de-DE" dirty="0"/>
+              <a:t> </a:t>
+            </a:r>
+            <a:r>
+              <a:rPr lang="de-DE" dirty="0" err="1"/>
+              <a:t>optimization</a:t>
+            </a:r>
+            <a:r>
+              <a:rPr lang="de-DE" dirty="0"/>
+              <a:t> </a:t>
+            </a:r>
+            <a:r>
+              <a:rPr lang="de-DE" dirty="0" err="1"/>
+              <a:t>of</a:t>
+            </a:r>
+            <a:r>
+              <a:rPr lang="de-DE" dirty="0"/>
+              <a:t> </a:t>
+            </a:r>
+            <a:r>
+              <a:rPr lang="de-DE" dirty="0" err="1"/>
+              <a:t>both</a:t>
+            </a:r>
+            <a:r>
+              <a:rPr lang="de-DE" dirty="0"/>
+              <a:t> DOE </a:t>
+            </a:r>
+            <a:r>
+              <a:rPr lang="de-DE" dirty="0" err="1"/>
+              <a:t>pattern</a:t>
+            </a:r>
+            <a:r>
+              <a:rPr lang="de-DE" dirty="0"/>
+              <a:t> and network </a:t>
+            </a:r>
+            <a:r>
+              <a:rPr lang="de-DE" dirty="0" err="1"/>
+              <a:t>parameters</a:t>
+            </a:r>
+            <a:r>
+              <a:rPr lang="de-DE" dirty="0"/>
+              <a:t>.</a:t>
+            </a:r>
+            <a:br>
+              <a:rPr lang="de-DE" dirty="0"/>
+            </a:br>
+            <a:br>
+              <a:rPr lang="de-DE" dirty="0"/>
+            </a:br>
+            <a:r>
+              <a:rPr lang="de-DE" dirty="0"/>
+              <a:t>YOLO11n </a:t>
+            </a:r>
+            <a:r>
+              <a:rPr lang="de-DE" dirty="0" err="1"/>
+              <a:t>adopted</a:t>
+            </a:r>
+            <a:r>
+              <a:rPr lang="de-DE" dirty="0"/>
+              <a:t> </a:t>
+            </a:r>
+            <a:r>
+              <a:rPr lang="de-DE" dirty="0" err="1"/>
+              <a:t>as</a:t>
+            </a:r>
+            <a:r>
+              <a:rPr lang="de-DE" dirty="0"/>
+              <a:t> </a:t>
+            </a:r>
+            <a:r>
+              <a:rPr lang="de-DE" dirty="0" err="1"/>
+              <a:t>baseline</a:t>
+            </a:r>
+            <a:r>
+              <a:rPr lang="de-DE" dirty="0"/>
+              <a:t> </a:t>
+            </a:r>
+            <a:r>
+              <a:rPr lang="de-DE" dirty="0" err="1"/>
+              <a:t>detector</a:t>
+            </a:r>
+            <a:r>
+              <a:rPr lang="de-DE" dirty="0"/>
+              <a:t> (</a:t>
+            </a:r>
+            <a:r>
+              <a:rPr lang="de-DE" dirty="0" err="1"/>
+              <a:t>accuracy</a:t>
+            </a:r>
+            <a:r>
+              <a:rPr lang="de-DE" dirty="0"/>
+              <a:t>–</a:t>
+            </a:r>
+            <a:r>
+              <a:rPr lang="de-DE" dirty="0" err="1"/>
+              <a:t>efficiency</a:t>
+            </a:r>
+            <a:r>
+              <a:rPr lang="de-DE" dirty="0"/>
+              <a:t> </a:t>
+            </a:r>
+            <a:r>
+              <a:rPr lang="de-DE" dirty="0" err="1"/>
+              <a:t>tradeoff</a:t>
+            </a:r>
+            <a:r>
+              <a:rPr lang="de-DE" dirty="0"/>
+              <a:t>).</a:t>
+            </a:r>
+          </a:p>
+          <a:p>
+            <a:r>
+              <a:rPr lang="de-DE" dirty="0"/>
+              <a:t>Optical </a:t>
+            </a:r>
+            <a:r>
+              <a:rPr lang="de-DE" dirty="0" err="1"/>
+              <a:t>simulation</a:t>
+            </a:r>
+            <a:r>
+              <a:rPr lang="de-DE" dirty="0"/>
+              <a:t> </a:t>
+            </a:r>
+            <a:r>
+              <a:rPr lang="de-DE" dirty="0" err="1"/>
+              <a:t>output</a:t>
+            </a:r>
+            <a:r>
+              <a:rPr lang="de-DE" dirty="0"/>
+              <a:t> </a:t>
+            </a:r>
+            <a:r>
+              <a:rPr lang="de-DE" dirty="0" err="1"/>
+              <a:t>fed</a:t>
+            </a:r>
+            <a:r>
+              <a:rPr lang="de-DE" dirty="0"/>
+              <a:t> </a:t>
+            </a:r>
+            <a:r>
+              <a:rPr lang="de-DE" dirty="0" err="1"/>
+              <a:t>directly</a:t>
+            </a:r>
+            <a:r>
+              <a:rPr lang="de-DE" dirty="0"/>
+              <a:t> </a:t>
+            </a:r>
+            <a:r>
+              <a:rPr lang="de-DE" dirty="0" err="1"/>
+              <a:t>into</a:t>
+            </a:r>
+            <a:r>
+              <a:rPr lang="de-DE" dirty="0"/>
+              <a:t> YOLO </a:t>
+            </a:r>
+            <a:r>
+              <a:rPr lang="de-DE" dirty="0" err="1"/>
+              <a:t>pipeline</a:t>
+            </a:r>
+            <a:r>
+              <a:rPr lang="de-DE" dirty="0"/>
+              <a:t>.</a:t>
+            </a:r>
+          </a:p>
+          <a:p>
+            <a:r>
+              <a:rPr lang="de-DE" dirty="0"/>
+              <a:t>End-</a:t>
+            </a:r>
+            <a:r>
+              <a:rPr lang="de-DE" dirty="0" err="1"/>
+              <a:t>to</a:t>
+            </a:r>
+            <a:r>
+              <a:rPr lang="de-DE" dirty="0"/>
+              <a:t>-end </a:t>
+            </a:r>
+            <a:r>
+              <a:rPr lang="de-DE" dirty="0" err="1"/>
+              <a:t>training</a:t>
+            </a:r>
+            <a:r>
+              <a:rPr lang="de-DE" dirty="0"/>
+              <a:t> </a:t>
+            </a:r>
+            <a:r>
+              <a:rPr lang="de-DE" dirty="0" err="1"/>
+              <a:t>optimizes</a:t>
+            </a:r>
+            <a:r>
+              <a:rPr lang="de-DE" dirty="0"/>
+              <a:t>:</a:t>
+            </a:r>
+          </a:p>
+          <a:p>
+            <a:pPr>
+              <a:buFont typeface="Arial" panose="020B0604020202020204" pitchFamily="34" charset="0"/>
+              <a:buChar char="•"/>
+            </a:pPr>
+            <a:r>
+              <a:rPr lang="de-DE" dirty="0"/>
+              <a:t>DOE </a:t>
+            </a:r>
+            <a:r>
+              <a:rPr lang="de-DE" dirty="0" err="1"/>
+              <a:t>phase</a:t>
+            </a:r>
+            <a:r>
+              <a:rPr lang="de-DE" dirty="0"/>
+              <a:t> </a:t>
+            </a:r>
+            <a:r>
+              <a:rPr lang="de-DE" dirty="0" err="1"/>
+              <a:t>profile</a:t>
+            </a:r>
+            <a:endParaRPr lang="de-DE" dirty="0"/>
+          </a:p>
+          <a:p>
+            <a:pPr>
+              <a:buFont typeface="Arial" panose="020B0604020202020204" pitchFamily="34" charset="0"/>
+              <a:buChar char="•"/>
+            </a:pPr>
+            <a:r>
+              <a:rPr lang="de-DE" dirty="0" err="1"/>
+              <a:t>Detector</a:t>
+            </a:r>
+            <a:r>
+              <a:rPr lang="de-DE" dirty="0"/>
+              <a:t> </a:t>
+            </a:r>
+            <a:r>
+              <a:rPr lang="de-DE" dirty="0" err="1"/>
+              <a:t>weights</a:t>
+            </a:r>
+            <a:endParaRPr lang="de-DE" dirty="0"/>
+          </a:p>
+          <a:p>
+            <a:r>
+              <a:rPr lang="de-DE" dirty="0" err="1"/>
+              <a:t>Uses</a:t>
+            </a:r>
+            <a:r>
+              <a:rPr lang="de-DE" dirty="0"/>
+              <a:t> </a:t>
+            </a:r>
+            <a:r>
+              <a:rPr lang="de-DE" dirty="0" err="1"/>
+              <a:t>Ultralytics</a:t>
+            </a:r>
+            <a:r>
+              <a:rPr lang="de-DE" dirty="0"/>
+              <a:t> </a:t>
+            </a:r>
+            <a:r>
+              <a:rPr lang="de-DE" dirty="0" err="1"/>
+              <a:t>standard</a:t>
+            </a:r>
+            <a:r>
+              <a:rPr lang="de-DE" dirty="0"/>
+              <a:t> </a:t>
+            </a:r>
+            <a:r>
+              <a:rPr lang="de-DE" dirty="0" err="1"/>
+              <a:t>training</a:t>
+            </a:r>
+            <a:r>
+              <a:rPr lang="de-DE" dirty="0"/>
+              <a:t> </a:t>
+            </a:r>
+            <a:r>
+              <a:rPr lang="de-DE" dirty="0" err="1"/>
+              <a:t>pipeline</a:t>
+            </a:r>
+            <a:r>
+              <a:rPr lang="de-DE" dirty="0"/>
+              <a:t> </a:t>
+            </a:r>
+            <a:r>
+              <a:rPr lang="de-DE" dirty="0" err="1"/>
+              <a:t>for</a:t>
+            </a:r>
+            <a:r>
+              <a:rPr lang="de-DE" dirty="0"/>
+              <a:t> </a:t>
+            </a:r>
+            <a:r>
+              <a:rPr lang="de-DE" dirty="0" err="1"/>
+              <a:t>stability</a:t>
+            </a:r>
+            <a:r>
+              <a:rPr lang="de-DE" dirty="0"/>
+              <a:t> and </a:t>
+            </a:r>
+            <a:r>
+              <a:rPr lang="de-DE" dirty="0" err="1"/>
+              <a:t>reproducibility</a:t>
+            </a:r>
+            <a:r>
+              <a:rPr lang="de-DE" dirty="0"/>
+              <a:t>.</a:t>
+            </a:r>
+          </a:p>
+          <a:p>
+            <a:endParaRPr lang="de-DE" dirty="0"/>
+          </a:p>
+          <a:p>
+            <a:endParaRPr lang="en-GB" dirty="0"/>
+          </a:p>
+        </p:txBody>
+      </p:sp>
+      <p:sp>
+        <p:nvSpPr>
+          <p:cNvPr id="4" name="Foliennummernplatzhalter 3"/>
+          <p:cNvSpPr>
+            <a:spLocks noGrp="1"/>
+          </p:cNvSpPr>
+          <p:nvPr>
+            <p:ph type="sldNum" sz="quarter" idx="5"/>
+          </p:nvPr>
+        </p:nvSpPr>
+        <p:spPr/>
+        <p:txBody>
+          <a:bodyPr/>
+          <a:lstStyle/>
+          <a:p>
+            <a:fld id="{FA60EB1A-5099-834C-85FD-CBA5DB11C771}" type="slidenum">
+              <a:rPr lang="en-GB" smtClean="0"/>
+              <a:t>8</a:t>
+            </a:fld>
+            <a:endParaRPr lang="en-GB"/>
+          </a:p>
+        </p:txBody>
+      </p:sp>
+    </p:spTree>
+    <p:extLst>
+      <p:ext uri="{BB962C8B-B14F-4D97-AF65-F5344CB8AC3E}">
+        <p14:creationId xmlns:p14="http://schemas.microsoft.com/office/powerpoint/2010/main" val="80184264"/>
+      </p:ext>
+    </p:extLst>
+  </p:cSld>
+  <p:clrMapOvr>
+    <a:masterClrMapping/>
+  </p:clrMapOvr>
+</p:notes>
 </file>
 
 <file path=ppt/slideLayouts/slideLayout1.xml><?xml version="1.0" encoding="utf-8"?>
@@ -380,7 +2130,7 @@
           <a:p>
             <a:fld id="{9E7B9DCE-2806-D243-A137-B4C1362D6AA1}" type="datetimeFigureOut">
               <a:rPr lang="en-GB" smtClean="0"/>
-              <a:t>03/12/2025</a:t>
+              <a:t>08/12/2025</a:t>
             </a:fld>
             <a:endParaRPr lang="en-GB"/>
           </a:p>
@@ -580,7 +2330,7 @@
           <a:p>
             <a:fld id="{9E7B9DCE-2806-D243-A137-B4C1362D6AA1}" type="datetimeFigureOut">
               <a:rPr lang="en-GB" smtClean="0"/>
-              <a:t>03/12/2025</a:t>
+              <a:t>08/12/2025</a:t>
             </a:fld>
             <a:endParaRPr lang="en-GB"/>
           </a:p>
@@ -790,7 +2540,7 @@
           <a:p>
             <a:fld id="{9E7B9DCE-2806-D243-A137-B4C1362D6AA1}" type="datetimeFigureOut">
               <a:rPr lang="en-GB" smtClean="0"/>
-              <a:t>03/12/2025</a:t>
+              <a:t>08/12/2025</a:t>
             </a:fld>
             <a:endParaRPr lang="en-GB"/>
           </a:p>
@@ -896,7 +2646,12 @@
             <p:ph type="title"/>
           </p:nvPr>
         </p:nvSpPr>
-        <p:spPr/>
+        <p:spPr>
+          <a:xfrm>
+            <a:off x="279400" y="-72232"/>
+            <a:ext cx="10515600" cy="1325563"/>
+          </a:xfrm>
+        </p:spPr>
         <p:txBody>
           <a:bodyPr/>
           <a:lstStyle/>
@@ -925,7 +2680,12 @@
             <p:ph idx="1"/>
           </p:nvPr>
         </p:nvSpPr>
-        <p:spPr/>
+        <p:spPr>
+          <a:xfrm>
+            <a:off x="279400" y="1253331"/>
+            <a:ext cx="11633200" cy="4976988"/>
+          </a:xfrm>
+        </p:spPr>
         <p:txBody>
           <a:bodyPr/>
           <a:lstStyle/>
@@ -990,7 +2750,7 @@
           <a:p>
             <a:fld id="{9E7B9DCE-2806-D243-A137-B4C1362D6AA1}" type="datetimeFigureOut">
               <a:rPr lang="en-GB" smtClean="0"/>
-              <a:t>03/12/2025</a:t>
+              <a:t>08/12/2025</a:t>
             </a:fld>
             <a:endParaRPr lang="en-GB"/>
           </a:p>
@@ -1266,7 +3026,7 @@
           <a:p>
             <a:fld id="{9E7B9DCE-2806-D243-A137-B4C1362D6AA1}" type="datetimeFigureOut">
               <a:rPr lang="en-GB" smtClean="0"/>
-              <a:t>03/12/2025</a:t>
+              <a:t>08/12/2025</a:t>
             </a:fld>
             <a:endParaRPr lang="en-GB"/>
           </a:p>
@@ -1534,7 +3294,7 @@
           <a:p>
             <a:fld id="{9E7B9DCE-2806-D243-A137-B4C1362D6AA1}" type="datetimeFigureOut">
               <a:rPr lang="en-GB" smtClean="0"/>
-              <a:t>03/12/2025</a:t>
+              <a:t>08/12/2025</a:t>
             </a:fld>
             <a:endParaRPr lang="en-GB"/>
           </a:p>
@@ -1949,7 +3709,7 @@
           <a:p>
             <a:fld id="{9E7B9DCE-2806-D243-A137-B4C1362D6AA1}" type="datetimeFigureOut">
               <a:rPr lang="en-GB" smtClean="0"/>
-              <a:t>03/12/2025</a:t>
+              <a:t>08/12/2025</a:t>
             </a:fld>
             <a:endParaRPr lang="en-GB"/>
           </a:p>
@@ -2091,7 +3851,7 @@
           <a:p>
             <a:fld id="{9E7B9DCE-2806-D243-A137-B4C1362D6AA1}" type="datetimeFigureOut">
               <a:rPr lang="en-GB" smtClean="0"/>
-              <a:t>03/12/2025</a:t>
+              <a:t>08/12/2025</a:t>
             </a:fld>
             <a:endParaRPr lang="en-GB"/>
           </a:p>
@@ -2204,7 +3964,7 @@
           <a:p>
             <a:fld id="{9E7B9DCE-2806-D243-A137-B4C1362D6AA1}" type="datetimeFigureOut">
               <a:rPr lang="en-GB" smtClean="0"/>
-              <a:t>03/12/2025</a:t>
+              <a:t>08/12/2025</a:t>
             </a:fld>
             <a:endParaRPr lang="en-GB"/>
           </a:p>
@@ -2517,7 +4277,7 @@
           <a:p>
             <a:fld id="{9E7B9DCE-2806-D243-A137-B4C1362D6AA1}" type="datetimeFigureOut">
               <a:rPr lang="en-GB" smtClean="0"/>
-              <a:t>03/12/2025</a:t>
+              <a:t>08/12/2025</a:t>
             </a:fld>
             <a:endParaRPr lang="en-GB"/>
           </a:p>
@@ -2806,7 +4566,7 @@
           <a:p>
             <a:fld id="{9E7B9DCE-2806-D243-A137-B4C1362D6AA1}" type="datetimeFigureOut">
               <a:rPr lang="en-GB" smtClean="0"/>
-              <a:t>03/12/2025</a:t>
+              <a:t>08/12/2025</a:t>
             </a:fld>
             <a:endParaRPr lang="en-GB"/>
           </a:p>
@@ -3049,7 +4809,7 @@
           <a:p>
             <a:fld id="{9E7B9DCE-2806-D243-A137-B4C1362D6AA1}" type="datetimeFigureOut">
               <a:rPr lang="en-GB" smtClean="0"/>
-              <a:t>03/12/2025</a:t>
+              <a:t>08/12/2025</a:t>
             </a:fld>
             <a:endParaRPr lang="en-GB"/>
           </a:p>
@@ -3450,6 +5210,1005 @@
 </file>
 
 <file path=ppt/slides/slide1.xml><?xml version="1.0" encoding="utf-8"?>
+<p:sld xmlns:a="http://schemas.openxmlformats.org/drawingml/2006/main" xmlns:r="http://schemas.openxmlformats.org/officeDocument/2006/relationships" xmlns:p="http://schemas.openxmlformats.org/presentationml/2006/main" show="0">
+  <p:cSld>
+    <p:bg>
+      <p:bgPr>
+        <a:solidFill>
+          <a:schemeClr val="bg1"/>
+        </a:solidFill>
+        <a:effectLst/>
+      </p:bgPr>
+    </p:bg>
+    <p:spTree>
+      <p:nvGrpSpPr>
+        <p:cNvPr id="1" name=""/>
+        <p:cNvGrpSpPr/>
+        <p:nvPr/>
+      </p:nvGrpSpPr>
+      <p:grpSpPr>
+        <a:xfrm>
+          <a:off x="0" y="0"/>
+          <a:ext cx="0" cy="0"/>
+          <a:chOff x="0" y="0"/>
+          <a:chExt cx="0" cy="0"/>
+        </a:xfrm>
+      </p:grpSpPr>
+      <p:sp useBgFill="1">
+        <p:nvSpPr>
+          <p:cNvPr id="38" name="Rectangle 37">
+            <a:extLst>
+              <a:ext uri="{FF2B5EF4-FFF2-40B4-BE49-F238E27FC236}">
+                <a16:creationId xmlns:a16="http://schemas.microsoft.com/office/drawing/2014/main" id="{C1DD1A8A-57D5-4A81-AD04-532B043C5611}"/>
+              </a:ext>
+              <a:ext uri="{C183D7F6-B498-43B3-948B-1728B52AA6E4}">
+                <adec:decorative xmlns:adec="http://schemas.microsoft.com/office/drawing/2017/decorative" val="1"/>
+              </a:ext>
+            </a:extLst>
+          </p:cNvPr>
+          <p:cNvSpPr>
+            <a:spLocks noGrp="1" noRot="1" noChangeAspect="1" noMove="1" noResize="1" noEditPoints="1" noAdjustHandles="1" noChangeArrowheads="1" noChangeShapeType="1" noTextEdit="1"/>
+          </p:cNvSpPr>
+          <p:nvPr>
+            <p:extLst>
+              <p:ext uri="{386F3935-93C4-4BCD-93E2-E3B085C9AB24}">
+                <p16:designElem xmlns:p16="http://schemas.microsoft.com/office/powerpoint/2015/main" val="1"/>
+              </p:ext>
+            </p:extLst>
+          </p:nvPr>
+        </p:nvSpPr>
+        <p:spPr>
+          <a:xfrm>
+            <a:off x="-1" y="0"/>
+            <a:ext cx="12188952" cy="6858000"/>
+          </a:xfrm>
+          <a:prstGeom prst="rect">
+            <a:avLst/>
+          </a:prstGeom>
+          <a:ln>
+            <a:noFill/>
+          </a:ln>
+        </p:spPr>
+        <p:style>
+          <a:lnRef idx="2">
+            <a:schemeClr val="accent1">
+              <a:shade val="50000"/>
+            </a:schemeClr>
+          </a:lnRef>
+          <a:fillRef idx="1">
+            <a:schemeClr val="accent1"/>
+          </a:fillRef>
+          <a:effectRef idx="0">
+            <a:schemeClr val="accent1"/>
+          </a:effectRef>
+          <a:fontRef idx="minor">
+            <a:schemeClr val="lt1"/>
+          </a:fontRef>
+        </p:style>
+        <p:txBody>
+          <a:bodyPr rtlCol="0" anchor="ctr"/>
+          <a:lstStyle/>
+          <a:p>
+            <a:pPr algn="ctr"/>
+            <a:endParaRPr lang="en-US"/>
+          </a:p>
+        </p:txBody>
+      </p:sp>
+      <p:pic>
+        <p:nvPicPr>
+          <p:cNvPr id="5" name="Picture 4" descr="Ein Bild, das Auto, draußen, Windschutzscheibe, Fahrzeug enthält.&#10;&#10;Automatisch generierte Beschreibung">
+            <a:extLst>
+              <a:ext uri="{FF2B5EF4-FFF2-40B4-BE49-F238E27FC236}">
+                <a16:creationId xmlns:a16="http://schemas.microsoft.com/office/drawing/2014/main" id="{189C3C27-EF33-F405-8E5B-CE661C115EBE}"/>
+              </a:ext>
+            </a:extLst>
+          </p:cNvPr>
+          <p:cNvPicPr>
+            <a:picLocks noChangeAspect="1" noChangeArrowheads="1"/>
+          </p:cNvPicPr>
+          <p:nvPr/>
+        </p:nvPicPr>
+        <p:blipFill>
+          <a:blip r:embed="rId3">
+            <a:extLst>
+              <a:ext uri="{28A0092B-C50C-407E-A947-70E740481C1C}">
+                <a14:useLocalDpi xmlns:a14="http://schemas.microsoft.com/office/drawing/2010/main" val="0"/>
+              </a:ext>
+            </a:extLst>
+          </a:blip>
+          <a:srcRect t="7707" b="7707"/>
+          <a:stretch>
+            <a:fillRect/>
+          </a:stretch>
+        </p:blipFill>
+        <p:spPr bwMode="auto">
+          <a:xfrm>
+            <a:off x="-3047" y="10"/>
+            <a:ext cx="12191999" cy="6857990"/>
+          </a:xfrm>
+          <a:prstGeom prst="rect">
+            <a:avLst/>
+          </a:prstGeom>
+          <a:noFill/>
+          <a:extLst>
+            <a:ext uri="{909E8E84-426E-40DD-AFC4-6F175D3DCCD1}">
+              <a14:hiddenFill xmlns:a14="http://schemas.microsoft.com/office/drawing/2010/main">
+                <a:solidFill>
+                  <a:srgbClr val="FFFFFF"/>
+                </a:solidFill>
+              </a14:hiddenFill>
+            </a:ext>
+          </a:extLst>
+        </p:spPr>
+      </p:pic>
+      <p:sp>
+        <p:nvSpPr>
+          <p:cNvPr id="40" name="Rectangle 39">
+            <a:extLst>
+              <a:ext uri="{FF2B5EF4-FFF2-40B4-BE49-F238E27FC236}">
+                <a16:creationId xmlns:a16="http://schemas.microsoft.com/office/drawing/2014/main" id="{007891EC-4501-44ED-A8C8-B11B6DB767AB}"/>
+              </a:ext>
+              <a:ext uri="{C183D7F6-B498-43B3-948B-1728B52AA6E4}">
+                <adec:decorative xmlns:adec="http://schemas.microsoft.com/office/drawing/2017/decorative" val="1"/>
+              </a:ext>
+            </a:extLst>
+          </p:cNvPr>
+          <p:cNvSpPr>
+            <a:spLocks noGrp="1" noRot="1" noChangeAspect="1" noMove="1" noResize="1" noEditPoints="1" noAdjustHandles="1" noChangeArrowheads="1" noChangeShapeType="1" noTextEdit="1"/>
+          </p:cNvSpPr>
+          <p:nvPr>
+            <p:extLst>
+              <p:ext uri="{386F3935-93C4-4BCD-93E2-E3B085C9AB24}">
+                <p16:designElem xmlns:p16="http://schemas.microsoft.com/office/powerpoint/2015/main" val="1"/>
+              </p:ext>
+            </p:extLst>
+          </p:nvPr>
+        </p:nvSpPr>
+        <p:spPr>
+          <a:xfrm>
+            <a:off x="0" y="2207602"/>
+            <a:ext cx="12191999" cy="3162146"/>
+          </a:xfrm>
+          <a:prstGeom prst="rect">
+            <a:avLst/>
+          </a:prstGeom>
+          <a:gradFill flip="none" rotWithShape="1">
+            <a:gsLst>
+              <a:gs pos="0">
+                <a:srgbClr val="000000">
+                  <a:alpha val="0"/>
+                </a:srgbClr>
+              </a:gs>
+              <a:gs pos="25000">
+                <a:srgbClr val="000000">
+                  <a:alpha val="15000"/>
+                </a:srgbClr>
+              </a:gs>
+              <a:gs pos="75000">
+                <a:srgbClr val="000000">
+                  <a:alpha val="15000"/>
+                </a:srgbClr>
+              </a:gs>
+              <a:gs pos="50000">
+                <a:srgbClr val="000000">
+                  <a:alpha val="30000"/>
+                </a:srgbClr>
+              </a:gs>
+              <a:gs pos="100000">
+                <a:srgbClr val="000000">
+                  <a:alpha val="0"/>
+                </a:srgbClr>
+              </a:gs>
+            </a:gsLst>
+            <a:lin ang="16200000" scaled="1"/>
+            <a:tileRect/>
+          </a:gradFill>
+          <a:ln>
+            <a:noFill/>
+          </a:ln>
+        </p:spPr>
+        <p:style>
+          <a:lnRef idx="2">
+            <a:schemeClr val="accent1">
+              <a:shade val="50000"/>
+            </a:schemeClr>
+          </a:lnRef>
+          <a:fillRef idx="1">
+            <a:schemeClr val="accent1"/>
+          </a:fillRef>
+          <a:effectRef idx="0">
+            <a:schemeClr val="accent1"/>
+          </a:effectRef>
+          <a:fontRef idx="minor">
+            <a:schemeClr val="lt1"/>
+          </a:fontRef>
+        </p:style>
+        <p:txBody>
+          <a:bodyPr rtlCol="0" anchor="ctr"/>
+          <a:lstStyle/>
+          <a:p>
+            <a:pPr algn="ctr"/>
+            <a:endParaRPr lang="en-US"/>
+          </a:p>
+        </p:txBody>
+      </p:sp>
+      <p:sp>
+        <p:nvSpPr>
+          <p:cNvPr id="6" name="Abgerundetes Rechteck 5">
+            <a:extLst>
+              <a:ext uri="{FF2B5EF4-FFF2-40B4-BE49-F238E27FC236}">
+                <a16:creationId xmlns:a16="http://schemas.microsoft.com/office/drawing/2014/main" id="{A24AC7F2-9DFE-2387-52FF-9352A54FD5D4}"/>
+              </a:ext>
+            </a:extLst>
+          </p:cNvPr>
+          <p:cNvSpPr/>
+          <p:nvPr/>
+        </p:nvSpPr>
+        <p:spPr>
+          <a:xfrm>
+            <a:off x="263514" y="719350"/>
+            <a:ext cx="9171709" cy="3408218"/>
+          </a:xfrm>
+          <a:prstGeom prst="roundRect">
+            <a:avLst/>
+          </a:prstGeom>
+          <a:solidFill>
+            <a:schemeClr val="bg1">
+              <a:alpha val="72254"/>
+            </a:schemeClr>
+          </a:solidFill>
+          <a:ln>
+            <a:noFill/>
+          </a:ln>
+        </p:spPr>
+        <p:style>
+          <a:lnRef idx="2">
+            <a:schemeClr val="accent1">
+              <a:shade val="15000"/>
+            </a:schemeClr>
+          </a:lnRef>
+          <a:fillRef idx="1">
+            <a:schemeClr val="accent1"/>
+          </a:fillRef>
+          <a:effectRef idx="0">
+            <a:schemeClr val="accent1"/>
+          </a:effectRef>
+          <a:fontRef idx="minor">
+            <a:schemeClr val="lt1"/>
+          </a:fontRef>
+        </p:style>
+        <p:txBody>
+          <a:bodyPr rtlCol="0" anchor="ctr"/>
+          <a:lstStyle/>
+          <a:p>
+            <a:pPr algn="ctr"/>
+            <a:endParaRPr lang="en-GB" dirty="0"/>
+          </a:p>
+        </p:txBody>
+      </p:sp>
+      <p:sp>
+        <p:nvSpPr>
+          <p:cNvPr id="2" name="Titel 1">
+            <a:extLst>
+              <a:ext uri="{FF2B5EF4-FFF2-40B4-BE49-F238E27FC236}">
+                <a16:creationId xmlns:a16="http://schemas.microsoft.com/office/drawing/2014/main" id="{90DBCF6C-5B00-CC99-E96D-CDB928BBF210}"/>
+              </a:ext>
+            </a:extLst>
+          </p:cNvPr>
+          <p:cNvSpPr>
+            <a:spLocks noGrp="1"/>
+          </p:cNvSpPr>
+          <p:nvPr>
+            <p:ph type="ctrTitle"/>
+          </p:nvPr>
+        </p:nvSpPr>
+        <p:spPr>
+          <a:xfrm>
+            <a:off x="-135497" y="-562227"/>
+            <a:ext cx="10058400" cy="3574778"/>
+          </a:xfrm>
+          <a:effectLst>
+            <a:outerShdw blurRad="50800" dist="38100" dir="2700000" algn="tl" rotWithShape="0">
+              <a:prstClr val="black">
+                <a:alpha val="40000"/>
+              </a:prstClr>
+            </a:outerShdw>
+          </a:effectLst>
+        </p:spPr>
+        <p:txBody>
+          <a:bodyPr>
+            <a:normAutofit/>
+          </a:bodyPr>
+          <a:lstStyle/>
+          <a:p>
+            <a:r>
+              <a:rPr lang="en-GB" sz="5200" b="1" dirty="0"/>
+              <a:t>Co-Optimizing Diffractive Optics and Object Detection for Robust Perception in Adverse Weather</a:t>
+            </a:r>
+          </a:p>
+        </p:txBody>
+      </p:sp>
+      <p:sp>
+        <p:nvSpPr>
+          <p:cNvPr id="3" name="Untertitel 2">
+            <a:extLst>
+              <a:ext uri="{FF2B5EF4-FFF2-40B4-BE49-F238E27FC236}">
+                <a16:creationId xmlns:a16="http://schemas.microsoft.com/office/drawing/2014/main" id="{3D62D144-989B-6987-A66E-A4D790AF1B77}"/>
+              </a:ext>
+            </a:extLst>
+          </p:cNvPr>
+          <p:cNvSpPr>
+            <a:spLocks noGrp="1"/>
+          </p:cNvSpPr>
+          <p:nvPr>
+            <p:ph type="subTitle" idx="1"/>
+          </p:nvPr>
+        </p:nvSpPr>
+        <p:spPr>
+          <a:xfrm>
+            <a:off x="-132726" y="3184266"/>
+            <a:ext cx="10058400" cy="1282707"/>
+          </a:xfrm>
+          <a:effectLst>
+            <a:outerShdw blurRad="50800" dist="38100" dir="2700000" algn="tl" rotWithShape="0">
+              <a:prstClr val="black">
+                <a:alpha val="40000"/>
+              </a:prstClr>
+            </a:outerShdw>
+          </a:effectLst>
+        </p:spPr>
+        <p:txBody>
+          <a:bodyPr>
+            <a:normAutofit/>
+          </a:bodyPr>
+          <a:lstStyle/>
+          <a:p>
+            <a:r>
+              <a:rPr lang="en-GB" dirty="0"/>
+              <a:t>CSED520 – Computational Imaging</a:t>
+            </a:r>
+          </a:p>
+          <a:p>
+            <a:r>
+              <a:rPr lang="en-GB" dirty="0" err="1"/>
+              <a:t>Nikolo</a:t>
+            </a:r>
+            <a:r>
+              <a:rPr lang="en-GB" dirty="0"/>
+              <a:t> </a:t>
+            </a:r>
+            <a:r>
+              <a:rPr lang="en-GB" dirty="0" err="1"/>
+              <a:t>Rohrmoser</a:t>
+            </a:r>
+            <a:r>
+              <a:rPr lang="en-GB" dirty="0"/>
+              <a:t>, Wilmer </a:t>
+            </a:r>
+            <a:r>
+              <a:rPr lang="en-GB" dirty="0" err="1"/>
+              <a:t>Zetterqvist</a:t>
+            </a:r>
+            <a:r>
+              <a:rPr lang="en-GB" dirty="0"/>
+              <a:t>, Michelle Reimann</a:t>
+            </a:r>
+          </a:p>
+        </p:txBody>
+      </p:sp>
+    </p:spTree>
+    <p:extLst>
+      <p:ext uri="{BB962C8B-B14F-4D97-AF65-F5344CB8AC3E}">
+        <p14:creationId xmlns:p14="http://schemas.microsoft.com/office/powerpoint/2010/main" val="2465030465"/>
+      </p:ext>
+    </p:extLst>
+  </p:cSld>
+  <p:clrMapOvr>
+    <a:masterClrMapping/>
+  </p:clrMapOvr>
+</p:sld>
+</file>
+
+<file path=ppt/slides/slide10.xml><?xml version="1.0" encoding="utf-8"?>
+<p:sld xmlns:a="http://schemas.openxmlformats.org/drawingml/2006/main" xmlns:r="http://schemas.openxmlformats.org/officeDocument/2006/relationships" xmlns:p="http://schemas.openxmlformats.org/presentationml/2006/main">
+  <p:cSld>
+    <p:spTree>
+      <p:nvGrpSpPr>
+        <p:cNvPr id="1" name=""/>
+        <p:cNvGrpSpPr/>
+        <p:nvPr/>
+      </p:nvGrpSpPr>
+      <p:grpSpPr>
+        <a:xfrm>
+          <a:off x="0" y="0"/>
+          <a:ext cx="0" cy="0"/>
+          <a:chOff x="0" y="0"/>
+          <a:chExt cx="0" cy="0"/>
+        </a:xfrm>
+      </p:grpSpPr>
+      <p:sp>
+        <p:nvSpPr>
+          <p:cNvPr id="2" name="Titel 1">
+            <a:extLst>
+              <a:ext uri="{FF2B5EF4-FFF2-40B4-BE49-F238E27FC236}">
+                <a16:creationId xmlns:a16="http://schemas.microsoft.com/office/drawing/2014/main" id="{9CD24094-1376-A08E-CF0A-22471136FC37}"/>
+              </a:ext>
+            </a:extLst>
+          </p:cNvPr>
+          <p:cNvSpPr>
+            <a:spLocks noGrp="1"/>
+          </p:cNvSpPr>
+          <p:nvPr>
+            <p:ph type="title"/>
+          </p:nvPr>
+        </p:nvSpPr>
+        <p:spPr/>
+        <p:txBody>
+          <a:bodyPr/>
+          <a:lstStyle/>
+          <a:p>
+            <a:r>
+              <a:rPr lang="en-GB" b="1" dirty="0"/>
+              <a:t>Conclusion</a:t>
+            </a:r>
+          </a:p>
+        </p:txBody>
+      </p:sp>
+      <p:sp>
+        <p:nvSpPr>
+          <p:cNvPr id="3" name="Inhaltsplatzhalter 2">
+            <a:extLst>
+              <a:ext uri="{FF2B5EF4-FFF2-40B4-BE49-F238E27FC236}">
+                <a16:creationId xmlns:a16="http://schemas.microsoft.com/office/drawing/2014/main" id="{F088508B-9057-00BA-E3C1-847A461485C1}"/>
+              </a:ext>
+            </a:extLst>
+          </p:cNvPr>
+          <p:cNvSpPr>
+            <a:spLocks noGrp="1"/>
+          </p:cNvSpPr>
+          <p:nvPr>
+            <p:ph idx="1"/>
+          </p:nvPr>
+        </p:nvSpPr>
+        <p:spPr/>
+        <p:txBody>
+          <a:bodyPr/>
+          <a:lstStyle/>
+          <a:p>
+            <a:endParaRPr lang="en-GB"/>
+          </a:p>
+        </p:txBody>
+      </p:sp>
+    </p:spTree>
+    <p:extLst>
+      <p:ext uri="{BB962C8B-B14F-4D97-AF65-F5344CB8AC3E}">
+        <p14:creationId xmlns:p14="http://schemas.microsoft.com/office/powerpoint/2010/main" val="3730115483"/>
+      </p:ext>
+    </p:extLst>
+  </p:cSld>
+  <p:clrMapOvr>
+    <a:masterClrMapping/>
+  </p:clrMapOvr>
+</p:sld>
+</file>
+
+<file path=ppt/slides/slide11.xml><?xml version="1.0" encoding="utf-8"?>
+<p:sld xmlns:a="http://schemas.openxmlformats.org/drawingml/2006/main" xmlns:r="http://schemas.openxmlformats.org/officeDocument/2006/relationships" xmlns:p="http://schemas.openxmlformats.org/presentationml/2006/main" show="0">
+  <p:cSld>
+    <p:spTree>
+      <p:nvGrpSpPr>
+        <p:cNvPr id="1" name=""/>
+        <p:cNvGrpSpPr/>
+        <p:nvPr/>
+      </p:nvGrpSpPr>
+      <p:grpSpPr>
+        <a:xfrm>
+          <a:off x="0" y="0"/>
+          <a:ext cx="0" cy="0"/>
+          <a:chOff x="0" y="0"/>
+          <a:chExt cx="0" cy="0"/>
+        </a:xfrm>
+      </p:grpSpPr>
+      <p:sp>
+        <p:nvSpPr>
+          <p:cNvPr id="4" name="Textfeld 3">
+            <a:extLst>
+              <a:ext uri="{FF2B5EF4-FFF2-40B4-BE49-F238E27FC236}">
+                <a16:creationId xmlns:a16="http://schemas.microsoft.com/office/drawing/2014/main" id="{BD64DDFA-E0E6-2C22-A2F2-88BEA96A308B}"/>
+              </a:ext>
+            </a:extLst>
+          </p:cNvPr>
+          <p:cNvSpPr txBox="1"/>
+          <p:nvPr/>
+        </p:nvSpPr>
+        <p:spPr>
+          <a:xfrm>
+            <a:off x="176136" y="2937613"/>
+            <a:ext cx="8238343" cy="646331"/>
+          </a:xfrm>
+          <a:prstGeom prst="rect">
+            <a:avLst/>
+          </a:prstGeom>
+          <a:noFill/>
+        </p:spPr>
+        <p:txBody>
+          <a:bodyPr wrap="square">
+            <a:spAutoFit/>
+          </a:bodyPr>
+          <a:lstStyle/>
+          <a:p>
+            <a:r>
+              <a:rPr lang="en-GB" dirty="0">
+                <a:hlinkClick r:id="rId2"/>
+              </a:rPr>
+              <a:t>https://www.kaggle.com/datasets/yessicatuteja/foggy-cityscapes-image-dataset</a:t>
+            </a:r>
+            <a:br>
+              <a:rPr lang="en-GB" dirty="0"/>
+            </a:br>
+            <a:r>
+              <a:rPr lang="en-GB" dirty="0"/>
+              <a:t>1500 simulated images (500 per no fog, medium fog, dense fog)</a:t>
+            </a:r>
+          </a:p>
+        </p:txBody>
+      </p:sp>
+      <p:sp>
+        <p:nvSpPr>
+          <p:cNvPr id="5" name="Textfeld 4">
+            <a:extLst>
+              <a:ext uri="{FF2B5EF4-FFF2-40B4-BE49-F238E27FC236}">
+                <a16:creationId xmlns:a16="http://schemas.microsoft.com/office/drawing/2014/main" id="{EB146B29-CB29-0F3E-A4E8-C19C159F7714}"/>
+              </a:ext>
+            </a:extLst>
+          </p:cNvPr>
+          <p:cNvSpPr txBox="1"/>
+          <p:nvPr/>
+        </p:nvSpPr>
+        <p:spPr>
+          <a:xfrm>
+            <a:off x="5336459" y="208917"/>
+            <a:ext cx="1912127" cy="369332"/>
+          </a:xfrm>
+          <a:prstGeom prst="rect">
+            <a:avLst/>
+          </a:prstGeom>
+          <a:noFill/>
+        </p:spPr>
+        <p:txBody>
+          <a:bodyPr wrap="none" rtlCol="0">
+            <a:spAutoFit/>
+          </a:bodyPr>
+          <a:lstStyle/>
+          <a:p>
+            <a:r>
+              <a:rPr lang="en-GB" dirty="0"/>
+              <a:t>Cityscapes dataset</a:t>
+            </a:r>
+          </a:p>
+        </p:txBody>
+      </p:sp>
+      <p:sp>
+        <p:nvSpPr>
+          <p:cNvPr id="6" name="Textfeld 5">
+            <a:extLst>
+              <a:ext uri="{FF2B5EF4-FFF2-40B4-BE49-F238E27FC236}">
+                <a16:creationId xmlns:a16="http://schemas.microsoft.com/office/drawing/2014/main" id="{94129CDF-C0BD-83F1-0199-C906248A10DE}"/>
+              </a:ext>
+            </a:extLst>
+          </p:cNvPr>
+          <p:cNvSpPr txBox="1"/>
+          <p:nvPr/>
+        </p:nvSpPr>
+        <p:spPr>
+          <a:xfrm>
+            <a:off x="5937008" y="1364939"/>
+            <a:ext cx="5252272" cy="646331"/>
+          </a:xfrm>
+          <a:prstGeom prst="rect">
+            <a:avLst/>
+          </a:prstGeom>
+          <a:noFill/>
+        </p:spPr>
+        <p:txBody>
+          <a:bodyPr wrap="none" rtlCol="0">
+            <a:spAutoFit/>
+          </a:bodyPr>
+          <a:lstStyle/>
+          <a:p>
+            <a:r>
+              <a:rPr lang="en-GB" dirty="0"/>
+              <a:t>https://</a:t>
+            </a:r>
+            <a:r>
+              <a:rPr lang="en-GB" dirty="0" err="1"/>
+              <a:t>www.cityscapes-dataset.com</a:t>
+            </a:r>
+            <a:r>
+              <a:rPr lang="en-GB" dirty="0"/>
+              <a:t>/</a:t>
+            </a:r>
+            <a:r>
+              <a:rPr lang="en-GB" dirty="0" err="1"/>
+              <a:t>foggydownload</a:t>
+            </a:r>
+            <a:r>
+              <a:rPr lang="en-GB" dirty="0"/>
+              <a:t>/</a:t>
+            </a:r>
+            <a:br>
+              <a:rPr lang="en-GB" dirty="0"/>
+            </a:br>
+            <a:r>
+              <a:rPr lang="en-GB" dirty="0"/>
+              <a:t>ETH Zürich, 25000 images with simulated fog</a:t>
+            </a:r>
+          </a:p>
+        </p:txBody>
+      </p:sp>
+      <mc:AlternateContent xmlns:mc="http://schemas.openxmlformats.org/markup-compatibility/2006" xmlns:p14="http://schemas.microsoft.com/office/powerpoint/2010/main">
+        <mc:Choice Requires="p14">
+          <p:contentPart p14:bwMode="auto" r:id="rId3">
+            <p14:nvContentPartPr>
+              <p14:cNvPr id="7" name="Freihand 6">
+                <a:extLst>
+                  <a:ext uri="{FF2B5EF4-FFF2-40B4-BE49-F238E27FC236}">
+                    <a16:creationId xmlns:a16="http://schemas.microsoft.com/office/drawing/2014/main" id="{53EAB370-BBB1-A378-DE14-125A850C391B}"/>
+                  </a:ext>
+                </a:extLst>
+              </p14:cNvPr>
+              <p14:cNvContentPartPr/>
+              <p14:nvPr/>
+            </p14:nvContentPartPr>
+            <p14:xfrm>
+              <a:off x="6379196" y="602386"/>
+              <a:ext cx="661320" cy="702000"/>
+            </p14:xfrm>
+          </p:contentPart>
+        </mc:Choice>
+        <mc:Fallback xmlns="">
+          <p:pic>
+            <p:nvPicPr>
+              <p:cNvPr id="7" name="Freihand 6">
+                <a:extLst>
+                  <a:ext uri="{FF2B5EF4-FFF2-40B4-BE49-F238E27FC236}">
+                    <a16:creationId xmlns:a16="http://schemas.microsoft.com/office/drawing/2014/main" id="{53EAB370-BBB1-A378-DE14-125A850C391B}"/>
+                  </a:ext>
+                </a:extLst>
+              </p:cNvPr>
+              <p:cNvPicPr/>
+              <p:nvPr/>
+            </p:nvPicPr>
+            <p:blipFill>
+              <a:blip r:embed="rId4"/>
+              <a:stretch>
+                <a:fillRect/>
+              </a:stretch>
+            </p:blipFill>
+            <p:spPr>
+              <a:xfrm>
+                <a:off x="6343556" y="566746"/>
+                <a:ext cx="732960" cy="773640"/>
+              </a:xfrm>
+              <a:prstGeom prst="rect">
+                <a:avLst/>
+              </a:prstGeom>
+            </p:spPr>
+          </p:pic>
+        </mc:Fallback>
+      </mc:AlternateContent>
+      <p:sp>
+        <p:nvSpPr>
+          <p:cNvPr id="9" name="Textfeld 8">
+            <a:extLst>
+              <a:ext uri="{FF2B5EF4-FFF2-40B4-BE49-F238E27FC236}">
+                <a16:creationId xmlns:a16="http://schemas.microsoft.com/office/drawing/2014/main" id="{D7F5AC3B-24D9-F008-6EBF-398E0E8222FD}"/>
+              </a:ext>
+            </a:extLst>
+          </p:cNvPr>
+          <p:cNvSpPr txBox="1"/>
+          <p:nvPr/>
+        </p:nvSpPr>
+        <p:spPr>
+          <a:xfrm>
+            <a:off x="6110991" y="3836598"/>
+            <a:ext cx="6382486" cy="646331"/>
+          </a:xfrm>
+          <a:prstGeom prst="rect">
+            <a:avLst/>
+          </a:prstGeom>
+          <a:noFill/>
+        </p:spPr>
+        <p:txBody>
+          <a:bodyPr wrap="square">
+            <a:spAutoFit/>
+          </a:bodyPr>
+          <a:lstStyle/>
+          <a:p>
+            <a:r>
+              <a:rPr lang="en-GB" dirty="0">
+                <a:hlinkClick r:id="rId5"/>
+              </a:rPr>
+              <a:t>https://www.kaggle.com/datasets/khitdon/foggy-cityscapes-yolo</a:t>
+            </a:r>
+            <a:br>
+              <a:rPr lang="en-GB" dirty="0"/>
+            </a:br>
+            <a:r>
+              <a:rPr lang="en-GB" dirty="0"/>
+              <a:t>3475 images, no source mentioned</a:t>
+            </a:r>
+          </a:p>
+        </p:txBody>
+      </p:sp>
+      <mc:AlternateContent xmlns:mc="http://schemas.openxmlformats.org/markup-compatibility/2006" xmlns:p14="http://schemas.microsoft.com/office/powerpoint/2010/main">
+        <mc:Choice Requires="p14">
+          <p:contentPart p14:bwMode="auto" r:id="rId6">
+            <p14:nvContentPartPr>
+              <p14:cNvPr id="12" name="Freihand 11">
+                <a:extLst>
+                  <a:ext uri="{FF2B5EF4-FFF2-40B4-BE49-F238E27FC236}">
+                    <a16:creationId xmlns:a16="http://schemas.microsoft.com/office/drawing/2014/main" id="{A4169A2D-351B-A392-C991-C01924FB7C50}"/>
+                  </a:ext>
+                </a:extLst>
+              </p14:cNvPr>
+              <p14:cNvContentPartPr/>
+              <p14:nvPr/>
+            </p14:nvContentPartPr>
+            <p14:xfrm>
+              <a:off x="5624168" y="2081591"/>
+              <a:ext cx="625680" cy="601560"/>
+            </p14:xfrm>
+          </p:contentPart>
+        </mc:Choice>
+        <mc:Fallback xmlns="">
+          <p:pic>
+            <p:nvPicPr>
+              <p:cNvPr id="12" name="Freihand 11">
+                <a:extLst>
+                  <a:ext uri="{FF2B5EF4-FFF2-40B4-BE49-F238E27FC236}">
+                    <a16:creationId xmlns:a16="http://schemas.microsoft.com/office/drawing/2014/main" id="{A4169A2D-351B-A392-C991-C01924FB7C50}"/>
+                  </a:ext>
+                </a:extLst>
+              </p:cNvPr>
+              <p:cNvPicPr/>
+              <p:nvPr/>
+            </p:nvPicPr>
+            <p:blipFill>
+              <a:blip r:embed="rId7"/>
+              <a:stretch>
+                <a:fillRect/>
+              </a:stretch>
+            </p:blipFill>
+            <p:spPr>
+              <a:xfrm>
+                <a:off x="5588168" y="2045591"/>
+                <a:ext cx="697320" cy="673200"/>
+              </a:xfrm>
+              <a:prstGeom prst="rect">
+                <a:avLst/>
+              </a:prstGeom>
+            </p:spPr>
+          </p:pic>
+        </mc:Fallback>
+      </mc:AlternateContent>
+      <mc:AlternateContent xmlns:mc="http://schemas.openxmlformats.org/markup-compatibility/2006" xmlns:p14="http://schemas.microsoft.com/office/powerpoint/2010/main">
+        <mc:Choice Requires="p14">
+          <p:contentPart p14:bwMode="auto" r:id="rId8">
+            <p14:nvContentPartPr>
+              <p14:cNvPr id="16" name="Freihand 15">
+                <a:extLst>
+                  <a:ext uri="{FF2B5EF4-FFF2-40B4-BE49-F238E27FC236}">
+                    <a16:creationId xmlns:a16="http://schemas.microsoft.com/office/drawing/2014/main" id="{B5F5003E-E1C5-4824-6C0C-BDD4DEEE3DD5}"/>
+                  </a:ext>
+                </a:extLst>
+              </p14:cNvPr>
+              <p14:cNvContentPartPr/>
+              <p14:nvPr/>
+            </p14:nvContentPartPr>
+            <p14:xfrm>
+              <a:off x="9425768" y="2576231"/>
+              <a:ext cx="563040" cy="842760"/>
+            </p14:xfrm>
+          </p:contentPart>
+        </mc:Choice>
+        <mc:Fallback xmlns="">
+          <p:pic>
+            <p:nvPicPr>
+              <p:cNvPr id="16" name="Freihand 15">
+                <a:extLst>
+                  <a:ext uri="{FF2B5EF4-FFF2-40B4-BE49-F238E27FC236}">
+                    <a16:creationId xmlns:a16="http://schemas.microsoft.com/office/drawing/2014/main" id="{B5F5003E-E1C5-4824-6C0C-BDD4DEEE3DD5}"/>
+                  </a:ext>
+                </a:extLst>
+              </p:cNvPr>
+              <p:cNvPicPr/>
+              <p:nvPr/>
+            </p:nvPicPr>
+            <p:blipFill>
+              <a:blip r:embed="rId9"/>
+              <a:stretch>
+                <a:fillRect/>
+              </a:stretch>
+            </p:blipFill>
+            <p:spPr>
+              <a:xfrm>
+                <a:off x="9390128" y="2540231"/>
+                <a:ext cx="634680" cy="914400"/>
+              </a:xfrm>
+              <a:prstGeom prst="rect">
+                <a:avLst/>
+              </a:prstGeom>
+            </p:spPr>
+          </p:pic>
+        </mc:Fallback>
+      </mc:AlternateContent>
+      <mc:AlternateContent xmlns:mc="http://schemas.openxmlformats.org/markup-compatibility/2006" xmlns:p14="http://schemas.microsoft.com/office/powerpoint/2010/main">
+        <mc:Choice Requires="p14">
+          <p:contentPart p14:bwMode="auto" r:id="rId10">
+            <p14:nvContentPartPr>
+              <p14:cNvPr id="21" name="Freihand 20">
+                <a:extLst>
+                  <a:ext uri="{FF2B5EF4-FFF2-40B4-BE49-F238E27FC236}">
+                    <a16:creationId xmlns:a16="http://schemas.microsoft.com/office/drawing/2014/main" id="{68064145-427D-E778-A818-40D82878A657}"/>
+                  </a:ext>
+                </a:extLst>
+              </p14:cNvPr>
+              <p14:cNvContentPartPr/>
+              <p14:nvPr/>
+            </p14:nvContentPartPr>
+            <p14:xfrm>
+              <a:off x="6214568" y="4312151"/>
+              <a:ext cx="3283200" cy="97560"/>
+            </p14:xfrm>
+          </p:contentPart>
+        </mc:Choice>
+        <mc:Fallback xmlns="">
+          <p:pic>
+            <p:nvPicPr>
+              <p:cNvPr id="21" name="Freihand 20">
+                <a:extLst>
+                  <a:ext uri="{FF2B5EF4-FFF2-40B4-BE49-F238E27FC236}">
+                    <a16:creationId xmlns:a16="http://schemas.microsoft.com/office/drawing/2014/main" id="{68064145-427D-E778-A818-40D82878A657}"/>
+                  </a:ext>
+                </a:extLst>
+              </p:cNvPr>
+              <p:cNvPicPr/>
+              <p:nvPr/>
+            </p:nvPicPr>
+            <p:blipFill>
+              <a:blip r:embed="rId11"/>
+              <a:stretch>
+                <a:fillRect/>
+              </a:stretch>
+            </p:blipFill>
+            <p:spPr>
+              <a:xfrm>
+                <a:off x="6160928" y="4204151"/>
+                <a:ext cx="3390840" cy="313200"/>
+              </a:xfrm>
+              <a:prstGeom prst="rect">
+                <a:avLst/>
+              </a:prstGeom>
+            </p:spPr>
+          </p:pic>
+        </mc:Fallback>
+      </mc:AlternateContent>
+      <p:sp>
+        <p:nvSpPr>
+          <p:cNvPr id="22" name="Textfeld 21">
+            <a:extLst>
+              <a:ext uri="{FF2B5EF4-FFF2-40B4-BE49-F238E27FC236}">
+                <a16:creationId xmlns:a16="http://schemas.microsoft.com/office/drawing/2014/main" id="{F0CDF945-F5E9-5B5C-6C02-BD16D851F206}"/>
+              </a:ext>
+            </a:extLst>
+          </p:cNvPr>
+          <p:cNvSpPr txBox="1"/>
+          <p:nvPr/>
+        </p:nvSpPr>
+        <p:spPr>
+          <a:xfrm>
+            <a:off x="176136" y="1304386"/>
+            <a:ext cx="5160323" cy="646331"/>
+          </a:xfrm>
+          <a:prstGeom prst="rect">
+            <a:avLst/>
+          </a:prstGeom>
+          <a:noFill/>
+        </p:spPr>
+        <p:txBody>
+          <a:bodyPr wrap="none" rtlCol="0">
+            <a:spAutoFit/>
+          </a:bodyPr>
+          <a:lstStyle/>
+          <a:p>
+            <a:r>
+              <a:rPr lang="en-GB" dirty="0"/>
+              <a:t>https://</a:t>
+            </a:r>
+            <a:r>
+              <a:rPr lang="en-GB" dirty="0" err="1"/>
+              <a:t>people.ee.ethz.ch</a:t>
+            </a:r>
+            <a:r>
+              <a:rPr lang="en-GB" dirty="0"/>
+              <a:t>/~</a:t>
+            </a:r>
+            <a:r>
+              <a:rPr lang="en-GB" dirty="0" err="1"/>
+              <a:t>csakarid</a:t>
+            </a:r>
+            <a:r>
+              <a:rPr lang="en-GB" dirty="0"/>
+              <a:t>/</a:t>
+            </a:r>
+            <a:r>
+              <a:rPr lang="en-GB" dirty="0" err="1"/>
+              <a:t>SFSU_synthetic</a:t>
+            </a:r>
+            <a:r>
+              <a:rPr lang="en-GB" dirty="0"/>
+              <a:t>/</a:t>
+            </a:r>
+            <a:br>
+              <a:rPr lang="en-GB" dirty="0"/>
+            </a:br>
+            <a:r>
+              <a:rPr lang="en-GB" dirty="0"/>
+              <a:t>ETH Zürich, Foggy driving, 101 real world images</a:t>
+            </a:r>
+          </a:p>
+        </p:txBody>
+      </p:sp>
+      <p:sp>
+        <p:nvSpPr>
+          <p:cNvPr id="2" name="Textfeld 1">
+            <a:extLst>
+              <a:ext uri="{FF2B5EF4-FFF2-40B4-BE49-F238E27FC236}">
+                <a16:creationId xmlns:a16="http://schemas.microsoft.com/office/drawing/2014/main" id="{B15BFF0B-D470-AD70-644C-10EF4E603BCC}"/>
+              </a:ext>
+            </a:extLst>
+          </p:cNvPr>
+          <p:cNvSpPr txBox="1"/>
+          <p:nvPr/>
+        </p:nvSpPr>
+        <p:spPr>
+          <a:xfrm>
+            <a:off x="1643063" y="5657850"/>
+            <a:ext cx="4605300" cy="369332"/>
+          </a:xfrm>
+          <a:prstGeom prst="rect">
+            <a:avLst/>
+          </a:prstGeom>
+          <a:noFill/>
+        </p:spPr>
+        <p:txBody>
+          <a:bodyPr wrap="none" rtlCol="0">
+            <a:spAutoFit/>
+          </a:bodyPr>
+          <a:lstStyle/>
+          <a:p>
+            <a:r>
+              <a:rPr lang="en-GB" dirty="0"/>
+              <a:t>DAWN:  303 foggy images with bounding boxes</a:t>
+            </a:r>
+          </a:p>
+        </p:txBody>
+      </p:sp>
+    </p:spTree>
+    <p:extLst>
+      <p:ext uri="{BB962C8B-B14F-4D97-AF65-F5344CB8AC3E}">
+        <p14:creationId xmlns:p14="http://schemas.microsoft.com/office/powerpoint/2010/main" val="2690319823"/>
+      </p:ext>
+    </p:extLst>
+  </p:cSld>
+  <p:clrMapOvr>
+    <a:masterClrMapping/>
+  </p:clrMapOvr>
+</p:sld>
+</file>
+
+<file path=ppt/slides/slide2.xml><?xml version="1.0" encoding="utf-8"?>
 <p:sld xmlns:a="http://schemas.openxmlformats.org/drawingml/2006/main" xmlns:r="http://schemas.openxmlformats.org/officeDocument/2006/relationships" xmlns:p="http://schemas.openxmlformats.org/presentationml/2006/main">
   <p:cSld>
     <p:bg>
@@ -3476,7 +6235,7 @@
       </p:grpSpPr>
       <p:sp useBgFill="1">
         <p:nvSpPr>
-          <p:cNvPr id="29" name="Rectangle 28">
+          <p:cNvPr id="8" name="Rectangle 7">
             <a:extLst>
               <a:ext uri="{FF2B5EF4-FFF2-40B4-BE49-F238E27FC236}">
                 <a16:creationId xmlns:a16="http://schemas.microsoft.com/office/drawing/2014/main" id="{5A292AEA-2528-46C0-B426-95822B6141FB}"/>
@@ -3536,7 +6295,7 @@
       </p:sp>
       <p:sp>
         <p:nvSpPr>
-          <p:cNvPr id="31" name="Rectangle 30">
+          <p:cNvPr id="10" name="Rectangle 9">
             <a:extLst>
               <a:ext uri="{FF2B5EF4-FFF2-40B4-BE49-F238E27FC236}">
                 <a16:creationId xmlns:a16="http://schemas.microsoft.com/office/drawing/2014/main" id="{D8B7B198-E4DF-43CD-AD8C-199884323745}"/>
@@ -3599,7 +6358,7 @@
       </p:sp>
       <p:sp>
         <p:nvSpPr>
-          <p:cNvPr id="33" name="Freeform: Shape 32">
+          <p:cNvPr id="12" name="Freeform: Shape 11">
             <a:extLst>
               <a:ext uri="{FF2B5EF4-FFF2-40B4-BE49-F238E27FC236}">
                 <a16:creationId xmlns:a16="http://schemas.microsoft.com/office/drawing/2014/main" id="{2BE67753-EA0E-4819-8D22-0B6600CF7231}"/>
@@ -3774,7 +6533,7 @@
       </p:sp>
       <p:grpSp>
         <p:nvGrpSpPr>
-          <p:cNvPr id="35" name="Group 34">
+          <p:cNvPr id="14" name="Group 13">
             <a:extLst>
               <a:ext uri="{FF2B5EF4-FFF2-40B4-BE49-F238E27FC236}">
                 <a16:creationId xmlns:a16="http://schemas.microsoft.com/office/drawing/2014/main" id="{D76D63AC-0421-45EC-B383-E79A61A78C6B}"/>
@@ -3810,7 +6569,7 @@
         </p:grpSpPr>
         <p:sp>
           <p:nvSpPr>
-            <p:cNvPr id="36" name="Freeform: Shape 35">
+            <p:cNvPr id="15" name="Freeform: Shape 14">
               <a:extLst>
                 <a:ext uri="{FF2B5EF4-FFF2-40B4-BE49-F238E27FC236}">
                   <a16:creationId xmlns:a16="http://schemas.microsoft.com/office/drawing/2014/main" id="{B997A32E-7032-4107-9C8B-99DB59EDD525}"/>
@@ -4561,7 +7320,7 @@
         </p:sp>
         <p:sp>
           <p:nvSpPr>
-            <p:cNvPr id="37" name="Freeform: Shape 36">
+            <p:cNvPr id="16" name="Freeform: Shape 15">
               <a:extLst>
                 <a:ext uri="{FF2B5EF4-FFF2-40B4-BE49-F238E27FC236}">
                   <a16:creationId xmlns:a16="http://schemas.microsoft.com/office/drawing/2014/main" id="{943BB27F-1470-42CA-91FF-D94BC691C8F2}"/>
@@ -4925,7 +7684,7 @@
         </p:sp>
         <p:sp>
           <p:nvSpPr>
-            <p:cNvPr id="38" name="Freeform: Shape 37">
+            <p:cNvPr id="17" name="Freeform: Shape 16">
               <a:extLst>
                 <a:ext uri="{FF2B5EF4-FFF2-40B4-BE49-F238E27FC236}">
                   <a16:creationId xmlns:a16="http://schemas.microsoft.com/office/drawing/2014/main" id="{E997B002-17FD-47B3-A06A-76802FE15CE7}"/>
@@ -5304,7 +8063,7 @@
         </p:sp>
         <p:sp>
           <p:nvSpPr>
-            <p:cNvPr id="39" name="Freeform: Shape 38">
+            <p:cNvPr id="18" name="Freeform: Shape 17">
               <a:extLst>
                 <a:ext uri="{FF2B5EF4-FFF2-40B4-BE49-F238E27FC236}">
                   <a16:creationId xmlns:a16="http://schemas.microsoft.com/office/drawing/2014/main" id="{E401EA35-9D2E-43B7-860F-EBB8A6C3E081}"/>
@@ -6191,7 +8950,7 @@
         </p:sp>
         <p:sp>
           <p:nvSpPr>
-            <p:cNvPr id="40" name="Freeform: Shape 39">
+            <p:cNvPr id="19" name="Freeform: Shape 18">
               <a:extLst>
                 <a:ext uri="{FF2B5EF4-FFF2-40B4-BE49-F238E27FC236}">
                   <a16:creationId xmlns:a16="http://schemas.microsoft.com/office/drawing/2014/main" id="{F8C44827-3D81-4FF9-B4A5-5650D1B20A29}"/>
@@ -8288,7 +11047,7 @@
         </p:sp>
         <p:sp>
           <p:nvSpPr>
-            <p:cNvPr id="41" name="Freeform: Shape 40">
+            <p:cNvPr id="20" name="Freeform: Shape 19">
               <a:extLst>
                 <a:ext uri="{FF2B5EF4-FFF2-40B4-BE49-F238E27FC236}">
                   <a16:creationId xmlns:a16="http://schemas.microsoft.com/office/drawing/2014/main" id="{F613D97F-F6DF-4D32-AD91-209A80E7A23C}"/>
@@ -9477,7 +12236,7 @@
         </p:sp>
         <p:sp>
           <p:nvSpPr>
-            <p:cNvPr id="42" name="Freeform: Shape 41">
+            <p:cNvPr id="21" name="Freeform: Shape 20">
               <a:extLst>
                 <a:ext uri="{FF2B5EF4-FFF2-40B4-BE49-F238E27FC236}">
                   <a16:creationId xmlns:a16="http://schemas.microsoft.com/office/drawing/2014/main" id="{82B0ED5C-927D-4C5F-8F27-1B403820B975}"/>
@@ -10677,8 +13436,8 @@
         </p:nvSpPr>
         <p:spPr>
           <a:xfrm>
-            <a:off x="2960572" y="548714"/>
-            <a:ext cx="6199847" cy="3242927"/>
+            <a:off x="3502731" y="1542402"/>
+            <a:ext cx="5186842" cy="2387918"/>
           </a:xfrm>
         </p:spPr>
         <p:txBody>
@@ -10688,13 +13447,18 @@
           <a:lstStyle/>
           <a:p>
             <a:r>
-              <a:rPr lang="en-GB" sz="3600" dirty="0">
+              <a:rPr lang="en-GB" sz="3300" b="1">
                 <a:solidFill>
                   <a:schemeClr val="tx2"/>
                 </a:solidFill>
               </a:rPr>
               <a:t>Co-Optimizing Diffractive Optics and Object Detection for Robust Perception in Adverse Weather</a:t>
             </a:r>
+            <a:endParaRPr lang="en-GB" sz="3300" b="1" dirty="0">
+              <a:solidFill>
+                <a:schemeClr val="tx2"/>
+              </a:solidFill>
+            </a:endParaRPr>
           </a:p>
         </p:txBody>
       </p:sp>
@@ -10716,18 +13480,18 @@
         </p:nvSpPr>
         <p:spPr>
           <a:xfrm>
-            <a:off x="3466478" y="4228024"/>
+            <a:off x="3500731" y="4130820"/>
             <a:ext cx="5188034" cy="682079"/>
           </a:xfrm>
         </p:spPr>
         <p:txBody>
           <a:bodyPr>
-            <a:normAutofit fontScale="92500" lnSpcReduction="20000"/>
+            <a:normAutofit fontScale="92500" lnSpcReduction="10000"/>
           </a:bodyPr>
           <a:lstStyle/>
           <a:p>
             <a:r>
-              <a:rPr lang="en-GB" sz="2000" dirty="0">
+              <a:rPr lang="en-GB" sz="1800">
                 <a:solidFill>
                   <a:schemeClr val="tx2"/>
                 </a:solidFill>
@@ -10737,43 +13501,24 @@
           </a:p>
           <a:p>
             <a:r>
-              <a:rPr lang="en-GB" sz="2000" dirty="0" err="1">
+              <a:rPr lang="en-GB" sz="1800">
                 <a:solidFill>
                   <a:schemeClr val="tx2"/>
                 </a:solidFill>
               </a:rPr>
-              <a:t>Nikolo</a:t>
-            </a:r>
-            <a:r>
-              <a:rPr lang="en-GB" sz="2000" dirty="0">
-                <a:solidFill>
-                  <a:schemeClr val="tx2"/>
-                </a:solidFill>
-              </a:rPr>
-              <a:t> </a:t>
-            </a:r>
-            <a:r>
-              <a:rPr lang="en-GB" sz="2000" dirty="0" err="1">
-                <a:solidFill>
-                  <a:schemeClr val="tx2"/>
-                </a:solidFill>
-              </a:rPr>
-              <a:t>Rohrmoser</a:t>
-            </a:r>
-            <a:r>
-              <a:rPr lang="en-GB" sz="2000" dirty="0">
-                <a:solidFill>
-                  <a:schemeClr val="tx2"/>
-                </a:solidFill>
-              </a:rPr>
-              <a:t>, Wilmer Z, Michelle Reimann</a:t>
-            </a:r>
+              <a:t>Nikolo Rohrmoser, Wilmer Zetterqvist, Michelle Reimann</a:t>
+            </a:r>
+            <a:endParaRPr lang="en-GB" sz="1800" dirty="0">
+              <a:solidFill>
+                <a:schemeClr val="tx2"/>
+              </a:solidFill>
+            </a:endParaRPr>
           </a:p>
         </p:txBody>
       </p:sp>
       <p:grpSp>
         <p:nvGrpSpPr>
-          <p:cNvPr id="44" name="Group 43">
+          <p:cNvPr id="23" name="Group 22">
             <a:extLst>
               <a:ext uri="{FF2B5EF4-FFF2-40B4-BE49-F238E27FC236}">
                 <a16:creationId xmlns:a16="http://schemas.microsoft.com/office/drawing/2014/main" id="{87F87F1B-42BA-4AC7-A4E2-41544DDB2CE3}"/>
@@ -10804,7 +13549,7 @@
         </p:grpSpPr>
         <p:sp>
           <p:nvSpPr>
-            <p:cNvPr id="45" name="Freeform: Shape 44">
+            <p:cNvPr id="24" name="Freeform: Shape 23">
               <a:extLst>
                 <a:ext uri="{FF2B5EF4-FFF2-40B4-BE49-F238E27FC236}">
                   <a16:creationId xmlns:a16="http://schemas.microsoft.com/office/drawing/2014/main" id="{68B53067-4E48-4E71-A6A9-A8CAABAFBF69}"/>
@@ -11202,7 +13947,7 @@
         </p:sp>
         <p:sp>
           <p:nvSpPr>
-            <p:cNvPr id="46" name="Freeform: Shape 45">
+            <p:cNvPr id="25" name="Freeform: Shape 24">
               <a:extLst>
                 <a:ext uri="{FF2B5EF4-FFF2-40B4-BE49-F238E27FC236}">
                   <a16:creationId xmlns:a16="http://schemas.microsoft.com/office/drawing/2014/main" id="{06D1A0D3-4BB8-41D9-9CE7-2884C83F448B}"/>
@@ -11394,7 +14139,7 @@
         </p:sp>
         <p:sp>
           <p:nvSpPr>
-            <p:cNvPr id="47" name="Freeform: Shape 46">
+            <p:cNvPr id="26" name="Freeform: Shape 25">
               <a:extLst>
                 <a:ext uri="{FF2B5EF4-FFF2-40B4-BE49-F238E27FC236}">
                   <a16:creationId xmlns:a16="http://schemas.microsoft.com/office/drawing/2014/main" id="{81E20F06-3B09-4B89-A36B-AB8BFBCCA5D9}"/>
@@ -11648,7 +14393,7 @@
         </p:sp>
         <p:sp>
           <p:nvSpPr>
-            <p:cNvPr id="48" name="Freeform: Shape 47">
+            <p:cNvPr id="27" name="Freeform: Shape 26">
               <a:extLst>
                 <a:ext uri="{FF2B5EF4-FFF2-40B4-BE49-F238E27FC236}">
                   <a16:creationId xmlns:a16="http://schemas.microsoft.com/office/drawing/2014/main" id="{DAE6C3D7-7D5B-4926-877D-45F117BB6BF0}"/>
@@ -11841,7 +14586,7 @@
       </p:grpSp>
       <p:grpSp>
         <p:nvGrpSpPr>
-          <p:cNvPr id="50" name="Group 49">
+          <p:cNvPr id="29" name="Group 28">
             <a:extLst>
               <a:ext uri="{FF2B5EF4-FFF2-40B4-BE49-F238E27FC236}">
                 <a16:creationId xmlns:a16="http://schemas.microsoft.com/office/drawing/2014/main" id="{967346A5-7569-4F15-AB5D-BE3DADF192C0}"/>
@@ -11872,7 +14617,7 @@
         </p:grpSpPr>
         <p:sp>
           <p:nvSpPr>
-            <p:cNvPr id="51" name="Freeform: Shape 50">
+            <p:cNvPr id="30" name="Freeform: Shape 29">
               <a:extLst>
                 <a:ext uri="{FF2B5EF4-FFF2-40B4-BE49-F238E27FC236}">
                   <a16:creationId xmlns:a16="http://schemas.microsoft.com/office/drawing/2014/main" id="{E1951533-A568-4765-AB1F-F71D9AFDEA9F}"/>
@@ -12270,7 +15015,7 @@
         </p:sp>
         <p:sp>
           <p:nvSpPr>
-            <p:cNvPr id="52" name="Freeform: Shape 51">
+            <p:cNvPr id="31" name="Freeform: Shape 30">
               <a:extLst>
                 <a:ext uri="{FF2B5EF4-FFF2-40B4-BE49-F238E27FC236}">
                   <a16:creationId xmlns:a16="http://schemas.microsoft.com/office/drawing/2014/main" id="{A7214F52-4F3F-4C96-A62E-F1401D6C04FA}"/>
@@ -12462,7 +15207,7 @@
         </p:sp>
         <p:sp>
           <p:nvSpPr>
-            <p:cNvPr id="53" name="Freeform: Shape 52">
+            <p:cNvPr id="32" name="Freeform: Shape 31">
               <a:extLst>
                 <a:ext uri="{FF2B5EF4-FFF2-40B4-BE49-F238E27FC236}">
                   <a16:creationId xmlns:a16="http://schemas.microsoft.com/office/drawing/2014/main" id="{023146A1-291C-4FA0-AB5B-EB04D4239812}"/>
@@ -12716,7 +15461,7 @@
         </p:sp>
         <p:sp>
           <p:nvSpPr>
-            <p:cNvPr id="54" name="Freeform: Shape 53">
+            <p:cNvPr id="33" name="Freeform: Shape 32">
               <a:extLst>
                 <a:ext uri="{FF2B5EF4-FFF2-40B4-BE49-F238E27FC236}">
                   <a16:creationId xmlns:a16="http://schemas.microsoft.com/office/drawing/2014/main" id="{62977932-2B03-4899-8306-5002CEE68E2C}"/>
@@ -12910,7 +15655,7 @@
     </p:spTree>
     <p:extLst>
       <p:ext uri="{BB962C8B-B14F-4D97-AF65-F5344CB8AC3E}">
-        <p14:creationId xmlns:p14="http://schemas.microsoft.com/office/powerpoint/2010/main" val="2465030465"/>
+        <p14:creationId xmlns:p14="http://schemas.microsoft.com/office/powerpoint/2010/main" val="4123086611"/>
       </p:ext>
     </p:extLst>
   </p:cSld>
@@ -12920,9 +15665,1221 @@
 </p:sld>
 </file>
 
-<file path=ppt/slides/slide2.xml><?xml version="1.0" encoding="utf-8"?>
+<file path=ppt/slides/slide3.xml><?xml version="1.0" encoding="utf-8"?>
 <p:sld xmlns:a="http://schemas.openxmlformats.org/drawingml/2006/main" xmlns:r="http://schemas.openxmlformats.org/officeDocument/2006/relationships" xmlns:p="http://schemas.openxmlformats.org/presentationml/2006/main">
   <p:cSld>
+    <p:bg>
+      <p:bgPr>
+        <a:solidFill>
+          <a:schemeClr val="bg1"/>
+        </a:solidFill>
+        <a:effectLst/>
+      </p:bgPr>
+    </p:bg>
+    <p:spTree>
+      <p:nvGrpSpPr>
+        <p:cNvPr id="1" name=""/>
+        <p:cNvGrpSpPr/>
+        <p:nvPr/>
+      </p:nvGrpSpPr>
+      <p:grpSpPr>
+        <a:xfrm>
+          <a:off x="0" y="0"/>
+          <a:ext cx="0" cy="0"/>
+          <a:chOff x="0" y="0"/>
+          <a:chExt cx="0" cy="0"/>
+        </a:xfrm>
+      </p:grpSpPr>
+      <p:sp useBgFill="1">
+        <p:nvSpPr>
+          <p:cNvPr id="1041" name="Rectangle 1040">
+            <a:extLst>
+              <a:ext uri="{FF2B5EF4-FFF2-40B4-BE49-F238E27FC236}">
+                <a16:creationId xmlns:a16="http://schemas.microsoft.com/office/drawing/2014/main" id="{A3C210E6-A35A-4F68-8D60-801A019C75B8}"/>
+              </a:ext>
+              <a:ext uri="{C183D7F6-B498-43B3-948B-1728B52AA6E4}">
+                <adec:decorative xmlns:adec="http://schemas.microsoft.com/office/drawing/2017/decorative" val="1"/>
+              </a:ext>
+            </a:extLst>
+          </p:cNvPr>
+          <p:cNvSpPr>
+            <a:spLocks noGrp="1" noRot="1" noChangeAspect="1" noMove="1" noResize="1" noEditPoints="1" noAdjustHandles="1" noChangeArrowheads="1" noChangeShapeType="1" noTextEdit="1"/>
+          </p:cNvSpPr>
+          <p:nvPr>
+            <p:extLst>
+              <p:ext uri="{386F3935-93C4-4BCD-93E2-E3B085C9AB24}">
+                <p16:designElem xmlns:p16="http://schemas.microsoft.com/office/powerpoint/2015/main" val="1"/>
+              </p:ext>
+            </p:extLst>
+          </p:nvPr>
+        </p:nvSpPr>
+        <p:spPr>
+          <a:xfrm>
+            <a:off x="0" y="0"/>
+            <a:ext cx="12192000" cy="6858000"/>
+          </a:xfrm>
+          <a:prstGeom prst="rect">
+            <a:avLst/>
+          </a:prstGeom>
+          <a:ln>
+            <a:noFill/>
+          </a:ln>
+        </p:spPr>
+        <p:style>
+          <a:lnRef idx="2">
+            <a:schemeClr val="accent1">
+              <a:shade val="50000"/>
+            </a:schemeClr>
+          </a:lnRef>
+          <a:fillRef idx="1">
+            <a:schemeClr val="accent1"/>
+          </a:fillRef>
+          <a:effectRef idx="0">
+            <a:schemeClr val="accent1"/>
+          </a:effectRef>
+          <a:fontRef idx="minor">
+            <a:schemeClr val="lt1"/>
+          </a:fontRef>
+        </p:style>
+        <p:txBody>
+          <a:bodyPr rtlCol="0" anchor="ctr"/>
+          <a:lstStyle/>
+          <a:p>
+            <a:pPr algn="ctr"/>
+            <a:endParaRPr lang="en-US"/>
+          </a:p>
+        </p:txBody>
+      </p:sp>
+      <p:pic>
+        <p:nvPicPr>
+          <p:cNvPr id="1036" name="Picture 12" descr="gb1 Object Detection Dataset by Sumba Coder">
+            <a:extLst>
+              <a:ext uri="{FF2B5EF4-FFF2-40B4-BE49-F238E27FC236}">
+                <a16:creationId xmlns:a16="http://schemas.microsoft.com/office/drawing/2014/main" id="{210B4AB0-4740-2B2D-8C9C-F4927ECFEB62}"/>
+              </a:ext>
+            </a:extLst>
+          </p:cNvPr>
+          <p:cNvPicPr>
+            <a:picLocks noChangeAspect="1" noChangeArrowheads="1"/>
+          </p:cNvPicPr>
+          <p:nvPr/>
+        </p:nvPicPr>
+        <p:blipFill>
+          <a:blip r:embed="rId3">
+            <a:extLst>
+              <a:ext uri="{28A0092B-C50C-407E-A947-70E740481C1C}">
+                <a14:useLocalDpi xmlns:a14="http://schemas.microsoft.com/office/drawing/2010/main" val="0"/>
+              </a:ext>
+            </a:extLst>
+          </a:blip>
+          <a:srcRect l="391" r="17633" b="-2"/>
+          <a:stretch>
+            <a:fillRect/>
+          </a:stretch>
+        </p:blipFill>
+        <p:spPr bwMode="auto">
+          <a:xfrm>
+            <a:off x="3136389" y="10"/>
+            <a:ext cx="4979304" cy="3401558"/>
+          </a:xfrm>
+          <a:custGeom>
+            <a:avLst/>
+            <a:gdLst/>
+            <a:ahLst/>
+            <a:cxnLst/>
+            <a:rect l="l" t="t" r="r" b="b"/>
+            <a:pathLst>
+              <a:path w="4979304" h="3364992">
+                <a:moveTo>
+                  <a:pt x="0" y="0"/>
+                </a:moveTo>
+                <a:lnTo>
+                  <a:pt x="4211250" y="0"/>
+                </a:lnTo>
+                <a:lnTo>
+                  <a:pt x="4309461" y="192282"/>
+                </a:lnTo>
+                <a:cubicBezTo>
+                  <a:pt x="4697535" y="1033269"/>
+                  <a:pt x="4937593" y="2032690"/>
+                  <a:pt x="4974907" y="3110424"/>
+                </a:cubicBezTo>
+                <a:lnTo>
+                  <a:pt x="4979304" y="3364992"/>
+                </a:lnTo>
+                <a:lnTo>
+                  <a:pt x="800592" y="3364992"/>
+                </a:lnTo>
+                <a:lnTo>
+                  <a:pt x="797493" y="3185579"/>
+                </a:lnTo>
+                <a:cubicBezTo>
+                  <a:pt x="756786" y="2009870"/>
+                  <a:pt x="474799" y="927359"/>
+                  <a:pt x="22579" y="42066"/>
+                </a:cubicBezTo>
+                <a:close/>
+              </a:path>
+            </a:pathLst>
+          </a:custGeom>
+          <a:noFill/>
+          <a:extLst>
+            <a:ext uri="{909E8E84-426E-40DD-AFC4-6F175D3DCCD1}">
+              <a14:hiddenFill xmlns:a14="http://schemas.microsoft.com/office/drawing/2010/main">
+                <a:solidFill>
+                  <a:srgbClr val="FFFFFF"/>
+                </a:solidFill>
+              </a14:hiddenFill>
+            </a:ext>
+          </a:extLst>
+        </p:spPr>
+      </p:pic>
+      <p:pic>
+        <p:nvPicPr>
+          <p:cNvPr id="1030" name="Picture 6" descr="Adverse Weather Object Detection Object Detection Dataset by Adverse Weather">
+            <a:extLst>
+              <a:ext uri="{FF2B5EF4-FFF2-40B4-BE49-F238E27FC236}">
+                <a16:creationId xmlns:a16="http://schemas.microsoft.com/office/drawing/2014/main" id="{8FF3D46B-8E6C-BE3D-3EBF-71ED469DD175}"/>
+              </a:ext>
+            </a:extLst>
+          </p:cNvPr>
+          <p:cNvPicPr>
+            <a:picLocks noChangeAspect="1" noChangeArrowheads="1"/>
+          </p:cNvPicPr>
+          <p:nvPr/>
+        </p:nvPicPr>
+        <p:blipFill>
+          <a:blip r:embed="rId4">
+            <a:extLst>
+              <a:ext uri="{28A0092B-C50C-407E-A947-70E740481C1C}">
+                <a14:useLocalDpi xmlns:a14="http://schemas.microsoft.com/office/drawing/2010/main" val="0"/>
+              </a:ext>
+            </a:extLst>
+          </a:blip>
+          <a:srcRect r="5896" b="1"/>
+          <a:stretch>
+            <a:fillRect/>
+          </a:stretch>
+        </p:blipFill>
+        <p:spPr bwMode="auto">
+          <a:xfrm>
+            <a:off x="7381690" y="3456433"/>
+            <a:ext cx="4810310" cy="3401568"/>
+          </a:xfrm>
+          <a:custGeom>
+            <a:avLst/>
+            <a:gdLst/>
+            <a:ahLst/>
+            <a:cxnLst/>
+            <a:rect l="l" t="t" r="r" b="b"/>
+            <a:pathLst>
+              <a:path w="4810310" h="3401568">
+                <a:moveTo>
+                  <a:pt x="781270" y="0"/>
+                </a:moveTo>
+                <a:lnTo>
+                  <a:pt x="4810310" y="0"/>
+                </a:lnTo>
+                <a:lnTo>
+                  <a:pt x="4810310" y="3401568"/>
+                </a:lnTo>
+                <a:lnTo>
+                  <a:pt x="0" y="3401568"/>
+                </a:lnTo>
+                <a:lnTo>
+                  <a:pt x="1963" y="3397912"/>
+                </a:lnTo>
+                <a:cubicBezTo>
+                  <a:pt x="454182" y="2512619"/>
+                  <a:pt x="736170" y="1430108"/>
+                  <a:pt x="776876" y="254399"/>
+                </a:cubicBezTo>
+                <a:close/>
+              </a:path>
+            </a:pathLst>
+          </a:custGeom>
+          <a:noFill/>
+          <a:extLst>
+            <a:ext uri="{909E8E84-426E-40DD-AFC4-6F175D3DCCD1}">
+              <a14:hiddenFill xmlns:a14="http://schemas.microsoft.com/office/drawing/2010/main">
+                <a:solidFill>
+                  <a:srgbClr val="FFFFFF"/>
+                </a:solidFill>
+              </a14:hiddenFill>
+            </a:ext>
+          </a:extLst>
+        </p:spPr>
+      </p:pic>
+      <p:pic>
+        <p:nvPicPr>
+          <p:cNvPr id="1034" name="Picture 10" descr="Adverse Weather Object Detection Object Detection Dataset by Adverse Weather">
+            <a:extLst>
+              <a:ext uri="{FF2B5EF4-FFF2-40B4-BE49-F238E27FC236}">
+                <a16:creationId xmlns:a16="http://schemas.microsoft.com/office/drawing/2014/main" id="{7D5A297C-E45D-AA2D-9218-84DD680FD96D}"/>
+              </a:ext>
+            </a:extLst>
+          </p:cNvPr>
+          <p:cNvPicPr>
+            <a:picLocks noChangeAspect="1" noChangeArrowheads="1"/>
+          </p:cNvPicPr>
+          <p:nvPr/>
+        </p:nvPicPr>
+        <p:blipFill>
+          <a:blip r:embed="rId5">
+            <a:extLst>
+              <a:ext uri="{28A0092B-C50C-407E-A947-70E740481C1C}">
+                <a14:useLocalDpi xmlns:a14="http://schemas.microsoft.com/office/drawing/2010/main" val="0"/>
+              </a:ext>
+            </a:extLst>
+          </a:blip>
+          <a:srcRect r="8087" b="-1"/>
+          <a:stretch>
+            <a:fillRect/>
+          </a:stretch>
+        </p:blipFill>
+        <p:spPr bwMode="auto">
+          <a:xfrm>
+            <a:off x="3189428" y="3456432"/>
+            <a:ext cx="4925479" cy="3401568"/>
+          </a:xfrm>
+          <a:custGeom>
+            <a:avLst/>
+            <a:gdLst/>
+            <a:ahLst/>
+            <a:cxnLst/>
+            <a:rect l="l" t="t" r="r" b="b"/>
+            <a:pathLst>
+              <a:path w="4925479" h="3364992">
+                <a:moveTo>
+                  <a:pt x="749362" y="0"/>
+                </a:moveTo>
+                <a:lnTo>
+                  <a:pt x="4925479" y="0"/>
+                </a:lnTo>
+                <a:lnTo>
+                  <a:pt x="4921868" y="209033"/>
+                </a:lnTo>
+                <a:cubicBezTo>
+                  <a:pt x="4884554" y="1286766"/>
+                  <a:pt x="4644496" y="2286187"/>
+                  <a:pt x="4256422" y="3127175"/>
+                </a:cubicBezTo>
+                <a:lnTo>
+                  <a:pt x="4134952" y="3364992"/>
+                </a:lnTo>
+                <a:lnTo>
+                  <a:pt x="0" y="3364992"/>
+                </a:lnTo>
+                <a:lnTo>
+                  <a:pt x="79008" y="3202330"/>
+                </a:lnTo>
+                <a:cubicBezTo>
+                  <a:pt x="467082" y="2361343"/>
+                  <a:pt x="707140" y="1361922"/>
+                  <a:pt x="744454" y="284189"/>
+                </a:cubicBezTo>
+                <a:close/>
+              </a:path>
+            </a:pathLst>
+          </a:custGeom>
+          <a:noFill/>
+          <a:extLst>
+            <a:ext uri="{909E8E84-426E-40DD-AFC4-6F175D3DCCD1}">
+              <a14:hiddenFill xmlns:a14="http://schemas.microsoft.com/office/drawing/2010/main">
+                <a:solidFill>
+                  <a:srgbClr val="FFFFFF"/>
+                </a:solidFill>
+              </a14:hiddenFill>
+            </a:ext>
+          </a:extLst>
+        </p:spPr>
+      </p:pic>
+      <p:sp useBgFill="1">
+        <p:nvSpPr>
+          <p:cNvPr id="1051" name="Freeform: Shape 1042">
+            <a:extLst>
+              <a:ext uri="{FF2B5EF4-FFF2-40B4-BE49-F238E27FC236}">
+                <a16:creationId xmlns:a16="http://schemas.microsoft.com/office/drawing/2014/main" id="{AC0D06B0-F19C-459E-B221-A34B506FB5E3}"/>
+              </a:ext>
+              <a:ext uri="{C183D7F6-B498-43B3-948B-1728B52AA6E4}">
+                <adec:decorative xmlns:adec="http://schemas.microsoft.com/office/drawing/2017/decorative" val="1"/>
+              </a:ext>
+            </a:extLst>
+          </p:cNvPr>
+          <p:cNvSpPr>
+            <a:spLocks noGrp="1" noRot="1" noChangeAspect="1" noMove="1" noResize="1" noEditPoints="1" noAdjustHandles="1" noChangeArrowheads="1" noChangeShapeType="1" noTextEdit="1"/>
+          </p:cNvSpPr>
+          <p:nvPr>
+            <p:extLst>
+              <p:ext uri="{386F3935-93C4-4BCD-93E2-E3B085C9AB24}">
+                <p16:designElem xmlns:p16="http://schemas.microsoft.com/office/powerpoint/2015/main" val="1"/>
+              </p:ext>
+            </p:extLst>
+          </p:nvPr>
+        </p:nvSpPr>
+        <p:spPr>
+          <a:xfrm>
+            <a:off x="0" y="0"/>
+            <a:ext cx="3945815" cy="6858000"/>
+          </a:xfrm>
+          <a:custGeom>
+            <a:avLst/>
+            <a:gdLst>
+              <a:gd name="connsiteX0" fmla="*/ 0 w 3945815"/>
+              <a:gd name="connsiteY0" fmla="*/ 0 h 6858000"/>
+              <a:gd name="connsiteX1" fmla="*/ 3138662 w 3945815"/>
+              <a:gd name="connsiteY1" fmla="*/ 0 h 6858000"/>
+              <a:gd name="connsiteX2" fmla="*/ 3275260 w 3945815"/>
+              <a:gd name="connsiteY2" fmla="*/ 267438 h 6858000"/>
+              <a:gd name="connsiteX3" fmla="*/ 3945815 w 3945815"/>
+              <a:gd name="connsiteY3" fmla="*/ 3481388 h 6858000"/>
+              <a:gd name="connsiteX4" fmla="*/ 3275260 w 3945815"/>
+              <a:gd name="connsiteY4" fmla="*/ 6695338 h 6858000"/>
+              <a:gd name="connsiteX5" fmla="*/ 3192177 w 3945815"/>
+              <a:gd name="connsiteY5" fmla="*/ 6858000 h 6858000"/>
+              <a:gd name="connsiteX6" fmla="*/ 0 w 3945815"/>
+              <a:gd name="connsiteY6" fmla="*/ 6858000 h 6858000"/>
+            </a:gdLst>
+            <a:ahLst/>
+            <a:cxnLst>
+              <a:cxn ang="0">
+                <a:pos x="connsiteX0" y="connsiteY0"/>
+              </a:cxn>
+              <a:cxn ang="0">
+                <a:pos x="connsiteX1" y="connsiteY1"/>
+              </a:cxn>
+              <a:cxn ang="0">
+                <a:pos x="connsiteX2" y="connsiteY2"/>
+              </a:cxn>
+              <a:cxn ang="0">
+                <a:pos x="connsiteX3" y="connsiteY3"/>
+              </a:cxn>
+              <a:cxn ang="0">
+                <a:pos x="connsiteX4" y="connsiteY4"/>
+              </a:cxn>
+              <a:cxn ang="0">
+                <a:pos x="connsiteX5" y="connsiteY5"/>
+              </a:cxn>
+              <a:cxn ang="0">
+                <a:pos x="connsiteX6" y="connsiteY6"/>
+              </a:cxn>
+            </a:cxnLst>
+            <a:rect l="l" t="t" r="r" b="b"/>
+            <a:pathLst>
+              <a:path w="3945815" h="6858000">
+                <a:moveTo>
+                  <a:pt x="0" y="0"/>
+                </a:moveTo>
+                <a:lnTo>
+                  <a:pt x="3138662" y="0"/>
+                </a:lnTo>
+                <a:lnTo>
+                  <a:pt x="3275260" y="267438"/>
+                </a:lnTo>
+                <a:cubicBezTo>
+                  <a:pt x="3698614" y="1184879"/>
+                  <a:pt x="3945815" y="2290869"/>
+                  <a:pt x="3945815" y="3481388"/>
+                </a:cubicBezTo>
+                <a:cubicBezTo>
+                  <a:pt x="3945815" y="4671908"/>
+                  <a:pt x="3698614" y="5777898"/>
+                  <a:pt x="3275260" y="6695338"/>
+                </a:cubicBezTo>
+                <a:lnTo>
+                  <a:pt x="3192177" y="6858000"/>
+                </a:lnTo>
+                <a:lnTo>
+                  <a:pt x="0" y="6858000"/>
+                </a:lnTo>
+                <a:close/>
+              </a:path>
+            </a:pathLst>
+          </a:custGeom>
+          <a:ln w="9525">
+            <a:solidFill>
+              <a:srgbClr val="EFEFEF"/>
+            </a:solidFill>
+          </a:ln>
+          <a:effectLst>
+            <a:outerShdw blurRad="50800" dist="38100" algn="l" rotWithShape="0">
+              <a:schemeClr val="bg1">
+                <a:lumMod val="85000"/>
+                <a:alpha val="30000"/>
+              </a:schemeClr>
+            </a:outerShdw>
+          </a:effectLst>
+        </p:spPr>
+        <p:style>
+          <a:lnRef idx="2">
+            <a:schemeClr val="accent1">
+              <a:shade val="50000"/>
+            </a:schemeClr>
+          </a:lnRef>
+          <a:fillRef idx="1">
+            <a:schemeClr val="accent1"/>
+          </a:fillRef>
+          <a:effectRef idx="0">
+            <a:schemeClr val="accent1"/>
+          </a:effectRef>
+          <a:fontRef idx="minor">
+            <a:schemeClr val="lt1"/>
+          </a:fontRef>
+        </p:style>
+        <p:txBody>
+          <a:bodyPr wrap="square" rtlCol="0" anchor="ctr">
+            <a:noAutofit/>
+          </a:bodyPr>
+          <a:lstStyle/>
+          <a:p>
+            <a:pPr marL="0" marR="0" lvl="0" indent="0" algn="ctr" defTabSz="914400" rtl="0" eaLnBrk="1" fontAlgn="auto" latinLnBrk="0" hangingPunct="1">
+              <a:lnSpc>
+                <a:spcPct val="100000"/>
+              </a:lnSpc>
+              <a:spcBef>
+                <a:spcPts val="0"/>
+              </a:spcBef>
+              <a:spcAft>
+                <a:spcPts val="0"/>
+              </a:spcAft>
+              <a:buClrTx/>
+              <a:buSzTx/>
+              <a:buFontTx/>
+              <a:buNone/>
+              <a:tabLst/>
+              <a:defRPr/>
+            </a:pPr>
+            <a:endParaRPr kumimoji="0" lang="en-US" sz="1800" b="0" i="0" u="none" strike="noStrike" kern="1200" cap="none" spc="0" normalizeH="0" baseline="0" noProof="0">
+              <a:ln>
+                <a:noFill/>
+              </a:ln>
+              <a:solidFill>
+                <a:prstClr val="white"/>
+              </a:solidFill>
+              <a:effectLst/>
+              <a:uLnTx/>
+              <a:uFillTx/>
+              <a:latin typeface="Calibri" panose="020F0502020204030204"/>
+              <a:ea typeface="+mn-ea"/>
+              <a:cs typeface="+mn-cs"/>
+            </a:endParaRPr>
+          </a:p>
+        </p:txBody>
+      </p:sp>
+      <p:sp useBgFill="1">
+        <p:nvSpPr>
+          <p:cNvPr id="1052" name="Freeform: Shape 1044">
+            <a:extLst>
+              <a:ext uri="{FF2B5EF4-FFF2-40B4-BE49-F238E27FC236}">
+                <a16:creationId xmlns:a16="http://schemas.microsoft.com/office/drawing/2014/main" id="{345B26DA-1C6B-4C66-81C9-9C1877FC2DB1}"/>
+              </a:ext>
+              <a:ext uri="{C183D7F6-B498-43B3-948B-1728B52AA6E4}">
+                <adec:decorative xmlns:adec="http://schemas.microsoft.com/office/drawing/2017/decorative" val="1"/>
+              </a:ext>
+            </a:extLst>
+          </p:cNvPr>
+          <p:cNvSpPr>
+            <a:spLocks noGrp="1" noRot="1" noChangeAspect="1" noMove="1" noResize="1" noEditPoints="1" noAdjustHandles="1" noChangeArrowheads="1" noChangeShapeType="1" noTextEdit="1"/>
+          </p:cNvSpPr>
+          <p:nvPr>
+            <p:extLst>
+              <p:ext uri="{386F3935-93C4-4BCD-93E2-E3B085C9AB24}">
+                <p16:designElem xmlns:p16="http://schemas.microsoft.com/office/powerpoint/2015/main" val="1"/>
+              </p:ext>
+            </p:extLst>
+          </p:nvPr>
+        </p:nvSpPr>
+        <p:spPr>
+          <a:xfrm>
+            <a:off x="0" y="0"/>
+            <a:ext cx="3936670" cy="6858000"/>
+          </a:xfrm>
+          <a:custGeom>
+            <a:avLst/>
+            <a:gdLst>
+              <a:gd name="connsiteX0" fmla="*/ 0 w 3936670"/>
+              <a:gd name="connsiteY0" fmla="*/ 0 h 6858000"/>
+              <a:gd name="connsiteX1" fmla="*/ 3129517 w 3936670"/>
+              <a:gd name="connsiteY1" fmla="*/ 0 h 6858000"/>
+              <a:gd name="connsiteX2" fmla="*/ 3266115 w 3936670"/>
+              <a:gd name="connsiteY2" fmla="*/ 267438 h 6858000"/>
+              <a:gd name="connsiteX3" fmla="*/ 3936670 w 3936670"/>
+              <a:gd name="connsiteY3" fmla="*/ 3481388 h 6858000"/>
+              <a:gd name="connsiteX4" fmla="*/ 3266115 w 3936670"/>
+              <a:gd name="connsiteY4" fmla="*/ 6695338 h 6858000"/>
+              <a:gd name="connsiteX5" fmla="*/ 3183032 w 3936670"/>
+              <a:gd name="connsiteY5" fmla="*/ 6858000 h 6858000"/>
+              <a:gd name="connsiteX6" fmla="*/ 0 w 3936670"/>
+              <a:gd name="connsiteY6" fmla="*/ 6858000 h 6858000"/>
+            </a:gdLst>
+            <a:ahLst/>
+            <a:cxnLst>
+              <a:cxn ang="0">
+                <a:pos x="connsiteX0" y="connsiteY0"/>
+              </a:cxn>
+              <a:cxn ang="0">
+                <a:pos x="connsiteX1" y="connsiteY1"/>
+              </a:cxn>
+              <a:cxn ang="0">
+                <a:pos x="connsiteX2" y="connsiteY2"/>
+              </a:cxn>
+              <a:cxn ang="0">
+                <a:pos x="connsiteX3" y="connsiteY3"/>
+              </a:cxn>
+              <a:cxn ang="0">
+                <a:pos x="connsiteX4" y="connsiteY4"/>
+              </a:cxn>
+              <a:cxn ang="0">
+                <a:pos x="connsiteX5" y="connsiteY5"/>
+              </a:cxn>
+              <a:cxn ang="0">
+                <a:pos x="connsiteX6" y="connsiteY6"/>
+              </a:cxn>
+            </a:cxnLst>
+            <a:rect l="l" t="t" r="r" b="b"/>
+            <a:pathLst>
+              <a:path w="3936670" h="6858000">
+                <a:moveTo>
+                  <a:pt x="0" y="0"/>
+                </a:moveTo>
+                <a:lnTo>
+                  <a:pt x="3129517" y="0"/>
+                </a:lnTo>
+                <a:lnTo>
+                  <a:pt x="3266115" y="267438"/>
+                </a:lnTo>
+                <a:cubicBezTo>
+                  <a:pt x="3689469" y="1184879"/>
+                  <a:pt x="3936670" y="2290869"/>
+                  <a:pt x="3936670" y="3481388"/>
+                </a:cubicBezTo>
+                <a:cubicBezTo>
+                  <a:pt x="3936670" y="4671908"/>
+                  <a:pt x="3689469" y="5777898"/>
+                  <a:pt x="3266115" y="6695338"/>
+                </a:cubicBezTo>
+                <a:lnTo>
+                  <a:pt x="3183032" y="6858000"/>
+                </a:lnTo>
+                <a:lnTo>
+                  <a:pt x="0" y="6858000"/>
+                </a:lnTo>
+                <a:close/>
+              </a:path>
+            </a:pathLst>
+          </a:custGeom>
+          <a:ln w="9525">
+            <a:noFill/>
+          </a:ln>
+          <a:effectLst/>
+        </p:spPr>
+        <p:style>
+          <a:lnRef idx="2">
+            <a:schemeClr val="accent1">
+              <a:shade val="50000"/>
+            </a:schemeClr>
+          </a:lnRef>
+          <a:fillRef idx="1">
+            <a:schemeClr val="accent1"/>
+          </a:fillRef>
+          <a:effectRef idx="0">
+            <a:schemeClr val="accent1"/>
+          </a:effectRef>
+          <a:fontRef idx="minor">
+            <a:schemeClr val="lt1"/>
+          </a:fontRef>
+        </p:style>
+        <p:txBody>
+          <a:bodyPr wrap="square" rtlCol="0" anchor="ctr">
+            <a:noAutofit/>
+          </a:bodyPr>
+          <a:lstStyle/>
+          <a:p>
+            <a:pPr marL="0" marR="0" lvl="0" indent="0" algn="ctr" defTabSz="914400" rtl="0" eaLnBrk="1" fontAlgn="auto" latinLnBrk="0" hangingPunct="1">
+              <a:lnSpc>
+                <a:spcPct val="100000"/>
+              </a:lnSpc>
+              <a:spcBef>
+                <a:spcPts val="0"/>
+              </a:spcBef>
+              <a:spcAft>
+                <a:spcPts val="0"/>
+              </a:spcAft>
+              <a:buClrTx/>
+              <a:buSzTx/>
+              <a:buFontTx/>
+              <a:buNone/>
+              <a:tabLst/>
+              <a:defRPr/>
+            </a:pPr>
+            <a:endParaRPr kumimoji="0" lang="en-US" sz="1800" b="0" i="0" u="none" strike="noStrike" kern="1200" cap="none" spc="0" normalizeH="0" baseline="0" noProof="0">
+              <a:ln>
+                <a:noFill/>
+              </a:ln>
+              <a:solidFill>
+                <a:prstClr val="white"/>
+              </a:solidFill>
+              <a:effectLst/>
+              <a:uLnTx/>
+              <a:uFillTx/>
+              <a:latin typeface="Calibri" panose="020F0502020204030204"/>
+              <a:ea typeface="+mn-ea"/>
+              <a:cs typeface="+mn-cs"/>
+            </a:endParaRPr>
+          </a:p>
+        </p:txBody>
+      </p:sp>
+      <p:sp>
+        <p:nvSpPr>
+          <p:cNvPr id="2" name="Titel 1">
+            <a:extLst>
+              <a:ext uri="{FF2B5EF4-FFF2-40B4-BE49-F238E27FC236}">
+                <a16:creationId xmlns:a16="http://schemas.microsoft.com/office/drawing/2014/main" id="{158B3E49-90BC-EA39-9D92-9AF89272950F}"/>
+              </a:ext>
+            </a:extLst>
+          </p:cNvPr>
+          <p:cNvSpPr>
+            <a:spLocks noGrp="1"/>
+          </p:cNvSpPr>
+          <p:nvPr>
+            <p:ph type="title"/>
+          </p:nvPr>
+        </p:nvSpPr>
+        <p:spPr>
+          <a:xfrm>
+            <a:off x="329181" y="670009"/>
+            <a:ext cx="2807208" cy="1325563"/>
+          </a:xfrm>
+        </p:spPr>
+        <p:txBody>
+          <a:bodyPr>
+            <a:normAutofit/>
+          </a:bodyPr>
+          <a:lstStyle/>
+          <a:p>
+            <a:r>
+              <a:rPr lang="en-GB" b="1" dirty="0"/>
+              <a:t>Motivation</a:t>
+            </a:r>
+          </a:p>
+        </p:txBody>
+      </p:sp>
+      <p:sp>
+        <p:nvSpPr>
+          <p:cNvPr id="1053" name="Rectangle 1046">
+            <a:extLst>
+              <a:ext uri="{FF2B5EF4-FFF2-40B4-BE49-F238E27FC236}">
+                <a16:creationId xmlns:a16="http://schemas.microsoft.com/office/drawing/2014/main" id="{98DE6C44-43F8-4DE4-AB81-66853FFEA09A}"/>
+              </a:ext>
+              <a:ext uri="{C183D7F6-B498-43B3-948B-1728B52AA6E4}">
+                <adec:decorative xmlns:adec="http://schemas.microsoft.com/office/drawing/2017/decorative" val="1"/>
+              </a:ext>
+            </a:extLst>
+          </p:cNvPr>
+          <p:cNvSpPr>
+            <a:spLocks noGrp="1" noRot="1" noChangeAspect="1" noMove="1" noResize="1" noEditPoints="1" noAdjustHandles="1" noChangeArrowheads="1" noChangeShapeType="1" noTextEdit="1"/>
+          </p:cNvSpPr>
+          <p:nvPr>
+            <p:extLst>
+              <p:ext uri="{386F3935-93C4-4BCD-93E2-E3B085C9AB24}">
+                <p16:designElem xmlns:p16="http://schemas.microsoft.com/office/powerpoint/2015/main" val="1"/>
+              </p:ext>
+            </p:extLst>
+          </p:nvPr>
+        </p:nvSpPr>
+        <p:spPr>
+          <a:xfrm>
+            <a:off x="0" y="1005840"/>
+            <a:ext cx="128016" cy="653903"/>
+          </a:xfrm>
+          <a:prstGeom prst="rect">
+            <a:avLst/>
+          </a:prstGeom>
+          <a:solidFill>
+            <a:schemeClr val="accent2"/>
+          </a:solidFill>
+          <a:ln>
+            <a:noFill/>
+          </a:ln>
+        </p:spPr>
+        <p:style>
+          <a:lnRef idx="2">
+            <a:schemeClr val="accent1">
+              <a:shade val="50000"/>
+            </a:schemeClr>
+          </a:lnRef>
+          <a:fillRef idx="1">
+            <a:schemeClr val="accent1"/>
+          </a:fillRef>
+          <a:effectRef idx="0">
+            <a:schemeClr val="accent1"/>
+          </a:effectRef>
+          <a:fontRef idx="minor">
+            <a:schemeClr val="lt1"/>
+          </a:fontRef>
+        </p:style>
+        <p:txBody>
+          <a:bodyPr rtlCol="0" anchor="ctr"/>
+          <a:lstStyle/>
+          <a:p>
+            <a:pPr marL="0" marR="0" lvl="0" indent="0" algn="ctr" defTabSz="914400" rtl="0" eaLnBrk="1" fontAlgn="auto" latinLnBrk="0" hangingPunct="1">
+              <a:lnSpc>
+                <a:spcPct val="100000"/>
+              </a:lnSpc>
+              <a:spcBef>
+                <a:spcPts val="0"/>
+              </a:spcBef>
+              <a:spcAft>
+                <a:spcPts val="0"/>
+              </a:spcAft>
+              <a:buClrTx/>
+              <a:buSzTx/>
+              <a:buFontTx/>
+              <a:buNone/>
+              <a:tabLst/>
+              <a:defRPr/>
+            </a:pPr>
+            <a:endParaRPr kumimoji="0" lang="en-US" sz="1800" b="0" i="0" u="none" strike="noStrike" kern="1200" cap="none" spc="0" normalizeH="0" baseline="0" noProof="0">
+              <a:ln>
+                <a:noFill/>
+              </a:ln>
+              <a:solidFill>
+                <a:prstClr val="white"/>
+              </a:solidFill>
+              <a:effectLst/>
+              <a:uLnTx/>
+              <a:uFillTx/>
+              <a:latin typeface="Calibri" panose="020F0502020204030204"/>
+              <a:ea typeface="+mn-ea"/>
+              <a:cs typeface="+mn-cs"/>
+            </a:endParaRPr>
+          </a:p>
+        </p:txBody>
+      </p:sp>
+      <p:sp>
+        <p:nvSpPr>
+          <p:cNvPr id="1054" name="Rectangle 1048">
+            <a:extLst>
+              <a:ext uri="{FF2B5EF4-FFF2-40B4-BE49-F238E27FC236}">
+                <a16:creationId xmlns:a16="http://schemas.microsoft.com/office/drawing/2014/main" id="{2409529B-9B56-4F10-BE4D-F934DB89E57E}"/>
+              </a:ext>
+              <a:ext uri="{C183D7F6-B498-43B3-948B-1728B52AA6E4}">
+                <adec:decorative xmlns:adec="http://schemas.microsoft.com/office/drawing/2017/decorative" val="1"/>
+              </a:ext>
+            </a:extLst>
+          </p:cNvPr>
+          <p:cNvSpPr>
+            <a:spLocks noGrp="1" noRot="1" noChangeAspect="1" noMove="1" noResize="1" noEditPoints="1" noAdjustHandles="1" noChangeArrowheads="1" noChangeShapeType="1" noTextEdit="1"/>
+          </p:cNvSpPr>
+          <p:nvPr>
+            <p:extLst>
+              <p:ext uri="{386F3935-93C4-4BCD-93E2-E3B085C9AB24}">
+                <p16:designElem xmlns:p16="http://schemas.microsoft.com/office/powerpoint/2015/main" val="1"/>
+              </p:ext>
+            </p:extLst>
+          </p:nvPr>
+        </p:nvSpPr>
+        <p:spPr>
+          <a:xfrm>
+            <a:off x="438912" y="2089941"/>
+            <a:ext cx="2834640" cy="18288"/>
+          </a:xfrm>
+          <a:prstGeom prst="rect">
+            <a:avLst/>
+          </a:prstGeom>
+          <a:solidFill>
+            <a:srgbClr val="D5D5D5"/>
+          </a:solidFill>
+          <a:ln w="3175">
+            <a:noFill/>
+          </a:ln>
+          <a:effectLst/>
+        </p:spPr>
+        <p:style>
+          <a:lnRef idx="2">
+            <a:schemeClr val="accent1">
+              <a:shade val="50000"/>
+            </a:schemeClr>
+          </a:lnRef>
+          <a:fillRef idx="1">
+            <a:schemeClr val="accent1"/>
+          </a:fillRef>
+          <a:effectRef idx="0">
+            <a:schemeClr val="accent1"/>
+          </a:effectRef>
+          <a:fontRef idx="minor">
+            <a:schemeClr val="lt1"/>
+          </a:fontRef>
+        </p:style>
+        <p:txBody>
+          <a:bodyPr rtlCol="0" anchor="ctr"/>
+          <a:lstStyle/>
+          <a:p>
+            <a:pPr marL="0" marR="0" lvl="0" indent="0" algn="ctr" defTabSz="914400" rtl="0" eaLnBrk="1" fontAlgn="auto" latinLnBrk="0" hangingPunct="1">
+              <a:lnSpc>
+                <a:spcPct val="100000"/>
+              </a:lnSpc>
+              <a:spcBef>
+                <a:spcPts val="0"/>
+              </a:spcBef>
+              <a:spcAft>
+                <a:spcPts val="0"/>
+              </a:spcAft>
+              <a:buClrTx/>
+              <a:buSzTx/>
+              <a:buFontTx/>
+              <a:buNone/>
+              <a:tabLst/>
+              <a:defRPr/>
+            </a:pPr>
+            <a:endParaRPr kumimoji="0" lang="en-US" sz="1800" b="0" i="0" u="none" strike="noStrike" kern="1200" cap="none" spc="0" normalizeH="0" baseline="0" noProof="0">
+              <a:ln>
+                <a:noFill/>
+              </a:ln>
+              <a:solidFill>
+                <a:prstClr val="white"/>
+              </a:solidFill>
+              <a:effectLst/>
+              <a:uLnTx/>
+              <a:uFillTx/>
+              <a:latin typeface="Calibri" panose="020F0502020204030204"/>
+              <a:ea typeface="+mn-ea"/>
+              <a:cs typeface="+mn-cs"/>
+            </a:endParaRPr>
+          </a:p>
+        </p:txBody>
+      </p:sp>
+      <p:sp>
+        <p:nvSpPr>
+          <p:cNvPr id="3" name="Inhaltsplatzhalter 2">
+            <a:extLst>
+              <a:ext uri="{FF2B5EF4-FFF2-40B4-BE49-F238E27FC236}">
+                <a16:creationId xmlns:a16="http://schemas.microsoft.com/office/drawing/2014/main" id="{4F4C7BC9-A00B-EE9F-75DB-6810A3371F9A}"/>
+              </a:ext>
+            </a:extLst>
+          </p:cNvPr>
+          <p:cNvSpPr>
+            <a:spLocks noGrp="1"/>
+          </p:cNvSpPr>
+          <p:nvPr>
+            <p:ph idx="1"/>
+          </p:nvPr>
+        </p:nvSpPr>
+        <p:spPr>
+          <a:xfrm>
+            <a:off x="288451" y="2521726"/>
+            <a:ext cx="3126418" cy="3922776"/>
+          </a:xfrm>
+        </p:spPr>
+        <p:txBody>
+          <a:bodyPr>
+            <a:normAutofit/>
+          </a:bodyPr>
+          <a:lstStyle/>
+          <a:p>
+            <a:pPr>
+              <a:spcAft>
+                <a:spcPts val="1200"/>
+              </a:spcAft>
+            </a:pPr>
+            <a:r>
+              <a:rPr lang="de-DE" sz="1700" b="1" dirty="0" err="1"/>
+              <a:t>Autonomous</a:t>
+            </a:r>
+            <a:r>
+              <a:rPr lang="de-DE" sz="1700" b="1" dirty="0"/>
+              <a:t> </a:t>
+            </a:r>
+            <a:r>
+              <a:rPr lang="de-DE" sz="1700" b="1" dirty="0" err="1"/>
+              <a:t>driving</a:t>
+            </a:r>
+            <a:r>
+              <a:rPr lang="de-DE" sz="1700" dirty="0"/>
+              <a:t> </a:t>
+            </a:r>
+            <a:r>
+              <a:rPr lang="de-DE" sz="1700" dirty="0" err="1"/>
+              <a:t>requires</a:t>
+            </a:r>
+            <a:r>
+              <a:rPr lang="de-DE" sz="1700" dirty="0"/>
+              <a:t> </a:t>
+            </a:r>
+            <a:r>
+              <a:rPr lang="de-DE" sz="1700" b="1" dirty="0"/>
+              <a:t>reliable </a:t>
+            </a:r>
+            <a:r>
+              <a:rPr lang="de-DE" sz="1700" b="1" dirty="0" err="1"/>
+              <a:t>object</a:t>
+            </a:r>
+            <a:r>
+              <a:rPr lang="de-DE" sz="1700" b="1" dirty="0"/>
+              <a:t> </a:t>
+            </a:r>
+            <a:r>
+              <a:rPr lang="de-DE" sz="1700" b="1" dirty="0" err="1"/>
+              <a:t>detection</a:t>
+            </a:r>
+            <a:endParaRPr lang="de-DE" sz="1700" b="1" dirty="0"/>
+          </a:p>
+          <a:p>
+            <a:pPr>
+              <a:spcAft>
+                <a:spcPts val="1200"/>
+              </a:spcAft>
+            </a:pPr>
+            <a:r>
+              <a:rPr lang="de-DE" sz="1700" dirty="0"/>
+              <a:t>Fog, rain, and </a:t>
+            </a:r>
+            <a:r>
+              <a:rPr lang="de-DE" sz="1700" dirty="0" err="1"/>
+              <a:t>snow</a:t>
+            </a:r>
+            <a:r>
+              <a:rPr lang="de-DE" sz="1700" dirty="0"/>
+              <a:t> </a:t>
+            </a:r>
+            <a:r>
+              <a:rPr lang="de-DE" sz="1700" dirty="0" err="1"/>
+              <a:t>cause</a:t>
+            </a:r>
+            <a:br>
+              <a:rPr lang="de-DE" sz="1700" dirty="0"/>
+            </a:br>
+            <a:r>
+              <a:rPr lang="de-DE" sz="1700" dirty="0" err="1"/>
+              <a:t>scattering</a:t>
+            </a:r>
+            <a:r>
+              <a:rPr lang="de-DE" sz="1700" dirty="0"/>
+              <a:t>, glare &amp; </a:t>
+            </a:r>
+            <a:r>
+              <a:rPr lang="de-DE" sz="1700" dirty="0" err="1"/>
+              <a:t>attenuation</a:t>
+            </a:r>
+            <a:r>
+              <a:rPr lang="de-DE" sz="1700" dirty="0"/>
+              <a:t> </a:t>
+            </a:r>
+            <a:br>
+              <a:rPr lang="de-DE" sz="1700" dirty="0"/>
+            </a:br>
+            <a:r>
+              <a:rPr lang="de-DE" sz="1700" dirty="0">
+                <a:sym typeface="Wingdings" pitchFamily="2" charset="2"/>
+              </a:rPr>
+              <a:t> </a:t>
+            </a:r>
+            <a:r>
+              <a:rPr lang="de-DE" sz="1700" b="1" dirty="0" err="1">
+                <a:sym typeface="Wingdings" pitchFamily="2" charset="2"/>
+              </a:rPr>
+              <a:t>reduced</a:t>
+            </a:r>
+            <a:r>
+              <a:rPr lang="de-DE" sz="1700" b="1" dirty="0">
+                <a:sym typeface="Wingdings" pitchFamily="2" charset="2"/>
+              </a:rPr>
+              <a:t> </a:t>
+            </a:r>
+            <a:r>
+              <a:rPr lang="de-DE" sz="1700" b="1" dirty="0" err="1">
+                <a:sym typeface="Wingdings" pitchFamily="2" charset="2"/>
+              </a:rPr>
+              <a:t>image</a:t>
+            </a:r>
+            <a:r>
+              <a:rPr lang="de-DE" sz="1700" b="1" dirty="0">
+                <a:sym typeface="Wingdings" pitchFamily="2" charset="2"/>
+              </a:rPr>
+              <a:t> </a:t>
+            </a:r>
+            <a:r>
+              <a:rPr lang="de-DE" sz="1700" b="1" dirty="0" err="1">
+                <a:sym typeface="Wingdings" pitchFamily="2" charset="2"/>
+              </a:rPr>
+              <a:t>quality</a:t>
+            </a:r>
+            <a:endParaRPr lang="de-DE" sz="1700" b="1" dirty="0"/>
+          </a:p>
+          <a:p>
+            <a:pPr>
+              <a:spcAft>
+                <a:spcPts val="1200"/>
+              </a:spcAft>
+            </a:pPr>
+            <a:r>
+              <a:rPr lang="de-DE" sz="1700" dirty="0"/>
+              <a:t>Even </a:t>
+            </a:r>
+            <a:r>
+              <a:rPr lang="de-DE" sz="1700" dirty="0" err="1"/>
+              <a:t>state</a:t>
+            </a:r>
+            <a:r>
+              <a:rPr lang="de-DE" sz="1700" dirty="0"/>
+              <a:t>-</a:t>
+            </a:r>
+            <a:r>
+              <a:rPr lang="de-DE" sz="1700" dirty="0" err="1"/>
+              <a:t>of</a:t>
+            </a:r>
+            <a:r>
+              <a:rPr lang="de-DE" sz="1700" dirty="0"/>
+              <a:t>-</a:t>
+            </a:r>
+            <a:r>
+              <a:rPr lang="de-DE" sz="1700" dirty="0" err="1"/>
+              <a:t>the</a:t>
+            </a:r>
+            <a:r>
+              <a:rPr lang="de-DE" sz="1700" dirty="0"/>
+              <a:t>-art </a:t>
+            </a:r>
+            <a:r>
+              <a:rPr lang="de-DE" sz="1700" dirty="0" err="1"/>
+              <a:t>deep</a:t>
+            </a:r>
+            <a:r>
+              <a:rPr lang="de-DE" sz="1700" dirty="0"/>
+              <a:t> </a:t>
+            </a:r>
+            <a:r>
+              <a:rPr lang="de-DE" sz="1700" dirty="0" err="1"/>
+              <a:t>detectors</a:t>
+            </a:r>
+            <a:r>
+              <a:rPr lang="de-DE" sz="1700" dirty="0"/>
+              <a:t> </a:t>
+            </a:r>
+            <a:r>
+              <a:rPr lang="de-DE" sz="1700" dirty="0" err="1"/>
+              <a:t>struggle</a:t>
+            </a:r>
+            <a:r>
+              <a:rPr lang="de-DE" sz="1700" dirty="0"/>
+              <a:t> </a:t>
+            </a:r>
+            <a:r>
+              <a:rPr lang="de-DE" sz="1700" dirty="0" err="1"/>
+              <a:t>under</a:t>
+            </a:r>
+            <a:r>
+              <a:rPr lang="de-DE" sz="1700" dirty="0"/>
+              <a:t> adverse </a:t>
+            </a:r>
+            <a:r>
+              <a:rPr lang="de-DE" sz="1700" dirty="0" err="1"/>
+              <a:t>conditions</a:t>
+            </a:r>
+            <a:endParaRPr lang="de-DE" sz="1700" dirty="0"/>
+          </a:p>
+        </p:txBody>
+      </p:sp>
+      <p:pic>
+        <p:nvPicPr>
+          <p:cNvPr id="1032" name="Picture 8" descr="Adverse Weather Object Detection Object Detection Dataset by Adverse Weather">
+            <a:extLst>
+              <a:ext uri="{FF2B5EF4-FFF2-40B4-BE49-F238E27FC236}">
+                <a16:creationId xmlns:a16="http://schemas.microsoft.com/office/drawing/2014/main" id="{30C011E6-B89D-68C6-CA9A-D90366423E11}"/>
+              </a:ext>
+            </a:extLst>
+          </p:cNvPr>
+          <p:cNvPicPr>
+            <a:picLocks noChangeAspect="1" noChangeArrowheads="1"/>
+          </p:cNvPicPr>
+          <p:nvPr/>
+        </p:nvPicPr>
+        <p:blipFill>
+          <a:blip r:embed="rId6">
+            <a:extLst>
+              <a:ext uri="{28A0092B-C50C-407E-A947-70E740481C1C}">
+                <a14:useLocalDpi xmlns:a14="http://schemas.microsoft.com/office/drawing/2010/main" val="0"/>
+              </a:ext>
+            </a:extLst>
+          </a:blip>
+          <a:srcRect t="219" b="4926"/>
+          <a:stretch>
+            <a:fillRect/>
+          </a:stretch>
+        </p:blipFill>
+        <p:spPr bwMode="auto">
+          <a:xfrm>
+            <a:off x="7404372" y="10"/>
+            <a:ext cx="4787628" cy="3401558"/>
+          </a:xfrm>
+          <a:custGeom>
+            <a:avLst/>
+            <a:gdLst/>
+            <a:ahLst/>
+            <a:cxnLst/>
+            <a:rect l="l" t="t" r="r" b="b"/>
+            <a:pathLst>
+              <a:path w="4787628" h="3401568">
+                <a:moveTo>
+                  <a:pt x="0" y="0"/>
+                </a:moveTo>
+                <a:lnTo>
+                  <a:pt x="4787628" y="0"/>
+                </a:lnTo>
+                <a:lnTo>
+                  <a:pt x="4787628" y="3401568"/>
+                </a:lnTo>
+                <a:lnTo>
+                  <a:pt x="762748" y="3401568"/>
+                </a:lnTo>
+                <a:lnTo>
+                  <a:pt x="751436" y="2963954"/>
+                </a:lnTo>
+                <a:cubicBezTo>
+                  <a:pt x="698408" y="1942163"/>
+                  <a:pt x="463174" y="995044"/>
+                  <a:pt x="93264" y="192283"/>
+                </a:cubicBezTo>
+                <a:close/>
+              </a:path>
+            </a:pathLst>
+          </a:custGeom>
+          <a:noFill/>
+          <a:extLst>
+            <a:ext uri="{909E8E84-426E-40DD-AFC4-6F175D3DCCD1}">
+              <a14:hiddenFill xmlns:a14="http://schemas.microsoft.com/office/drawing/2010/main">
+                <a:solidFill>
+                  <a:srgbClr val="FFFFFF"/>
+                </a:solidFill>
+              </a14:hiddenFill>
+            </a:ext>
+          </a:extLst>
+        </p:spPr>
+      </p:pic>
+    </p:spTree>
+    <p:extLst>
+      <p:ext uri="{BB962C8B-B14F-4D97-AF65-F5344CB8AC3E}">
+        <p14:creationId xmlns:p14="http://schemas.microsoft.com/office/powerpoint/2010/main" val="1408667817"/>
+      </p:ext>
+    </p:extLst>
+  </p:cSld>
+  <p:clrMapOvr>
+    <a:masterClrMapping/>
+  </p:clrMapOvr>
+</p:sld>
+</file>
+
+<file path=ppt/slides/slide4.xml><?xml version="1.0" encoding="utf-8"?>
+<p:sld xmlns:a="http://schemas.openxmlformats.org/drawingml/2006/main" xmlns:r="http://schemas.openxmlformats.org/officeDocument/2006/relationships" xmlns:p="http://schemas.openxmlformats.org/presentationml/2006/main" show="0">
+  <p:cSld>
+    <p:bg>
+      <p:bgPr>
+        <a:solidFill>
+          <a:schemeClr val="bg1"/>
+        </a:solidFill>
+        <a:effectLst/>
+      </p:bgPr>
+    </p:bg>
     <p:spTree>
       <p:nvGrpSpPr>
         <p:cNvPr id="1" name=""/>
@@ -12953,13 +16910,20 @@
             <p:ph type="title"/>
           </p:nvPr>
         </p:nvSpPr>
-        <p:spPr/>
+        <p:spPr>
+          <a:xfrm>
+            <a:off x="640080" y="415636"/>
+            <a:ext cx="4368602" cy="845179"/>
+          </a:xfrm>
+        </p:spPr>
         <p:txBody>
-          <a:bodyPr/>
+          <a:bodyPr anchor="b">
+            <a:normAutofit/>
+          </a:bodyPr>
           <a:lstStyle/>
           <a:p>
             <a:r>
-              <a:rPr lang="en-GB" dirty="0"/>
+              <a:rPr lang="en-GB" sz="5400" b="1" dirty="0"/>
               <a:t>Motivation</a:t>
             </a:r>
           </a:p>
@@ -12981,31 +16945,382 @@
             <p:ph idx="1"/>
           </p:nvPr>
         </p:nvSpPr>
-        <p:spPr/>
+        <p:spPr>
+          <a:xfrm>
+            <a:off x="268778" y="1260815"/>
+            <a:ext cx="5827222" cy="4673698"/>
+          </a:xfrm>
+        </p:spPr>
         <p:txBody>
-          <a:bodyPr/>
+          <a:bodyPr anchor="ctr">
+            <a:noAutofit/>
+          </a:bodyPr>
           <a:lstStyle/>
           <a:p>
-            <a:pPr marL="0" indent="0">
-              <a:buNone/>
+            <a:pPr>
+              <a:spcAft>
+                <a:spcPts val="1200"/>
+              </a:spcAft>
             </a:pPr>
             <a:r>
-              <a:rPr lang="en-GB" dirty="0"/>
-              <a:t>Autonomous vehicles</a:t>
-            </a:r>
+              <a:rPr lang="de-DE" sz="1800" b="1" dirty="0" err="1"/>
+              <a:t>Autonomous</a:t>
+            </a:r>
+            <a:r>
+              <a:rPr lang="de-DE" sz="1800" b="1" dirty="0"/>
+              <a:t> </a:t>
+            </a:r>
+            <a:r>
+              <a:rPr lang="de-DE" sz="1800" b="1" dirty="0" err="1"/>
+              <a:t>driving</a:t>
+            </a:r>
+            <a:r>
+              <a:rPr lang="de-DE" sz="1800" dirty="0"/>
+              <a:t> </a:t>
+            </a:r>
+            <a:r>
+              <a:rPr lang="de-DE" sz="1800" dirty="0" err="1"/>
+              <a:t>requires</a:t>
+            </a:r>
+            <a:r>
+              <a:rPr lang="de-DE" sz="1800" dirty="0"/>
+              <a:t> </a:t>
+            </a:r>
+            <a:r>
+              <a:rPr lang="de-DE" sz="1800" b="1" dirty="0"/>
+              <a:t>reliable </a:t>
+            </a:r>
+            <a:r>
+              <a:rPr lang="de-DE" sz="1800" b="1" dirty="0" err="1"/>
+              <a:t>object</a:t>
+            </a:r>
+            <a:r>
+              <a:rPr lang="de-DE" sz="1800" b="1" dirty="0"/>
+              <a:t> </a:t>
+            </a:r>
+            <a:r>
+              <a:rPr lang="de-DE" sz="1800" b="1" dirty="0" err="1"/>
+              <a:t>detection</a:t>
+            </a:r>
+            <a:endParaRPr lang="de-DE" sz="1800" b="1" dirty="0"/>
           </a:p>
           <a:p>
-            <a:pPr marL="0" indent="0">
-              <a:buNone/>
+            <a:pPr>
+              <a:spcAft>
+                <a:spcPts val="1200"/>
+              </a:spcAft>
             </a:pPr>
-            <a:endParaRPr lang="en-GB" dirty="0"/>
+            <a:r>
+              <a:rPr lang="de-DE" sz="1800" dirty="0"/>
+              <a:t>Fog, rain, and </a:t>
+            </a:r>
+            <a:r>
+              <a:rPr lang="de-DE" sz="1800" dirty="0" err="1"/>
+              <a:t>snow</a:t>
+            </a:r>
+            <a:r>
+              <a:rPr lang="de-DE" sz="1800" dirty="0"/>
+              <a:t> </a:t>
+            </a:r>
+            <a:r>
+              <a:rPr lang="de-DE" sz="1800" dirty="0" err="1"/>
+              <a:t>cause</a:t>
+            </a:r>
+            <a:r>
+              <a:rPr lang="de-DE" sz="1800" dirty="0"/>
+              <a:t> </a:t>
+            </a:r>
+            <a:r>
+              <a:rPr lang="de-DE" sz="1800" dirty="0" err="1"/>
+              <a:t>scattering</a:t>
+            </a:r>
+            <a:r>
+              <a:rPr lang="de-DE" sz="1800" dirty="0"/>
+              <a:t>, glare &amp; </a:t>
+            </a:r>
+            <a:r>
+              <a:rPr lang="de-DE" sz="1800" dirty="0" err="1"/>
+              <a:t>attenuation</a:t>
+            </a:r>
+            <a:r>
+              <a:rPr lang="de-DE" sz="1800" dirty="0"/>
+              <a:t> </a:t>
+            </a:r>
+            <a:r>
+              <a:rPr lang="de-DE" sz="1800" dirty="0">
+                <a:sym typeface="Wingdings" pitchFamily="2" charset="2"/>
+              </a:rPr>
+              <a:t> </a:t>
+            </a:r>
+            <a:r>
+              <a:rPr lang="de-DE" sz="1800" b="1" dirty="0" err="1">
+                <a:sym typeface="Wingdings" pitchFamily="2" charset="2"/>
+              </a:rPr>
+              <a:t>reduced</a:t>
+            </a:r>
+            <a:r>
+              <a:rPr lang="de-DE" sz="1800" b="1" dirty="0">
+                <a:sym typeface="Wingdings" pitchFamily="2" charset="2"/>
+              </a:rPr>
+              <a:t> </a:t>
+            </a:r>
+            <a:r>
+              <a:rPr lang="de-DE" sz="1800" b="1" dirty="0" err="1">
+                <a:sym typeface="Wingdings" pitchFamily="2" charset="2"/>
+              </a:rPr>
+              <a:t>image</a:t>
+            </a:r>
+            <a:r>
+              <a:rPr lang="de-DE" sz="1800" b="1" dirty="0">
+                <a:sym typeface="Wingdings" pitchFamily="2" charset="2"/>
+              </a:rPr>
+              <a:t> </a:t>
+            </a:r>
+            <a:r>
+              <a:rPr lang="de-DE" sz="1800" b="1" dirty="0" err="1">
+                <a:sym typeface="Wingdings" pitchFamily="2" charset="2"/>
+              </a:rPr>
+              <a:t>quality</a:t>
+            </a:r>
+            <a:endParaRPr lang="de-DE" sz="1800" b="1" dirty="0"/>
+          </a:p>
+          <a:p>
+            <a:pPr>
+              <a:spcAft>
+                <a:spcPts val="1200"/>
+              </a:spcAft>
+            </a:pPr>
+            <a:r>
+              <a:rPr lang="de-DE" sz="1800" dirty="0"/>
+              <a:t>Even </a:t>
+            </a:r>
+            <a:r>
+              <a:rPr lang="de-DE" sz="1800" dirty="0" err="1"/>
+              <a:t>state</a:t>
+            </a:r>
+            <a:r>
+              <a:rPr lang="de-DE" sz="1800" dirty="0"/>
+              <a:t>-</a:t>
+            </a:r>
+            <a:r>
+              <a:rPr lang="de-DE" sz="1800" dirty="0" err="1"/>
+              <a:t>of</a:t>
+            </a:r>
+            <a:r>
+              <a:rPr lang="de-DE" sz="1800" dirty="0"/>
+              <a:t>-</a:t>
+            </a:r>
+            <a:r>
+              <a:rPr lang="de-DE" sz="1800" dirty="0" err="1"/>
+              <a:t>the</a:t>
+            </a:r>
+            <a:r>
+              <a:rPr lang="de-DE" sz="1800" dirty="0"/>
+              <a:t>-art </a:t>
+            </a:r>
+            <a:r>
+              <a:rPr lang="de-DE" sz="1800" dirty="0" err="1"/>
+              <a:t>deep</a:t>
+            </a:r>
+            <a:r>
+              <a:rPr lang="de-DE" sz="1800" dirty="0"/>
+              <a:t> </a:t>
+            </a:r>
+            <a:r>
+              <a:rPr lang="de-DE" sz="1800" dirty="0" err="1"/>
+              <a:t>detectors</a:t>
+            </a:r>
+            <a:r>
+              <a:rPr lang="de-DE" sz="1800" dirty="0"/>
+              <a:t> </a:t>
+            </a:r>
+            <a:r>
+              <a:rPr lang="de-DE" sz="1800" dirty="0" err="1"/>
+              <a:t>struggle</a:t>
+            </a:r>
+            <a:r>
+              <a:rPr lang="de-DE" sz="1800" dirty="0"/>
+              <a:t> </a:t>
+            </a:r>
+            <a:r>
+              <a:rPr lang="de-DE" sz="1800" dirty="0" err="1"/>
+              <a:t>under</a:t>
+            </a:r>
+            <a:r>
+              <a:rPr lang="de-DE" sz="1800" dirty="0"/>
+              <a:t> adverse </a:t>
+            </a:r>
+            <a:r>
+              <a:rPr lang="de-DE" sz="1800" dirty="0" err="1"/>
+              <a:t>conditions</a:t>
+            </a:r>
+            <a:endParaRPr lang="de-DE" sz="1800" dirty="0"/>
           </a:p>
         </p:txBody>
       </p:sp>
+      <p:pic>
+        <p:nvPicPr>
+          <p:cNvPr id="1028" name="Picture 4">
+            <a:extLst>
+              <a:ext uri="{FF2B5EF4-FFF2-40B4-BE49-F238E27FC236}">
+                <a16:creationId xmlns:a16="http://schemas.microsoft.com/office/drawing/2014/main" id="{B4C2CA35-5A0A-3F9A-3C0D-8F7E47DE320D}"/>
+              </a:ext>
+            </a:extLst>
+          </p:cNvPr>
+          <p:cNvPicPr>
+            <a:picLocks noChangeAspect="1" noChangeArrowheads="1"/>
+          </p:cNvPicPr>
+          <p:nvPr/>
+        </p:nvPicPr>
+        <p:blipFill>
+          <a:blip r:embed="rId2">
+            <a:extLst>
+              <a:ext uri="{28A0092B-C50C-407E-A947-70E740481C1C}">
+                <a14:useLocalDpi xmlns:a14="http://schemas.microsoft.com/office/drawing/2010/main" val="0"/>
+              </a:ext>
+            </a:extLst>
+          </a:blip>
+          <a:srcRect l="26585" r="6714"/>
+          <a:stretch>
+            <a:fillRect/>
+          </a:stretch>
+        </p:blipFill>
+        <p:spPr bwMode="auto">
+          <a:xfrm>
+            <a:off x="5902036" y="10"/>
+            <a:ext cx="6288441" cy="6857990"/>
+          </a:xfrm>
+          <a:custGeom>
+            <a:avLst/>
+            <a:gdLst/>
+            <a:ahLst/>
+            <a:cxnLst/>
+            <a:rect l="l" t="t" r="r" b="b"/>
+            <a:pathLst>
+              <a:path w="6878775" h="6858000">
+                <a:moveTo>
+                  <a:pt x="1102973" y="0"/>
+                </a:moveTo>
+                <a:lnTo>
+                  <a:pt x="1160688" y="0"/>
+                </a:lnTo>
+                <a:lnTo>
+                  <a:pt x="983189" y="331786"/>
+                </a:lnTo>
+                <a:cubicBezTo>
+                  <a:pt x="914866" y="469145"/>
+                  <a:pt x="850355" y="608712"/>
+                  <a:pt x="789261" y="750263"/>
+                </a:cubicBezTo>
+                <a:cubicBezTo>
+                  <a:pt x="774307" y="784928"/>
+                  <a:pt x="759992" y="819849"/>
+                  <a:pt x="745295" y="854514"/>
+                </a:cubicBezTo>
+                <a:cubicBezTo>
+                  <a:pt x="756682" y="845393"/>
+                  <a:pt x="765489" y="833492"/>
+                  <a:pt x="770857" y="819975"/>
+                </a:cubicBezTo>
+                <a:cubicBezTo>
+                  <a:pt x="879943" y="589569"/>
+                  <a:pt x="999605" y="365513"/>
+                  <a:pt x="1131329" y="148742"/>
+                </a:cubicBezTo>
+                <a:lnTo>
+                  <a:pt x="1227589" y="0"/>
+                </a:lnTo>
+                <a:lnTo>
+                  <a:pt x="6878775" y="0"/>
+                </a:lnTo>
+                <a:lnTo>
+                  <a:pt x="6878775" y="6858000"/>
+                </a:lnTo>
+                <a:lnTo>
+                  <a:pt x="713521" y="6858000"/>
+                </a:lnTo>
+                <a:lnTo>
+                  <a:pt x="625642" y="6670527"/>
+                </a:lnTo>
+                <a:cubicBezTo>
+                  <a:pt x="507232" y="6398531"/>
+                  <a:pt x="403083" y="6118381"/>
+                  <a:pt x="312785" y="5830359"/>
+                </a:cubicBezTo>
+                <a:cubicBezTo>
+                  <a:pt x="278149" y="5719759"/>
+                  <a:pt x="248879" y="5607635"/>
+                  <a:pt x="212198" y="5480401"/>
+                </a:cubicBezTo>
+                <a:cubicBezTo>
+                  <a:pt x="212208" y="5491601"/>
+                  <a:pt x="212803" y="5502788"/>
+                  <a:pt x="213988" y="5513923"/>
+                </a:cubicBezTo>
+                <a:cubicBezTo>
+                  <a:pt x="264089" y="5723695"/>
+                  <a:pt x="307290" y="5935370"/>
+                  <a:pt x="365826" y="6142729"/>
+                </a:cubicBezTo>
+                <a:cubicBezTo>
+                  <a:pt x="433152" y="6380817"/>
+                  <a:pt x="510068" y="6614016"/>
+                  <a:pt x="597975" y="6841549"/>
+                </a:cubicBezTo>
+                <a:lnTo>
+                  <a:pt x="604824" y="6858000"/>
+                </a:lnTo>
+                <a:lnTo>
+                  <a:pt x="552056" y="6858000"/>
+                </a:lnTo>
+                <a:lnTo>
+                  <a:pt x="539576" y="6828295"/>
+                </a:lnTo>
+                <a:cubicBezTo>
+                  <a:pt x="380597" y="6414594"/>
+                  <a:pt x="260223" y="5988893"/>
+                  <a:pt x="171555" y="5552906"/>
+                </a:cubicBezTo>
+                <a:cubicBezTo>
+                  <a:pt x="91163" y="5157998"/>
+                  <a:pt x="43746" y="4758899"/>
+                  <a:pt x="12305" y="4357388"/>
+                </a:cubicBezTo>
+                <a:cubicBezTo>
+                  <a:pt x="-14281" y="4013908"/>
+                  <a:pt x="4507" y="3672965"/>
+                  <a:pt x="46684" y="3331516"/>
+                </a:cubicBezTo>
+                <a:cubicBezTo>
+                  <a:pt x="127203" y="2664286"/>
+                  <a:pt x="277819" y="2007265"/>
+                  <a:pt x="496065" y="1371196"/>
+                </a:cubicBezTo>
+                <a:cubicBezTo>
+                  <a:pt x="636273" y="966066"/>
+                  <a:pt x="800445" y="573253"/>
+                  <a:pt x="995723" y="196614"/>
+                </a:cubicBezTo>
+                <a:close/>
+              </a:path>
+            </a:pathLst>
+          </a:custGeom>
+          <a:noFill/>
+          <a:extLst>
+            <a:ext uri="{909E8E84-426E-40DD-AFC4-6F175D3DCCD1}">
+              <a14:hiddenFill xmlns:a14="http://schemas.microsoft.com/office/drawing/2010/main">
+                <a:solidFill>
+                  <a:srgbClr val="FFFFFF"/>
+                </a:solidFill>
+              </a14:hiddenFill>
+            </a:ext>
+          </a:extLst>
+        </p:spPr>
+      </p:pic>
     </p:spTree>
     <p:extLst>
       <p:ext uri="{BB962C8B-B14F-4D97-AF65-F5344CB8AC3E}">
-        <p14:creationId xmlns:p14="http://schemas.microsoft.com/office/powerpoint/2010/main" val="1408667817"/>
+        <p14:creationId xmlns:p14="http://schemas.microsoft.com/office/powerpoint/2010/main" val="205230042"/>
       </p:ext>
     </p:extLst>
   </p:cSld>
@@ -13015,7 +17330,7 @@
 </p:sld>
 </file>
 
-<file path=ppt/slides/slide3.xml><?xml version="1.0" encoding="utf-8"?>
+<file path=ppt/slides/slide5.xml><?xml version="1.0" encoding="utf-8"?>
 <p:sld xmlns:a="http://schemas.openxmlformats.org/drawingml/2006/main" xmlns:r="http://schemas.openxmlformats.org/officeDocument/2006/relationships" xmlns:p="http://schemas.openxmlformats.org/presentationml/2006/main">
   <p:cSld>
     <p:spTree>
@@ -13048,13 +17363,18 @@
             <p:ph type="title"/>
           </p:nvPr>
         </p:nvSpPr>
-        <p:spPr/>
+        <p:spPr>
+          <a:xfrm>
+            <a:off x="294484" y="68836"/>
+            <a:ext cx="10515600" cy="1325563"/>
+          </a:xfrm>
+        </p:spPr>
         <p:txBody>
           <a:bodyPr/>
           <a:lstStyle/>
           <a:p>
             <a:r>
-              <a:rPr lang="en-GB" dirty="0"/>
+              <a:rPr lang="en-GB" b="1" dirty="0"/>
               <a:t>Previous Work</a:t>
             </a:r>
           </a:p>
@@ -13076,12 +17396,1146 @@
             <p:ph idx="1"/>
           </p:nvPr>
         </p:nvSpPr>
-        <p:spPr/>
+        <p:spPr>
+          <a:xfrm>
+            <a:off x="294484" y="1155824"/>
+            <a:ext cx="6024119" cy="4707304"/>
+          </a:xfrm>
+        </p:spPr>
         <p:txBody>
-          <a:bodyPr/>
+          <a:bodyPr lIns="90000" anchor="ctr">
+            <a:normAutofit/>
+          </a:bodyPr>
           <a:lstStyle/>
           <a:p>
-            <a:endParaRPr lang="en-GB"/>
+            <a:pPr>
+              <a:spcAft>
+                <a:spcPts val="1200"/>
+              </a:spcAft>
+            </a:pPr>
+            <a:r>
+              <a:rPr lang="de-DE" sz="1800" dirty="0" err="1"/>
+              <a:t>Weather</a:t>
+            </a:r>
+            <a:r>
+              <a:rPr lang="de-DE" sz="1800" dirty="0"/>
+              <a:t>-diverse </a:t>
+            </a:r>
+            <a:r>
+              <a:rPr lang="de-DE" sz="1800" dirty="0" err="1"/>
+              <a:t>datasets</a:t>
+            </a:r>
+            <a:r>
+              <a:rPr lang="de-DE" sz="1800" dirty="0"/>
+              <a:t> (</a:t>
+            </a:r>
+            <a:r>
+              <a:rPr lang="de-DE" sz="1800" dirty="0" err="1"/>
+              <a:t>Cityscapes</a:t>
+            </a:r>
+            <a:r>
+              <a:rPr lang="de-DE" sz="1800" dirty="0"/>
+              <a:t>, DAWN, ACDC, RTTS) </a:t>
+            </a:r>
+            <a:r>
+              <a:rPr lang="de-DE" sz="1800" dirty="0" err="1"/>
+              <a:t>containing</a:t>
+            </a:r>
+            <a:r>
+              <a:rPr lang="de-DE" sz="1800" dirty="0"/>
+              <a:t> </a:t>
+            </a:r>
+            <a:r>
+              <a:rPr lang="de-DE" sz="1800" dirty="0" err="1"/>
+              <a:t>synthesized</a:t>
+            </a:r>
+            <a:r>
+              <a:rPr lang="de-DE" sz="1800" dirty="0"/>
+              <a:t>/real </a:t>
+            </a:r>
+            <a:r>
+              <a:rPr lang="de-DE" sz="1800" dirty="0" err="1"/>
+              <a:t>foggy</a:t>
+            </a:r>
+            <a:r>
+              <a:rPr lang="de-DE" sz="1800" dirty="0"/>
+              <a:t> </a:t>
+            </a:r>
+            <a:r>
+              <a:rPr lang="de-DE" sz="1800" dirty="0" err="1"/>
+              <a:t>images</a:t>
+            </a:r>
+            <a:r>
+              <a:rPr lang="de-DE" sz="1800" dirty="0"/>
+              <a:t> </a:t>
+            </a:r>
+          </a:p>
+          <a:p>
+            <a:pPr>
+              <a:spcAft>
+                <a:spcPts val="1200"/>
+              </a:spcAft>
+            </a:pPr>
+            <a:r>
+              <a:rPr lang="de-DE" sz="1800" dirty="0"/>
+              <a:t>Digital-domain </a:t>
+            </a:r>
+            <a:r>
+              <a:rPr lang="de-DE" sz="1800" dirty="0" err="1"/>
+              <a:t>solutions</a:t>
+            </a:r>
+            <a:r>
+              <a:rPr lang="de-DE" sz="1800" dirty="0"/>
+              <a:t> (R-YOLO [1], IA-YOLO [2]) </a:t>
+            </a:r>
+            <a:r>
+              <a:rPr lang="de-DE" sz="1800" dirty="0" err="1"/>
+              <a:t>mainly</a:t>
+            </a:r>
+            <a:r>
+              <a:rPr lang="de-DE" sz="1800" dirty="0"/>
+              <a:t> </a:t>
+            </a:r>
+            <a:r>
+              <a:rPr lang="de-DE" sz="1800" dirty="0" err="1"/>
+              <a:t>focussing</a:t>
+            </a:r>
+            <a:r>
+              <a:rPr lang="de-DE" sz="1800" dirty="0"/>
+              <a:t> on </a:t>
+            </a:r>
+            <a:r>
+              <a:rPr lang="de-DE" sz="1800" dirty="0" err="1"/>
+              <a:t>improvements</a:t>
+            </a:r>
+            <a:r>
+              <a:rPr lang="de-DE" sz="1800" dirty="0"/>
+              <a:t> on software-</a:t>
+            </a:r>
+            <a:r>
+              <a:rPr lang="de-DE" sz="1800" dirty="0" err="1"/>
+              <a:t>side</a:t>
+            </a:r>
+            <a:r>
+              <a:rPr lang="de-DE" sz="1800" dirty="0"/>
+              <a:t>:</a:t>
+            </a:r>
+          </a:p>
+          <a:p>
+            <a:pPr lvl="1">
+              <a:spcBef>
+                <a:spcPts val="0"/>
+              </a:spcBef>
+              <a:spcAft>
+                <a:spcPts val="600"/>
+              </a:spcAft>
+            </a:pPr>
+            <a:r>
+              <a:rPr lang="de-DE" sz="1800" dirty="0"/>
+              <a:t>network </a:t>
+            </a:r>
+            <a:r>
+              <a:rPr lang="de-DE" sz="1800" dirty="0" err="1"/>
+              <a:t>adaption</a:t>
+            </a:r>
+            <a:endParaRPr lang="de-DE" sz="1800" dirty="0"/>
+          </a:p>
+          <a:p>
+            <a:pPr lvl="1">
+              <a:spcBef>
+                <a:spcPts val="0"/>
+              </a:spcBef>
+              <a:spcAft>
+                <a:spcPts val="600"/>
+              </a:spcAft>
+            </a:pPr>
+            <a:r>
+              <a:rPr lang="de-DE" sz="1800" dirty="0" err="1"/>
+              <a:t>preprocessing</a:t>
+            </a:r>
+            <a:r>
+              <a:rPr lang="de-DE" sz="1800" dirty="0"/>
+              <a:t> </a:t>
+            </a:r>
+            <a:r>
+              <a:rPr lang="de-DE" sz="1800" dirty="0" err="1"/>
+              <a:t>of</a:t>
+            </a:r>
+            <a:r>
+              <a:rPr lang="de-DE" sz="1800" dirty="0"/>
+              <a:t> </a:t>
+            </a:r>
+            <a:r>
+              <a:rPr lang="de-DE" sz="1800" dirty="0" err="1"/>
+              <a:t>images</a:t>
+            </a:r>
+            <a:endParaRPr lang="de-DE" sz="1800" dirty="0"/>
+          </a:p>
+          <a:p>
+            <a:pPr lvl="1">
+              <a:spcBef>
+                <a:spcPts val="0"/>
+              </a:spcBef>
+              <a:spcAft>
+                <a:spcPts val="1200"/>
+              </a:spcAft>
+            </a:pPr>
+            <a:r>
+              <a:rPr lang="de-DE" sz="1800" dirty="0" err="1"/>
+              <a:t>image</a:t>
+            </a:r>
+            <a:r>
+              <a:rPr lang="de-DE" sz="1800" dirty="0"/>
+              <a:t> </a:t>
+            </a:r>
+            <a:r>
+              <a:rPr lang="de-DE" sz="1800" dirty="0" err="1"/>
+              <a:t>enhancement</a:t>
+            </a:r>
+            <a:endParaRPr lang="de-DE" sz="1800" dirty="0"/>
+          </a:p>
+          <a:p>
+            <a:pPr>
+              <a:spcAft>
+                <a:spcPts val="1200"/>
+              </a:spcAft>
+              <a:buFont typeface="Arial" panose="020B0604020202020204" pitchFamily="34" charset="0"/>
+              <a:buChar char="•"/>
+            </a:pPr>
+            <a:r>
+              <a:rPr lang="de-DE" sz="1800" dirty="0" err="1"/>
+              <a:t>Visibility</a:t>
+            </a:r>
+            <a:r>
+              <a:rPr lang="de-DE" sz="1800" dirty="0"/>
+              <a:t> </a:t>
+            </a:r>
+            <a:r>
+              <a:rPr lang="de-DE" sz="1800" dirty="0" err="1"/>
+              <a:t>issues</a:t>
+            </a:r>
+            <a:r>
+              <a:rPr lang="de-DE" sz="1800" dirty="0"/>
+              <a:t> </a:t>
+            </a:r>
+            <a:r>
+              <a:rPr lang="de-DE" sz="1800" dirty="0" err="1"/>
+              <a:t>from</a:t>
+            </a:r>
+            <a:r>
+              <a:rPr lang="de-DE" sz="1800" dirty="0"/>
+              <a:t> </a:t>
+            </a:r>
+            <a:r>
+              <a:rPr lang="de-DE" sz="1800" dirty="0" err="1"/>
+              <a:t>scattering</a:t>
+            </a:r>
+            <a:r>
+              <a:rPr lang="de-DE" sz="1800" dirty="0"/>
+              <a:t>/</a:t>
+            </a:r>
+            <a:r>
+              <a:rPr lang="de-DE" sz="1800" dirty="0" err="1"/>
+              <a:t>attenuation</a:t>
+            </a:r>
+            <a:r>
+              <a:rPr lang="de-DE" sz="1800" dirty="0"/>
+              <a:t> </a:t>
+            </a:r>
+            <a:r>
+              <a:rPr lang="de-DE" sz="1800" dirty="0" err="1"/>
+              <a:t>remain</a:t>
+            </a:r>
+            <a:r>
+              <a:rPr lang="de-DE" sz="1800" dirty="0"/>
+              <a:t> </a:t>
+            </a:r>
+            <a:r>
+              <a:rPr lang="de-DE" sz="1800" dirty="0" err="1"/>
+              <a:t>unresolved</a:t>
+            </a:r>
+            <a:endParaRPr lang="de-DE" sz="1800" dirty="0"/>
+          </a:p>
+          <a:p>
+            <a:pPr>
+              <a:spcAft>
+                <a:spcPts val="1200"/>
+              </a:spcAft>
+              <a:buFont typeface="Arial" panose="020B0604020202020204" pitchFamily="34" charset="0"/>
+              <a:buChar char="•"/>
+            </a:pPr>
+            <a:r>
+              <a:rPr lang="de-DE" sz="1800" dirty="0"/>
+              <a:t>=&gt; </a:t>
+            </a:r>
+            <a:r>
+              <a:rPr lang="de-DE" sz="1800" dirty="0" err="1"/>
+              <a:t>joint</a:t>
+            </a:r>
+            <a:r>
+              <a:rPr lang="de-DE" sz="1800" dirty="0"/>
+              <a:t> </a:t>
+            </a:r>
+            <a:r>
+              <a:rPr lang="de-DE" sz="1800" dirty="0" err="1"/>
+              <a:t>optimization</a:t>
+            </a:r>
+            <a:r>
+              <a:rPr lang="de-DE" sz="1800" dirty="0"/>
+              <a:t> </a:t>
+            </a:r>
+            <a:r>
+              <a:rPr lang="de-DE" sz="1800" dirty="0" err="1"/>
+              <a:t>of</a:t>
+            </a:r>
+            <a:r>
+              <a:rPr lang="de-DE" sz="1800" dirty="0"/>
+              <a:t> </a:t>
+            </a:r>
+            <a:r>
+              <a:rPr lang="de-DE" sz="1800" dirty="0" err="1"/>
+              <a:t>physical</a:t>
+            </a:r>
+            <a:r>
+              <a:rPr lang="de-DE" sz="1800" dirty="0"/>
+              <a:t> </a:t>
+            </a:r>
+            <a:r>
+              <a:rPr lang="de-DE" sz="1800" dirty="0" err="1"/>
+              <a:t>optical</a:t>
+            </a:r>
+            <a:r>
+              <a:rPr lang="de-DE" sz="1800" dirty="0"/>
+              <a:t> </a:t>
+            </a:r>
+            <a:r>
+              <a:rPr lang="de-DE" sz="1800" dirty="0" err="1"/>
+              <a:t>system</a:t>
+            </a:r>
+            <a:r>
+              <a:rPr lang="de-DE" sz="1800" dirty="0"/>
+              <a:t> (DOE) +  </a:t>
+            </a:r>
+            <a:r>
+              <a:rPr lang="de-DE" sz="1800" dirty="0" err="1"/>
+              <a:t>object</a:t>
+            </a:r>
+            <a:r>
+              <a:rPr lang="de-DE" sz="1800" dirty="0"/>
+              <a:t> </a:t>
+            </a:r>
+            <a:r>
+              <a:rPr lang="de-DE" sz="1800" dirty="0" err="1"/>
+              <a:t>detection</a:t>
+            </a:r>
+            <a:r>
+              <a:rPr lang="de-DE" sz="1800" dirty="0"/>
+              <a:t> </a:t>
+            </a:r>
+            <a:r>
+              <a:rPr lang="de-DE" sz="1800" dirty="0" err="1"/>
+              <a:t>model</a:t>
+            </a:r>
+            <a:r>
+              <a:rPr lang="de-DE" sz="1800" dirty="0"/>
+              <a:t> </a:t>
+            </a:r>
+            <a:r>
+              <a:rPr lang="de-DE" sz="1800" dirty="0" err="1"/>
+              <a:t>using</a:t>
+            </a:r>
+            <a:r>
+              <a:rPr lang="de-DE" sz="1800" dirty="0"/>
+              <a:t> </a:t>
+            </a:r>
+            <a:r>
+              <a:rPr lang="de-DE" sz="1800" dirty="0" err="1"/>
+              <a:t>pado</a:t>
+            </a:r>
+            <a:endParaRPr lang="de-DE" sz="1800" dirty="0"/>
+          </a:p>
+        </p:txBody>
+      </p:sp>
+      <p:sp>
+        <p:nvSpPr>
+          <p:cNvPr id="3" name="Textfeld 2">
+            <a:extLst>
+              <a:ext uri="{FF2B5EF4-FFF2-40B4-BE49-F238E27FC236}">
+                <a16:creationId xmlns:a16="http://schemas.microsoft.com/office/drawing/2014/main" id="{AE88BF10-704A-2E3D-74CB-FD03251DE613}"/>
+              </a:ext>
+            </a:extLst>
+          </p:cNvPr>
+          <p:cNvSpPr txBox="1"/>
+          <p:nvPr/>
+        </p:nvSpPr>
+        <p:spPr>
+          <a:xfrm>
+            <a:off x="-2989" y="5948224"/>
+            <a:ext cx="12194989" cy="938719"/>
+          </a:xfrm>
+          <a:prstGeom prst="rect">
+            <a:avLst/>
+          </a:prstGeom>
+          <a:noFill/>
+        </p:spPr>
+        <p:txBody>
+          <a:bodyPr wrap="square" rtlCol="0">
+            <a:spAutoFit/>
+          </a:bodyPr>
+          <a:lstStyle/>
+          <a:p>
+            <a:r>
+              <a:rPr lang="de-DE" sz="1100" dirty="0">
+                <a:effectLst/>
+              </a:rPr>
+              <a:t>[1] P. B. S. </a:t>
+            </a:r>
+            <a:r>
+              <a:rPr lang="de-DE" sz="1100" dirty="0" err="1">
+                <a:effectLst/>
+              </a:rPr>
+              <a:t>Varma</a:t>
+            </a:r>
+            <a:r>
+              <a:rPr lang="de-DE" sz="1100" dirty="0">
+                <a:effectLst/>
+              </a:rPr>
+              <a:t>, P. </a:t>
+            </a:r>
+            <a:r>
+              <a:rPr lang="de-DE" sz="1100" dirty="0" err="1">
+                <a:effectLst/>
+              </a:rPr>
+              <a:t>Adimoolam</a:t>
+            </a:r>
+            <a:r>
+              <a:rPr lang="de-DE" sz="1100" dirty="0">
+                <a:effectLst/>
+              </a:rPr>
+              <a:t>, Y. L. </a:t>
+            </a:r>
+            <a:r>
+              <a:rPr lang="de-DE" sz="1100" dirty="0" err="1">
+                <a:effectLst/>
+              </a:rPr>
+              <a:t>Marna</a:t>
+            </a:r>
+            <a:r>
+              <a:rPr lang="de-DE" sz="1100" dirty="0">
+                <a:effectLst/>
+              </a:rPr>
+              <a:t>, A. </a:t>
+            </a:r>
+            <a:r>
+              <a:rPr lang="de-DE" sz="1100" dirty="0" err="1">
+                <a:effectLst/>
+              </a:rPr>
+              <a:t>Vengala</a:t>
+            </a:r>
+            <a:r>
+              <a:rPr lang="de-DE" sz="1100" dirty="0">
+                <a:effectLst/>
+              </a:rPr>
+              <a:t>, V. S. D. Sundar, and M. V. T. R. P. Kumar, ‘</a:t>
+            </a:r>
+            <a:r>
+              <a:rPr lang="de-DE" sz="1100" dirty="0" err="1">
+                <a:effectLst/>
+              </a:rPr>
+              <a:t>Enhancing</a:t>
+            </a:r>
+            <a:r>
+              <a:rPr lang="de-DE" sz="1100" dirty="0">
+                <a:effectLst/>
+              </a:rPr>
+              <a:t> robust </a:t>
+            </a:r>
+            <a:r>
+              <a:rPr lang="de-DE" sz="1100" dirty="0" err="1">
+                <a:effectLst/>
+              </a:rPr>
+              <a:t>object</a:t>
+            </a:r>
+            <a:r>
+              <a:rPr lang="de-DE" sz="1100" dirty="0">
+                <a:effectLst/>
+              </a:rPr>
+              <a:t> </a:t>
+            </a:r>
+            <a:r>
+              <a:rPr lang="de-DE" sz="1100" dirty="0" err="1">
+                <a:effectLst/>
+              </a:rPr>
+              <a:t>detection</a:t>
+            </a:r>
+            <a:r>
+              <a:rPr lang="de-DE" sz="1100" dirty="0">
+                <a:effectLst/>
+              </a:rPr>
+              <a:t> in </a:t>
+            </a:r>
+            <a:r>
+              <a:rPr lang="de-DE" sz="1100" dirty="0" err="1">
+                <a:effectLst/>
+              </a:rPr>
+              <a:t>weather-impacted</a:t>
+            </a:r>
+            <a:r>
+              <a:rPr lang="de-DE" sz="1100" dirty="0">
+                <a:effectLst/>
+              </a:rPr>
+              <a:t> </a:t>
+            </a:r>
+            <a:r>
+              <a:rPr lang="de-DE" sz="1100" dirty="0" err="1">
+                <a:effectLst/>
+              </a:rPr>
+              <a:t>environments</a:t>
+            </a:r>
+            <a:r>
+              <a:rPr lang="de-DE" sz="1100" dirty="0">
+                <a:effectLst/>
+              </a:rPr>
+              <a:t> </a:t>
+            </a:r>
+            <a:r>
+              <a:rPr lang="de-DE" sz="1100" dirty="0" err="1">
+                <a:effectLst/>
+              </a:rPr>
+              <a:t>using</a:t>
+            </a:r>
+            <a:r>
+              <a:rPr lang="de-DE" sz="1100" dirty="0">
+                <a:effectLst/>
+              </a:rPr>
+              <a:t> </a:t>
+            </a:r>
+            <a:r>
+              <a:rPr lang="de-DE" sz="1100" dirty="0" err="1">
+                <a:effectLst/>
+              </a:rPr>
+              <a:t>deep</a:t>
+            </a:r>
+            <a:r>
+              <a:rPr lang="de-DE" sz="1100" dirty="0">
+                <a:effectLst/>
+              </a:rPr>
+              <a:t> </a:t>
+            </a:r>
+            <a:r>
+              <a:rPr lang="de-DE" sz="1100" dirty="0" err="1">
+                <a:effectLst/>
+              </a:rPr>
+              <a:t>learning</a:t>
+            </a:r>
+            <a:r>
+              <a:rPr lang="de-DE" sz="1100" dirty="0">
+                <a:effectLst/>
+              </a:rPr>
+              <a:t> </a:t>
+            </a:r>
+            <a:r>
+              <a:rPr lang="de-DE" sz="1100" dirty="0" err="1">
+                <a:effectLst/>
+              </a:rPr>
+              <a:t>techniques</a:t>
+            </a:r>
+            <a:r>
+              <a:rPr lang="de-DE" sz="1100" dirty="0">
+                <a:effectLst/>
+              </a:rPr>
+              <a:t>’, </a:t>
+            </a:r>
+            <a:r>
+              <a:rPr lang="de-DE" sz="1100" i="1" dirty="0">
+                <a:effectLst/>
+              </a:rPr>
+              <a:t>2024 2nd International Conference on </a:t>
+            </a:r>
+            <a:r>
+              <a:rPr lang="de-DE" sz="1100" i="1" dirty="0" err="1">
+                <a:effectLst/>
+              </a:rPr>
+              <a:t>Self</a:t>
+            </a:r>
+            <a:r>
+              <a:rPr lang="de-DE" sz="1100" i="1" dirty="0">
+                <a:effectLst/>
+              </a:rPr>
+              <a:t> </a:t>
+            </a:r>
+            <a:r>
+              <a:rPr lang="de-DE" sz="1100" i="1" dirty="0" err="1">
+                <a:effectLst/>
+              </a:rPr>
+              <a:t>Sustainable</a:t>
+            </a:r>
+            <a:r>
+              <a:rPr lang="de-DE" sz="1100" i="1" dirty="0">
+                <a:effectLst/>
+              </a:rPr>
+              <a:t> </a:t>
+            </a:r>
+            <a:r>
+              <a:rPr lang="de-DE" sz="1100" i="1" dirty="0" err="1">
+                <a:effectLst/>
+              </a:rPr>
+              <a:t>Artificial</a:t>
+            </a:r>
+            <a:r>
+              <a:rPr lang="de-DE" sz="1100" i="1" dirty="0">
+                <a:effectLst/>
+              </a:rPr>
+              <a:t> </a:t>
+            </a:r>
+            <a:r>
+              <a:rPr lang="de-DE" sz="1100" i="1" dirty="0" err="1">
+                <a:effectLst/>
+              </a:rPr>
+              <a:t>Intelligence</a:t>
+            </a:r>
+            <a:r>
+              <a:rPr lang="de-DE" sz="1100" i="1" dirty="0">
+                <a:effectLst/>
+              </a:rPr>
+              <a:t> Systems (ICSSAS)</a:t>
+            </a:r>
+            <a:r>
+              <a:rPr lang="de-DE" sz="1100" dirty="0">
+                <a:effectLst/>
+              </a:rPr>
+              <a:t>, pp. 599–604, 2024.</a:t>
+            </a:r>
+          </a:p>
+          <a:p>
+            <a:r>
+              <a:rPr lang="de-DE" sz="1100" dirty="0"/>
+              <a:t>[2] W. Liu, G. Ren, R. </a:t>
+            </a:r>
+            <a:r>
+              <a:rPr lang="de-DE" sz="1100" dirty="0" err="1"/>
+              <a:t>Yu</a:t>
+            </a:r>
+            <a:r>
+              <a:rPr lang="de-DE" sz="1100" dirty="0"/>
+              <a:t>, S. Guo, J. Zhu, and L. Zhang, “Image-Adaptive YOLO </a:t>
+            </a:r>
+            <a:r>
+              <a:rPr lang="de-DE" sz="1100" dirty="0" err="1"/>
+              <a:t>for</a:t>
+            </a:r>
+            <a:r>
+              <a:rPr lang="de-DE" sz="1100" dirty="0"/>
+              <a:t> </a:t>
+            </a:r>
+            <a:r>
+              <a:rPr lang="de-DE" sz="1100" dirty="0" err="1"/>
+              <a:t>Object</a:t>
+            </a:r>
+            <a:r>
+              <a:rPr lang="de-DE" sz="1100" dirty="0"/>
+              <a:t> </a:t>
+            </a:r>
+            <a:r>
+              <a:rPr lang="de-DE" sz="1100" dirty="0" err="1"/>
+              <a:t>Detection</a:t>
+            </a:r>
+            <a:r>
+              <a:rPr lang="de-DE" sz="1100" dirty="0"/>
+              <a:t> in Adverse </a:t>
+            </a:r>
+            <a:r>
+              <a:rPr lang="de-DE" sz="1100" dirty="0" err="1"/>
+              <a:t>Weather</a:t>
+            </a:r>
+            <a:r>
+              <a:rPr lang="de-DE" sz="1100" dirty="0"/>
+              <a:t> </a:t>
+            </a:r>
+            <a:r>
+              <a:rPr lang="de-DE" sz="1100" dirty="0" err="1"/>
+              <a:t>Conditions</a:t>
+            </a:r>
+            <a:r>
+              <a:rPr lang="de-DE" sz="1100" dirty="0"/>
+              <a:t>”, </a:t>
+            </a:r>
+            <a:r>
+              <a:rPr lang="de-DE" sz="1100" i="1" dirty="0"/>
+              <a:t>AAAI</a:t>
+            </a:r>
+            <a:r>
+              <a:rPr lang="de-DE" sz="1100" dirty="0"/>
+              <a:t>, vol. 36, </a:t>
+            </a:r>
+            <a:r>
+              <a:rPr lang="de-DE" sz="1100" dirty="0" err="1"/>
+              <a:t>no</a:t>
+            </a:r>
+            <a:r>
+              <a:rPr lang="de-DE" sz="1100" dirty="0"/>
+              <a:t>. 2, pp. 1792-1800, Jun. 2022.</a:t>
+            </a:r>
+          </a:p>
+          <a:p>
+            <a:r>
+              <a:rPr lang="de-DE" sz="1100" dirty="0">
+                <a:effectLst/>
+              </a:rPr>
+              <a:t>[3] </a:t>
+            </a:r>
+            <a:r>
+              <a:rPr lang="en-GB" sz="1100" dirty="0"/>
+              <a:t>L. Chen, X. Yuan and B. Yang, "Object detection and recognition in foggy environment based on improved YOLOv11," 2025 6th International Conference on Electronic Communication and Artificial Intelligence (ICECAI), Chengdu, China, 2025, pp. 368-372, </a:t>
+            </a:r>
+            <a:r>
+              <a:rPr lang="en-GB" sz="1100" dirty="0" err="1"/>
+              <a:t>doi</a:t>
+            </a:r>
+            <a:r>
+              <a:rPr lang="en-GB" sz="1100" dirty="0"/>
+              <a:t>: 10.1109/ICECAI66283.2025.11170606.</a:t>
+            </a:r>
+          </a:p>
+        </p:txBody>
+      </p:sp>
+      <p:grpSp>
+        <p:nvGrpSpPr>
+          <p:cNvPr id="11" name="Gruppieren 10">
+            <a:extLst>
+              <a:ext uri="{FF2B5EF4-FFF2-40B4-BE49-F238E27FC236}">
+                <a16:creationId xmlns:a16="http://schemas.microsoft.com/office/drawing/2014/main" id="{293298E4-6C39-BB30-9CB7-1D05A4CAEA2E}"/>
+              </a:ext>
+            </a:extLst>
+          </p:cNvPr>
+          <p:cNvGrpSpPr/>
+          <p:nvPr/>
+        </p:nvGrpSpPr>
+        <p:grpSpPr>
+          <a:xfrm>
+            <a:off x="6781689" y="885044"/>
+            <a:ext cx="5225221" cy="4789438"/>
+            <a:chOff x="5212231" y="811556"/>
+            <a:chExt cx="7182059" cy="6583077"/>
+          </a:xfrm>
+        </p:grpSpPr>
+        <p:pic>
+          <p:nvPicPr>
+            <p:cNvPr id="4" name="Inhaltsplatzhalter 3">
+              <a:extLst>
+                <a:ext uri="{FF2B5EF4-FFF2-40B4-BE49-F238E27FC236}">
+                  <a16:creationId xmlns:a16="http://schemas.microsoft.com/office/drawing/2014/main" id="{5BC2BCFF-9FBD-F36D-74F3-205E5470DF50}"/>
+                </a:ext>
+              </a:extLst>
+            </p:cNvPr>
+            <p:cNvPicPr>
+              <a:picLocks noChangeAspect="1"/>
+            </p:cNvPicPr>
+            <p:nvPr/>
+          </p:nvPicPr>
+          <p:blipFill>
+            <a:blip r:embed="rId2"/>
+            <a:stretch>
+              <a:fillRect/>
+            </a:stretch>
+          </p:blipFill>
+          <p:spPr>
+            <a:xfrm>
+              <a:off x="5326740" y="1097266"/>
+              <a:ext cx="7067550" cy="4389139"/>
+            </a:xfrm>
+            <a:prstGeom prst="rect">
+              <a:avLst/>
+            </a:prstGeom>
+          </p:spPr>
+        </p:pic>
+        <p:sp>
+          <p:nvSpPr>
+            <p:cNvPr id="5" name="Rechteck 4">
+              <a:extLst>
+                <a:ext uri="{FF2B5EF4-FFF2-40B4-BE49-F238E27FC236}">
+                  <a16:creationId xmlns:a16="http://schemas.microsoft.com/office/drawing/2014/main" id="{E2683E6C-9636-A364-CF20-506DF675BB5D}"/>
+                </a:ext>
+              </a:extLst>
+            </p:cNvPr>
+            <p:cNvSpPr/>
+            <p:nvPr/>
+          </p:nvSpPr>
+          <p:spPr>
+            <a:xfrm>
+              <a:off x="5916020" y="3520436"/>
+              <a:ext cx="1257300" cy="480060"/>
+            </a:xfrm>
+            <a:prstGeom prst="rect">
+              <a:avLst/>
+            </a:prstGeom>
+            <a:solidFill>
+              <a:schemeClr val="bg1"/>
+            </a:solidFill>
+            <a:ln>
+              <a:noFill/>
+            </a:ln>
+          </p:spPr>
+          <p:style>
+            <a:lnRef idx="2">
+              <a:schemeClr val="accent1">
+                <a:shade val="15000"/>
+              </a:schemeClr>
+            </a:lnRef>
+            <a:fillRef idx="1">
+              <a:schemeClr val="accent1"/>
+            </a:fillRef>
+            <a:effectRef idx="0">
+              <a:schemeClr val="accent1"/>
+            </a:effectRef>
+            <a:fontRef idx="minor">
+              <a:schemeClr val="lt1"/>
+            </a:fontRef>
+          </p:style>
+          <p:txBody>
+            <a:bodyPr rtlCol="0" anchor="ctr"/>
+            <a:lstStyle/>
+            <a:p>
+              <a:pPr algn="ctr"/>
+              <a:endParaRPr lang="en-GB" dirty="0"/>
+            </a:p>
+          </p:txBody>
+        </p:sp>
+        <p:sp>
+          <p:nvSpPr>
+            <p:cNvPr id="7" name="Textfeld 6">
+              <a:extLst>
+                <a:ext uri="{FF2B5EF4-FFF2-40B4-BE49-F238E27FC236}">
+                  <a16:creationId xmlns:a16="http://schemas.microsoft.com/office/drawing/2014/main" id="{0024580C-8660-62BE-50F4-F3E07EC9A187}"/>
+                </a:ext>
+              </a:extLst>
+            </p:cNvPr>
+            <p:cNvSpPr txBox="1"/>
+            <p:nvPr/>
+          </p:nvSpPr>
+          <p:spPr>
+            <a:xfrm>
+              <a:off x="5441219" y="3506624"/>
+              <a:ext cx="2206902" cy="634558"/>
+            </a:xfrm>
+            <a:prstGeom prst="rect">
+              <a:avLst/>
+            </a:prstGeom>
+            <a:noFill/>
+          </p:spPr>
+          <p:txBody>
+            <a:bodyPr wrap="square" rtlCol="0">
+              <a:spAutoFit/>
+            </a:bodyPr>
+            <a:lstStyle/>
+            <a:p>
+              <a:pPr algn="ctr"/>
+              <a:r>
+                <a:rPr lang="en-GB" sz="1200" dirty="0"/>
+                <a:t>Illumination Adaptive Transformer</a:t>
+              </a:r>
+            </a:p>
+          </p:txBody>
+        </p:sp>
+        <p:sp>
+          <p:nvSpPr>
+            <p:cNvPr id="8" name="Textfeld 7">
+              <a:extLst>
+                <a:ext uri="{FF2B5EF4-FFF2-40B4-BE49-F238E27FC236}">
+                  <a16:creationId xmlns:a16="http://schemas.microsoft.com/office/drawing/2014/main" id="{5C2D5765-ED16-48C2-B36D-2B45307D08DD}"/>
+                </a:ext>
+              </a:extLst>
+            </p:cNvPr>
+            <p:cNvSpPr txBox="1"/>
+            <p:nvPr/>
+          </p:nvSpPr>
+          <p:spPr>
+            <a:xfrm>
+              <a:off x="5609027" y="4605785"/>
+              <a:ext cx="4078187" cy="803773"/>
+            </a:xfrm>
+            <a:prstGeom prst="rect">
+              <a:avLst/>
+            </a:prstGeom>
+            <a:noFill/>
+          </p:spPr>
+          <p:txBody>
+            <a:bodyPr wrap="square" rtlCol="0">
+              <a:spAutoFit/>
+            </a:bodyPr>
+            <a:lstStyle/>
+            <a:p>
+              <a:r>
+                <a:rPr lang="en-GB" sz="1600" dirty="0"/>
+                <a:t>emulates image signal processor</a:t>
+              </a:r>
+              <a:br>
+                <a:rPr lang="en-GB" sz="1600" dirty="0"/>
+              </a:br>
+              <a:r>
+                <a:rPr lang="en-GB" sz="1600" dirty="0"/>
+                <a:t>to resolve image quality issues</a:t>
+              </a:r>
+            </a:p>
+          </p:txBody>
+        </p:sp>
+        <mc:AlternateContent xmlns:mc="http://schemas.openxmlformats.org/markup-compatibility/2006">
+          <mc:Choice xmlns:p14="http://schemas.microsoft.com/office/powerpoint/2010/main" Requires="p14">
+            <p:contentPart p14:bwMode="auto" r:id="rId3">
+              <p14:nvContentPartPr>
+                <p14:cNvPr id="9" name="Freihand 8">
+                  <a:extLst>
+                    <a:ext uri="{FF2B5EF4-FFF2-40B4-BE49-F238E27FC236}">
+                      <a16:creationId xmlns:a16="http://schemas.microsoft.com/office/drawing/2014/main" id="{5F4EB6BC-37E9-33B6-756E-A4E6BCAB52B5}"/>
+                    </a:ext>
+                  </a:extLst>
+                </p14:cNvPr>
+                <p14:cNvContentPartPr/>
+                <p14:nvPr/>
+              </p14:nvContentPartPr>
+              <p14:xfrm>
+                <a:off x="6411649" y="4176915"/>
+                <a:ext cx="266040" cy="483840"/>
+              </p14:xfrm>
+            </p:contentPart>
+          </mc:Choice>
+          <mc:Fallback>
+            <p:pic>
+              <p:nvPicPr>
+                <p:cNvPr id="9" name="Freihand 8">
+                  <a:extLst>
+                    <a:ext uri="{FF2B5EF4-FFF2-40B4-BE49-F238E27FC236}">
+                      <a16:creationId xmlns:a16="http://schemas.microsoft.com/office/drawing/2014/main" id="{5F4EB6BC-37E9-33B6-756E-A4E6BCAB52B5}"/>
+                    </a:ext>
+                  </a:extLst>
+                </p:cNvPr>
+                <p:cNvPicPr/>
+                <p:nvPr/>
+              </p:nvPicPr>
+              <p:blipFill>
+                <a:blip r:embed="rId4"/>
+                <a:stretch>
+                  <a:fillRect/>
+                </a:stretch>
+              </p:blipFill>
+              <p:spPr>
+                <a:xfrm>
+                  <a:off x="6399781" y="4164547"/>
+                  <a:ext cx="290270" cy="508081"/>
+                </a:xfrm>
+                <a:prstGeom prst="rect">
+                  <a:avLst/>
+                </a:prstGeom>
+              </p:spPr>
+            </p:pic>
+          </mc:Fallback>
+        </mc:AlternateContent>
+        <p:sp>
+          <p:nvSpPr>
+            <p:cNvPr id="10" name="Abgerundetes Rechteck 9">
+              <a:extLst>
+                <a:ext uri="{FF2B5EF4-FFF2-40B4-BE49-F238E27FC236}">
+                  <a16:creationId xmlns:a16="http://schemas.microsoft.com/office/drawing/2014/main" id="{C7A3414B-71C3-939D-6F7E-6F96994F6D81}"/>
+                </a:ext>
+              </a:extLst>
+            </p:cNvPr>
+            <p:cNvSpPr/>
+            <p:nvPr/>
+          </p:nvSpPr>
+          <p:spPr>
+            <a:xfrm>
+              <a:off x="5212231" y="811556"/>
+              <a:ext cx="7182058" cy="6583077"/>
+            </a:xfrm>
+            <a:prstGeom prst="roundRect">
+              <a:avLst/>
+            </a:prstGeom>
+            <a:noFill/>
+            <a:ln w="38100">
+              <a:solidFill>
+                <a:schemeClr val="accent1">
+                  <a:shade val="15000"/>
+                </a:schemeClr>
+              </a:solidFill>
+            </a:ln>
+          </p:spPr>
+          <p:style>
+            <a:lnRef idx="2">
+              <a:schemeClr val="accent1">
+                <a:shade val="15000"/>
+              </a:schemeClr>
+            </a:lnRef>
+            <a:fillRef idx="1">
+              <a:schemeClr val="accent1"/>
+            </a:fillRef>
+            <a:effectRef idx="0">
+              <a:schemeClr val="accent1"/>
+            </a:effectRef>
+            <a:fontRef idx="minor">
+              <a:schemeClr val="lt1"/>
+            </a:fontRef>
+          </p:style>
+          <p:txBody>
+            <a:bodyPr rtlCol="0" anchor="ctr"/>
+            <a:lstStyle/>
+            <a:p>
+              <a:pPr algn="ctr"/>
+              <a:endParaRPr lang="en-GB" dirty="0"/>
+            </a:p>
+          </p:txBody>
+        </p:sp>
+      </p:grpSp>
+      <p:grpSp>
+        <p:nvGrpSpPr>
+          <p:cNvPr id="12" name="Gruppieren 11">
+            <a:extLst>
+              <a:ext uri="{FF2B5EF4-FFF2-40B4-BE49-F238E27FC236}">
+                <a16:creationId xmlns:a16="http://schemas.microsoft.com/office/drawing/2014/main" id="{61A7085E-1B92-DB0F-F64C-7AEDBDE21B05}"/>
+              </a:ext>
+            </a:extLst>
+          </p:cNvPr>
+          <p:cNvGrpSpPr/>
+          <p:nvPr/>
+        </p:nvGrpSpPr>
+        <p:grpSpPr>
+          <a:xfrm>
+            <a:off x="7293722" y="4509578"/>
+            <a:ext cx="4266763" cy="751913"/>
+            <a:chOff x="7417018" y="149740"/>
+            <a:chExt cx="4266763" cy="751913"/>
+          </a:xfrm>
+        </p:grpSpPr>
+        <p:pic>
+          <p:nvPicPr>
+            <p:cNvPr id="13" name="Grafik 12">
+              <a:extLst>
+                <a:ext uri="{FF2B5EF4-FFF2-40B4-BE49-F238E27FC236}">
+                  <a16:creationId xmlns:a16="http://schemas.microsoft.com/office/drawing/2014/main" id="{ADB1C8C6-1ED6-7AE6-7705-35CD0822D52F}"/>
+                </a:ext>
+              </a:extLst>
+            </p:cNvPr>
+            <p:cNvPicPr>
+              <a:picLocks noChangeAspect="1"/>
+            </p:cNvPicPr>
+            <p:nvPr/>
+          </p:nvPicPr>
+          <p:blipFill rotWithShape="1">
+            <a:blip r:embed="rId5"/>
+            <a:srcRect t="13253" r="45104" b="69361"/>
+            <a:stretch/>
+          </p:blipFill>
+          <p:spPr>
+            <a:xfrm>
+              <a:off x="7417018" y="149740"/>
+              <a:ext cx="4266763" cy="274648"/>
+            </a:xfrm>
+            <a:prstGeom prst="rect">
+              <a:avLst/>
+            </a:prstGeom>
+          </p:spPr>
+        </p:pic>
+        <p:pic>
+          <p:nvPicPr>
+            <p:cNvPr id="14" name="Grafik 13">
+              <a:extLst>
+                <a:ext uri="{FF2B5EF4-FFF2-40B4-BE49-F238E27FC236}">
+                  <a16:creationId xmlns:a16="http://schemas.microsoft.com/office/drawing/2014/main" id="{82B33365-4048-8FED-5A16-7D65AC44BC4C}"/>
+                </a:ext>
+              </a:extLst>
+            </p:cNvPr>
+            <p:cNvPicPr>
+              <a:picLocks noChangeAspect="1"/>
+            </p:cNvPicPr>
+            <p:nvPr/>
+          </p:nvPicPr>
+          <p:blipFill rotWithShape="1">
+            <a:blip r:embed="rId5"/>
+            <a:srcRect t="66879" r="45104" b="2908"/>
+            <a:stretch/>
+          </p:blipFill>
+          <p:spPr>
+            <a:xfrm>
+              <a:off x="7417018" y="424388"/>
+              <a:ext cx="4266763" cy="477265"/>
+            </a:xfrm>
+            <a:prstGeom prst="rect">
+              <a:avLst/>
+            </a:prstGeom>
+          </p:spPr>
+        </p:pic>
+      </p:grpSp>
+      <p:sp>
+        <p:nvSpPr>
+          <p:cNvPr id="15" name="Textfeld 14">
+            <a:extLst>
+              <a:ext uri="{FF2B5EF4-FFF2-40B4-BE49-F238E27FC236}">
+                <a16:creationId xmlns:a16="http://schemas.microsoft.com/office/drawing/2014/main" id="{EB8C452C-FD1E-A3CC-737A-9E4723789191}"/>
+              </a:ext>
+            </a:extLst>
+          </p:cNvPr>
+          <p:cNvSpPr txBox="1"/>
+          <p:nvPr/>
+        </p:nvSpPr>
+        <p:spPr>
+          <a:xfrm>
+            <a:off x="7669395" y="5297998"/>
+            <a:ext cx="3362395" cy="369332"/>
+          </a:xfrm>
+          <a:prstGeom prst="rect">
+            <a:avLst/>
+          </a:prstGeom>
+          <a:noFill/>
+        </p:spPr>
+        <p:txBody>
+          <a:bodyPr wrap="none" rtlCol="0">
+            <a:spAutoFit/>
+          </a:bodyPr>
+          <a:lstStyle/>
+          <a:p>
+            <a:r>
+              <a:rPr lang="en-GB" dirty="0"/>
+              <a:t>=&gt; accuracy improvement of </a:t>
+            </a:r>
+            <a:r>
+              <a:rPr lang="en-GB" b="1" dirty="0"/>
+              <a:t>2.9%</a:t>
+            </a:r>
+          </a:p>
+        </p:txBody>
+      </p:sp>
+      <p:sp>
+        <p:nvSpPr>
+          <p:cNvPr id="16" name="Textfeld 15">
+            <a:extLst>
+              <a:ext uri="{FF2B5EF4-FFF2-40B4-BE49-F238E27FC236}">
+                <a16:creationId xmlns:a16="http://schemas.microsoft.com/office/drawing/2014/main" id="{36DCEBE1-0322-449D-BD05-8564AAF216C7}"/>
+              </a:ext>
+            </a:extLst>
+          </p:cNvPr>
+          <p:cNvSpPr txBox="1"/>
+          <p:nvPr/>
+        </p:nvSpPr>
+        <p:spPr>
+          <a:xfrm>
+            <a:off x="9647890" y="1056401"/>
+            <a:ext cx="2100255" cy="369332"/>
+          </a:xfrm>
+          <a:prstGeom prst="rect">
+            <a:avLst/>
+          </a:prstGeom>
+          <a:noFill/>
+        </p:spPr>
+        <p:txBody>
+          <a:bodyPr wrap="none" rtlCol="0">
+            <a:spAutoFit/>
+          </a:bodyPr>
+          <a:lstStyle/>
+          <a:p>
+            <a:r>
+              <a:rPr lang="en-GB" b="1" dirty="0"/>
+              <a:t>Chen et al., 2025 [3]</a:t>
+            </a:r>
+            <a:endParaRPr lang="en-GB" dirty="0"/>
           </a:p>
         </p:txBody>
       </p:sp>
@@ -13098,7 +18552,7 @@
 </p:sld>
 </file>
 
-<file path=ppt/slides/slide4.xml><?xml version="1.0" encoding="utf-8"?>
+<file path=ppt/slides/slide6.xml><?xml version="1.0" encoding="utf-8"?>
 <p:sld xmlns:a="http://schemas.openxmlformats.org/drawingml/2006/main" xmlns:r="http://schemas.openxmlformats.org/officeDocument/2006/relationships" xmlns:p="http://schemas.openxmlformats.org/presentationml/2006/main" show="0">
   <p:cSld>
     <p:spTree>
@@ -13241,523 +18695,7 @@
 </p:sld>
 </file>
 
-<file path=ppt/slides/slide5.xml><?xml version="1.0" encoding="utf-8"?>
-<p:sld xmlns:a="http://schemas.openxmlformats.org/drawingml/2006/main" xmlns:r="http://schemas.openxmlformats.org/officeDocument/2006/relationships" xmlns:p="http://schemas.openxmlformats.org/presentationml/2006/main" show="0">
-  <p:cSld>
-    <p:spTree>
-      <p:nvGrpSpPr>
-        <p:cNvPr id="1" name=""/>
-        <p:cNvGrpSpPr/>
-        <p:nvPr/>
-      </p:nvGrpSpPr>
-      <p:grpSpPr>
-        <a:xfrm>
-          <a:off x="0" y="0"/>
-          <a:ext cx="0" cy="0"/>
-          <a:chOff x="0" y="0"/>
-          <a:chExt cx="0" cy="0"/>
-        </a:xfrm>
-      </p:grpSpPr>
-      <p:sp>
-        <p:nvSpPr>
-          <p:cNvPr id="4" name="Textfeld 3">
-            <a:extLst>
-              <a:ext uri="{FF2B5EF4-FFF2-40B4-BE49-F238E27FC236}">
-                <a16:creationId xmlns:a16="http://schemas.microsoft.com/office/drawing/2014/main" id="{BD64DDFA-E0E6-2C22-A2F2-88BEA96A308B}"/>
-              </a:ext>
-            </a:extLst>
-          </p:cNvPr>
-          <p:cNvSpPr txBox="1"/>
-          <p:nvPr/>
-        </p:nvSpPr>
-        <p:spPr>
-          <a:xfrm>
-            <a:off x="176136" y="2937613"/>
-            <a:ext cx="8238343" cy="646331"/>
-          </a:xfrm>
-          <a:prstGeom prst="rect">
-            <a:avLst/>
-          </a:prstGeom>
-          <a:noFill/>
-        </p:spPr>
-        <p:txBody>
-          <a:bodyPr wrap="square">
-            <a:spAutoFit/>
-          </a:bodyPr>
-          <a:lstStyle/>
-          <a:p>
-            <a:r>
-              <a:rPr lang="en-GB" dirty="0">
-                <a:hlinkClick r:id="rId2"/>
-              </a:rPr>
-              <a:t>https://www.kaggle.com/datasets/yessicatuteja/foggy-cityscapes-image-dataset</a:t>
-            </a:r>
-            <a:br>
-              <a:rPr lang="en-GB" dirty="0"/>
-            </a:br>
-            <a:r>
-              <a:rPr lang="en-GB" dirty="0"/>
-              <a:t>1500 simulated images (500 per no fog, medium fog, dense fog)</a:t>
-            </a:r>
-          </a:p>
-        </p:txBody>
-      </p:sp>
-      <p:sp>
-        <p:nvSpPr>
-          <p:cNvPr id="5" name="Textfeld 4">
-            <a:extLst>
-              <a:ext uri="{FF2B5EF4-FFF2-40B4-BE49-F238E27FC236}">
-                <a16:creationId xmlns:a16="http://schemas.microsoft.com/office/drawing/2014/main" id="{EB146B29-CB29-0F3E-A4E8-C19C159F7714}"/>
-              </a:ext>
-            </a:extLst>
-          </p:cNvPr>
-          <p:cNvSpPr txBox="1"/>
-          <p:nvPr/>
-        </p:nvSpPr>
-        <p:spPr>
-          <a:xfrm>
-            <a:off x="5336459" y="208917"/>
-            <a:ext cx="1912127" cy="369332"/>
-          </a:xfrm>
-          <a:prstGeom prst="rect">
-            <a:avLst/>
-          </a:prstGeom>
-          <a:noFill/>
-        </p:spPr>
-        <p:txBody>
-          <a:bodyPr wrap="none" rtlCol="0">
-            <a:spAutoFit/>
-          </a:bodyPr>
-          <a:lstStyle/>
-          <a:p>
-            <a:r>
-              <a:rPr lang="en-GB" dirty="0"/>
-              <a:t>Cityscapes dataset</a:t>
-            </a:r>
-          </a:p>
-        </p:txBody>
-      </p:sp>
-      <p:sp>
-        <p:nvSpPr>
-          <p:cNvPr id="6" name="Textfeld 5">
-            <a:extLst>
-              <a:ext uri="{FF2B5EF4-FFF2-40B4-BE49-F238E27FC236}">
-                <a16:creationId xmlns:a16="http://schemas.microsoft.com/office/drawing/2014/main" id="{94129CDF-C0BD-83F1-0199-C906248A10DE}"/>
-              </a:ext>
-            </a:extLst>
-          </p:cNvPr>
-          <p:cNvSpPr txBox="1"/>
-          <p:nvPr/>
-        </p:nvSpPr>
-        <p:spPr>
-          <a:xfrm>
-            <a:off x="5937008" y="1364939"/>
-            <a:ext cx="5252272" cy="646331"/>
-          </a:xfrm>
-          <a:prstGeom prst="rect">
-            <a:avLst/>
-          </a:prstGeom>
-          <a:noFill/>
-        </p:spPr>
-        <p:txBody>
-          <a:bodyPr wrap="none" rtlCol="0">
-            <a:spAutoFit/>
-          </a:bodyPr>
-          <a:lstStyle/>
-          <a:p>
-            <a:r>
-              <a:rPr lang="en-GB" dirty="0"/>
-              <a:t>https://</a:t>
-            </a:r>
-            <a:r>
-              <a:rPr lang="en-GB" dirty="0" err="1"/>
-              <a:t>www.cityscapes-dataset.com</a:t>
-            </a:r>
-            <a:r>
-              <a:rPr lang="en-GB" dirty="0"/>
-              <a:t>/</a:t>
-            </a:r>
-            <a:r>
-              <a:rPr lang="en-GB" dirty="0" err="1"/>
-              <a:t>foggydownload</a:t>
-            </a:r>
-            <a:r>
-              <a:rPr lang="en-GB" dirty="0"/>
-              <a:t>/</a:t>
-            </a:r>
-            <a:br>
-              <a:rPr lang="en-GB" dirty="0"/>
-            </a:br>
-            <a:r>
-              <a:rPr lang="en-GB" dirty="0"/>
-              <a:t>ETH Zürich, 25000 images with simulated fog</a:t>
-            </a:r>
-          </a:p>
-        </p:txBody>
-      </p:sp>
-      <mc:AlternateContent xmlns:mc="http://schemas.openxmlformats.org/markup-compatibility/2006" xmlns:p14="http://schemas.microsoft.com/office/powerpoint/2010/main">
-        <mc:Choice Requires="p14">
-          <p:contentPart p14:bwMode="auto" r:id="rId3">
-            <p14:nvContentPartPr>
-              <p14:cNvPr id="7" name="Freihand 6">
-                <a:extLst>
-                  <a:ext uri="{FF2B5EF4-FFF2-40B4-BE49-F238E27FC236}">
-                    <a16:creationId xmlns:a16="http://schemas.microsoft.com/office/drawing/2014/main" id="{53EAB370-BBB1-A378-DE14-125A850C391B}"/>
-                  </a:ext>
-                </a:extLst>
-              </p14:cNvPr>
-              <p14:cNvContentPartPr/>
-              <p14:nvPr/>
-            </p14:nvContentPartPr>
-            <p14:xfrm>
-              <a:off x="6379196" y="602386"/>
-              <a:ext cx="661320" cy="702000"/>
-            </p14:xfrm>
-          </p:contentPart>
-        </mc:Choice>
-        <mc:Fallback xmlns="">
-          <p:pic>
-            <p:nvPicPr>
-              <p:cNvPr id="7" name="Freihand 6">
-                <a:extLst>
-                  <a:ext uri="{FF2B5EF4-FFF2-40B4-BE49-F238E27FC236}">
-                    <a16:creationId xmlns:a16="http://schemas.microsoft.com/office/drawing/2014/main" id="{53EAB370-BBB1-A378-DE14-125A850C391B}"/>
-                  </a:ext>
-                </a:extLst>
-              </p:cNvPr>
-              <p:cNvPicPr/>
-              <p:nvPr/>
-            </p:nvPicPr>
-            <p:blipFill>
-              <a:blip r:embed="rId4"/>
-              <a:stretch>
-                <a:fillRect/>
-              </a:stretch>
-            </p:blipFill>
-            <p:spPr>
-              <a:xfrm>
-                <a:off x="6343556" y="566746"/>
-                <a:ext cx="732960" cy="773640"/>
-              </a:xfrm>
-              <a:prstGeom prst="rect">
-                <a:avLst/>
-              </a:prstGeom>
-            </p:spPr>
-          </p:pic>
-        </mc:Fallback>
-      </mc:AlternateContent>
-      <p:sp>
-        <p:nvSpPr>
-          <p:cNvPr id="9" name="Textfeld 8">
-            <a:extLst>
-              <a:ext uri="{FF2B5EF4-FFF2-40B4-BE49-F238E27FC236}">
-                <a16:creationId xmlns:a16="http://schemas.microsoft.com/office/drawing/2014/main" id="{D7F5AC3B-24D9-F008-6EBF-398E0E8222FD}"/>
-              </a:ext>
-            </a:extLst>
-          </p:cNvPr>
-          <p:cNvSpPr txBox="1"/>
-          <p:nvPr/>
-        </p:nvSpPr>
-        <p:spPr>
-          <a:xfrm>
-            <a:off x="6110991" y="3836598"/>
-            <a:ext cx="6382486" cy="646331"/>
-          </a:xfrm>
-          <a:prstGeom prst="rect">
-            <a:avLst/>
-          </a:prstGeom>
-          <a:noFill/>
-        </p:spPr>
-        <p:txBody>
-          <a:bodyPr wrap="square">
-            <a:spAutoFit/>
-          </a:bodyPr>
-          <a:lstStyle/>
-          <a:p>
-            <a:r>
-              <a:rPr lang="en-GB" dirty="0">
-                <a:hlinkClick r:id="rId5"/>
-              </a:rPr>
-              <a:t>https://www.kaggle.com/datasets/khitdon/foggy-cityscapes-yolo</a:t>
-            </a:r>
-            <a:br>
-              <a:rPr lang="en-GB" dirty="0"/>
-            </a:br>
-            <a:r>
-              <a:rPr lang="en-GB" dirty="0"/>
-              <a:t>3475 images, no source mentioned</a:t>
-            </a:r>
-          </a:p>
-        </p:txBody>
-      </p:sp>
-      <mc:AlternateContent xmlns:mc="http://schemas.openxmlformats.org/markup-compatibility/2006" xmlns:p14="http://schemas.microsoft.com/office/powerpoint/2010/main">
-        <mc:Choice Requires="p14">
-          <p:contentPart p14:bwMode="auto" r:id="rId6">
-            <p14:nvContentPartPr>
-              <p14:cNvPr id="12" name="Freihand 11">
-                <a:extLst>
-                  <a:ext uri="{FF2B5EF4-FFF2-40B4-BE49-F238E27FC236}">
-                    <a16:creationId xmlns:a16="http://schemas.microsoft.com/office/drawing/2014/main" id="{A4169A2D-351B-A392-C991-C01924FB7C50}"/>
-                  </a:ext>
-                </a:extLst>
-              </p14:cNvPr>
-              <p14:cNvContentPartPr/>
-              <p14:nvPr/>
-            </p14:nvContentPartPr>
-            <p14:xfrm>
-              <a:off x="5624168" y="2081591"/>
-              <a:ext cx="625680" cy="601560"/>
-            </p14:xfrm>
-          </p:contentPart>
-        </mc:Choice>
-        <mc:Fallback xmlns="">
-          <p:pic>
-            <p:nvPicPr>
-              <p:cNvPr id="12" name="Freihand 11">
-                <a:extLst>
-                  <a:ext uri="{FF2B5EF4-FFF2-40B4-BE49-F238E27FC236}">
-                    <a16:creationId xmlns:a16="http://schemas.microsoft.com/office/drawing/2014/main" id="{A4169A2D-351B-A392-C991-C01924FB7C50}"/>
-                  </a:ext>
-                </a:extLst>
-              </p:cNvPr>
-              <p:cNvPicPr/>
-              <p:nvPr/>
-            </p:nvPicPr>
-            <p:blipFill>
-              <a:blip r:embed="rId7"/>
-              <a:stretch>
-                <a:fillRect/>
-              </a:stretch>
-            </p:blipFill>
-            <p:spPr>
-              <a:xfrm>
-                <a:off x="5588168" y="2045591"/>
-                <a:ext cx="697320" cy="673200"/>
-              </a:xfrm>
-              <a:prstGeom prst="rect">
-                <a:avLst/>
-              </a:prstGeom>
-            </p:spPr>
-          </p:pic>
-        </mc:Fallback>
-      </mc:AlternateContent>
-      <mc:AlternateContent xmlns:mc="http://schemas.openxmlformats.org/markup-compatibility/2006" xmlns:p14="http://schemas.microsoft.com/office/powerpoint/2010/main">
-        <mc:Choice Requires="p14">
-          <p:contentPart p14:bwMode="auto" r:id="rId8">
-            <p14:nvContentPartPr>
-              <p14:cNvPr id="16" name="Freihand 15">
-                <a:extLst>
-                  <a:ext uri="{FF2B5EF4-FFF2-40B4-BE49-F238E27FC236}">
-                    <a16:creationId xmlns:a16="http://schemas.microsoft.com/office/drawing/2014/main" id="{B5F5003E-E1C5-4824-6C0C-BDD4DEEE3DD5}"/>
-                  </a:ext>
-                </a:extLst>
-              </p14:cNvPr>
-              <p14:cNvContentPartPr/>
-              <p14:nvPr/>
-            </p14:nvContentPartPr>
-            <p14:xfrm>
-              <a:off x="9425768" y="2576231"/>
-              <a:ext cx="563040" cy="842760"/>
-            </p14:xfrm>
-          </p:contentPart>
-        </mc:Choice>
-        <mc:Fallback xmlns="">
-          <p:pic>
-            <p:nvPicPr>
-              <p:cNvPr id="16" name="Freihand 15">
-                <a:extLst>
-                  <a:ext uri="{FF2B5EF4-FFF2-40B4-BE49-F238E27FC236}">
-                    <a16:creationId xmlns:a16="http://schemas.microsoft.com/office/drawing/2014/main" id="{B5F5003E-E1C5-4824-6C0C-BDD4DEEE3DD5}"/>
-                  </a:ext>
-                </a:extLst>
-              </p:cNvPr>
-              <p:cNvPicPr/>
-              <p:nvPr/>
-            </p:nvPicPr>
-            <p:blipFill>
-              <a:blip r:embed="rId9"/>
-              <a:stretch>
-                <a:fillRect/>
-              </a:stretch>
-            </p:blipFill>
-            <p:spPr>
-              <a:xfrm>
-                <a:off x="9390128" y="2540231"/>
-                <a:ext cx="634680" cy="914400"/>
-              </a:xfrm>
-              <a:prstGeom prst="rect">
-                <a:avLst/>
-              </a:prstGeom>
-            </p:spPr>
-          </p:pic>
-        </mc:Fallback>
-      </mc:AlternateContent>
-      <mc:AlternateContent xmlns:mc="http://schemas.openxmlformats.org/markup-compatibility/2006" xmlns:p14="http://schemas.microsoft.com/office/powerpoint/2010/main">
-        <mc:Choice Requires="p14">
-          <p:contentPart p14:bwMode="auto" r:id="rId10">
-            <p14:nvContentPartPr>
-              <p14:cNvPr id="21" name="Freihand 20">
-                <a:extLst>
-                  <a:ext uri="{FF2B5EF4-FFF2-40B4-BE49-F238E27FC236}">
-                    <a16:creationId xmlns:a16="http://schemas.microsoft.com/office/drawing/2014/main" id="{68064145-427D-E778-A818-40D82878A657}"/>
-                  </a:ext>
-                </a:extLst>
-              </p14:cNvPr>
-              <p14:cNvContentPartPr/>
-              <p14:nvPr/>
-            </p14:nvContentPartPr>
-            <p14:xfrm>
-              <a:off x="6214568" y="4312151"/>
-              <a:ext cx="3283200" cy="97560"/>
-            </p14:xfrm>
-          </p:contentPart>
-        </mc:Choice>
-        <mc:Fallback xmlns="">
-          <p:pic>
-            <p:nvPicPr>
-              <p:cNvPr id="21" name="Freihand 20">
-                <a:extLst>
-                  <a:ext uri="{FF2B5EF4-FFF2-40B4-BE49-F238E27FC236}">
-                    <a16:creationId xmlns:a16="http://schemas.microsoft.com/office/drawing/2014/main" id="{68064145-427D-E778-A818-40D82878A657}"/>
-                  </a:ext>
-                </a:extLst>
-              </p:cNvPr>
-              <p:cNvPicPr/>
-              <p:nvPr/>
-            </p:nvPicPr>
-            <p:blipFill>
-              <a:blip r:embed="rId11"/>
-              <a:stretch>
-                <a:fillRect/>
-              </a:stretch>
-            </p:blipFill>
-            <p:spPr>
-              <a:xfrm>
-                <a:off x="6160928" y="4204151"/>
-                <a:ext cx="3390840" cy="313200"/>
-              </a:xfrm>
-              <a:prstGeom prst="rect">
-                <a:avLst/>
-              </a:prstGeom>
-            </p:spPr>
-          </p:pic>
-        </mc:Fallback>
-      </mc:AlternateContent>
-      <p:sp>
-        <p:nvSpPr>
-          <p:cNvPr id="22" name="Textfeld 21">
-            <a:extLst>
-              <a:ext uri="{FF2B5EF4-FFF2-40B4-BE49-F238E27FC236}">
-                <a16:creationId xmlns:a16="http://schemas.microsoft.com/office/drawing/2014/main" id="{F0CDF945-F5E9-5B5C-6C02-BD16D851F206}"/>
-              </a:ext>
-            </a:extLst>
-          </p:cNvPr>
-          <p:cNvSpPr txBox="1"/>
-          <p:nvPr/>
-        </p:nvSpPr>
-        <p:spPr>
-          <a:xfrm>
-            <a:off x="176136" y="1304386"/>
-            <a:ext cx="5160323" cy="646331"/>
-          </a:xfrm>
-          <a:prstGeom prst="rect">
-            <a:avLst/>
-          </a:prstGeom>
-          <a:noFill/>
-        </p:spPr>
-        <p:txBody>
-          <a:bodyPr wrap="none" rtlCol="0">
-            <a:spAutoFit/>
-          </a:bodyPr>
-          <a:lstStyle/>
-          <a:p>
-            <a:r>
-              <a:rPr lang="en-GB" dirty="0"/>
-              <a:t>https://</a:t>
-            </a:r>
-            <a:r>
-              <a:rPr lang="en-GB" dirty="0" err="1"/>
-              <a:t>people.ee.ethz.ch</a:t>
-            </a:r>
-            <a:r>
-              <a:rPr lang="en-GB" dirty="0"/>
-              <a:t>/~</a:t>
-            </a:r>
-            <a:r>
-              <a:rPr lang="en-GB" dirty="0" err="1"/>
-              <a:t>csakarid</a:t>
-            </a:r>
-            <a:r>
-              <a:rPr lang="en-GB" dirty="0"/>
-              <a:t>/</a:t>
-            </a:r>
-            <a:r>
-              <a:rPr lang="en-GB" dirty="0" err="1"/>
-              <a:t>SFSU_synthetic</a:t>
-            </a:r>
-            <a:r>
-              <a:rPr lang="en-GB" dirty="0"/>
-              <a:t>/</a:t>
-            </a:r>
-            <a:br>
-              <a:rPr lang="en-GB" dirty="0"/>
-            </a:br>
-            <a:r>
-              <a:rPr lang="en-GB" dirty="0"/>
-              <a:t>ETH Zürich, Foggy driving, 101 real world images</a:t>
-            </a:r>
-          </a:p>
-        </p:txBody>
-      </p:sp>
-      <p:sp>
-        <p:nvSpPr>
-          <p:cNvPr id="2" name="Textfeld 1">
-            <a:extLst>
-              <a:ext uri="{FF2B5EF4-FFF2-40B4-BE49-F238E27FC236}">
-                <a16:creationId xmlns:a16="http://schemas.microsoft.com/office/drawing/2014/main" id="{B15BFF0B-D470-AD70-644C-10EF4E603BCC}"/>
-              </a:ext>
-            </a:extLst>
-          </p:cNvPr>
-          <p:cNvSpPr txBox="1"/>
-          <p:nvPr/>
-        </p:nvSpPr>
-        <p:spPr>
-          <a:xfrm>
-            <a:off x="1643063" y="5657850"/>
-            <a:ext cx="4605300" cy="369332"/>
-          </a:xfrm>
-          <a:prstGeom prst="rect">
-            <a:avLst/>
-          </a:prstGeom>
-          <a:noFill/>
-        </p:spPr>
-        <p:txBody>
-          <a:bodyPr wrap="none" rtlCol="0">
-            <a:spAutoFit/>
-          </a:bodyPr>
-          <a:lstStyle/>
-          <a:p>
-            <a:r>
-              <a:rPr lang="en-GB" dirty="0"/>
-              <a:t>DAWN:  303 foggy images with bounding boxes</a:t>
-            </a:r>
-          </a:p>
-        </p:txBody>
-      </p:sp>
-    </p:spTree>
-    <p:extLst>
-      <p:ext uri="{BB962C8B-B14F-4D97-AF65-F5344CB8AC3E}">
-        <p14:creationId xmlns:p14="http://schemas.microsoft.com/office/powerpoint/2010/main" val="2690319823"/>
-      </p:ext>
-    </p:extLst>
-  </p:cSld>
-  <p:clrMapOvr>
-    <a:masterClrMapping/>
-  </p:clrMapOvr>
-</p:sld>
-</file>
-
-<file path=ppt/slides/slide6.xml><?xml version="1.0" encoding="utf-8"?>
+<file path=ppt/slides/slide7.xml><?xml version="1.0" encoding="utf-8"?>
 <p:sld xmlns:a="http://schemas.openxmlformats.org/drawingml/2006/main" xmlns:r="http://schemas.openxmlformats.org/officeDocument/2006/relationships" xmlns:p="http://schemas.openxmlformats.org/presentationml/2006/main">
   <p:cSld>
     <p:spTree>
@@ -13790,7 +18728,1576 @@
             <p:ph type="title"/>
           </p:nvPr>
         </p:nvSpPr>
-        <p:spPr/>
+        <p:spPr>
+          <a:xfrm>
+            <a:off x="207333" y="-131558"/>
+            <a:ext cx="10515600" cy="1325563"/>
+          </a:xfrm>
+        </p:spPr>
+        <p:txBody>
+          <a:bodyPr/>
+          <a:lstStyle/>
+          <a:p>
+            <a:r>
+              <a:rPr lang="en-GB" b="1" dirty="0"/>
+              <a:t>Methods</a:t>
+            </a:r>
+          </a:p>
+        </p:txBody>
+      </p:sp>
+      <p:sp>
+        <p:nvSpPr>
+          <p:cNvPr id="8" name="Abgerundetes Rechteck 7">
+            <a:extLst>
+              <a:ext uri="{FF2B5EF4-FFF2-40B4-BE49-F238E27FC236}">
+                <a16:creationId xmlns:a16="http://schemas.microsoft.com/office/drawing/2014/main" id="{629B07C8-B35F-CBA1-30B1-1F22E7C92934}"/>
+              </a:ext>
+            </a:extLst>
+          </p:cNvPr>
+          <p:cNvSpPr/>
+          <p:nvPr/>
+        </p:nvSpPr>
+        <p:spPr>
+          <a:xfrm>
+            <a:off x="6456872" y="4674788"/>
+            <a:ext cx="1358537" cy="770708"/>
+          </a:xfrm>
+          <a:prstGeom prst="roundRect">
+            <a:avLst/>
+          </a:prstGeom>
+        </p:spPr>
+        <p:style>
+          <a:lnRef idx="2">
+            <a:schemeClr val="accent1">
+              <a:shade val="15000"/>
+            </a:schemeClr>
+          </a:lnRef>
+          <a:fillRef idx="1">
+            <a:schemeClr val="accent1"/>
+          </a:fillRef>
+          <a:effectRef idx="0">
+            <a:schemeClr val="accent1"/>
+          </a:effectRef>
+          <a:fontRef idx="minor">
+            <a:schemeClr val="lt1"/>
+          </a:fontRef>
+        </p:style>
+        <p:txBody>
+          <a:bodyPr rtlCol="0" anchor="ctr"/>
+          <a:lstStyle/>
+          <a:p>
+            <a:pPr algn="ctr"/>
+            <a:r>
+              <a:rPr lang="en-GB" dirty="0"/>
+              <a:t>YOLOv11</a:t>
+            </a:r>
+          </a:p>
+          <a:p>
+            <a:pPr algn="ctr"/>
+            <a:r>
+              <a:rPr lang="en-GB" dirty="0"/>
+              <a:t>(</a:t>
+            </a:r>
+            <a:r>
+              <a:rPr lang="en-GB" dirty="0" err="1"/>
+              <a:t>Ultralytics</a:t>
+            </a:r>
+            <a:r>
+              <a:rPr lang="en-GB" dirty="0"/>
+              <a:t>)</a:t>
+            </a:r>
+          </a:p>
+        </p:txBody>
+      </p:sp>
+      <mc:AlternateContent xmlns:mc="http://schemas.openxmlformats.org/markup-compatibility/2006">
+        <mc:Choice xmlns:a14="http://schemas.microsoft.com/office/drawing/2010/main" Requires="a14">
+          <p:sp>
+            <p:nvSpPr>
+              <p:cNvPr id="10" name="Textfeld 9">
+                <a:extLst>
+                  <a:ext uri="{FF2B5EF4-FFF2-40B4-BE49-F238E27FC236}">
+                    <a16:creationId xmlns:a16="http://schemas.microsoft.com/office/drawing/2014/main" id="{51DBF89C-E908-8582-EE3A-B6ED50AEB851}"/>
+                  </a:ext>
+                </a:extLst>
+              </p:cNvPr>
+              <p:cNvSpPr txBox="1"/>
+              <p:nvPr/>
+            </p:nvSpPr>
+            <p:spPr>
+              <a:xfrm>
+                <a:off x="10645158" y="4729968"/>
+                <a:ext cx="746567" cy="553998"/>
+              </a:xfrm>
+              <a:prstGeom prst="rect">
+                <a:avLst/>
+              </a:prstGeom>
+              <a:noFill/>
+            </p:spPr>
+            <p:txBody>
+              <a:bodyPr wrap="square" lIns="0" tIns="0" rIns="0" bIns="0" rtlCol="0">
+                <a:spAutoFit/>
+              </a:bodyPr>
+              <a:lstStyle/>
+              <a:p>
+                <a:pPr/>
+                <a14:m>
+                  <m:oMathPara xmlns:m="http://schemas.openxmlformats.org/officeDocument/2006/math">
+                    <m:oMathParaPr>
+                      <m:jc m:val="centerGroup"/>
+                    </m:oMathParaPr>
+                    <m:oMath xmlns:m="http://schemas.openxmlformats.org/officeDocument/2006/math">
+                      <m:r>
+                        <a:rPr lang="en-GB" sz="3600" i="1" smtClean="0">
+                          <a:latin typeface="Cambria Math" panose="02040503050406030204" pitchFamily="18" charset="0"/>
+                          <a:ea typeface="Cambria Math" panose="02040503050406030204" pitchFamily="18" charset="0"/>
+                        </a:rPr>
+                        <m:t>ℒ</m:t>
+                      </m:r>
+                    </m:oMath>
+                  </m:oMathPara>
+                </a14:m>
+                <a:endParaRPr lang="en-GB" sz="3600" dirty="0"/>
+              </a:p>
+            </p:txBody>
+          </p:sp>
+        </mc:Choice>
+        <mc:Fallback>
+          <p:sp>
+            <p:nvSpPr>
+              <p:cNvPr id="10" name="Textfeld 9">
+                <a:extLst>
+                  <a:ext uri="{FF2B5EF4-FFF2-40B4-BE49-F238E27FC236}">
+                    <a16:creationId xmlns:a16="http://schemas.microsoft.com/office/drawing/2014/main" id="{51DBF89C-E908-8582-EE3A-B6ED50AEB851}"/>
+                  </a:ext>
+                </a:extLst>
+              </p:cNvPr>
+              <p:cNvSpPr txBox="1">
+                <a:spLocks noRot="1" noChangeAspect="1" noMove="1" noResize="1" noEditPoints="1" noAdjustHandles="1" noChangeArrowheads="1" noChangeShapeType="1" noTextEdit="1"/>
+              </p:cNvSpPr>
+              <p:nvPr/>
+            </p:nvSpPr>
+            <p:spPr>
+              <a:xfrm>
+                <a:off x="10645158" y="4729968"/>
+                <a:ext cx="746567" cy="553998"/>
+              </a:xfrm>
+              <a:prstGeom prst="rect">
+                <a:avLst/>
+              </a:prstGeom>
+              <a:blipFill>
+                <a:blip r:embed="rId3"/>
+                <a:stretch>
+                  <a:fillRect b="-4444"/>
+                </a:stretch>
+              </a:blipFill>
+            </p:spPr>
+            <p:txBody>
+              <a:bodyPr/>
+              <a:lstStyle/>
+              <a:p>
+                <a:r>
+                  <a:rPr lang="en-GB">
+                    <a:noFill/>
+                  </a:rPr>
+                  <a:t> </a:t>
+                </a:r>
+              </a:p>
+            </p:txBody>
+          </p:sp>
+        </mc:Fallback>
+      </mc:AlternateContent>
+      <p:pic>
+        <p:nvPicPr>
+          <p:cNvPr id="13" name="Grafik 12">
+            <a:extLst>
+              <a:ext uri="{FF2B5EF4-FFF2-40B4-BE49-F238E27FC236}">
+                <a16:creationId xmlns:a16="http://schemas.microsoft.com/office/drawing/2014/main" id="{5E439152-F239-B9D7-149A-0C25B4C54FE0}"/>
+              </a:ext>
+            </a:extLst>
+          </p:cNvPr>
+          <p:cNvPicPr>
+            <a:picLocks noChangeAspect="1"/>
+          </p:cNvPicPr>
+          <p:nvPr/>
+        </p:nvPicPr>
+        <p:blipFill>
+          <a:blip r:embed="rId4"/>
+          <a:stretch>
+            <a:fillRect/>
+          </a:stretch>
+        </p:blipFill>
+        <p:spPr>
+          <a:xfrm>
+            <a:off x="5384145" y="4627921"/>
+            <a:ext cx="208140" cy="858579"/>
+          </a:xfrm>
+          <a:prstGeom prst="rect">
+            <a:avLst/>
+          </a:prstGeom>
+        </p:spPr>
+      </p:pic>
+      <p:sp>
+        <p:nvSpPr>
+          <p:cNvPr id="14" name="Textfeld 13">
+            <a:extLst>
+              <a:ext uri="{FF2B5EF4-FFF2-40B4-BE49-F238E27FC236}">
+                <a16:creationId xmlns:a16="http://schemas.microsoft.com/office/drawing/2014/main" id="{71CD9407-E5DF-B41C-3F3F-D15274389A24}"/>
+              </a:ext>
+            </a:extLst>
+          </p:cNvPr>
+          <p:cNvSpPr txBox="1"/>
+          <p:nvPr/>
+        </p:nvSpPr>
+        <p:spPr>
+          <a:xfrm>
+            <a:off x="5192300" y="5466401"/>
+            <a:ext cx="591829" cy="369332"/>
+          </a:xfrm>
+          <a:prstGeom prst="rect">
+            <a:avLst/>
+          </a:prstGeom>
+          <a:noFill/>
+        </p:spPr>
+        <p:txBody>
+          <a:bodyPr wrap="none" rtlCol="0">
+            <a:spAutoFit/>
+          </a:bodyPr>
+          <a:lstStyle/>
+          <a:p>
+            <a:r>
+              <a:rPr lang="en-GB" dirty="0"/>
+              <a:t>DOE</a:t>
+            </a:r>
+          </a:p>
+        </p:txBody>
+      </p:sp>
+      <p:cxnSp>
+        <p:nvCxnSpPr>
+          <p:cNvPr id="16" name="Gerade Verbindung mit Pfeil 15">
+            <a:extLst>
+              <a:ext uri="{FF2B5EF4-FFF2-40B4-BE49-F238E27FC236}">
+                <a16:creationId xmlns:a16="http://schemas.microsoft.com/office/drawing/2014/main" id="{0A05233B-C909-1B48-EA0A-364709E8EBF9}"/>
+              </a:ext>
+            </a:extLst>
+          </p:cNvPr>
+          <p:cNvCxnSpPr>
+            <a:cxnSpLocks/>
+          </p:cNvCxnSpPr>
+          <p:nvPr/>
+        </p:nvCxnSpPr>
+        <p:spPr>
+          <a:xfrm>
+            <a:off x="5865561" y="4945644"/>
+            <a:ext cx="468076" cy="0"/>
+          </a:xfrm>
+          <a:prstGeom prst="straightConnector1">
+            <a:avLst/>
+          </a:prstGeom>
+          <a:ln w="25400">
+            <a:solidFill>
+              <a:schemeClr val="tx1"/>
+            </a:solidFill>
+            <a:tailEnd type="triangle"/>
+          </a:ln>
+        </p:spPr>
+        <p:style>
+          <a:lnRef idx="1">
+            <a:schemeClr val="accent1"/>
+          </a:lnRef>
+          <a:fillRef idx="0">
+            <a:schemeClr val="accent1"/>
+          </a:fillRef>
+          <a:effectRef idx="0">
+            <a:schemeClr val="accent1"/>
+          </a:effectRef>
+          <a:fontRef idx="minor">
+            <a:schemeClr val="tx1"/>
+          </a:fontRef>
+        </p:style>
+      </p:cxnSp>
+      <p:cxnSp>
+        <p:nvCxnSpPr>
+          <p:cNvPr id="18" name="Gerade Verbindung mit Pfeil 17">
+            <a:extLst>
+              <a:ext uri="{FF2B5EF4-FFF2-40B4-BE49-F238E27FC236}">
+                <a16:creationId xmlns:a16="http://schemas.microsoft.com/office/drawing/2014/main" id="{48FAB8DC-E884-B4E6-B528-565834E9F502}"/>
+              </a:ext>
+            </a:extLst>
+          </p:cNvPr>
+          <p:cNvCxnSpPr>
+            <a:cxnSpLocks/>
+          </p:cNvCxnSpPr>
+          <p:nvPr/>
+        </p:nvCxnSpPr>
+        <p:spPr>
+          <a:xfrm flipH="1">
+            <a:off x="5865561" y="5089069"/>
+            <a:ext cx="468076" cy="0"/>
+          </a:xfrm>
+          <a:prstGeom prst="straightConnector1">
+            <a:avLst/>
+          </a:prstGeom>
+          <a:ln w="25400">
+            <a:solidFill>
+              <a:schemeClr val="tx1"/>
+            </a:solidFill>
+            <a:tailEnd type="triangle"/>
+          </a:ln>
+        </p:spPr>
+        <p:style>
+          <a:lnRef idx="1">
+            <a:schemeClr val="accent1"/>
+          </a:lnRef>
+          <a:fillRef idx="0">
+            <a:schemeClr val="accent1"/>
+          </a:fillRef>
+          <a:effectRef idx="0">
+            <a:schemeClr val="accent1"/>
+          </a:effectRef>
+          <a:fontRef idx="minor">
+            <a:schemeClr val="tx1"/>
+          </a:fontRef>
+        </p:style>
+      </p:cxnSp>
+      <p:cxnSp>
+        <p:nvCxnSpPr>
+          <p:cNvPr id="25" name="Gerade Verbindung mit Pfeil 24">
+            <a:extLst>
+              <a:ext uri="{FF2B5EF4-FFF2-40B4-BE49-F238E27FC236}">
+                <a16:creationId xmlns:a16="http://schemas.microsoft.com/office/drawing/2014/main" id="{E1E7A2AA-3F9C-7726-593C-717C0E138FBD}"/>
+              </a:ext>
+            </a:extLst>
+          </p:cNvPr>
+          <p:cNvCxnSpPr>
+            <a:cxnSpLocks/>
+          </p:cNvCxnSpPr>
+          <p:nvPr/>
+        </p:nvCxnSpPr>
+        <p:spPr>
+          <a:xfrm>
+            <a:off x="7945372" y="4945644"/>
+            <a:ext cx="468076" cy="0"/>
+          </a:xfrm>
+          <a:prstGeom prst="straightConnector1">
+            <a:avLst/>
+          </a:prstGeom>
+          <a:ln w="25400">
+            <a:solidFill>
+              <a:schemeClr val="tx1"/>
+            </a:solidFill>
+            <a:tailEnd type="triangle"/>
+          </a:ln>
+        </p:spPr>
+        <p:style>
+          <a:lnRef idx="1">
+            <a:schemeClr val="accent1"/>
+          </a:lnRef>
+          <a:fillRef idx="0">
+            <a:schemeClr val="accent1"/>
+          </a:fillRef>
+          <a:effectRef idx="0">
+            <a:schemeClr val="accent1"/>
+          </a:effectRef>
+          <a:fontRef idx="minor">
+            <a:schemeClr val="tx1"/>
+          </a:fontRef>
+        </p:style>
+      </p:cxnSp>
+      <p:cxnSp>
+        <p:nvCxnSpPr>
+          <p:cNvPr id="26" name="Gerade Verbindung mit Pfeil 25">
+            <a:extLst>
+              <a:ext uri="{FF2B5EF4-FFF2-40B4-BE49-F238E27FC236}">
+                <a16:creationId xmlns:a16="http://schemas.microsoft.com/office/drawing/2014/main" id="{506B8BC7-DFB3-8EDF-C2F8-A4A155FE558C}"/>
+              </a:ext>
+            </a:extLst>
+          </p:cNvPr>
+          <p:cNvCxnSpPr>
+            <a:cxnSpLocks/>
+          </p:cNvCxnSpPr>
+          <p:nvPr/>
+        </p:nvCxnSpPr>
+        <p:spPr>
+          <a:xfrm flipH="1">
+            <a:off x="7945372" y="5089069"/>
+            <a:ext cx="468076" cy="0"/>
+          </a:xfrm>
+          <a:prstGeom prst="straightConnector1">
+            <a:avLst/>
+          </a:prstGeom>
+          <a:ln w="25400">
+            <a:solidFill>
+              <a:schemeClr val="tx1"/>
+            </a:solidFill>
+            <a:tailEnd type="triangle"/>
+          </a:ln>
+        </p:spPr>
+        <p:style>
+          <a:lnRef idx="1">
+            <a:schemeClr val="accent1"/>
+          </a:lnRef>
+          <a:fillRef idx="0">
+            <a:schemeClr val="accent1"/>
+          </a:fillRef>
+          <a:effectRef idx="0">
+            <a:schemeClr val="accent1"/>
+          </a:effectRef>
+          <a:fontRef idx="minor">
+            <a:schemeClr val="tx1"/>
+          </a:fontRef>
+        </p:style>
+      </p:cxnSp>
+      <p:pic>
+        <p:nvPicPr>
+          <p:cNvPr id="27" name="Grafik 26">
+            <a:extLst>
+              <a:ext uri="{FF2B5EF4-FFF2-40B4-BE49-F238E27FC236}">
+                <a16:creationId xmlns:a16="http://schemas.microsoft.com/office/drawing/2014/main" id="{3D96529C-2C6F-3207-38E9-A5F7C113FD90}"/>
+              </a:ext>
+            </a:extLst>
+          </p:cNvPr>
+          <p:cNvPicPr>
+            <a:picLocks noChangeAspect="1"/>
+          </p:cNvPicPr>
+          <p:nvPr/>
+        </p:nvPicPr>
+        <p:blipFill rotWithShape="1">
+          <a:blip r:embed="rId5"/>
+          <a:srcRect l="7964" t="3980" r="1224" b="8871"/>
+          <a:stretch/>
+        </p:blipFill>
+        <p:spPr>
+          <a:xfrm>
+            <a:off x="8503466" y="4521526"/>
+            <a:ext cx="1686976" cy="1108636"/>
+          </a:xfrm>
+          <a:prstGeom prst="rect">
+            <a:avLst/>
+          </a:prstGeom>
+        </p:spPr>
+      </p:pic>
+      <p:sp>
+        <p:nvSpPr>
+          <p:cNvPr id="28" name="Textfeld 27">
+            <a:extLst>
+              <a:ext uri="{FF2B5EF4-FFF2-40B4-BE49-F238E27FC236}">
+                <a16:creationId xmlns:a16="http://schemas.microsoft.com/office/drawing/2014/main" id="{0FE0B056-850C-2C0C-4E0B-F1D650AD96C2}"/>
+              </a:ext>
+            </a:extLst>
+          </p:cNvPr>
+          <p:cNvSpPr txBox="1"/>
+          <p:nvPr/>
+        </p:nvSpPr>
+        <p:spPr>
+          <a:xfrm>
+            <a:off x="8776028" y="4190573"/>
+            <a:ext cx="1102674" cy="369332"/>
+          </a:xfrm>
+          <a:prstGeom prst="rect">
+            <a:avLst/>
+          </a:prstGeom>
+          <a:noFill/>
+        </p:spPr>
+        <p:txBody>
+          <a:bodyPr wrap="none" rtlCol="0">
+            <a:spAutoFit/>
+          </a:bodyPr>
+          <a:lstStyle/>
+          <a:p>
+            <a:r>
+              <a:rPr lang="en-GB" dirty="0"/>
+              <a:t>Detection</a:t>
+            </a:r>
+          </a:p>
+        </p:txBody>
+      </p:sp>
+      <p:cxnSp>
+        <p:nvCxnSpPr>
+          <p:cNvPr id="29" name="Gerade Verbindung mit Pfeil 28">
+            <a:extLst>
+              <a:ext uri="{FF2B5EF4-FFF2-40B4-BE49-F238E27FC236}">
+                <a16:creationId xmlns:a16="http://schemas.microsoft.com/office/drawing/2014/main" id="{D470A574-5B10-0EDE-2260-384A6C921B37}"/>
+              </a:ext>
+            </a:extLst>
+          </p:cNvPr>
+          <p:cNvCxnSpPr>
+            <a:cxnSpLocks/>
+          </p:cNvCxnSpPr>
+          <p:nvPr/>
+        </p:nvCxnSpPr>
+        <p:spPr>
+          <a:xfrm>
+            <a:off x="10254857" y="4894637"/>
+            <a:ext cx="468076" cy="0"/>
+          </a:xfrm>
+          <a:prstGeom prst="straightConnector1">
+            <a:avLst/>
+          </a:prstGeom>
+          <a:ln w="25400">
+            <a:solidFill>
+              <a:schemeClr val="tx1"/>
+            </a:solidFill>
+            <a:tailEnd type="triangle"/>
+          </a:ln>
+        </p:spPr>
+        <p:style>
+          <a:lnRef idx="1">
+            <a:schemeClr val="accent1"/>
+          </a:lnRef>
+          <a:fillRef idx="0">
+            <a:schemeClr val="accent1"/>
+          </a:fillRef>
+          <a:effectRef idx="0">
+            <a:schemeClr val="accent1"/>
+          </a:effectRef>
+          <a:fontRef idx="minor">
+            <a:schemeClr val="tx1"/>
+          </a:fontRef>
+        </p:style>
+      </p:cxnSp>
+      <p:cxnSp>
+        <p:nvCxnSpPr>
+          <p:cNvPr id="30" name="Gerade Verbindung mit Pfeil 29">
+            <a:extLst>
+              <a:ext uri="{FF2B5EF4-FFF2-40B4-BE49-F238E27FC236}">
+                <a16:creationId xmlns:a16="http://schemas.microsoft.com/office/drawing/2014/main" id="{5D9D37F8-C4B6-47F4-E6D2-9FFC0866FB2A}"/>
+              </a:ext>
+            </a:extLst>
+          </p:cNvPr>
+          <p:cNvCxnSpPr>
+            <a:cxnSpLocks/>
+          </p:cNvCxnSpPr>
+          <p:nvPr/>
+        </p:nvCxnSpPr>
+        <p:spPr>
+          <a:xfrm flipH="1">
+            <a:off x="10254857" y="5038062"/>
+            <a:ext cx="468076" cy="0"/>
+          </a:xfrm>
+          <a:prstGeom prst="straightConnector1">
+            <a:avLst/>
+          </a:prstGeom>
+          <a:ln w="25400">
+            <a:solidFill>
+              <a:schemeClr val="tx1"/>
+            </a:solidFill>
+            <a:tailEnd type="triangle"/>
+          </a:ln>
+        </p:spPr>
+        <p:style>
+          <a:lnRef idx="1">
+            <a:schemeClr val="accent1"/>
+          </a:lnRef>
+          <a:fillRef idx="0">
+            <a:schemeClr val="accent1"/>
+          </a:fillRef>
+          <a:effectRef idx="0">
+            <a:schemeClr val="accent1"/>
+          </a:effectRef>
+          <a:fontRef idx="minor">
+            <a:schemeClr val="tx1"/>
+          </a:fontRef>
+        </p:style>
+      </p:cxnSp>
+      <p:sp>
+        <p:nvSpPr>
+          <p:cNvPr id="31" name="Textfeld 30">
+            <a:extLst>
+              <a:ext uri="{FF2B5EF4-FFF2-40B4-BE49-F238E27FC236}">
+                <a16:creationId xmlns:a16="http://schemas.microsoft.com/office/drawing/2014/main" id="{9486F0AA-E956-7CA3-20F7-9D6BC9E8DEC9}"/>
+              </a:ext>
+            </a:extLst>
+          </p:cNvPr>
+          <p:cNvSpPr txBox="1"/>
+          <p:nvPr/>
+        </p:nvSpPr>
+        <p:spPr>
+          <a:xfrm>
+            <a:off x="10726534" y="4211029"/>
+            <a:ext cx="583814" cy="369332"/>
+          </a:xfrm>
+          <a:prstGeom prst="rect">
+            <a:avLst/>
+          </a:prstGeom>
+          <a:noFill/>
+        </p:spPr>
+        <p:txBody>
+          <a:bodyPr wrap="none" rtlCol="0">
+            <a:spAutoFit/>
+          </a:bodyPr>
+          <a:lstStyle/>
+          <a:p>
+            <a:r>
+              <a:rPr lang="en-GB" dirty="0"/>
+              <a:t>Loss</a:t>
+            </a:r>
+          </a:p>
+        </p:txBody>
+      </p:sp>
+      <mc:AlternateContent xmlns:mc="http://schemas.openxmlformats.org/markup-compatibility/2006" xmlns:a14="http://schemas.microsoft.com/office/drawing/2010/main">
+        <mc:Choice Requires="a14">
+          <p:sp>
+            <p:nvSpPr>
+              <p:cNvPr id="32" name="Textfeld 31">
+                <a:extLst>
+                  <a:ext uri="{FF2B5EF4-FFF2-40B4-BE49-F238E27FC236}">
+                    <a16:creationId xmlns:a16="http://schemas.microsoft.com/office/drawing/2014/main" id="{CAD93931-F379-E682-81F3-58CB32671CDA}"/>
+                  </a:ext>
+                </a:extLst>
+              </p:cNvPr>
+              <p:cNvSpPr txBox="1"/>
+              <p:nvPr/>
+            </p:nvSpPr>
+            <p:spPr>
+              <a:xfrm>
+                <a:off x="4902032" y="4760593"/>
+                <a:ext cx="327013" cy="553998"/>
+              </a:xfrm>
+              <a:prstGeom prst="rect">
+                <a:avLst/>
+              </a:prstGeom>
+              <a:noFill/>
+            </p:spPr>
+            <p:txBody>
+              <a:bodyPr wrap="none" lIns="0" tIns="0" rIns="0" bIns="0" rtlCol="0">
+                <a:spAutoFit/>
+              </a:bodyPr>
+              <a:lstStyle/>
+              <a:p>
+                <a:pPr/>
+                <a14:m>
+                  <m:oMathPara xmlns:m="http://schemas.openxmlformats.org/officeDocument/2006/math">
+                    <m:oMathParaPr>
+                      <m:jc m:val="centerGroup"/>
+                    </m:oMathParaPr>
+                    <m:oMath xmlns:m="http://schemas.openxmlformats.org/officeDocument/2006/math">
+                      <m:r>
+                        <a:rPr lang="en-GB" sz="3600" i="1" smtClean="0">
+                          <a:latin typeface="Cambria Math" panose="02040503050406030204" pitchFamily="18" charset="0"/>
+                          <a:ea typeface="Cambria Math" panose="02040503050406030204" pitchFamily="18" charset="0"/>
+                        </a:rPr>
+                        <m:t>∗</m:t>
+                      </m:r>
+                    </m:oMath>
+                  </m:oMathPara>
+                </a14:m>
+                <a:endParaRPr lang="en-GB" sz="2800" dirty="0"/>
+              </a:p>
+            </p:txBody>
+          </p:sp>
+        </mc:Choice>
+        <mc:Fallback xmlns="">
+          <p:sp>
+            <p:nvSpPr>
+              <p:cNvPr id="32" name="Textfeld 31">
+                <a:extLst>
+                  <a:ext uri="{FF2B5EF4-FFF2-40B4-BE49-F238E27FC236}">
+                    <a16:creationId xmlns:a16="http://schemas.microsoft.com/office/drawing/2014/main" id="{CAD93931-F379-E682-81F3-58CB32671CDA}"/>
+                  </a:ext>
+                </a:extLst>
+              </p:cNvPr>
+              <p:cNvSpPr txBox="1">
+                <a:spLocks noRot="1" noChangeAspect="1" noMove="1" noResize="1" noEditPoints="1" noAdjustHandles="1" noChangeArrowheads="1" noChangeShapeType="1" noTextEdit="1"/>
+              </p:cNvSpPr>
+              <p:nvPr/>
+            </p:nvSpPr>
+            <p:spPr>
+              <a:xfrm>
+                <a:off x="4902032" y="4760593"/>
+                <a:ext cx="327013" cy="553998"/>
+              </a:xfrm>
+              <a:prstGeom prst="rect">
+                <a:avLst/>
+              </a:prstGeom>
+              <a:blipFill>
+                <a:blip r:embed="rId10"/>
+                <a:stretch>
+                  <a:fillRect l="-14815" r="-18519"/>
+                </a:stretch>
+              </a:blipFill>
+            </p:spPr>
+            <p:txBody>
+              <a:bodyPr/>
+              <a:lstStyle/>
+              <a:p>
+                <a:r>
+                  <a:rPr lang="en-GB">
+                    <a:noFill/>
+                  </a:rPr>
+                  <a:t> </a:t>
+                </a:r>
+              </a:p>
+            </p:txBody>
+          </p:sp>
+        </mc:Fallback>
+      </mc:AlternateContent>
+      <p:sp>
+        <p:nvSpPr>
+          <p:cNvPr id="33" name="Abgerundetes Rechteck 32">
+            <a:extLst>
+              <a:ext uri="{FF2B5EF4-FFF2-40B4-BE49-F238E27FC236}">
+                <a16:creationId xmlns:a16="http://schemas.microsoft.com/office/drawing/2014/main" id="{17999D2D-9DBB-0673-E7DC-FF91847A4F44}"/>
+              </a:ext>
+            </a:extLst>
+          </p:cNvPr>
+          <p:cNvSpPr/>
+          <p:nvPr/>
+        </p:nvSpPr>
+        <p:spPr>
+          <a:xfrm>
+            <a:off x="6002156" y="1973200"/>
+            <a:ext cx="1358537" cy="770708"/>
+          </a:xfrm>
+          <a:prstGeom prst="roundRect">
+            <a:avLst/>
+          </a:prstGeom>
+        </p:spPr>
+        <p:style>
+          <a:lnRef idx="2">
+            <a:schemeClr val="accent1">
+              <a:shade val="15000"/>
+            </a:schemeClr>
+          </a:lnRef>
+          <a:fillRef idx="1">
+            <a:schemeClr val="accent1"/>
+          </a:fillRef>
+          <a:effectRef idx="0">
+            <a:schemeClr val="accent1"/>
+          </a:effectRef>
+          <a:fontRef idx="minor">
+            <a:schemeClr val="lt1"/>
+          </a:fontRef>
+        </p:style>
+        <p:txBody>
+          <a:bodyPr rtlCol="0" anchor="ctr"/>
+          <a:lstStyle/>
+          <a:p>
+            <a:pPr algn="ctr"/>
+            <a:r>
+              <a:rPr lang="en-GB" dirty="0"/>
+              <a:t>YOLOv11</a:t>
+            </a:r>
+          </a:p>
+          <a:p>
+            <a:pPr algn="ctr"/>
+            <a:r>
+              <a:rPr lang="en-GB" dirty="0"/>
+              <a:t>(</a:t>
+            </a:r>
+            <a:r>
+              <a:rPr lang="en-GB" dirty="0" err="1"/>
+              <a:t>Ultralytics</a:t>
+            </a:r>
+            <a:r>
+              <a:rPr lang="en-GB" dirty="0"/>
+              <a:t>)</a:t>
+            </a:r>
+          </a:p>
+        </p:txBody>
+      </p:sp>
+      <mc:AlternateContent xmlns:mc="http://schemas.openxmlformats.org/markup-compatibility/2006">
+        <mc:Choice xmlns:a14="http://schemas.microsoft.com/office/drawing/2010/main" Requires="a14">
+          <p:sp>
+            <p:nvSpPr>
+              <p:cNvPr id="34" name="Textfeld 33">
+                <a:extLst>
+                  <a:ext uri="{FF2B5EF4-FFF2-40B4-BE49-F238E27FC236}">
+                    <a16:creationId xmlns:a16="http://schemas.microsoft.com/office/drawing/2014/main" id="{844DDD49-29A1-D7F5-4D40-D7FF57C75E89}"/>
+                  </a:ext>
+                </a:extLst>
+              </p:cNvPr>
+              <p:cNvSpPr txBox="1"/>
+              <p:nvPr/>
+            </p:nvSpPr>
+            <p:spPr>
+              <a:xfrm>
+                <a:off x="10190442" y="2028380"/>
+                <a:ext cx="746567" cy="553998"/>
+              </a:xfrm>
+              <a:prstGeom prst="rect">
+                <a:avLst/>
+              </a:prstGeom>
+              <a:noFill/>
+            </p:spPr>
+            <p:txBody>
+              <a:bodyPr wrap="square" lIns="0" tIns="0" rIns="0" bIns="0" rtlCol="0">
+                <a:spAutoFit/>
+              </a:bodyPr>
+              <a:lstStyle/>
+              <a:p>
+                <a:pPr/>
+                <a14:m>
+                  <m:oMathPara xmlns:m="http://schemas.openxmlformats.org/officeDocument/2006/math">
+                    <m:oMathParaPr>
+                      <m:jc m:val="centerGroup"/>
+                    </m:oMathParaPr>
+                    <m:oMath xmlns:m="http://schemas.openxmlformats.org/officeDocument/2006/math">
+                      <m:r>
+                        <a:rPr lang="en-GB" sz="3600" i="1" smtClean="0">
+                          <a:latin typeface="Cambria Math" panose="02040503050406030204" pitchFamily="18" charset="0"/>
+                          <a:ea typeface="Cambria Math" panose="02040503050406030204" pitchFamily="18" charset="0"/>
+                        </a:rPr>
+                        <m:t>ℒ</m:t>
+                      </m:r>
+                    </m:oMath>
+                  </m:oMathPara>
+                </a14:m>
+                <a:endParaRPr lang="en-GB" sz="3600" dirty="0"/>
+              </a:p>
+            </p:txBody>
+          </p:sp>
+        </mc:Choice>
+        <mc:Fallback>
+          <p:sp>
+            <p:nvSpPr>
+              <p:cNvPr id="34" name="Textfeld 33">
+                <a:extLst>
+                  <a:ext uri="{FF2B5EF4-FFF2-40B4-BE49-F238E27FC236}">
+                    <a16:creationId xmlns:a16="http://schemas.microsoft.com/office/drawing/2014/main" id="{844DDD49-29A1-D7F5-4D40-D7FF57C75E89}"/>
+                  </a:ext>
+                </a:extLst>
+              </p:cNvPr>
+              <p:cNvSpPr txBox="1">
+                <a:spLocks noRot="1" noChangeAspect="1" noMove="1" noResize="1" noEditPoints="1" noAdjustHandles="1" noChangeArrowheads="1" noChangeShapeType="1" noTextEdit="1"/>
+              </p:cNvSpPr>
+              <p:nvPr/>
+            </p:nvSpPr>
+            <p:spPr>
+              <a:xfrm>
+                <a:off x="10190442" y="2028380"/>
+                <a:ext cx="746567" cy="553998"/>
+              </a:xfrm>
+              <a:prstGeom prst="rect">
+                <a:avLst/>
+              </a:prstGeom>
+              <a:blipFill>
+                <a:blip r:embed="rId3"/>
+                <a:stretch>
+                  <a:fillRect b="-4444"/>
+                </a:stretch>
+              </a:blipFill>
+            </p:spPr>
+            <p:txBody>
+              <a:bodyPr/>
+              <a:lstStyle/>
+              <a:p>
+                <a:r>
+                  <a:rPr lang="en-GB">
+                    <a:noFill/>
+                  </a:rPr>
+                  <a:t> </a:t>
+                </a:r>
+              </a:p>
+            </p:txBody>
+          </p:sp>
+        </mc:Fallback>
+      </mc:AlternateContent>
+      <p:cxnSp>
+        <p:nvCxnSpPr>
+          <p:cNvPr id="37" name="Gerade Verbindung mit Pfeil 36">
+            <a:extLst>
+              <a:ext uri="{FF2B5EF4-FFF2-40B4-BE49-F238E27FC236}">
+                <a16:creationId xmlns:a16="http://schemas.microsoft.com/office/drawing/2014/main" id="{9BFF39BE-F38D-D50A-FFB9-7006ACD1416C}"/>
+              </a:ext>
+            </a:extLst>
+          </p:cNvPr>
+          <p:cNvCxnSpPr>
+            <a:cxnSpLocks/>
+          </p:cNvCxnSpPr>
+          <p:nvPr/>
+        </p:nvCxnSpPr>
+        <p:spPr>
+          <a:xfrm>
+            <a:off x="5410845" y="2244056"/>
+            <a:ext cx="468076" cy="0"/>
+          </a:xfrm>
+          <a:prstGeom prst="straightConnector1">
+            <a:avLst/>
+          </a:prstGeom>
+          <a:ln w="25400">
+            <a:solidFill>
+              <a:schemeClr val="tx1"/>
+            </a:solidFill>
+            <a:tailEnd type="triangle"/>
+          </a:ln>
+        </p:spPr>
+        <p:style>
+          <a:lnRef idx="1">
+            <a:schemeClr val="accent1"/>
+          </a:lnRef>
+          <a:fillRef idx="0">
+            <a:schemeClr val="accent1"/>
+          </a:fillRef>
+          <a:effectRef idx="0">
+            <a:schemeClr val="accent1"/>
+          </a:effectRef>
+          <a:fontRef idx="minor">
+            <a:schemeClr val="tx1"/>
+          </a:fontRef>
+        </p:style>
+      </p:cxnSp>
+      <p:cxnSp>
+        <p:nvCxnSpPr>
+          <p:cNvPr id="38" name="Gerade Verbindung mit Pfeil 37">
+            <a:extLst>
+              <a:ext uri="{FF2B5EF4-FFF2-40B4-BE49-F238E27FC236}">
+                <a16:creationId xmlns:a16="http://schemas.microsoft.com/office/drawing/2014/main" id="{1D37E778-9A21-ADAD-44DF-8E57E143840D}"/>
+              </a:ext>
+            </a:extLst>
+          </p:cNvPr>
+          <p:cNvCxnSpPr>
+            <a:cxnSpLocks/>
+          </p:cNvCxnSpPr>
+          <p:nvPr/>
+        </p:nvCxnSpPr>
+        <p:spPr>
+          <a:xfrm flipH="1">
+            <a:off x="5410845" y="2387481"/>
+            <a:ext cx="468076" cy="0"/>
+          </a:xfrm>
+          <a:prstGeom prst="straightConnector1">
+            <a:avLst/>
+          </a:prstGeom>
+          <a:ln w="25400">
+            <a:solidFill>
+              <a:schemeClr val="tx1"/>
+            </a:solidFill>
+            <a:tailEnd type="triangle"/>
+          </a:ln>
+        </p:spPr>
+        <p:style>
+          <a:lnRef idx="1">
+            <a:schemeClr val="accent1"/>
+          </a:lnRef>
+          <a:fillRef idx="0">
+            <a:schemeClr val="accent1"/>
+          </a:fillRef>
+          <a:effectRef idx="0">
+            <a:schemeClr val="accent1"/>
+          </a:effectRef>
+          <a:fontRef idx="minor">
+            <a:schemeClr val="tx1"/>
+          </a:fontRef>
+        </p:style>
+      </p:cxnSp>
+      <p:cxnSp>
+        <p:nvCxnSpPr>
+          <p:cNvPr id="39" name="Gerade Verbindung mit Pfeil 38">
+            <a:extLst>
+              <a:ext uri="{FF2B5EF4-FFF2-40B4-BE49-F238E27FC236}">
+                <a16:creationId xmlns:a16="http://schemas.microsoft.com/office/drawing/2014/main" id="{25F2A2D8-6152-A7C8-A7EE-1DE061208011}"/>
+              </a:ext>
+            </a:extLst>
+          </p:cNvPr>
+          <p:cNvCxnSpPr>
+            <a:cxnSpLocks/>
+          </p:cNvCxnSpPr>
+          <p:nvPr/>
+        </p:nvCxnSpPr>
+        <p:spPr>
+          <a:xfrm>
+            <a:off x="7490656" y="2244056"/>
+            <a:ext cx="468076" cy="0"/>
+          </a:xfrm>
+          <a:prstGeom prst="straightConnector1">
+            <a:avLst/>
+          </a:prstGeom>
+          <a:ln w="25400">
+            <a:solidFill>
+              <a:schemeClr val="tx1"/>
+            </a:solidFill>
+            <a:tailEnd type="triangle"/>
+          </a:ln>
+        </p:spPr>
+        <p:style>
+          <a:lnRef idx="1">
+            <a:schemeClr val="accent1"/>
+          </a:lnRef>
+          <a:fillRef idx="0">
+            <a:schemeClr val="accent1"/>
+          </a:fillRef>
+          <a:effectRef idx="0">
+            <a:schemeClr val="accent1"/>
+          </a:effectRef>
+          <a:fontRef idx="minor">
+            <a:schemeClr val="tx1"/>
+          </a:fontRef>
+        </p:style>
+      </p:cxnSp>
+      <p:cxnSp>
+        <p:nvCxnSpPr>
+          <p:cNvPr id="40" name="Gerade Verbindung mit Pfeil 39">
+            <a:extLst>
+              <a:ext uri="{FF2B5EF4-FFF2-40B4-BE49-F238E27FC236}">
+                <a16:creationId xmlns:a16="http://schemas.microsoft.com/office/drawing/2014/main" id="{3596E81F-CA31-82B7-AF36-E6ADE16F82DA}"/>
+              </a:ext>
+            </a:extLst>
+          </p:cNvPr>
+          <p:cNvCxnSpPr>
+            <a:cxnSpLocks/>
+          </p:cNvCxnSpPr>
+          <p:nvPr/>
+        </p:nvCxnSpPr>
+        <p:spPr>
+          <a:xfrm flipH="1">
+            <a:off x="7490656" y="2387481"/>
+            <a:ext cx="468076" cy="0"/>
+          </a:xfrm>
+          <a:prstGeom prst="straightConnector1">
+            <a:avLst/>
+          </a:prstGeom>
+          <a:ln w="25400">
+            <a:solidFill>
+              <a:schemeClr val="tx1"/>
+            </a:solidFill>
+            <a:tailEnd type="triangle"/>
+          </a:ln>
+        </p:spPr>
+        <p:style>
+          <a:lnRef idx="1">
+            <a:schemeClr val="accent1"/>
+          </a:lnRef>
+          <a:fillRef idx="0">
+            <a:schemeClr val="accent1"/>
+          </a:fillRef>
+          <a:effectRef idx="0">
+            <a:schemeClr val="accent1"/>
+          </a:effectRef>
+          <a:fontRef idx="minor">
+            <a:schemeClr val="tx1"/>
+          </a:fontRef>
+        </p:style>
+      </p:cxnSp>
+      <p:pic>
+        <p:nvPicPr>
+          <p:cNvPr id="41" name="Grafik 40">
+            <a:extLst>
+              <a:ext uri="{FF2B5EF4-FFF2-40B4-BE49-F238E27FC236}">
+                <a16:creationId xmlns:a16="http://schemas.microsoft.com/office/drawing/2014/main" id="{F91AEE5D-F824-9FDE-7B1F-8F2C6D488F42}"/>
+              </a:ext>
+            </a:extLst>
+          </p:cNvPr>
+          <p:cNvPicPr>
+            <a:picLocks noChangeAspect="1"/>
+          </p:cNvPicPr>
+          <p:nvPr/>
+        </p:nvPicPr>
+        <p:blipFill rotWithShape="1">
+          <a:blip r:embed="rId5"/>
+          <a:srcRect l="7964" t="3980" r="1224" b="8871"/>
+          <a:stretch/>
+        </p:blipFill>
+        <p:spPr>
+          <a:xfrm>
+            <a:off x="8048750" y="1819938"/>
+            <a:ext cx="1686976" cy="1108636"/>
+          </a:xfrm>
+          <a:prstGeom prst="rect">
+            <a:avLst/>
+          </a:prstGeom>
+        </p:spPr>
+      </p:pic>
+      <p:sp>
+        <p:nvSpPr>
+          <p:cNvPr id="42" name="Textfeld 41">
+            <a:extLst>
+              <a:ext uri="{FF2B5EF4-FFF2-40B4-BE49-F238E27FC236}">
+                <a16:creationId xmlns:a16="http://schemas.microsoft.com/office/drawing/2014/main" id="{F6A59788-9990-AF74-210A-C623492A4D82}"/>
+              </a:ext>
+            </a:extLst>
+          </p:cNvPr>
+          <p:cNvSpPr txBox="1"/>
+          <p:nvPr/>
+        </p:nvSpPr>
+        <p:spPr>
+          <a:xfrm>
+            <a:off x="8321312" y="1488985"/>
+            <a:ext cx="1102674" cy="369332"/>
+          </a:xfrm>
+          <a:prstGeom prst="rect">
+            <a:avLst/>
+          </a:prstGeom>
+          <a:noFill/>
+        </p:spPr>
+        <p:txBody>
+          <a:bodyPr wrap="none" rtlCol="0">
+            <a:spAutoFit/>
+          </a:bodyPr>
+          <a:lstStyle/>
+          <a:p>
+            <a:r>
+              <a:rPr lang="en-GB" dirty="0"/>
+              <a:t>Detection</a:t>
+            </a:r>
+          </a:p>
+        </p:txBody>
+      </p:sp>
+      <p:cxnSp>
+        <p:nvCxnSpPr>
+          <p:cNvPr id="43" name="Gerade Verbindung mit Pfeil 42">
+            <a:extLst>
+              <a:ext uri="{FF2B5EF4-FFF2-40B4-BE49-F238E27FC236}">
+                <a16:creationId xmlns:a16="http://schemas.microsoft.com/office/drawing/2014/main" id="{72E96A3A-8706-3995-A734-E497D40E4877}"/>
+              </a:ext>
+            </a:extLst>
+          </p:cNvPr>
+          <p:cNvCxnSpPr>
+            <a:cxnSpLocks/>
+          </p:cNvCxnSpPr>
+          <p:nvPr/>
+        </p:nvCxnSpPr>
+        <p:spPr>
+          <a:xfrm>
+            <a:off x="9800141" y="2193049"/>
+            <a:ext cx="468076" cy="0"/>
+          </a:xfrm>
+          <a:prstGeom prst="straightConnector1">
+            <a:avLst/>
+          </a:prstGeom>
+          <a:ln w="25400">
+            <a:solidFill>
+              <a:schemeClr val="tx1"/>
+            </a:solidFill>
+            <a:tailEnd type="triangle"/>
+          </a:ln>
+        </p:spPr>
+        <p:style>
+          <a:lnRef idx="1">
+            <a:schemeClr val="accent1"/>
+          </a:lnRef>
+          <a:fillRef idx="0">
+            <a:schemeClr val="accent1"/>
+          </a:fillRef>
+          <a:effectRef idx="0">
+            <a:schemeClr val="accent1"/>
+          </a:effectRef>
+          <a:fontRef idx="minor">
+            <a:schemeClr val="tx1"/>
+          </a:fontRef>
+        </p:style>
+      </p:cxnSp>
+      <p:cxnSp>
+        <p:nvCxnSpPr>
+          <p:cNvPr id="44" name="Gerade Verbindung mit Pfeil 43">
+            <a:extLst>
+              <a:ext uri="{FF2B5EF4-FFF2-40B4-BE49-F238E27FC236}">
+                <a16:creationId xmlns:a16="http://schemas.microsoft.com/office/drawing/2014/main" id="{4CE77ECB-FEFE-814B-59DD-A756DC0AE2B2}"/>
+              </a:ext>
+            </a:extLst>
+          </p:cNvPr>
+          <p:cNvCxnSpPr>
+            <a:cxnSpLocks/>
+          </p:cNvCxnSpPr>
+          <p:nvPr/>
+        </p:nvCxnSpPr>
+        <p:spPr>
+          <a:xfrm flipH="1">
+            <a:off x="9800141" y="2336474"/>
+            <a:ext cx="468076" cy="0"/>
+          </a:xfrm>
+          <a:prstGeom prst="straightConnector1">
+            <a:avLst/>
+          </a:prstGeom>
+          <a:ln w="25400">
+            <a:solidFill>
+              <a:schemeClr val="tx1"/>
+            </a:solidFill>
+            <a:tailEnd type="triangle"/>
+          </a:ln>
+        </p:spPr>
+        <p:style>
+          <a:lnRef idx="1">
+            <a:schemeClr val="accent1"/>
+          </a:lnRef>
+          <a:fillRef idx="0">
+            <a:schemeClr val="accent1"/>
+          </a:fillRef>
+          <a:effectRef idx="0">
+            <a:schemeClr val="accent1"/>
+          </a:effectRef>
+          <a:fontRef idx="minor">
+            <a:schemeClr val="tx1"/>
+          </a:fontRef>
+        </p:style>
+      </p:cxnSp>
+      <p:sp>
+        <p:nvSpPr>
+          <p:cNvPr id="45" name="Textfeld 44">
+            <a:extLst>
+              <a:ext uri="{FF2B5EF4-FFF2-40B4-BE49-F238E27FC236}">
+                <a16:creationId xmlns:a16="http://schemas.microsoft.com/office/drawing/2014/main" id="{5DED5501-1C20-229C-FA17-9D4409B8DAED}"/>
+              </a:ext>
+            </a:extLst>
+          </p:cNvPr>
+          <p:cNvSpPr txBox="1"/>
+          <p:nvPr/>
+        </p:nvSpPr>
+        <p:spPr>
+          <a:xfrm>
+            <a:off x="10271818" y="1509441"/>
+            <a:ext cx="583814" cy="369332"/>
+          </a:xfrm>
+          <a:prstGeom prst="rect">
+            <a:avLst/>
+          </a:prstGeom>
+          <a:noFill/>
+        </p:spPr>
+        <p:txBody>
+          <a:bodyPr wrap="none" rtlCol="0">
+            <a:spAutoFit/>
+          </a:bodyPr>
+          <a:lstStyle/>
+          <a:p>
+            <a:r>
+              <a:rPr lang="en-GB" dirty="0"/>
+              <a:t>Loss</a:t>
+            </a:r>
+          </a:p>
+        </p:txBody>
+      </p:sp>
+      <p:sp>
+        <p:nvSpPr>
+          <p:cNvPr id="48" name="Textfeld 47">
+            <a:extLst>
+              <a:ext uri="{FF2B5EF4-FFF2-40B4-BE49-F238E27FC236}">
+                <a16:creationId xmlns:a16="http://schemas.microsoft.com/office/drawing/2014/main" id="{D1EB607B-E229-CECC-D8A1-F391AEFED447}"/>
+              </a:ext>
+            </a:extLst>
+          </p:cNvPr>
+          <p:cNvSpPr txBox="1"/>
+          <p:nvPr/>
+        </p:nvSpPr>
+        <p:spPr>
+          <a:xfrm>
+            <a:off x="699559" y="958967"/>
+            <a:ext cx="1048685" cy="369332"/>
+          </a:xfrm>
+          <a:prstGeom prst="rect">
+            <a:avLst/>
+          </a:prstGeom>
+          <a:noFill/>
+        </p:spPr>
+        <p:txBody>
+          <a:bodyPr wrap="none" rtlCol="0">
+            <a:spAutoFit/>
+          </a:bodyPr>
+          <a:lstStyle/>
+          <a:p>
+            <a:r>
+              <a:rPr lang="en-GB" b="1" u="sng" dirty="0"/>
+              <a:t>Baseline</a:t>
+            </a:r>
+            <a:r>
+              <a:rPr lang="en-GB" dirty="0"/>
+              <a:t>:</a:t>
+            </a:r>
+          </a:p>
+        </p:txBody>
+      </p:sp>
+      <p:sp>
+        <p:nvSpPr>
+          <p:cNvPr id="49" name="Textfeld 48">
+            <a:extLst>
+              <a:ext uri="{FF2B5EF4-FFF2-40B4-BE49-F238E27FC236}">
+                <a16:creationId xmlns:a16="http://schemas.microsoft.com/office/drawing/2014/main" id="{BE567BC4-1210-789F-340F-D3970A2EDA31}"/>
+              </a:ext>
+            </a:extLst>
+          </p:cNvPr>
+          <p:cNvSpPr txBox="1"/>
+          <p:nvPr/>
+        </p:nvSpPr>
+        <p:spPr>
+          <a:xfrm>
+            <a:off x="699559" y="3904598"/>
+            <a:ext cx="1820114" cy="369332"/>
+          </a:xfrm>
+          <a:prstGeom prst="rect">
+            <a:avLst/>
+          </a:prstGeom>
+          <a:noFill/>
+        </p:spPr>
+        <p:txBody>
+          <a:bodyPr wrap="none" rtlCol="0">
+            <a:spAutoFit/>
+          </a:bodyPr>
+          <a:lstStyle/>
+          <a:p>
+            <a:r>
+              <a:rPr lang="en-GB" b="1" u="sng" dirty="0"/>
+              <a:t>DOE using PADO:</a:t>
+            </a:r>
+          </a:p>
+        </p:txBody>
+      </p:sp>
+      <p:grpSp>
+        <p:nvGrpSpPr>
+          <p:cNvPr id="22" name="Gruppieren 21">
+            <a:extLst>
+              <a:ext uri="{FF2B5EF4-FFF2-40B4-BE49-F238E27FC236}">
+                <a16:creationId xmlns:a16="http://schemas.microsoft.com/office/drawing/2014/main" id="{F02F1E64-2E5F-501F-C1F9-09D5FA2CCC66}"/>
+              </a:ext>
+            </a:extLst>
+          </p:cNvPr>
+          <p:cNvGrpSpPr/>
+          <p:nvPr/>
+        </p:nvGrpSpPr>
+        <p:grpSpPr>
+          <a:xfrm>
+            <a:off x="1146565" y="1290908"/>
+            <a:ext cx="3690570" cy="2440234"/>
+            <a:chOff x="241491" y="2048569"/>
+            <a:chExt cx="3690570" cy="2440234"/>
+          </a:xfrm>
+        </p:grpSpPr>
+        <p:sp>
+          <p:nvSpPr>
+            <p:cNvPr id="4" name="Textfeld 3">
+              <a:extLst>
+                <a:ext uri="{FF2B5EF4-FFF2-40B4-BE49-F238E27FC236}">
+                  <a16:creationId xmlns:a16="http://schemas.microsoft.com/office/drawing/2014/main" id="{7A6BC039-F026-C7C2-6DFA-5AAF7EB1AB17}"/>
+                </a:ext>
+              </a:extLst>
+            </p:cNvPr>
+            <p:cNvSpPr txBox="1"/>
+            <p:nvPr/>
+          </p:nvSpPr>
+          <p:spPr>
+            <a:xfrm>
+              <a:off x="258546" y="4181026"/>
+              <a:ext cx="3673515" cy="307777"/>
+            </a:xfrm>
+            <a:prstGeom prst="rect">
+              <a:avLst/>
+            </a:prstGeom>
+            <a:noFill/>
+          </p:spPr>
+          <p:txBody>
+            <a:bodyPr wrap="square" rtlCol="0">
+              <a:spAutoFit/>
+            </a:bodyPr>
+            <a:lstStyle/>
+            <a:p>
+              <a:pPr algn="ctr"/>
+              <a:r>
+                <a:rPr lang="en-GB" sz="1400" b="1" dirty="0"/>
+                <a:t>ACDC Images [1] (1375 + 399 + 199 images)</a:t>
+              </a:r>
+            </a:p>
+          </p:txBody>
+        </p:sp>
+        <p:pic>
+          <p:nvPicPr>
+            <p:cNvPr id="21" name="Grafik 20">
+              <a:extLst>
+                <a:ext uri="{FF2B5EF4-FFF2-40B4-BE49-F238E27FC236}">
+                  <a16:creationId xmlns:a16="http://schemas.microsoft.com/office/drawing/2014/main" id="{1FBF88FC-5739-0C2A-0AB6-65E67318ECA4}"/>
+                </a:ext>
+              </a:extLst>
+            </p:cNvPr>
+            <p:cNvPicPr>
+              <a:picLocks noChangeAspect="1"/>
+            </p:cNvPicPr>
+            <p:nvPr/>
+          </p:nvPicPr>
+          <p:blipFill>
+            <a:blip r:embed="rId11"/>
+            <a:stretch>
+              <a:fillRect/>
+            </a:stretch>
+          </p:blipFill>
+          <p:spPr>
+            <a:xfrm>
+              <a:off x="241491" y="2048569"/>
+              <a:ext cx="3690570" cy="2214342"/>
+            </a:xfrm>
+            <a:prstGeom prst="rect">
+              <a:avLst/>
+            </a:prstGeom>
+          </p:spPr>
+        </p:pic>
+      </p:grpSp>
+      <p:grpSp>
+        <p:nvGrpSpPr>
+          <p:cNvPr id="23" name="Gruppieren 22">
+            <a:extLst>
+              <a:ext uri="{FF2B5EF4-FFF2-40B4-BE49-F238E27FC236}">
+                <a16:creationId xmlns:a16="http://schemas.microsoft.com/office/drawing/2014/main" id="{F58AB326-CDBD-720C-8AE0-F889EF7CE4B6}"/>
+              </a:ext>
+            </a:extLst>
+          </p:cNvPr>
+          <p:cNvGrpSpPr/>
+          <p:nvPr/>
+        </p:nvGrpSpPr>
+        <p:grpSpPr>
+          <a:xfrm>
+            <a:off x="1157483" y="4246284"/>
+            <a:ext cx="3690570" cy="2440234"/>
+            <a:chOff x="241491" y="2048569"/>
+            <a:chExt cx="3690570" cy="2440234"/>
+          </a:xfrm>
+        </p:grpSpPr>
+        <p:sp>
+          <p:nvSpPr>
+            <p:cNvPr id="24" name="Textfeld 23">
+              <a:extLst>
+                <a:ext uri="{FF2B5EF4-FFF2-40B4-BE49-F238E27FC236}">
+                  <a16:creationId xmlns:a16="http://schemas.microsoft.com/office/drawing/2014/main" id="{79234707-72CD-4FAD-B08B-060F35A0122F}"/>
+                </a:ext>
+              </a:extLst>
+            </p:cNvPr>
+            <p:cNvSpPr txBox="1"/>
+            <p:nvPr/>
+          </p:nvSpPr>
+          <p:spPr>
+            <a:xfrm>
+              <a:off x="258546" y="4181026"/>
+              <a:ext cx="3673515" cy="307777"/>
+            </a:xfrm>
+            <a:prstGeom prst="rect">
+              <a:avLst/>
+            </a:prstGeom>
+            <a:noFill/>
+          </p:spPr>
+          <p:txBody>
+            <a:bodyPr wrap="square" rtlCol="0">
+              <a:spAutoFit/>
+            </a:bodyPr>
+            <a:lstStyle/>
+            <a:p>
+              <a:pPr algn="ctr"/>
+              <a:r>
+                <a:rPr lang="en-GB" sz="1400" b="1" dirty="0"/>
+                <a:t>ACDC Images [1] (1375 + 399 + 199 images)</a:t>
+              </a:r>
+            </a:p>
+          </p:txBody>
+        </p:sp>
+        <p:pic>
+          <p:nvPicPr>
+            <p:cNvPr id="35" name="Grafik 34">
+              <a:extLst>
+                <a:ext uri="{FF2B5EF4-FFF2-40B4-BE49-F238E27FC236}">
+                  <a16:creationId xmlns:a16="http://schemas.microsoft.com/office/drawing/2014/main" id="{A2CD0024-19AD-014D-C28D-115CE5A04AD2}"/>
+                </a:ext>
+              </a:extLst>
+            </p:cNvPr>
+            <p:cNvPicPr>
+              <a:picLocks noChangeAspect="1"/>
+            </p:cNvPicPr>
+            <p:nvPr/>
+          </p:nvPicPr>
+          <p:blipFill>
+            <a:blip r:embed="rId11"/>
+            <a:stretch>
+              <a:fillRect/>
+            </a:stretch>
+          </p:blipFill>
+          <p:spPr>
+            <a:xfrm>
+              <a:off x="241491" y="2048569"/>
+              <a:ext cx="3690570" cy="2214342"/>
+            </a:xfrm>
+            <a:prstGeom prst="rect">
+              <a:avLst/>
+            </a:prstGeom>
+          </p:spPr>
+        </p:pic>
+      </p:grpSp>
+      <p:cxnSp>
+        <p:nvCxnSpPr>
+          <p:cNvPr id="46" name="Gerade Verbindung 45">
+            <a:extLst>
+              <a:ext uri="{FF2B5EF4-FFF2-40B4-BE49-F238E27FC236}">
+                <a16:creationId xmlns:a16="http://schemas.microsoft.com/office/drawing/2014/main" id="{8F9E628F-B9B3-577D-357F-EB3E012C5873}"/>
+              </a:ext>
+            </a:extLst>
+          </p:cNvPr>
+          <p:cNvCxnSpPr>
+            <a:cxnSpLocks/>
+          </p:cNvCxnSpPr>
+          <p:nvPr/>
+        </p:nvCxnSpPr>
+        <p:spPr>
+          <a:xfrm>
+            <a:off x="-146299" y="3818540"/>
+            <a:ext cx="12455236" cy="0"/>
+          </a:xfrm>
+          <a:prstGeom prst="line">
+            <a:avLst/>
+          </a:prstGeom>
+          <a:ln w="41275">
+            <a:solidFill>
+              <a:schemeClr val="tx1"/>
+            </a:solidFill>
+          </a:ln>
+        </p:spPr>
+        <p:style>
+          <a:lnRef idx="1">
+            <a:schemeClr val="accent1"/>
+          </a:lnRef>
+          <a:fillRef idx="0">
+            <a:schemeClr val="accent1"/>
+          </a:fillRef>
+          <a:effectRef idx="0">
+            <a:schemeClr val="accent1"/>
+          </a:effectRef>
+          <a:fontRef idx="minor">
+            <a:schemeClr val="tx1"/>
+          </a:fontRef>
+        </p:style>
+      </p:cxnSp>
+    </p:spTree>
+    <p:extLst>
+      <p:ext uri="{BB962C8B-B14F-4D97-AF65-F5344CB8AC3E}">
+        <p14:creationId xmlns:p14="http://schemas.microsoft.com/office/powerpoint/2010/main" val="4170129692"/>
+      </p:ext>
+    </p:extLst>
+  </p:cSld>
+  <p:clrMapOvr>
+    <a:masterClrMapping/>
+  </p:clrMapOvr>
+</p:sld>
+</file>
+
+<file path=ppt/slides/slide8.xml><?xml version="1.0" encoding="utf-8"?>
+<p:sld xmlns:a="http://schemas.openxmlformats.org/drawingml/2006/main" xmlns:r="http://schemas.openxmlformats.org/officeDocument/2006/relationships" xmlns:p="http://schemas.openxmlformats.org/presentationml/2006/main" show="0">
+  <p:cSld>
+    <p:spTree>
+      <p:nvGrpSpPr>
+        <p:cNvPr id="1" name=""/>
+        <p:cNvGrpSpPr/>
+        <p:nvPr/>
+      </p:nvGrpSpPr>
+      <p:grpSpPr>
+        <a:xfrm>
+          <a:off x="0" y="0"/>
+          <a:ext cx="0" cy="0"/>
+          <a:chOff x="0" y="0"/>
+          <a:chExt cx="0" cy="0"/>
+        </a:xfrm>
+      </p:grpSpPr>
+      <p:sp>
+        <p:nvSpPr>
+          <p:cNvPr id="2" name="Titel 1">
+            <a:extLst>
+              <a:ext uri="{FF2B5EF4-FFF2-40B4-BE49-F238E27FC236}">
+                <a16:creationId xmlns:a16="http://schemas.microsoft.com/office/drawing/2014/main" id="{FFD4B6CD-A168-5C50-AD9E-3CD36785B461}"/>
+              </a:ext>
+            </a:extLst>
+          </p:cNvPr>
+          <p:cNvSpPr>
+            <a:spLocks noGrp="1"/>
+          </p:cNvSpPr>
+          <p:nvPr>
+            <p:ph type="title"/>
+          </p:nvPr>
+        </p:nvSpPr>
+        <p:spPr>
+          <a:xfrm>
+            <a:off x="421409" y="-104010"/>
+            <a:ext cx="10515600" cy="1325563"/>
+          </a:xfrm>
+        </p:spPr>
         <p:txBody>
           <a:bodyPr/>
           <a:lstStyle/>
@@ -13837,7 +20344,7 @@
             <p:nvPr/>
           </p:nvPicPr>
           <p:blipFill>
-            <a:blip r:embed="rId2"/>
+            <a:blip r:embed="rId3"/>
             <a:stretch>
               <a:fillRect/>
             </a:stretch>
@@ -13922,7 +20429,7 @@
             </a:r>
             <a:r>
               <a:rPr lang="en-GB" sz="1100" dirty="0">
-                <a:hlinkClick r:id="rId3"/>
+                <a:hlinkClick r:id="rId4"/>
               </a:rPr>
               <a:t>https://www.kaggle.com/datasets/khitdon/foggy-cityscapes-yolo</a:t>
             </a:r>
@@ -13935,7 +20442,7 @@
             </a:r>
             <a:r>
               <a:rPr lang="en-GB" sz="1100" dirty="0">
-                <a:hlinkClick r:id="rId4"/>
+                <a:hlinkClick r:id="rId5"/>
               </a:rPr>
               <a:t>https://www.kaggle.com/datasets/orvile/dawn-detection-in-adverse-weather-nature</a:t>
             </a:r>
@@ -13958,7 +20465,7 @@
           <p:nvPr/>
         </p:nvPicPr>
         <p:blipFill>
-          <a:blip r:embed="rId5"/>
+          <a:blip r:embed="rId6"/>
           <a:stretch>
             <a:fillRect/>
           </a:stretch>
@@ -14008,10 +20515,1294 @@
           </a:p>
         </p:txBody>
       </p:sp>
+      <p:sp>
+        <p:nvSpPr>
+          <p:cNvPr id="8" name="Abgerundetes Rechteck 7">
+            <a:extLst>
+              <a:ext uri="{FF2B5EF4-FFF2-40B4-BE49-F238E27FC236}">
+                <a16:creationId xmlns:a16="http://schemas.microsoft.com/office/drawing/2014/main" id="{629B07C8-B35F-CBA1-30B1-1F22E7C92934}"/>
+              </a:ext>
+            </a:extLst>
+          </p:cNvPr>
+          <p:cNvSpPr/>
+          <p:nvPr/>
+        </p:nvSpPr>
+        <p:spPr>
+          <a:xfrm>
+            <a:off x="6375440" y="4695693"/>
+            <a:ext cx="1358537" cy="770708"/>
+          </a:xfrm>
+          <a:prstGeom prst="roundRect">
+            <a:avLst/>
+          </a:prstGeom>
+        </p:spPr>
+        <p:style>
+          <a:lnRef idx="2">
+            <a:schemeClr val="accent1">
+              <a:shade val="15000"/>
+            </a:schemeClr>
+          </a:lnRef>
+          <a:fillRef idx="1">
+            <a:schemeClr val="accent1"/>
+          </a:fillRef>
+          <a:effectRef idx="0">
+            <a:schemeClr val="accent1"/>
+          </a:effectRef>
+          <a:fontRef idx="minor">
+            <a:schemeClr val="lt1"/>
+          </a:fontRef>
+        </p:style>
+        <p:txBody>
+          <a:bodyPr rtlCol="0" anchor="ctr"/>
+          <a:lstStyle/>
+          <a:p>
+            <a:pPr algn="ctr"/>
+            <a:r>
+              <a:rPr lang="en-GB" dirty="0"/>
+              <a:t>YOLOv11</a:t>
+            </a:r>
+          </a:p>
+          <a:p>
+            <a:pPr algn="ctr"/>
+            <a:r>
+              <a:rPr lang="en-GB" dirty="0"/>
+              <a:t>(</a:t>
+            </a:r>
+            <a:r>
+              <a:rPr lang="en-GB" dirty="0" err="1"/>
+              <a:t>Ultralytics</a:t>
+            </a:r>
+            <a:r>
+              <a:rPr lang="en-GB" dirty="0"/>
+              <a:t>)</a:t>
+            </a:r>
+          </a:p>
+        </p:txBody>
+      </p:sp>
+      <mc:AlternateContent xmlns:mc="http://schemas.openxmlformats.org/markup-compatibility/2006">
+        <mc:Choice xmlns:a14="http://schemas.microsoft.com/office/drawing/2010/main" Requires="a14">
+          <p:sp>
+            <p:nvSpPr>
+              <p:cNvPr id="10" name="Textfeld 9">
+                <a:extLst>
+                  <a:ext uri="{FF2B5EF4-FFF2-40B4-BE49-F238E27FC236}">
+                    <a16:creationId xmlns:a16="http://schemas.microsoft.com/office/drawing/2014/main" id="{51DBF89C-E908-8582-EE3A-B6ED50AEB851}"/>
+                  </a:ext>
+                </a:extLst>
+              </p:cNvPr>
+              <p:cNvSpPr txBox="1"/>
+              <p:nvPr/>
+            </p:nvSpPr>
+            <p:spPr>
+              <a:xfrm>
+                <a:off x="10563726" y="4750873"/>
+                <a:ext cx="746567" cy="553998"/>
+              </a:xfrm>
+              <a:prstGeom prst="rect">
+                <a:avLst/>
+              </a:prstGeom>
+              <a:noFill/>
+            </p:spPr>
+            <p:txBody>
+              <a:bodyPr wrap="square" lIns="0" tIns="0" rIns="0" bIns="0" rtlCol="0">
+                <a:spAutoFit/>
+              </a:bodyPr>
+              <a:lstStyle/>
+              <a:p>
+                <a:pPr/>
+                <a14:m>
+                  <m:oMathPara xmlns:m="http://schemas.openxmlformats.org/officeDocument/2006/math">
+                    <m:oMathParaPr>
+                      <m:jc m:val="centerGroup"/>
+                    </m:oMathParaPr>
+                    <m:oMath xmlns:m="http://schemas.openxmlformats.org/officeDocument/2006/math">
+                      <m:r>
+                        <a:rPr lang="en-GB" sz="3600" i="1" smtClean="0">
+                          <a:latin typeface="Cambria Math" panose="02040503050406030204" pitchFamily="18" charset="0"/>
+                          <a:ea typeface="Cambria Math" panose="02040503050406030204" pitchFamily="18" charset="0"/>
+                        </a:rPr>
+                        <m:t>ℒ</m:t>
+                      </m:r>
+                    </m:oMath>
+                  </m:oMathPara>
+                </a14:m>
+                <a:endParaRPr lang="en-GB" sz="3600" dirty="0"/>
+              </a:p>
+            </p:txBody>
+          </p:sp>
+        </mc:Choice>
+        <mc:Fallback>
+          <p:sp>
+            <p:nvSpPr>
+              <p:cNvPr id="10" name="Textfeld 9">
+                <a:extLst>
+                  <a:ext uri="{FF2B5EF4-FFF2-40B4-BE49-F238E27FC236}">
+                    <a16:creationId xmlns:a16="http://schemas.microsoft.com/office/drawing/2014/main" id="{51DBF89C-E908-8582-EE3A-B6ED50AEB851}"/>
+                  </a:ext>
+                </a:extLst>
+              </p:cNvPr>
+              <p:cNvSpPr txBox="1">
+                <a:spLocks noRot="1" noChangeAspect="1" noMove="1" noResize="1" noEditPoints="1" noAdjustHandles="1" noChangeArrowheads="1" noChangeShapeType="1" noTextEdit="1"/>
+              </p:cNvSpPr>
+              <p:nvPr/>
+            </p:nvSpPr>
+            <p:spPr>
+              <a:xfrm>
+                <a:off x="10563726" y="4750873"/>
+                <a:ext cx="746567" cy="553998"/>
+              </a:xfrm>
+              <a:prstGeom prst="rect">
+                <a:avLst/>
+              </a:prstGeom>
+              <a:blipFill>
+                <a:blip r:embed="rId7"/>
+                <a:stretch>
+                  <a:fillRect b="-6667"/>
+                </a:stretch>
+              </a:blipFill>
+            </p:spPr>
+            <p:txBody>
+              <a:bodyPr/>
+              <a:lstStyle/>
+              <a:p>
+                <a:r>
+                  <a:rPr lang="en-GB">
+                    <a:noFill/>
+                  </a:rPr>
+                  <a:t> </a:t>
+                </a:r>
+              </a:p>
+            </p:txBody>
+          </p:sp>
+        </mc:Fallback>
+      </mc:AlternateContent>
+      <p:pic>
+        <p:nvPicPr>
+          <p:cNvPr id="13" name="Grafik 12">
+            <a:extLst>
+              <a:ext uri="{FF2B5EF4-FFF2-40B4-BE49-F238E27FC236}">
+                <a16:creationId xmlns:a16="http://schemas.microsoft.com/office/drawing/2014/main" id="{5E439152-F239-B9D7-149A-0C25B4C54FE0}"/>
+              </a:ext>
+            </a:extLst>
+          </p:cNvPr>
+          <p:cNvPicPr>
+            <a:picLocks noChangeAspect="1"/>
+          </p:cNvPicPr>
+          <p:nvPr/>
+        </p:nvPicPr>
+        <p:blipFill>
+          <a:blip r:embed="rId8"/>
+          <a:stretch>
+            <a:fillRect/>
+          </a:stretch>
+        </p:blipFill>
+        <p:spPr>
+          <a:xfrm>
+            <a:off x="5384145" y="4627921"/>
+            <a:ext cx="208140" cy="858579"/>
+          </a:xfrm>
+          <a:prstGeom prst="rect">
+            <a:avLst/>
+          </a:prstGeom>
+        </p:spPr>
+      </p:pic>
+      <p:sp>
+        <p:nvSpPr>
+          <p:cNvPr id="14" name="Textfeld 13">
+            <a:extLst>
+              <a:ext uri="{FF2B5EF4-FFF2-40B4-BE49-F238E27FC236}">
+                <a16:creationId xmlns:a16="http://schemas.microsoft.com/office/drawing/2014/main" id="{71CD9407-E5DF-B41C-3F3F-D15274389A24}"/>
+              </a:ext>
+            </a:extLst>
+          </p:cNvPr>
+          <p:cNvSpPr txBox="1"/>
+          <p:nvPr/>
+        </p:nvSpPr>
+        <p:spPr>
+          <a:xfrm>
+            <a:off x="5192300" y="5466401"/>
+            <a:ext cx="591829" cy="369332"/>
+          </a:xfrm>
+          <a:prstGeom prst="rect">
+            <a:avLst/>
+          </a:prstGeom>
+          <a:noFill/>
+        </p:spPr>
+        <p:txBody>
+          <a:bodyPr wrap="none" rtlCol="0">
+            <a:spAutoFit/>
+          </a:bodyPr>
+          <a:lstStyle/>
+          <a:p>
+            <a:r>
+              <a:rPr lang="en-GB" dirty="0"/>
+              <a:t>DOE</a:t>
+            </a:r>
+          </a:p>
+        </p:txBody>
+      </p:sp>
+      <p:cxnSp>
+        <p:nvCxnSpPr>
+          <p:cNvPr id="16" name="Gerade Verbindung mit Pfeil 15">
+            <a:extLst>
+              <a:ext uri="{FF2B5EF4-FFF2-40B4-BE49-F238E27FC236}">
+                <a16:creationId xmlns:a16="http://schemas.microsoft.com/office/drawing/2014/main" id="{0A05233B-C909-1B48-EA0A-364709E8EBF9}"/>
+              </a:ext>
+            </a:extLst>
+          </p:cNvPr>
+          <p:cNvCxnSpPr>
+            <a:cxnSpLocks/>
+          </p:cNvCxnSpPr>
+          <p:nvPr/>
+        </p:nvCxnSpPr>
+        <p:spPr>
+          <a:xfrm>
+            <a:off x="5784129" y="4966549"/>
+            <a:ext cx="468076" cy="0"/>
+          </a:xfrm>
+          <a:prstGeom prst="straightConnector1">
+            <a:avLst/>
+          </a:prstGeom>
+          <a:ln w="25400">
+            <a:solidFill>
+              <a:schemeClr val="tx1"/>
+            </a:solidFill>
+            <a:tailEnd type="triangle"/>
+          </a:ln>
+        </p:spPr>
+        <p:style>
+          <a:lnRef idx="1">
+            <a:schemeClr val="accent1"/>
+          </a:lnRef>
+          <a:fillRef idx="0">
+            <a:schemeClr val="accent1"/>
+          </a:fillRef>
+          <a:effectRef idx="0">
+            <a:schemeClr val="accent1"/>
+          </a:effectRef>
+          <a:fontRef idx="minor">
+            <a:schemeClr val="tx1"/>
+          </a:fontRef>
+        </p:style>
+      </p:cxnSp>
+      <p:cxnSp>
+        <p:nvCxnSpPr>
+          <p:cNvPr id="18" name="Gerade Verbindung mit Pfeil 17">
+            <a:extLst>
+              <a:ext uri="{FF2B5EF4-FFF2-40B4-BE49-F238E27FC236}">
+                <a16:creationId xmlns:a16="http://schemas.microsoft.com/office/drawing/2014/main" id="{48FAB8DC-E884-B4E6-B528-565834E9F502}"/>
+              </a:ext>
+            </a:extLst>
+          </p:cNvPr>
+          <p:cNvCxnSpPr>
+            <a:cxnSpLocks/>
+          </p:cNvCxnSpPr>
+          <p:nvPr/>
+        </p:nvCxnSpPr>
+        <p:spPr>
+          <a:xfrm flipH="1">
+            <a:off x="5784129" y="5109974"/>
+            <a:ext cx="468076" cy="0"/>
+          </a:xfrm>
+          <a:prstGeom prst="straightConnector1">
+            <a:avLst/>
+          </a:prstGeom>
+          <a:ln w="25400">
+            <a:solidFill>
+              <a:schemeClr val="tx1"/>
+            </a:solidFill>
+            <a:tailEnd type="triangle"/>
+          </a:ln>
+        </p:spPr>
+        <p:style>
+          <a:lnRef idx="1">
+            <a:schemeClr val="accent1"/>
+          </a:lnRef>
+          <a:fillRef idx="0">
+            <a:schemeClr val="accent1"/>
+          </a:fillRef>
+          <a:effectRef idx="0">
+            <a:schemeClr val="accent1"/>
+          </a:effectRef>
+          <a:fontRef idx="minor">
+            <a:schemeClr val="tx1"/>
+          </a:fontRef>
+        </p:style>
+      </p:cxnSp>
+      <p:cxnSp>
+        <p:nvCxnSpPr>
+          <p:cNvPr id="25" name="Gerade Verbindung mit Pfeil 24">
+            <a:extLst>
+              <a:ext uri="{FF2B5EF4-FFF2-40B4-BE49-F238E27FC236}">
+                <a16:creationId xmlns:a16="http://schemas.microsoft.com/office/drawing/2014/main" id="{E1E7A2AA-3F9C-7726-593C-717C0E138FBD}"/>
+              </a:ext>
+            </a:extLst>
+          </p:cNvPr>
+          <p:cNvCxnSpPr>
+            <a:cxnSpLocks/>
+          </p:cNvCxnSpPr>
+          <p:nvPr/>
+        </p:nvCxnSpPr>
+        <p:spPr>
+          <a:xfrm>
+            <a:off x="7863940" y="4966549"/>
+            <a:ext cx="468076" cy="0"/>
+          </a:xfrm>
+          <a:prstGeom prst="straightConnector1">
+            <a:avLst/>
+          </a:prstGeom>
+          <a:ln w="25400">
+            <a:solidFill>
+              <a:schemeClr val="tx1"/>
+            </a:solidFill>
+            <a:tailEnd type="triangle"/>
+          </a:ln>
+        </p:spPr>
+        <p:style>
+          <a:lnRef idx="1">
+            <a:schemeClr val="accent1"/>
+          </a:lnRef>
+          <a:fillRef idx="0">
+            <a:schemeClr val="accent1"/>
+          </a:fillRef>
+          <a:effectRef idx="0">
+            <a:schemeClr val="accent1"/>
+          </a:effectRef>
+          <a:fontRef idx="minor">
+            <a:schemeClr val="tx1"/>
+          </a:fontRef>
+        </p:style>
+      </p:cxnSp>
+      <p:cxnSp>
+        <p:nvCxnSpPr>
+          <p:cNvPr id="26" name="Gerade Verbindung mit Pfeil 25">
+            <a:extLst>
+              <a:ext uri="{FF2B5EF4-FFF2-40B4-BE49-F238E27FC236}">
+                <a16:creationId xmlns:a16="http://schemas.microsoft.com/office/drawing/2014/main" id="{506B8BC7-DFB3-8EDF-C2F8-A4A155FE558C}"/>
+              </a:ext>
+            </a:extLst>
+          </p:cNvPr>
+          <p:cNvCxnSpPr>
+            <a:cxnSpLocks/>
+          </p:cNvCxnSpPr>
+          <p:nvPr/>
+        </p:nvCxnSpPr>
+        <p:spPr>
+          <a:xfrm flipH="1">
+            <a:off x="7863940" y="5109974"/>
+            <a:ext cx="468076" cy="0"/>
+          </a:xfrm>
+          <a:prstGeom prst="straightConnector1">
+            <a:avLst/>
+          </a:prstGeom>
+          <a:ln w="25400">
+            <a:solidFill>
+              <a:schemeClr val="tx1"/>
+            </a:solidFill>
+            <a:tailEnd type="triangle"/>
+          </a:ln>
+        </p:spPr>
+        <p:style>
+          <a:lnRef idx="1">
+            <a:schemeClr val="accent1"/>
+          </a:lnRef>
+          <a:fillRef idx="0">
+            <a:schemeClr val="accent1"/>
+          </a:fillRef>
+          <a:effectRef idx="0">
+            <a:schemeClr val="accent1"/>
+          </a:effectRef>
+          <a:fontRef idx="minor">
+            <a:schemeClr val="tx1"/>
+          </a:fontRef>
+        </p:style>
+      </p:cxnSp>
+      <p:pic>
+        <p:nvPicPr>
+          <p:cNvPr id="27" name="Grafik 26">
+            <a:extLst>
+              <a:ext uri="{FF2B5EF4-FFF2-40B4-BE49-F238E27FC236}">
+                <a16:creationId xmlns:a16="http://schemas.microsoft.com/office/drawing/2014/main" id="{3D96529C-2C6F-3207-38E9-A5F7C113FD90}"/>
+              </a:ext>
+            </a:extLst>
+          </p:cNvPr>
+          <p:cNvPicPr>
+            <a:picLocks noChangeAspect="1"/>
+          </p:cNvPicPr>
+          <p:nvPr/>
+        </p:nvPicPr>
+        <p:blipFill rotWithShape="1">
+          <a:blip r:embed="rId9"/>
+          <a:srcRect l="7964" t="3980" r="1224" b="8871"/>
+          <a:stretch/>
+        </p:blipFill>
+        <p:spPr>
+          <a:xfrm>
+            <a:off x="8422034" y="4542431"/>
+            <a:ext cx="1686976" cy="1108636"/>
+          </a:xfrm>
+          <a:prstGeom prst="rect">
+            <a:avLst/>
+          </a:prstGeom>
+        </p:spPr>
+      </p:pic>
+      <p:sp>
+        <p:nvSpPr>
+          <p:cNvPr id="28" name="Textfeld 27">
+            <a:extLst>
+              <a:ext uri="{FF2B5EF4-FFF2-40B4-BE49-F238E27FC236}">
+                <a16:creationId xmlns:a16="http://schemas.microsoft.com/office/drawing/2014/main" id="{0FE0B056-850C-2C0C-4E0B-F1D650AD96C2}"/>
+              </a:ext>
+            </a:extLst>
+          </p:cNvPr>
+          <p:cNvSpPr txBox="1"/>
+          <p:nvPr/>
+        </p:nvSpPr>
+        <p:spPr>
+          <a:xfrm>
+            <a:off x="8694596" y="4211478"/>
+            <a:ext cx="1102674" cy="369332"/>
+          </a:xfrm>
+          <a:prstGeom prst="rect">
+            <a:avLst/>
+          </a:prstGeom>
+          <a:noFill/>
+        </p:spPr>
+        <p:txBody>
+          <a:bodyPr wrap="none" rtlCol="0">
+            <a:spAutoFit/>
+          </a:bodyPr>
+          <a:lstStyle/>
+          <a:p>
+            <a:r>
+              <a:rPr lang="en-GB" dirty="0"/>
+              <a:t>Detection</a:t>
+            </a:r>
+          </a:p>
+        </p:txBody>
+      </p:sp>
+      <p:cxnSp>
+        <p:nvCxnSpPr>
+          <p:cNvPr id="29" name="Gerade Verbindung mit Pfeil 28">
+            <a:extLst>
+              <a:ext uri="{FF2B5EF4-FFF2-40B4-BE49-F238E27FC236}">
+                <a16:creationId xmlns:a16="http://schemas.microsoft.com/office/drawing/2014/main" id="{D470A574-5B10-0EDE-2260-384A6C921B37}"/>
+              </a:ext>
+            </a:extLst>
+          </p:cNvPr>
+          <p:cNvCxnSpPr>
+            <a:cxnSpLocks/>
+          </p:cNvCxnSpPr>
+          <p:nvPr/>
+        </p:nvCxnSpPr>
+        <p:spPr>
+          <a:xfrm>
+            <a:off x="10173425" y="4915542"/>
+            <a:ext cx="468076" cy="0"/>
+          </a:xfrm>
+          <a:prstGeom prst="straightConnector1">
+            <a:avLst/>
+          </a:prstGeom>
+          <a:ln w="25400">
+            <a:solidFill>
+              <a:schemeClr val="tx1"/>
+            </a:solidFill>
+            <a:tailEnd type="triangle"/>
+          </a:ln>
+        </p:spPr>
+        <p:style>
+          <a:lnRef idx="1">
+            <a:schemeClr val="accent1"/>
+          </a:lnRef>
+          <a:fillRef idx="0">
+            <a:schemeClr val="accent1"/>
+          </a:fillRef>
+          <a:effectRef idx="0">
+            <a:schemeClr val="accent1"/>
+          </a:effectRef>
+          <a:fontRef idx="minor">
+            <a:schemeClr val="tx1"/>
+          </a:fontRef>
+        </p:style>
+      </p:cxnSp>
+      <p:cxnSp>
+        <p:nvCxnSpPr>
+          <p:cNvPr id="30" name="Gerade Verbindung mit Pfeil 29">
+            <a:extLst>
+              <a:ext uri="{FF2B5EF4-FFF2-40B4-BE49-F238E27FC236}">
+                <a16:creationId xmlns:a16="http://schemas.microsoft.com/office/drawing/2014/main" id="{5D9D37F8-C4B6-47F4-E6D2-9FFC0866FB2A}"/>
+              </a:ext>
+            </a:extLst>
+          </p:cNvPr>
+          <p:cNvCxnSpPr>
+            <a:cxnSpLocks/>
+          </p:cNvCxnSpPr>
+          <p:nvPr/>
+        </p:nvCxnSpPr>
+        <p:spPr>
+          <a:xfrm flipH="1">
+            <a:off x="10173425" y="5058967"/>
+            <a:ext cx="468076" cy="0"/>
+          </a:xfrm>
+          <a:prstGeom prst="straightConnector1">
+            <a:avLst/>
+          </a:prstGeom>
+          <a:ln w="25400">
+            <a:solidFill>
+              <a:schemeClr val="tx1"/>
+            </a:solidFill>
+            <a:tailEnd type="triangle"/>
+          </a:ln>
+        </p:spPr>
+        <p:style>
+          <a:lnRef idx="1">
+            <a:schemeClr val="accent1"/>
+          </a:lnRef>
+          <a:fillRef idx="0">
+            <a:schemeClr val="accent1"/>
+          </a:fillRef>
+          <a:effectRef idx="0">
+            <a:schemeClr val="accent1"/>
+          </a:effectRef>
+          <a:fontRef idx="minor">
+            <a:schemeClr val="tx1"/>
+          </a:fontRef>
+        </p:style>
+      </p:cxnSp>
+      <p:sp>
+        <p:nvSpPr>
+          <p:cNvPr id="31" name="Textfeld 30">
+            <a:extLst>
+              <a:ext uri="{FF2B5EF4-FFF2-40B4-BE49-F238E27FC236}">
+                <a16:creationId xmlns:a16="http://schemas.microsoft.com/office/drawing/2014/main" id="{9486F0AA-E956-7CA3-20F7-9D6BC9E8DEC9}"/>
+              </a:ext>
+            </a:extLst>
+          </p:cNvPr>
+          <p:cNvSpPr txBox="1"/>
+          <p:nvPr/>
+        </p:nvSpPr>
+        <p:spPr>
+          <a:xfrm>
+            <a:off x="10645102" y="4231934"/>
+            <a:ext cx="583814" cy="369332"/>
+          </a:xfrm>
+          <a:prstGeom prst="rect">
+            <a:avLst/>
+          </a:prstGeom>
+          <a:noFill/>
+        </p:spPr>
+        <p:txBody>
+          <a:bodyPr wrap="none" rtlCol="0">
+            <a:spAutoFit/>
+          </a:bodyPr>
+          <a:lstStyle/>
+          <a:p>
+            <a:r>
+              <a:rPr lang="en-GB" dirty="0"/>
+              <a:t>Loss</a:t>
+            </a:r>
+          </a:p>
+        </p:txBody>
+      </p:sp>
+      <mc:AlternateContent xmlns:mc="http://schemas.openxmlformats.org/markup-compatibility/2006">
+        <mc:Choice xmlns:a14="http://schemas.microsoft.com/office/drawing/2010/main" Requires="a14">
+          <p:sp>
+            <p:nvSpPr>
+              <p:cNvPr id="32" name="Textfeld 31">
+                <a:extLst>
+                  <a:ext uri="{FF2B5EF4-FFF2-40B4-BE49-F238E27FC236}">
+                    <a16:creationId xmlns:a16="http://schemas.microsoft.com/office/drawing/2014/main" id="{CAD93931-F379-E682-81F3-58CB32671CDA}"/>
+                  </a:ext>
+                </a:extLst>
+              </p:cNvPr>
+              <p:cNvSpPr txBox="1"/>
+              <p:nvPr/>
+            </p:nvSpPr>
+            <p:spPr>
+              <a:xfrm>
+                <a:off x="4902032" y="4760593"/>
+                <a:ext cx="327013" cy="553998"/>
+              </a:xfrm>
+              <a:prstGeom prst="rect">
+                <a:avLst/>
+              </a:prstGeom>
+              <a:noFill/>
+            </p:spPr>
+            <p:txBody>
+              <a:bodyPr wrap="none" lIns="0" tIns="0" rIns="0" bIns="0" rtlCol="0">
+                <a:spAutoFit/>
+              </a:bodyPr>
+              <a:lstStyle/>
+              <a:p>
+                <a:pPr/>
+                <a14:m>
+                  <m:oMathPara xmlns:m="http://schemas.openxmlformats.org/officeDocument/2006/math">
+                    <m:oMathParaPr>
+                      <m:jc m:val="centerGroup"/>
+                    </m:oMathParaPr>
+                    <m:oMath xmlns:m="http://schemas.openxmlformats.org/officeDocument/2006/math">
+                      <m:r>
+                        <a:rPr lang="en-GB" sz="3600" i="1" smtClean="0">
+                          <a:latin typeface="Cambria Math" panose="02040503050406030204" pitchFamily="18" charset="0"/>
+                          <a:ea typeface="Cambria Math" panose="02040503050406030204" pitchFamily="18" charset="0"/>
+                        </a:rPr>
+                        <m:t>∗</m:t>
+                      </m:r>
+                    </m:oMath>
+                  </m:oMathPara>
+                </a14:m>
+                <a:endParaRPr lang="en-GB" sz="2800" dirty="0"/>
+              </a:p>
+            </p:txBody>
+          </p:sp>
+        </mc:Choice>
+        <mc:Fallback>
+          <p:sp>
+            <p:nvSpPr>
+              <p:cNvPr id="32" name="Textfeld 31">
+                <a:extLst>
+                  <a:ext uri="{FF2B5EF4-FFF2-40B4-BE49-F238E27FC236}">
+                    <a16:creationId xmlns:a16="http://schemas.microsoft.com/office/drawing/2014/main" id="{CAD93931-F379-E682-81F3-58CB32671CDA}"/>
+                  </a:ext>
+                </a:extLst>
+              </p:cNvPr>
+              <p:cNvSpPr txBox="1">
+                <a:spLocks noRot="1" noChangeAspect="1" noMove="1" noResize="1" noEditPoints="1" noAdjustHandles="1" noChangeArrowheads="1" noChangeShapeType="1" noTextEdit="1"/>
+              </p:cNvSpPr>
+              <p:nvPr/>
+            </p:nvSpPr>
+            <p:spPr>
+              <a:xfrm>
+                <a:off x="4902032" y="4760593"/>
+                <a:ext cx="327013" cy="553998"/>
+              </a:xfrm>
+              <a:prstGeom prst="rect">
+                <a:avLst/>
+              </a:prstGeom>
+              <a:blipFill>
+                <a:blip r:embed="rId10"/>
+                <a:stretch>
+                  <a:fillRect l="-14815" r="-18519"/>
+                </a:stretch>
+              </a:blipFill>
+            </p:spPr>
+            <p:txBody>
+              <a:bodyPr/>
+              <a:lstStyle/>
+              <a:p>
+                <a:r>
+                  <a:rPr lang="en-GB">
+                    <a:noFill/>
+                  </a:rPr>
+                  <a:t> </a:t>
+                </a:r>
+              </a:p>
+            </p:txBody>
+          </p:sp>
+        </mc:Fallback>
+      </mc:AlternateContent>
+      <p:sp>
+        <p:nvSpPr>
+          <p:cNvPr id="33" name="Abgerundetes Rechteck 32">
+            <a:extLst>
+              <a:ext uri="{FF2B5EF4-FFF2-40B4-BE49-F238E27FC236}">
+                <a16:creationId xmlns:a16="http://schemas.microsoft.com/office/drawing/2014/main" id="{17999D2D-9DBB-0673-E7DC-FF91847A4F44}"/>
+              </a:ext>
+            </a:extLst>
+          </p:cNvPr>
+          <p:cNvSpPr/>
+          <p:nvPr/>
+        </p:nvSpPr>
+        <p:spPr>
+          <a:xfrm>
+            <a:off x="6375440" y="2045880"/>
+            <a:ext cx="1358537" cy="770708"/>
+          </a:xfrm>
+          <a:prstGeom prst="roundRect">
+            <a:avLst/>
+          </a:prstGeom>
+        </p:spPr>
+        <p:style>
+          <a:lnRef idx="2">
+            <a:schemeClr val="accent1">
+              <a:shade val="15000"/>
+            </a:schemeClr>
+          </a:lnRef>
+          <a:fillRef idx="1">
+            <a:schemeClr val="accent1"/>
+          </a:fillRef>
+          <a:effectRef idx="0">
+            <a:schemeClr val="accent1"/>
+          </a:effectRef>
+          <a:fontRef idx="minor">
+            <a:schemeClr val="lt1"/>
+          </a:fontRef>
+        </p:style>
+        <p:txBody>
+          <a:bodyPr rtlCol="0" anchor="ctr"/>
+          <a:lstStyle/>
+          <a:p>
+            <a:pPr algn="ctr"/>
+            <a:r>
+              <a:rPr lang="en-GB" dirty="0"/>
+              <a:t>YOLOv11</a:t>
+            </a:r>
+          </a:p>
+          <a:p>
+            <a:pPr algn="ctr"/>
+            <a:r>
+              <a:rPr lang="en-GB" dirty="0"/>
+              <a:t>(</a:t>
+            </a:r>
+            <a:r>
+              <a:rPr lang="en-GB" dirty="0" err="1"/>
+              <a:t>Ultralytics</a:t>
+            </a:r>
+            <a:r>
+              <a:rPr lang="en-GB" dirty="0"/>
+              <a:t>)</a:t>
+            </a:r>
+          </a:p>
+        </p:txBody>
+      </p:sp>
+      <mc:AlternateContent xmlns:mc="http://schemas.openxmlformats.org/markup-compatibility/2006">
+        <mc:Choice xmlns:a14="http://schemas.microsoft.com/office/drawing/2010/main" Requires="a14">
+          <p:sp>
+            <p:nvSpPr>
+              <p:cNvPr id="34" name="Textfeld 33">
+                <a:extLst>
+                  <a:ext uri="{FF2B5EF4-FFF2-40B4-BE49-F238E27FC236}">
+                    <a16:creationId xmlns:a16="http://schemas.microsoft.com/office/drawing/2014/main" id="{844DDD49-29A1-D7F5-4D40-D7FF57C75E89}"/>
+                  </a:ext>
+                </a:extLst>
+              </p:cNvPr>
+              <p:cNvSpPr txBox="1"/>
+              <p:nvPr/>
+            </p:nvSpPr>
+            <p:spPr>
+              <a:xfrm>
+                <a:off x="10563726" y="2101060"/>
+                <a:ext cx="746567" cy="553998"/>
+              </a:xfrm>
+              <a:prstGeom prst="rect">
+                <a:avLst/>
+              </a:prstGeom>
+              <a:noFill/>
+            </p:spPr>
+            <p:txBody>
+              <a:bodyPr wrap="square" lIns="0" tIns="0" rIns="0" bIns="0" rtlCol="0">
+                <a:spAutoFit/>
+              </a:bodyPr>
+              <a:lstStyle/>
+              <a:p>
+                <a:pPr/>
+                <a14:m>
+                  <m:oMathPara xmlns:m="http://schemas.openxmlformats.org/officeDocument/2006/math">
+                    <m:oMathParaPr>
+                      <m:jc m:val="centerGroup"/>
+                    </m:oMathParaPr>
+                    <m:oMath xmlns:m="http://schemas.openxmlformats.org/officeDocument/2006/math">
+                      <m:r>
+                        <a:rPr lang="en-GB" sz="3600" i="1" smtClean="0">
+                          <a:latin typeface="Cambria Math" panose="02040503050406030204" pitchFamily="18" charset="0"/>
+                          <a:ea typeface="Cambria Math" panose="02040503050406030204" pitchFamily="18" charset="0"/>
+                        </a:rPr>
+                        <m:t>ℒ</m:t>
+                      </m:r>
+                    </m:oMath>
+                  </m:oMathPara>
+                </a14:m>
+                <a:endParaRPr lang="en-GB" sz="3600" dirty="0"/>
+              </a:p>
+            </p:txBody>
+          </p:sp>
+        </mc:Choice>
+        <mc:Fallback>
+          <p:sp>
+            <p:nvSpPr>
+              <p:cNvPr id="34" name="Textfeld 33">
+                <a:extLst>
+                  <a:ext uri="{FF2B5EF4-FFF2-40B4-BE49-F238E27FC236}">
+                    <a16:creationId xmlns:a16="http://schemas.microsoft.com/office/drawing/2014/main" id="{844DDD49-29A1-D7F5-4D40-D7FF57C75E89}"/>
+                  </a:ext>
+                </a:extLst>
+              </p:cNvPr>
+              <p:cNvSpPr txBox="1">
+                <a:spLocks noRot="1" noChangeAspect="1" noMove="1" noResize="1" noEditPoints="1" noAdjustHandles="1" noChangeArrowheads="1" noChangeShapeType="1" noTextEdit="1"/>
+              </p:cNvSpPr>
+              <p:nvPr/>
+            </p:nvSpPr>
+            <p:spPr>
+              <a:xfrm>
+                <a:off x="10563726" y="2101060"/>
+                <a:ext cx="746567" cy="553998"/>
+              </a:xfrm>
+              <a:prstGeom prst="rect">
+                <a:avLst/>
+              </a:prstGeom>
+              <a:blipFill>
+                <a:blip r:embed="rId11"/>
+                <a:stretch>
+                  <a:fillRect b="-4444"/>
+                </a:stretch>
+              </a:blipFill>
+            </p:spPr>
+            <p:txBody>
+              <a:bodyPr/>
+              <a:lstStyle/>
+              <a:p>
+                <a:r>
+                  <a:rPr lang="en-GB">
+                    <a:noFill/>
+                  </a:rPr>
+                  <a:t> </a:t>
+                </a:r>
+              </a:p>
+            </p:txBody>
+          </p:sp>
+        </mc:Fallback>
+      </mc:AlternateContent>
+      <p:cxnSp>
+        <p:nvCxnSpPr>
+          <p:cNvPr id="37" name="Gerade Verbindung mit Pfeil 36">
+            <a:extLst>
+              <a:ext uri="{FF2B5EF4-FFF2-40B4-BE49-F238E27FC236}">
+                <a16:creationId xmlns:a16="http://schemas.microsoft.com/office/drawing/2014/main" id="{9BFF39BE-F38D-D50A-FFB9-7006ACD1416C}"/>
+              </a:ext>
+            </a:extLst>
+          </p:cNvPr>
+          <p:cNvCxnSpPr>
+            <a:cxnSpLocks/>
+          </p:cNvCxnSpPr>
+          <p:nvPr/>
+        </p:nvCxnSpPr>
+        <p:spPr>
+          <a:xfrm>
+            <a:off x="5784129" y="2316736"/>
+            <a:ext cx="468076" cy="0"/>
+          </a:xfrm>
+          <a:prstGeom prst="straightConnector1">
+            <a:avLst/>
+          </a:prstGeom>
+          <a:ln w="25400">
+            <a:solidFill>
+              <a:schemeClr val="tx1"/>
+            </a:solidFill>
+            <a:tailEnd type="triangle"/>
+          </a:ln>
+        </p:spPr>
+        <p:style>
+          <a:lnRef idx="1">
+            <a:schemeClr val="accent1"/>
+          </a:lnRef>
+          <a:fillRef idx="0">
+            <a:schemeClr val="accent1"/>
+          </a:fillRef>
+          <a:effectRef idx="0">
+            <a:schemeClr val="accent1"/>
+          </a:effectRef>
+          <a:fontRef idx="minor">
+            <a:schemeClr val="tx1"/>
+          </a:fontRef>
+        </p:style>
+      </p:cxnSp>
+      <p:cxnSp>
+        <p:nvCxnSpPr>
+          <p:cNvPr id="38" name="Gerade Verbindung mit Pfeil 37">
+            <a:extLst>
+              <a:ext uri="{FF2B5EF4-FFF2-40B4-BE49-F238E27FC236}">
+                <a16:creationId xmlns:a16="http://schemas.microsoft.com/office/drawing/2014/main" id="{1D37E778-9A21-ADAD-44DF-8E57E143840D}"/>
+              </a:ext>
+            </a:extLst>
+          </p:cNvPr>
+          <p:cNvCxnSpPr>
+            <a:cxnSpLocks/>
+          </p:cNvCxnSpPr>
+          <p:nvPr/>
+        </p:nvCxnSpPr>
+        <p:spPr>
+          <a:xfrm flipH="1">
+            <a:off x="5784129" y="2460161"/>
+            <a:ext cx="468076" cy="0"/>
+          </a:xfrm>
+          <a:prstGeom prst="straightConnector1">
+            <a:avLst/>
+          </a:prstGeom>
+          <a:ln w="25400">
+            <a:solidFill>
+              <a:schemeClr val="tx1"/>
+            </a:solidFill>
+            <a:tailEnd type="triangle"/>
+          </a:ln>
+        </p:spPr>
+        <p:style>
+          <a:lnRef idx="1">
+            <a:schemeClr val="accent1"/>
+          </a:lnRef>
+          <a:fillRef idx="0">
+            <a:schemeClr val="accent1"/>
+          </a:fillRef>
+          <a:effectRef idx="0">
+            <a:schemeClr val="accent1"/>
+          </a:effectRef>
+          <a:fontRef idx="minor">
+            <a:schemeClr val="tx1"/>
+          </a:fontRef>
+        </p:style>
+      </p:cxnSp>
+      <p:cxnSp>
+        <p:nvCxnSpPr>
+          <p:cNvPr id="39" name="Gerade Verbindung mit Pfeil 38">
+            <a:extLst>
+              <a:ext uri="{FF2B5EF4-FFF2-40B4-BE49-F238E27FC236}">
+                <a16:creationId xmlns:a16="http://schemas.microsoft.com/office/drawing/2014/main" id="{25F2A2D8-6152-A7C8-A7EE-1DE061208011}"/>
+              </a:ext>
+            </a:extLst>
+          </p:cNvPr>
+          <p:cNvCxnSpPr>
+            <a:cxnSpLocks/>
+          </p:cNvCxnSpPr>
+          <p:nvPr/>
+        </p:nvCxnSpPr>
+        <p:spPr>
+          <a:xfrm>
+            <a:off x="7863940" y="2316736"/>
+            <a:ext cx="468076" cy="0"/>
+          </a:xfrm>
+          <a:prstGeom prst="straightConnector1">
+            <a:avLst/>
+          </a:prstGeom>
+          <a:ln w="25400">
+            <a:solidFill>
+              <a:schemeClr val="tx1"/>
+            </a:solidFill>
+            <a:tailEnd type="triangle"/>
+          </a:ln>
+        </p:spPr>
+        <p:style>
+          <a:lnRef idx="1">
+            <a:schemeClr val="accent1"/>
+          </a:lnRef>
+          <a:fillRef idx="0">
+            <a:schemeClr val="accent1"/>
+          </a:fillRef>
+          <a:effectRef idx="0">
+            <a:schemeClr val="accent1"/>
+          </a:effectRef>
+          <a:fontRef idx="minor">
+            <a:schemeClr val="tx1"/>
+          </a:fontRef>
+        </p:style>
+      </p:cxnSp>
+      <p:cxnSp>
+        <p:nvCxnSpPr>
+          <p:cNvPr id="40" name="Gerade Verbindung mit Pfeil 39">
+            <a:extLst>
+              <a:ext uri="{FF2B5EF4-FFF2-40B4-BE49-F238E27FC236}">
+                <a16:creationId xmlns:a16="http://schemas.microsoft.com/office/drawing/2014/main" id="{3596E81F-CA31-82B7-AF36-E6ADE16F82DA}"/>
+              </a:ext>
+            </a:extLst>
+          </p:cNvPr>
+          <p:cNvCxnSpPr>
+            <a:cxnSpLocks/>
+          </p:cNvCxnSpPr>
+          <p:nvPr/>
+        </p:nvCxnSpPr>
+        <p:spPr>
+          <a:xfrm flipH="1">
+            <a:off x="7863940" y="2460161"/>
+            <a:ext cx="468076" cy="0"/>
+          </a:xfrm>
+          <a:prstGeom prst="straightConnector1">
+            <a:avLst/>
+          </a:prstGeom>
+          <a:ln w="25400">
+            <a:solidFill>
+              <a:schemeClr val="tx1"/>
+            </a:solidFill>
+            <a:tailEnd type="triangle"/>
+          </a:ln>
+        </p:spPr>
+        <p:style>
+          <a:lnRef idx="1">
+            <a:schemeClr val="accent1"/>
+          </a:lnRef>
+          <a:fillRef idx="0">
+            <a:schemeClr val="accent1"/>
+          </a:fillRef>
+          <a:effectRef idx="0">
+            <a:schemeClr val="accent1"/>
+          </a:effectRef>
+          <a:fontRef idx="minor">
+            <a:schemeClr val="tx1"/>
+          </a:fontRef>
+        </p:style>
+      </p:cxnSp>
+      <p:pic>
+        <p:nvPicPr>
+          <p:cNvPr id="41" name="Grafik 40">
+            <a:extLst>
+              <a:ext uri="{FF2B5EF4-FFF2-40B4-BE49-F238E27FC236}">
+                <a16:creationId xmlns:a16="http://schemas.microsoft.com/office/drawing/2014/main" id="{F91AEE5D-F824-9FDE-7B1F-8F2C6D488F42}"/>
+              </a:ext>
+            </a:extLst>
+          </p:cNvPr>
+          <p:cNvPicPr>
+            <a:picLocks noChangeAspect="1"/>
+          </p:cNvPicPr>
+          <p:nvPr/>
+        </p:nvPicPr>
+        <p:blipFill rotWithShape="1">
+          <a:blip r:embed="rId9"/>
+          <a:srcRect l="7964" t="3980" r="1224" b="8871"/>
+          <a:stretch/>
+        </p:blipFill>
+        <p:spPr>
+          <a:xfrm>
+            <a:off x="8422034" y="1892618"/>
+            <a:ext cx="1686976" cy="1108636"/>
+          </a:xfrm>
+          <a:prstGeom prst="rect">
+            <a:avLst/>
+          </a:prstGeom>
+        </p:spPr>
+      </p:pic>
+      <p:sp>
+        <p:nvSpPr>
+          <p:cNvPr id="42" name="Textfeld 41">
+            <a:extLst>
+              <a:ext uri="{FF2B5EF4-FFF2-40B4-BE49-F238E27FC236}">
+                <a16:creationId xmlns:a16="http://schemas.microsoft.com/office/drawing/2014/main" id="{F6A59788-9990-AF74-210A-C623492A4D82}"/>
+              </a:ext>
+            </a:extLst>
+          </p:cNvPr>
+          <p:cNvSpPr txBox="1"/>
+          <p:nvPr/>
+        </p:nvSpPr>
+        <p:spPr>
+          <a:xfrm>
+            <a:off x="8694596" y="1561665"/>
+            <a:ext cx="1102674" cy="369332"/>
+          </a:xfrm>
+          <a:prstGeom prst="rect">
+            <a:avLst/>
+          </a:prstGeom>
+          <a:noFill/>
+        </p:spPr>
+        <p:txBody>
+          <a:bodyPr wrap="none" rtlCol="0">
+            <a:spAutoFit/>
+          </a:bodyPr>
+          <a:lstStyle/>
+          <a:p>
+            <a:r>
+              <a:rPr lang="en-GB" dirty="0"/>
+              <a:t>Detection</a:t>
+            </a:r>
+          </a:p>
+        </p:txBody>
+      </p:sp>
+      <p:cxnSp>
+        <p:nvCxnSpPr>
+          <p:cNvPr id="43" name="Gerade Verbindung mit Pfeil 42">
+            <a:extLst>
+              <a:ext uri="{FF2B5EF4-FFF2-40B4-BE49-F238E27FC236}">
+                <a16:creationId xmlns:a16="http://schemas.microsoft.com/office/drawing/2014/main" id="{72E96A3A-8706-3995-A734-E497D40E4877}"/>
+              </a:ext>
+            </a:extLst>
+          </p:cNvPr>
+          <p:cNvCxnSpPr>
+            <a:cxnSpLocks/>
+          </p:cNvCxnSpPr>
+          <p:nvPr/>
+        </p:nvCxnSpPr>
+        <p:spPr>
+          <a:xfrm>
+            <a:off x="10173425" y="2265729"/>
+            <a:ext cx="468076" cy="0"/>
+          </a:xfrm>
+          <a:prstGeom prst="straightConnector1">
+            <a:avLst/>
+          </a:prstGeom>
+          <a:ln w="25400">
+            <a:solidFill>
+              <a:schemeClr val="tx1"/>
+            </a:solidFill>
+            <a:tailEnd type="triangle"/>
+          </a:ln>
+        </p:spPr>
+        <p:style>
+          <a:lnRef idx="1">
+            <a:schemeClr val="accent1"/>
+          </a:lnRef>
+          <a:fillRef idx="0">
+            <a:schemeClr val="accent1"/>
+          </a:fillRef>
+          <a:effectRef idx="0">
+            <a:schemeClr val="accent1"/>
+          </a:effectRef>
+          <a:fontRef idx="minor">
+            <a:schemeClr val="tx1"/>
+          </a:fontRef>
+        </p:style>
+      </p:cxnSp>
+      <p:cxnSp>
+        <p:nvCxnSpPr>
+          <p:cNvPr id="44" name="Gerade Verbindung mit Pfeil 43">
+            <a:extLst>
+              <a:ext uri="{FF2B5EF4-FFF2-40B4-BE49-F238E27FC236}">
+                <a16:creationId xmlns:a16="http://schemas.microsoft.com/office/drawing/2014/main" id="{4CE77ECB-FEFE-814B-59DD-A756DC0AE2B2}"/>
+              </a:ext>
+            </a:extLst>
+          </p:cNvPr>
+          <p:cNvCxnSpPr>
+            <a:cxnSpLocks/>
+          </p:cNvCxnSpPr>
+          <p:nvPr/>
+        </p:nvCxnSpPr>
+        <p:spPr>
+          <a:xfrm flipH="1">
+            <a:off x="10173425" y="2409154"/>
+            <a:ext cx="468076" cy="0"/>
+          </a:xfrm>
+          <a:prstGeom prst="straightConnector1">
+            <a:avLst/>
+          </a:prstGeom>
+          <a:ln w="25400">
+            <a:solidFill>
+              <a:schemeClr val="tx1"/>
+            </a:solidFill>
+            <a:tailEnd type="triangle"/>
+          </a:ln>
+        </p:spPr>
+        <p:style>
+          <a:lnRef idx="1">
+            <a:schemeClr val="accent1"/>
+          </a:lnRef>
+          <a:fillRef idx="0">
+            <a:schemeClr val="accent1"/>
+          </a:fillRef>
+          <a:effectRef idx="0">
+            <a:schemeClr val="accent1"/>
+          </a:effectRef>
+          <a:fontRef idx="minor">
+            <a:schemeClr val="tx1"/>
+          </a:fontRef>
+        </p:style>
+      </p:cxnSp>
+      <p:sp>
+        <p:nvSpPr>
+          <p:cNvPr id="45" name="Textfeld 44">
+            <a:extLst>
+              <a:ext uri="{FF2B5EF4-FFF2-40B4-BE49-F238E27FC236}">
+                <a16:creationId xmlns:a16="http://schemas.microsoft.com/office/drawing/2014/main" id="{5DED5501-1C20-229C-FA17-9D4409B8DAED}"/>
+              </a:ext>
+            </a:extLst>
+          </p:cNvPr>
+          <p:cNvSpPr txBox="1"/>
+          <p:nvPr/>
+        </p:nvSpPr>
+        <p:spPr>
+          <a:xfrm>
+            <a:off x="10645102" y="1582121"/>
+            <a:ext cx="583814" cy="369332"/>
+          </a:xfrm>
+          <a:prstGeom prst="rect">
+            <a:avLst/>
+          </a:prstGeom>
+          <a:noFill/>
+        </p:spPr>
+        <p:txBody>
+          <a:bodyPr wrap="none" rtlCol="0">
+            <a:spAutoFit/>
+          </a:bodyPr>
+          <a:lstStyle/>
+          <a:p>
+            <a:r>
+              <a:rPr lang="en-GB" dirty="0"/>
+              <a:t>Loss</a:t>
+            </a:r>
+          </a:p>
+        </p:txBody>
+      </p:sp>
+      <p:sp>
+        <p:nvSpPr>
+          <p:cNvPr id="48" name="Textfeld 47">
+            <a:extLst>
+              <a:ext uri="{FF2B5EF4-FFF2-40B4-BE49-F238E27FC236}">
+                <a16:creationId xmlns:a16="http://schemas.microsoft.com/office/drawing/2014/main" id="{D1EB607B-E229-CECC-D8A1-F391AEFED447}"/>
+              </a:ext>
+            </a:extLst>
+          </p:cNvPr>
+          <p:cNvSpPr txBox="1"/>
+          <p:nvPr/>
+        </p:nvSpPr>
+        <p:spPr>
+          <a:xfrm>
+            <a:off x="4261415" y="1457119"/>
+            <a:ext cx="1048685" cy="369332"/>
+          </a:xfrm>
+          <a:prstGeom prst="rect">
+            <a:avLst/>
+          </a:prstGeom>
+          <a:noFill/>
+        </p:spPr>
+        <p:txBody>
+          <a:bodyPr wrap="none" rtlCol="0">
+            <a:spAutoFit/>
+          </a:bodyPr>
+          <a:lstStyle/>
+          <a:p>
+            <a:r>
+              <a:rPr lang="en-GB" b="1" u="sng" dirty="0"/>
+              <a:t>Baseline</a:t>
+            </a:r>
+            <a:r>
+              <a:rPr lang="en-GB" dirty="0"/>
+              <a:t>:</a:t>
+            </a:r>
+          </a:p>
+        </p:txBody>
+      </p:sp>
+      <p:sp>
+        <p:nvSpPr>
+          <p:cNvPr id="49" name="Textfeld 48">
+            <a:extLst>
+              <a:ext uri="{FF2B5EF4-FFF2-40B4-BE49-F238E27FC236}">
+                <a16:creationId xmlns:a16="http://schemas.microsoft.com/office/drawing/2014/main" id="{BE567BC4-1210-789F-340F-D3970A2EDA31}"/>
+              </a:ext>
+            </a:extLst>
+          </p:cNvPr>
+          <p:cNvSpPr txBox="1"/>
+          <p:nvPr/>
+        </p:nvSpPr>
+        <p:spPr>
+          <a:xfrm>
+            <a:off x="4261415" y="4086476"/>
+            <a:ext cx="1820114" cy="369332"/>
+          </a:xfrm>
+          <a:prstGeom prst="rect">
+            <a:avLst/>
+          </a:prstGeom>
+          <a:noFill/>
+        </p:spPr>
+        <p:txBody>
+          <a:bodyPr wrap="none" rtlCol="0">
+            <a:spAutoFit/>
+          </a:bodyPr>
+          <a:lstStyle/>
+          <a:p>
+            <a:r>
+              <a:rPr lang="en-GB" b="1" u="sng" dirty="0"/>
+              <a:t>DOE using PADO:</a:t>
+            </a:r>
+          </a:p>
+        </p:txBody>
+      </p:sp>
     </p:spTree>
     <p:extLst>
       <p:ext uri="{BB962C8B-B14F-4D97-AF65-F5344CB8AC3E}">
-        <p14:creationId xmlns:p14="http://schemas.microsoft.com/office/powerpoint/2010/main" val="4170129692"/>
+        <p14:creationId xmlns:p14="http://schemas.microsoft.com/office/powerpoint/2010/main" val="2833428053"/>
       </p:ext>
     </p:extLst>
   </p:cSld>
@@ -14021,7 +21812,7 @@
 </p:sld>
 </file>
 
-<file path=ppt/slides/slide7.xml><?xml version="1.0" encoding="utf-8"?>
+<file path=ppt/slides/slide9.xml><?xml version="1.0" encoding="utf-8"?>
 <p:sld xmlns:a="http://schemas.openxmlformats.org/drawingml/2006/main" xmlns:r="http://schemas.openxmlformats.org/officeDocument/2006/relationships" xmlns:p="http://schemas.openxmlformats.org/presentationml/2006/main">
   <p:cSld>
     <p:spTree>
@@ -14060,7 +21851,7 @@
           <a:lstStyle/>
           <a:p>
             <a:r>
-              <a:rPr lang="en-GB" dirty="0"/>
+              <a:rPr lang="en-GB" b="1" dirty="0"/>
               <a:t>Results</a:t>
             </a:r>
           </a:p>
@@ -14095,89 +21886,6 @@
     <p:extLst>
       <p:ext uri="{BB962C8B-B14F-4D97-AF65-F5344CB8AC3E}">
         <p14:creationId xmlns:p14="http://schemas.microsoft.com/office/powerpoint/2010/main" val="3033946559"/>
-      </p:ext>
-    </p:extLst>
-  </p:cSld>
-  <p:clrMapOvr>
-    <a:masterClrMapping/>
-  </p:clrMapOvr>
-</p:sld>
-</file>
-
-<file path=ppt/slides/slide8.xml><?xml version="1.0" encoding="utf-8"?>
-<p:sld xmlns:a="http://schemas.openxmlformats.org/drawingml/2006/main" xmlns:r="http://schemas.openxmlformats.org/officeDocument/2006/relationships" xmlns:p="http://schemas.openxmlformats.org/presentationml/2006/main">
-  <p:cSld>
-    <p:spTree>
-      <p:nvGrpSpPr>
-        <p:cNvPr id="1" name=""/>
-        <p:cNvGrpSpPr/>
-        <p:nvPr/>
-      </p:nvGrpSpPr>
-      <p:grpSpPr>
-        <a:xfrm>
-          <a:off x="0" y="0"/>
-          <a:ext cx="0" cy="0"/>
-          <a:chOff x="0" y="0"/>
-          <a:chExt cx="0" cy="0"/>
-        </a:xfrm>
-      </p:grpSpPr>
-      <p:sp>
-        <p:nvSpPr>
-          <p:cNvPr id="2" name="Titel 1">
-            <a:extLst>
-              <a:ext uri="{FF2B5EF4-FFF2-40B4-BE49-F238E27FC236}">
-                <a16:creationId xmlns:a16="http://schemas.microsoft.com/office/drawing/2014/main" id="{9CD24094-1376-A08E-CF0A-22471136FC37}"/>
-              </a:ext>
-            </a:extLst>
-          </p:cNvPr>
-          <p:cNvSpPr>
-            <a:spLocks noGrp="1"/>
-          </p:cNvSpPr>
-          <p:nvPr>
-            <p:ph type="title"/>
-          </p:nvPr>
-        </p:nvSpPr>
-        <p:spPr/>
-        <p:txBody>
-          <a:bodyPr/>
-          <a:lstStyle/>
-          <a:p>
-            <a:r>
-              <a:rPr lang="en-GB" dirty="0"/>
-              <a:t>Conclusion</a:t>
-            </a:r>
-          </a:p>
-        </p:txBody>
-      </p:sp>
-      <p:sp>
-        <p:nvSpPr>
-          <p:cNvPr id="3" name="Inhaltsplatzhalter 2">
-            <a:extLst>
-              <a:ext uri="{FF2B5EF4-FFF2-40B4-BE49-F238E27FC236}">
-                <a16:creationId xmlns:a16="http://schemas.microsoft.com/office/drawing/2014/main" id="{F088508B-9057-00BA-E3C1-847A461485C1}"/>
-              </a:ext>
-            </a:extLst>
-          </p:cNvPr>
-          <p:cNvSpPr>
-            <a:spLocks noGrp="1"/>
-          </p:cNvSpPr>
-          <p:nvPr>
-            <p:ph idx="1"/>
-          </p:nvPr>
-        </p:nvSpPr>
-        <p:spPr/>
-        <p:txBody>
-          <a:bodyPr/>
-          <a:lstStyle/>
-          <a:p>
-            <a:endParaRPr lang="en-GB"/>
-          </a:p>
-        </p:txBody>
-      </p:sp>
-    </p:spTree>
-    <p:extLst>
-      <p:ext uri="{BB962C8B-B14F-4D97-AF65-F5344CB8AC3E}">
-        <p14:creationId xmlns:p14="http://schemas.microsoft.com/office/powerpoint/2010/main" val="3730115483"/>
       </p:ext>
     </p:extLst>
   </p:cSld>
@@ -14480,4 +22188,299 @@
     </a:ext>
   </a:extLst>
 </a:theme>
+</file>
+
+<file path=ppt/theme/theme2.xml><?xml version="1.0" encoding="utf-8"?>
+<a:theme xmlns:a="http://schemas.openxmlformats.org/drawingml/2006/main" name="Office">
+  <a:themeElements>
+    <a:clrScheme name="Office">
+      <a:dk1>
+        <a:sysClr val="windowText" lastClr="000000"/>
+      </a:dk1>
+      <a:lt1>
+        <a:sysClr val="window" lastClr="FFFFFF"/>
+      </a:lt1>
+      <a:dk2>
+        <a:srgbClr val="44546A"/>
+      </a:dk2>
+      <a:lt2>
+        <a:srgbClr val="E7E6E6"/>
+      </a:lt2>
+      <a:accent1>
+        <a:srgbClr val="4472C4"/>
+      </a:accent1>
+      <a:accent2>
+        <a:srgbClr val="ED7D31"/>
+      </a:accent2>
+      <a:accent3>
+        <a:srgbClr val="A5A5A5"/>
+      </a:accent3>
+      <a:accent4>
+        <a:srgbClr val="FFC000"/>
+      </a:accent4>
+      <a:accent5>
+        <a:srgbClr val="5B9BD5"/>
+      </a:accent5>
+      <a:accent6>
+        <a:srgbClr val="70AD47"/>
+      </a:accent6>
+      <a:hlink>
+        <a:srgbClr val="0563C1"/>
+      </a:hlink>
+      <a:folHlink>
+        <a:srgbClr val="954F72"/>
+      </a:folHlink>
+    </a:clrScheme>
+    <a:fontScheme name="Office">
+      <a:majorFont>
+        <a:latin typeface="Calibri Light" panose="020F0302020204030204"/>
+        <a:ea typeface=""/>
+        <a:cs typeface=""/>
+        <a:font script="Jpan" typeface="游ゴシック Light"/>
+        <a:font script="Hang" typeface="맑은 고딕"/>
+        <a:font script="Hans" typeface="等线 Light"/>
+        <a:font script="Hant" typeface="新細明體"/>
+        <a:font script="Arab" typeface="Times New Roman"/>
+        <a:font script="Hebr" typeface="Times New Roman"/>
+        <a:font script="Thai" typeface="Angsana New"/>
+        <a:font script="Ethi" typeface="Nyala"/>
+        <a:font script="Beng" typeface="Vrinda"/>
+        <a:font script="Gujr" typeface="Shruti"/>
+        <a:font script="Khmr" typeface="MoolBoran"/>
+        <a:font script="Knda" typeface="Tunga"/>
+        <a:font script="Guru" typeface="Raavi"/>
+        <a:font script="Cans" typeface="Euphemia"/>
+        <a:font script="Cher" typeface="Plantagenet Cherokee"/>
+        <a:font script="Yiii" typeface="Microsoft Yi Baiti"/>
+        <a:font script="Tibt" typeface="Microsoft Himalaya"/>
+        <a:font script="Thaa" typeface="MV Boli"/>
+        <a:font script="Deva" typeface="Mangal"/>
+        <a:font script="Telu" typeface="Gautami"/>
+        <a:font script="Taml" typeface="Latha"/>
+        <a:font script="Syrc" typeface="Estrangelo Edessa"/>
+        <a:font script="Orya" typeface="Kalinga"/>
+        <a:font script="Mlym" typeface="Kartika"/>
+        <a:font script="Laoo" typeface="DokChampa"/>
+        <a:font script="Sinh" typeface="Iskoola Pota"/>
+        <a:font script="Mong" typeface="Mongolian Baiti"/>
+        <a:font script="Viet" typeface="Times New Roman"/>
+        <a:font script="Uigh" typeface="Microsoft Uighur"/>
+        <a:font script="Geor" typeface="Sylfaen"/>
+        <a:font script="Armn" typeface="Arial"/>
+        <a:font script="Bugi" typeface="Leelawadee UI"/>
+        <a:font script="Bopo" typeface="Microsoft JhengHei"/>
+        <a:font script="Java" typeface="Javanese Text"/>
+        <a:font script="Lisu" typeface="Segoe UI"/>
+        <a:font script="Mymr" typeface="Myanmar Text"/>
+        <a:font script="Nkoo" typeface="Ebrima"/>
+        <a:font script="Olck" typeface="Nirmala UI"/>
+        <a:font script="Osma" typeface="Ebrima"/>
+        <a:font script="Phag" typeface="Phagspa"/>
+        <a:font script="Syrn" typeface="Estrangelo Edessa"/>
+        <a:font script="Syrj" typeface="Estrangelo Edessa"/>
+        <a:font script="Syre" typeface="Estrangelo Edessa"/>
+        <a:font script="Sora" typeface="Nirmala UI"/>
+        <a:font script="Tale" typeface="Microsoft Tai Le"/>
+        <a:font script="Talu" typeface="Microsoft New Tai Lue"/>
+        <a:font script="Tfng" typeface="Ebrima"/>
+      </a:majorFont>
+      <a:minorFont>
+        <a:latin typeface="Calibri" panose="020F0502020204030204"/>
+        <a:ea typeface=""/>
+        <a:cs typeface=""/>
+        <a:font script="Jpan" typeface="游ゴシック"/>
+        <a:font script="Hang" typeface="맑은 고딕"/>
+        <a:font script="Hans" typeface="等线"/>
+        <a:font script="Hant" typeface="新細明體"/>
+        <a:font script="Arab" typeface="Arial"/>
+        <a:font script="Hebr" typeface="Arial"/>
+        <a:font script="Thai" typeface="Cordia New"/>
+        <a:font script="Ethi" typeface="Nyala"/>
+        <a:font script="Beng" typeface="Vrinda"/>
+        <a:font script="Gujr" typeface="Shruti"/>
+        <a:font script="Khmr" typeface="DaunPenh"/>
+        <a:font script="Knda" typeface="Tunga"/>
+        <a:font script="Guru" typeface="Raavi"/>
+        <a:font script="Cans" typeface="Euphemia"/>
+        <a:font script="Cher" typeface="Plantagenet Cherokee"/>
+        <a:font script="Yiii" typeface="Microsoft Yi Baiti"/>
+        <a:font script="Tibt" typeface="Microsoft Himalaya"/>
+        <a:font script="Thaa" typeface="MV Boli"/>
+        <a:font script="Deva" typeface="Mangal"/>
+        <a:font script="Telu" typeface="Gautami"/>
+        <a:font script="Taml" typeface="Latha"/>
+        <a:font script="Syrc" typeface="Estrangelo Edessa"/>
+        <a:font script="Orya" typeface="Kalinga"/>
+        <a:font script="Mlym" typeface="Kartika"/>
+        <a:font script="Laoo" typeface="DokChampa"/>
+        <a:font script="Sinh" typeface="Iskoola Pota"/>
+        <a:font script="Mong" typeface="Mongolian Baiti"/>
+        <a:font script="Viet" typeface="Arial"/>
+        <a:font script="Uigh" typeface="Microsoft Uighur"/>
+        <a:font script="Geor" typeface="Sylfaen"/>
+        <a:font script="Armn" typeface="Arial"/>
+        <a:font script="Bugi" typeface="Leelawadee UI"/>
+        <a:font script="Bopo" typeface="Microsoft JhengHei"/>
+        <a:font script="Java" typeface="Javanese Text"/>
+        <a:font script="Lisu" typeface="Segoe UI"/>
+        <a:font script="Mymr" typeface="Myanmar Text"/>
+        <a:font script="Nkoo" typeface="Ebrima"/>
+        <a:font script="Olck" typeface="Nirmala UI"/>
+        <a:font script="Osma" typeface="Ebrima"/>
+        <a:font script="Phag" typeface="Phagspa"/>
+        <a:font script="Syrn" typeface="Estrangelo Edessa"/>
+        <a:font script="Syrj" typeface="Estrangelo Edessa"/>
+        <a:font script="Syre" typeface="Estrangelo Edessa"/>
+        <a:font script="Sora" typeface="Nirmala UI"/>
+        <a:font script="Tale" typeface="Microsoft Tai Le"/>
+        <a:font script="Talu" typeface="Microsoft New Tai Lue"/>
+        <a:font script="Tfng" typeface="Ebrima"/>
+      </a:minorFont>
+    </a:fontScheme>
+    <a:fmtScheme name="Office">
+      <a:fillStyleLst>
+        <a:solidFill>
+          <a:schemeClr val="phClr"/>
+        </a:solidFill>
+        <a:gradFill rotWithShape="1">
+          <a:gsLst>
+            <a:gs pos="0">
+              <a:schemeClr val="phClr">
+                <a:lumMod val="110000"/>
+                <a:satMod val="105000"/>
+                <a:tint val="67000"/>
+              </a:schemeClr>
+            </a:gs>
+            <a:gs pos="50000">
+              <a:schemeClr val="phClr">
+                <a:lumMod val="105000"/>
+                <a:satMod val="103000"/>
+                <a:tint val="73000"/>
+              </a:schemeClr>
+            </a:gs>
+            <a:gs pos="100000">
+              <a:schemeClr val="phClr">
+                <a:lumMod val="105000"/>
+                <a:satMod val="109000"/>
+                <a:tint val="81000"/>
+              </a:schemeClr>
+            </a:gs>
+          </a:gsLst>
+          <a:lin ang="5400000" scaled="0"/>
+        </a:gradFill>
+        <a:gradFill rotWithShape="1">
+          <a:gsLst>
+            <a:gs pos="0">
+              <a:schemeClr val="phClr">
+                <a:satMod val="103000"/>
+                <a:lumMod val="102000"/>
+                <a:tint val="94000"/>
+              </a:schemeClr>
+            </a:gs>
+            <a:gs pos="50000">
+              <a:schemeClr val="phClr">
+                <a:satMod val="110000"/>
+                <a:lumMod val="100000"/>
+                <a:shade val="100000"/>
+              </a:schemeClr>
+            </a:gs>
+            <a:gs pos="100000">
+              <a:schemeClr val="phClr">
+                <a:lumMod val="99000"/>
+                <a:satMod val="120000"/>
+                <a:shade val="78000"/>
+              </a:schemeClr>
+            </a:gs>
+          </a:gsLst>
+          <a:lin ang="5400000" scaled="0"/>
+        </a:gradFill>
+      </a:fillStyleLst>
+      <a:lnStyleLst>
+        <a:ln w="6350" cap="flat" cmpd="sng" algn="ctr">
+          <a:solidFill>
+            <a:schemeClr val="phClr"/>
+          </a:solidFill>
+          <a:prstDash val="solid"/>
+          <a:miter lim="800000"/>
+        </a:ln>
+        <a:ln w="12700" cap="flat" cmpd="sng" algn="ctr">
+          <a:solidFill>
+            <a:schemeClr val="phClr"/>
+          </a:solidFill>
+          <a:prstDash val="solid"/>
+          <a:miter lim="800000"/>
+        </a:ln>
+        <a:ln w="19050" cap="flat" cmpd="sng" algn="ctr">
+          <a:solidFill>
+            <a:schemeClr val="phClr"/>
+          </a:solidFill>
+          <a:prstDash val="solid"/>
+          <a:miter lim="800000"/>
+        </a:ln>
+      </a:lnStyleLst>
+      <a:effectStyleLst>
+        <a:effectStyle>
+          <a:effectLst/>
+        </a:effectStyle>
+        <a:effectStyle>
+          <a:effectLst/>
+        </a:effectStyle>
+        <a:effectStyle>
+          <a:effectLst>
+            <a:outerShdw blurRad="57150" dist="19050" dir="5400000" algn="ctr" rotWithShape="0">
+              <a:srgbClr val="000000">
+                <a:alpha val="63000"/>
+              </a:srgbClr>
+            </a:outerShdw>
+          </a:effectLst>
+        </a:effectStyle>
+      </a:effectStyleLst>
+      <a:bgFillStyleLst>
+        <a:solidFill>
+          <a:schemeClr val="phClr"/>
+        </a:solidFill>
+        <a:solidFill>
+          <a:schemeClr val="phClr">
+            <a:tint val="95000"/>
+            <a:satMod val="170000"/>
+          </a:schemeClr>
+        </a:solidFill>
+        <a:gradFill rotWithShape="1">
+          <a:gsLst>
+            <a:gs pos="0">
+              <a:schemeClr val="phClr">
+                <a:tint val="93000"/>
+                <a:satMod val="150000"/>
+                <a:shade val="98000"/>
+                <a:lumMod val="102000"/>
+              </a:schemeClr>
+            </a:gs>
+            <a:gs pos="50000">
+              <a:schemeClr val="phClr">
+                <a:tint val="98000"/>
+                <a:satMod val="130000"/>
+                <a:shade val="90000"/>
+                <a:lumMod val="103000"/>
+              </a:schemeClr>
+            </a:gs>
+            <a:gs pos="100000">
+              <a:schemeClr val="phClr">
+                <a:shade val="63000"/>
+                <a:satMod val="120000"/>
+              </a:schemeClr>
+            </a:gs>
+          </a:gsLst>
+          <a:lin ang="5400000" scaled="0"/>
+        </a:gradFill>
+      </a:bgFillStyleLst>
+    </a:fmtScheme>
+  </a:themeElements>
+  <a:objectDefaults/>
+  <a:extraClrSchemeLst/>
+  <a:extLst>
+    <a:ext uri="{05A4C25C-085E-4340-85A3-A5531E510DB2}">
+      <thm15:themeFamily xmlns:thm15="http://schemas.microsoft.com/office/thememl/2012/main" name="Office Theme" id="{62F939B6-93AF-4DB8-9C6B-D6C7DFDC589F}" vid="{4A3C46E8-61CC-4603-A589-7422A47A8E4A}"/>
+    </a:ext>
+  </a:extLst>
+</a:theme>
 </file>